--- a/Lectures/01.Foundations/Lecture02.pptx
+++ b/Lectures/01.Foundations/Lecture02.pptx
@@ -5,10 +5,10 @@
     <p:sldMasterId id="2147483648" r:id="rId1"/>
   </p:sldMasterIdLst>
   <p:notesMasterIdLst>
-    <p:notesMasterId r:id="rId33"/>
+    <p:notesMasterId r:id="rId27"/>
   </p:notesMasterIdLst>
   <p:handoutMasterIdLst>
-    <p:handoutMasterId r:id="rId34"/>
+    <p:handoutMasterId r:id="rId28"/>
   </p:handoutMasterIdLst>
   <p:sldIdLst>
     <p:sldId id="256" r:id="rId2"/>
@@ -28,20 +28,14 @@
     <p:sldId id="270" r:id="rId16"/>
     <p:sldId id="271" r:id="rId17"/>
     <p:sldId id="272" r:id="rId18"/>
-    <p:sldId id="274" r:id="rId19"/>
-    <p:sldId id="276" r:id="rId20"/>
-    <p:sldId id="277" r:id="rId21"/>
-    <p:sldId id="278" r:id="rId22"/>
-    <p:sldId id="279" r:id="rId23"/>
-    <p:sldId id="280" r:id="rId24"/>
-    <p:sldId id="1013" r:id="rId25"/>
-    <p:sldId id="1015" r:id="rId26"/>
-    <p:sldId id="1016" r:id="rId27"/>
-    <p:sldId id="1017" r:id="rId28"/>
-    <p:sldId id="1018" r:id="rId29"/>
-    <p:sldId id="1019" r:id="rId30"/>
-    <p:sldId id="1014" r:id="rId31"/>
-    <p:sldId id="281" r:id="rId32"/>
+    <p:sldId id="278" r:id="rId19"/>
+    <p:sldId id="279" r:id="rId20"/>
+    <p:sldId id="280" r:id="rId21"/>
+    <p:sldId id="1013" r:id="rId22"/>
+    <p:sldId id="1015" r:id="rId23"/>
+    <p:sldId id="1016" r:id="rId24"/>
+    <p:sldId id="1014" r:id="rId25"/>
+    <p:sldId id="281" r:id="rId26"/>
   </p:sldIdLst>
   <p:sldSz cx="9144000" cy="6858000" type="letter"/>
   <p:notesSz cx="9601200" cy="7315200"/>
@@ -3031,10 +3025,7 @@
                 </a:pPr>
                 <a14:m>
                   <m:oMathPara xmlns:m="http://schemas.openxmlformats.org/officeDocument/2006/math">
-                    <m:oMathParaPr>
-                      <m:jc m:val="centerGroup"/>
-                    </m:oMathParaPr>
-                    <m:oMath xmlns:m="http://schemas.openxmlformats.org/officeDocument/2006/math">
+                    <m:oMath>
                       <m:r>
                         <a:rPr lang="en-US" i="1">
                           <a:latin typeface="Cambria Math" panose="02040503050406030204" pitchFamily="18" charset="0"/>
@@ -3303,10 +3294,7 @@
                 </a:pPr>
                 <a14:m>
                   <m:oMathPara xmlns:m="http://schemas.openxmlformats.org/officeDocument/2006/math">
-                    <m:oMathParaPr>
-                      <m:jc m:val="centerGroup"/>
-                    </m:oMathParaPr>
-                    <m:oMath xmlns:m="http://schemas.openxmlformats.org/officeDocument/2006/math">
+                    <m:oMath>
                       <m:r>
                         <a:rPr lang="en-US" i="1">
                           <a:latin typeface="Cambria Math" panose="02040503050406030204" pitchFamily="18" charset="0"/>
@@ -3756,10 +3744,7 @@
                 </a:pPr>
                 <a14:m>
                   <m:oMathPara xmlns:m="http://schemas.openxmlformats.org/officeDocument/2006/math">
-                    <m:oMathParaPr>
-                      <m:jc m:val="centerGroup"/>
-                    </m:oMathParaPr>
-                    <m:oMath xmlns:m="http://schemas.openxmlformats.org/officeDocument/2006/math">
+                    <m:oMath>
                       <m:r>
                         <a:rPr lang="en-US" i="1">
                           <a:latin typeface="Cambria Math" panose="02040503050406030204" pitchFamily="18" charset="0"/>
@@ -4306,10 +4291,7 @@
                 </a:pPr>
                 <a14:m>
                   <m:oMathPara xmlns:m="http://schemas.openxmlformats.org/officeDocument/2006/math">
-                    <m:oMathParaPr>
-                      <m:jc m:val="centerGroup"/>
-                    </m:oMathParaPr>
-                    <m:oMath xmlns:m="http://schemas.openxmlformats.org/officeDocument/2006/math">
+                    <m:oMath>
                       <m:r>
                         <a:rPr lang="en-US" i="1">
                           <a:latin typeface="Cambria Math" panose="02040503050406030204" pitchFamily="18" charset="0"/>
@@ -4708,10 +4690,7 @@
                 </a:pPr>
                 <a14:m>
                   <m:oMathPara xmlns:m="http://schemas.openxmlformats.org/officeDocument/2006/math">
-                    <m:oMathParaPr>
-                      <m:jc m:val="centerGroup"/>
-                    </m:oMathParaPr>
-                    <m:oMath xmlns:m="http://schemas.openxmlformats.org/officeDocument/2006/math">
+                    <m:oMath>
                       <m:r>
                         <a:rPr lang="en-US" i="1">
                           <a:latin typeface="Cambria Math" panose="02040503050406030204" pitchFamily="18" charset="0"/>
@@ -4891,10 +4870,7 @@
                 </a:pPr>
                 <a14:m>
                   <m:oMathPara xmlns:m="http://schemas.openxmlformats.org/officeDocument/2006/math">
-                    <m:oMathParaPr>
-                      <m:jc m:val="centerGroup"/>
-                    </m:oMathParaPr>
-                    <m:oMath xmlns:m="http://schemas.openxmlformats.org/officeDocument/2006/math">
+                    <m:oMath>
                       <m:r>
                         <a:rPr lang="en-US" b="1" i="1">
                           <a:solidFill>
@@ -5612,7 +5588,7 @@
                     <m:oMathParaPr>
                       <m:jc m:val="left"/>
                     </m:oMathParaPr>
-                    <m:oMath xmlns:m="http://schemas.openxmlformats.org/officeDocument/2006/math">
+                    <m:oMath>
                       <m:r>
                         <a:rPr lang="en-US" i="1">
                           <a:latin typeface="Cambria Math" panose="02040503050406030204" pitchFamily="18" charset="0"/>
@@ -5681,8 +5657,12 @@
                       <m:d>
                         <m:dPr>
                           <m:ctrlPr>
-                            <a:rPr lang="en-US" i="1">
+                            <a:rPr lang="en-US" b="1" i="1" smtClean="0">
+                              <a:solidFill>
+                                <a:srgbClr val="C00000"/>
+                              </a:solidFill>
                               <a:latin typeface="Cambria Math" panose="02040503050406030204" pitchFamily="18" charset="0"/>
+                              <a:ea typeface="Cambria Math" panose="02040503050406030204" pitchFamily="18" charset="0"/>
                             </a:rPr>
                           </m:ctrlPr>
                         </m:dPr>
@@ -5865,7 +5845,7 @@
                     <m:oMathParaPr>
                       <m:jc m:val="left"/>
                     </m:oMathParaPr>
-                    <m:oMath xmlns:m="http://schemas.openxmlformats.org/officeDocument/2006/math">
+                    <m:oMath>
                       <m:r>
                         <a:rPr lang="en-US" i="1">
                           <a:latin typeface="Cambria Math" panose="02040503050406030204" pitchFamily="18" charset="0"/>
@@ -5888,7 +5868,7 @@
                     <m:oMathParaPr>
                       <m:jc m:val="left"/>
                     </m:oMathParaPr>
-                    <m:oMath xmlns:m="http://schemas.openxmlformats.org/officeDocument/2006/math">
+                    <m:oMath>
                       <m:r>
                         <a:rPr lang="en-US" i="1">
                           <a:latin typeface="Cambria Math" panose="02040503050406030204" pitchFamily="18" charset="0"/>
@@ -6212,7 +6192,7 @@
                         <m:begChr m:val="|"/>
                         <m:endChr m:val="|"/>
                         <m:ctrlPr>
-                          <a:rPr lang="en-US" b="0" i="1" smtClean="0">
+                          <a:rPr lang="en-US" i="1">
                             <a:solidFill>
                               <a:srgbClr val="0033CC"/>
                             </a:solidFill>
@@ -6410,10 +6390,7 @@
                 </a:pPr>
                 <a14:m>
                   <m:oMathPara xmlns:m="http://schemas.openxmlformats.org/officeDocument/2006/math">
-                    <m:oMathParaPr>
-                      <m:jc m:val="centerGroup"/>
-                    </m:oMathParaPr>
-                    <m:oMath xmlns:m="http://schemas.openxmlformats.org/officeDocument/2006/math">
+                    <m:oMath>
                       <m:r>
                         <m:rPr>
                           <m:sty m:val="p"/>
@@ -6426,7 +6403,7 @@
                       <m:d>
                         <m:dPr>
                           <m:ctrlPr>
-                            <a:rPr lang="en-US" i="1" smtClean="0">
+                            <a:rPr lang="en-US" i="1">
                               <a:latin typeface="Cambria Math" panose="02040503050406030204" pitchFamily="18" charset="0"/>
                             </a:rPr>
                           </m:ctrlPr>
@@ -6936,10 +6913,7 @@
                 </a:pPr>
                 <a14:m>
                   <m:oMathPara xmlns:m="http://schemas.openxmlformats.org/officeDocument/2006/math">
-                    <m:oMathParaPr>
-                      <m:jc m:val="centerGroup"/>
-                    </m:oMathParaPr>
-                    <m:oMath xmlns:m="http://schemas.openxmlformats.org/officeDocument/2006/math">
+                    <m:oMath>
                       <m:nary>
                         <m:naryPr>
                           <m:limLoc m:val="undOvr"/>
@@ -7418,10 +7392,7 @@
                 </a:pPr>
                 <a14:m>
                   <m:oMathPara xmlns:m="http://schemas.openxmlformats.org/officeDocument/2006/math">
-                    <m:oMathParaPr>
-                      <m:jc m:val="centerGroup"/>
-                    </m:oMathParaPr>
-                    <m:oMath xmlns:m="http://schemas.openxmlformats.org/officeDocument/2006/math">
+                    <m:oMath>
                       <m:nary>
                         <m:naryPr>
                           <m:limLoc m:val="undOvr"/>
@@ -7675,10 +7646,7 @@
                 </a:pPr>
                 <a14:m>
                   <m:oMathPara xmlns:m="http://schemas.openxmlformats.org/officeDocument/2006/math">
-                    <m:oMathParaPr>
-                      <m:jc m:val="centerGroup"/>
-                    </m:oMathParaPr>
-                    <m:oMath xmlns:m="http://schemas.openxmlformats.org/officeDocument/2006/math">
+                    <m:oMath>
                       <m:f>
                         <m:fPr>
                           <m:ctrlPr>
@@ -8098,10 +8066,7 @@
                 <a:pPr/>
                 <a14:m>
                   <m:oMathPara xmlns:m="http://schemas.openxmlformats.org/officeDocument/2006/math">
-                    <m:oMathParaPr>
-                      <m:jc m:val="centerGroup"/>
-                    </m:oMathParaPr>
-                    <m:oMath xmlns:m="http://schemas.openxmlformats.org/officeDocument/2006/math">
+                    <m:oMath>
                       <m:nary>
                         <m:naryPr>
                           <m:limLoc m:val="undOvr"/>
@@ -8174,7 +8139,7 @@
                           <m:d>
                             <m:dPr>
                               <m:ctrlPr>
-                                <a:rPr lang="en-US" i="1">
+                                <a:rPr lang="en-US" b="0" i="1" smtClean="0">
                                   <a:latin typeface="Cambria Math" panose="02040503050406030204" pitchFamily="18" charset="0"/>
                                 </a:rPr>
                               </m:ctrlPr>
@@ -8728,7 +8693,7 @@
                     <m:sSup>
                       <m:sSupPr>
                         <m:ctrlPr>
-                          <a:rPr lang="en-US" i="1" smtClean="0">
+                          <a:rPr lang="en-US" i="1">
                             <a:solidFill>
                               <a:srgbClr val="0033CC"/>
                             </a:solidFill>
@@ -8904,10 +8869,7 @@
                 <a:pPr/>
                 <a14:m>
                   <m:oMathPara xmlns:m="http://schemas.openxmlformats.org/officeDocument/2006/math">
-                    <m:oMathParaPr>
-                      <m:jc m:val="centerGroup"/>
-                    </m:oMathParaPr>
-                    <m:oMath xmlns:m="http://schemas.openxmlformats.org/officeDocument/2006/math">
+                    <m:oMath>
                       <m:nary>
                         <m:naryPr>
                           <m:limLoc m:val="undOvr"/>
@@ -8980,7 +8942,7 @@
                           <m:d>
                             <m:dPr>
                               <m:ctrlPr>
-                                <a:rPr lang="en-US" i="1">
+                                <a:rPr lang="en-US" b="0" i="1" smtClean="0">
                                   <a:latin typeface="Cambria Math" panose="02040503050406030204" pitchFamily="18" charset="0"/>
                                 </a:rPr>
                               </m:ctrlPr>
@@ -9111,10 +9073,10 @@
       </p:grpSpPr>
       <p:sp>
         <p:nvSpPr>
-          <p:cNvPr id="2" name="Title 1">
+          <p:cNvPr id="3" name="Title 2">
             <a:extLst>
               <a:ext uri="{FF2B5EF4-FFF2-40B4-BE49-F238E27FC236}">
-                <a16:creationId xmlns:a16="http://schemas.microsoft.com/office/drawing/2014/main" id="{15160679-D6B1-610A-B664-7236129E7F93}"/>
+                <a16:creationId xmlns:a16="http://schemas.microsoft.com/office/drawing/2014/main" id="{0CFDF7CA-B744-B3B5-850E-543CCDA16258}"/>
               </a:ext>
             </a:extLst>
           </p:cNvPr>
@@ -9132,7 +9094,7 @@
           <a:p>
             <a:r>
               <a:rPr lang="en-US" dirty="0"/>
-              <a:t>Empirical RISK Minimization</a:t>
+              <a:t>Common loss functions</a:t>
             </a:r>
           </a:p>
         </p:txBody>
@@ -9140,7 +9102,7 @@
     </p:spTree>
     <p:extLst>
       <p:ext uri="{BB962C8B-B14F-4D97-AF65-F5344CB8AC3E}">
-        <p14:creationId xmlns:p14="http://schemas.microsoft.com/office/powerpoint/2010/main" val="3793860274"/>
+        <p14:creationId xmlns:p14="http://schemas.microsoft.com/office/powerpoint/2010/main" val="4210722022"/>
       </p:ext>
     </p:extLst>
   </p:cSld>
@@ -9170,44 +9132,14 @@
           <a:chExt cx="0" cy="0"/>
         </a:xfrm>
       </p:grpSpPr>
-      <p:pic>
-        <p:nvPicPr>
-          <p:cNvPr id="4" name="Picture 3" descr="A map of a mountain&#10;&#10;Description automatically generated">
-            <a:extLst>
-              <a:ext uri="{FF2B5EF4-FFF2-40B4-BE49-F238E27FC236}">
-                <a16:creationId xmlns:a16="http://schemas.microsoft.com/office/drawing/2014/main" id="{FC20D917-2813-56A2-BE44-B1E435474AE5}"/>
-              </a:ext>
-            </a:extLst>
-          </p:cNvPr>
-          <p:cNvPicPr>
-            <a:picLocks noChangeAspect="1"/>
-          </p:cNvPicPr>
-          <p:nvPr/>
-        </p:nvPicPr>
-        <p:blipFill>
-          <a:blip r:embed="rId2"/>
-          <a:stretch>
-            <a:fillRect/>
-          </a:stretch>
-        </p:blipFill>
-        <p:spPr>
-          <a:xfrm>
-            <a:off x="5297518" y="2514600"/>
-            <a:ext cx="3846482" cy="3922200"/>
-          </a:xfrm>
-          <a:prstGeom prst="rect">
-            <a:avLst/>
-          </a:prstGeom>
-        </p:spPr>
-      </p:pic>
       <mc:AlternateContent xmlns:mc="http://schemas.openxmlformats.org/markup-compatibility/2006" xmlns:a14="http://schemas.microsoft.com/office/drawing/2010/main">
         <mc:Choice Requires="a14">
           <p:sp>
             <p:nvSpPr>
-              <p:cNvPr id="2" name="Content Placeholder 1">
+              <p:cNvPr id="4" name="Content Placeholder 3">
                 <a:extLst>
                   <a:ext uri="{FF2B5EF4-FFF2-40B4-BE49-F238E27FC236}">
-                    <a16:creationId xmlns:a16="http://schemas.microsoft.com/office/drawing/2014/main" id="{6907674D-04C0-896E-ECB0-08F4A9BA3844}"/>
+                    <a16:creationId xmlns:a16="http://schemas.microsoft.com/office/drawing/2014/main" id="{51DC6163-A954-DD59-6EC8-A66A6CED9A85}"/>
                   </a:ext>
                 </a:extLst>
               </p:cNvPr>
@@ -9218,168 +9150,17 @@
                 <p:ph sz="half" idx="1"/>
               </p:nvPr>
             </p:nvSpPr>
-            <p:spPr/>
+            <p:spPr>
+              <a:xfrm>
+                <a:off x="711200" y="1123950"/>
+                <a:ext cx="7747000" cy="4819650"/>
+              </a:xfrm>
+            </p:spPr>
             <p:txBody>
               <a:bodyPr/>
               <a:lstStyle/>
               <a:p>
-                <a:pPr>
-                  <a:lnSpc>
-                    <a:spcPct val="90000"/>
-                  </a:lnSpc>
-                  <a:buFont typeface="Marlett" pitchFamily="26" charset="0"/>
-                  <a:buNone/>
-                </a:pPr>
-                <a:r>
-                  <a:rPr lang="en-US" dirty="0"/>
-                  <a:t>The minimization of </a:t>
-                </a:r>
-                <a14:m>
-                  <m:oMath xmlns:m="http://schemas.openxmlformats.org/officeDocument/2006/math">
-                    <m:r>
-                      <a:rPr lang="en-US" i="1">
-                        <a:solidFill>
-                          <a:srgbClr val="0033CC"/>
-                        </a:solidFill>
-                        <a:latin typeface="Cambria Math" panose="02040503050406030204" pitchFamily="18" charset="0"/>
-                      </a:rPr>
-                      <m:t>𝑅</m:t>
-                    </m:r>
-                    <m:d>
-                      <m:dPr>
-                        <m:ctrlPr>
-                          <a:rPr lang="en-US" i="1">
-                            <a:solidFill>
-                              <a:srgbClr val="0033CC"/>
-                            </a:solidFill>
-                            <a:latin typeface="Cambria Math" panose="02040503050406030204" pitchFamily="18" charset="0"/>
-                          </a:rPr>
-                        </m:ctrlPr>
-                      </m:dPr>
-                      <m:e>
-                        <m:r>
-                          <a:rPr lang="en-US" i="1">
-                            <a:solidFill>
-                              <a:srgbClr val="0033CC"/>
-                            </a:solidFill>
-                            <a:latin typeface="Cambria Math" panose="02040503050406030204" pitchFamily="18" charset="0"/>
-                          </a:rPr>
-                          <m:t>𝜔</m:t>
-                        </m:r>
-                      </m:e>
-                    </m:d>
-                    <m:r>
-                      <a:rPr lang="en-US" i="1">
-                        <a:solidFill>
-                          <a:srgbClr val="0033CC"/>
-                        </a:solidFill>
-                        <a:latin typeface="Cambria Math" panose="02040503050406030204" pitchFamily="18" charset="0"/>
-                      </a:rPr>
-                      <m:t> </m:t>
-                    </m:r>
-                  </m:oMath>
-                </a14:m>
-                <a:r>
-                  <a:rPr lang="en-US" dirty="0"/>
-                  <a:t>is typically done by moving in the direction of </a:t>
-                </a:r>
-                <a:r>
-                  <a:rPr lang="en-US" i="1" dirty="0">
-                    <a:solidFill>
-                      <a:srgbClr val="0033CC"/>
-                    </a:solidFill>
-                  </a:rPr>
-                  <a:t>steepest descent</a:t>
-                </a:r>
-                <a:r>
-                  <a:rPr lang="en-US" dirty="0"/>
-                  <a:t>. Most optimization algorithms in ML are variations of</a:t>
-                </a:r>
-                <a:r>
-                  <a:rPr lang="en-US" dirty="0">
-                    <a:solidFill>
-                      <a:srgbClr val="000000"/>
-                    </a:solidFill>
-                  </a:rPr>
-                  <a:t> </a:t>
-                </a:r>
-                <a:r>
-                  <a:rPr lang="en-US" b="1" dirty="0">
-                    <a:solidFill>
-                      <a:srgbClr val="0033CC"/>
-                    </a:solidFill>
-                  </a:rPr>
-                  <a:t>S</a:t>
-                </a:r>
-                <a:r>
-                  <a:rPr lang="en-US" dirty="0">
-                    <a:solidFill>
-                      <a:srgbClr val="0033CC"/>
-                    </a:solidFill>
-                  </a:rPr>
-                  <a:t>tochastic </a:t>
-                </a:r>
-                <a:r>
-                  <a:rPr lang="en-US" b="1" dirty="0">
-                    <a:solidFill>
-                      <a:srgbClr val="0033CC"/>
-                    </a:solidFill>
-                  </a:rPr>
-                  <a:t>G</a:t>
-                </a:r>
-                <a:r>
-                  <a:rPr lang="en-US" dirty="0">
-                    <a:solidFill>
-                      <a:srgbClr val="0033CC"/>
-                    </a:solidFill>
-                  </a:rPr>
-                  <a:t>radient </a:t>
-                </a:r>
-                <a:r>
-                  <a:rPr lang="en-US" b="1" dirty="0">
-                    <a:solidFill>
-                      <a:srgbClr val="0033CC"/>
-                    </a:solidFill>
-                  </a:rPr>
-                  <a:t>D</a:t>
-                </a:r>
-                <a:r>
-                  <a:rPr lang="en-US" dirty="0">
-                    <a:solidFill>
-                      <a:srgbClr val="0033CC"/>
-                    </a:solidFill>
-                  </a:rPr>
-                  <a:t>escent</a:t>
-                </a:r>
-                <a:r>
-                  <a:rPr lang="en-US" dirty="0">
-                    <a:solidFill>
-                      <a:srgbClr val="000000"/>
-                    </a:solidFill>
-                  </a:rPr>
-                  <a:t>. </a:t>
-                </a:r>
-              </a:p>
-              <a:p>
-                <a:pPr>
-                  <a:lnSpc>
-                    <a:spcPct val="90000"/>
-                  </a:lnSpc>
-                  <a:buFont typeface="Marlett" pitchFamily="26" charset="0"/>
-                  <a:buNone/>
-                </a:pPr>
-                <a:endParaRPr lang="en-US" dirty="0">
-                  <a:solidFill>
-                    <a:srgbClr val="000000"/>
-                  </a:solidFill>
-                </a:endParaRPr>
-              </a:p>
-              <a:p>
-                <a:pPr>
-                  <a:lnSpc>
-                    <a:spcPct val="90000"/>
-                  </a:lnSpc>
-                  <a:buFont typeface="Marlett" pitchFamily="26" charset="0"/>
+                <a:pPr marL="0" indent="0">
                   <a:buNone/>
                 </a:pPr>
                 <a:r>
@@ -9388,224 +9169,86 @@
                       <a:srgbClr val="0033CC"/>
                     </a:solidFill>
                   </a:rPr>
-                  <a:t>Algorithm</a:t>
+                  <a:t>Quadratic loss		</a:t>
                 </a:r>
-                <a:endParaRPr lang="en-US" b="1" dirty="0">
-                  <a:solidFill>
-                    <a:srgbClr val="000000"/>
-                  </a:solidFill>
-                </a:endParaRPr>
+                <a:r>
+                  <a:rPr lang="en-US" dirty="0"/>
+                  <a:t>(often used for regression)</a:t>
+                </a:r>
               </a:p>
               <a:p>
-                <a:pPr marL="457200" indent="-457200">
-                  <a:lnSpc>
-                    <a:spcPct val="90000"/>
-                  </a:lnSpc>
-                  <a:buFont typeface="+mj-lt"/>
-                  <a:buAutoNum type="arabicPeriod"/>
+                <a:pPr marL="0" indent="0">
+                  <a:buNone/>
                 </a:pPr>
                 <a:r>
                   <a:rPr lang="en-US" dirty="0">
-                    <a:solidFill>
-                      <a:srgbClr val="000000"/>
-                    </a:solidFill>
+                    <a:ea typeface="Cambria Math" charset="0"/>
+                    <a:cs typeface="Cambria Math" charset="0"/>
                   </a:rPr>
-                  <a:t>At the current point </a:t>
-                </a:r>
-                <a14:m>
-                  <m:oMath xmlns:m="http://schemas.openxmlformats.org/officeDocument/2006/math">
-                    <m:sSub>
-                      <m:sSubPr>
-                        <m:ctrlPr>
-                          <a:rPr lang="en-US" i="1">
-                            <a:solidFill>
-                              <a:srgbClr val="000000"/>
-                            </a:solidFill>
-                            <a:latin typeface="Cambria Math" panose="02040503050406030204" pitchFamily="18" charset="0"/>
-                            <a:ea typeface="Cambria Math" panose="02040503050406030204" pitchFamily="18" charset="0"/>
-                          </a:rPr>
-                        </m:ctrlPr>
-                      </m:sSubPr>
-                      <m:e>
-                        <m:r>
-                          <a:rPr lang="en-US" i="1">
-                            <a:solidFill>
-                              <a:srgbClr val="000000"/>
-                            </a:solidFill>
-                            <a:latin typeface="Cambria Math" panose="02040503050406030204" pitchFamily="18" charset="0"/>
-                            <a:ea typeface="Cambria Math" panose="02040503050406030204" pitchFamily="18" charset="0"/>
-                          </a:rPr>
-                          <m:t>𝜔</m:t>
-                        </m:r>
-                      </m:e>
-                      <m:sub>
-                        <m:r>
-                          <a:rPr lang="en-US" i="1">
-                            <a:solidFill>
-                              <a:srgbClr val="000000"/>
-                            </a:solidFill>
-                            <a:latin typeface="Cambria Math" panose="02040503050406030204" pitchFamily="18" charset="0"/>
-                            <a:ea typeface="Cambria Math" panose="02040503050406030204" pitchFamily="18" charset="0"/>
-                          </a:rPr>
-                          <m:t>𝑗</m:t>
-                        </m:r>
-                      </m:sub>
-                    </m:sSub>
-                  </m:oMath>
-                </a14:m>
-                <a:r>
-                  <a:rPr lang="en-US" dirty="0">
-                    <a:solidFill>
-                      <a:srgbClr val="000000"/>
-                    </a:solidFill>
-                  </a:rPr>
-                  <a:t>, compute a </a:t>
-                </a:r>
-                <a:br>
-                  <a:rPr lang="en-US" dirty="0">
-                    <a:solidFill>
-                      <a:srgbClr val="000000"/>
-                    </a:solidFill>
-                  </a:rPr>
-                </a:br>
-                <a:r>
-                  <a:rPr lang="en-US" i="1" u="sng" dirty="0">
-                    <a:solidFill>
-                      <a:srgbClr val="0033CC"/>
-                    </a:solidFill>
-                  </a:rPr>
-                  <a:t>noisy</a:t>
-                </a:r>
-                <a:r>
-                  <a:rPr lang="en-US" dirty="0">
-                    <a:solidFill>
-                      <a:srgbClr val="000000"/>
-                    </a:solidFill>
-                  </a:rPr>
-                  <a:t> approximation of the gradient </a:t>
-                </a:r>
-                <a:br>
-                  <a:rPr lang="en-US" dirty="0">
-                    <a:solidFill>
-                      <a:srgbClr val="000000"/>
-                    </a:solidFill>
-                  </a:rPr>
-                </a:br>
-                <a:r>
-                  <a:rPr lang="en-US" dirty="0">
-                    <a:solidFill>
-                      <a:srgbClr val="000000"/>
-                    </a:solidFill>
-                  </a:rPr>
-                  <a:t>of  </a:t>
+                  <a:t>	</a:t>
                 </a:r>
                 <a14:m>
                   <m:oMath xmlns:m="http://schemas.openxmlformats.org/officeDocument/2006/math">
                     <m:r>
                       <a:rPr lang="en-US" i="1">
-                        <a:solidFill>
-                          <a:srgbClr val="0033CC"/>
-                        </a:solidFill>
                         <a:latin typeface="Cambria Math" panose="02040503050406030204" pitchFamily="18" charset="0"/>
+                        <a:ea typeface="Cambria Math" charset="0"/>
+                        <a:cs typeface="Cambria Math" charset="0"/>
                       </a:rPr>
-                      <m:t>𝑅</m:t>
+                      <m:t>𝐿</m:t>
                     </m:r>
                     <m:d>
                       <m:dPr>
                         <m:ctrlPr>
                           <a:rPr lang="en-US" i="1">
-                            <a:solidFill>
-                              <a:srgbClr val="0033CC"/>
-                            </a:solidFill>
                             <a:latin typeface="Cambria Math" panose="02040503050406030204" pitchFamily="18" charset="0"/>
+                            <a:ea typeface="Cambria Math" charset="0"/>
+                            <a:cs typeface="Cambria Math" charset="0"/>
                           </a:rPr>
                         </m:ctrlPr>
                       </m:dPr>
                       <m:e>
                         <m:r>
                           <a:rPr lang="en-US" i="1">
-                            <a:solidFill>
-                              <a:srgbClr val="0033CC"/>
-                            </a:solidFill>
                             <a:latin typeface="Cambria Math" panose="02040503050406030204" pitchFamily="18" charset="0"/>
+                            <a:ea typeface="Cambria Math" charset="0"/>
+                            <a:cs typeface="Cambria Math" charset="0"/>
                           </a:rPr>
-                          <m:t>𝜔</m:t>
+                          <m:t>𝑦</m:t>
+                        </m:r>
+                        <m:r>
+                          <a:rPr lang="en-US" i="1">
+                            <a:latin typeface="Cambria Math" panose="02040503050406030204" pitchFamily="18" charset="0"/>
+                            <a:ea typeface="Cambria Math" charset="0"/>
+                            <a:cs typeface="Cambria Math" charset="0"/>
+                          </a:rPr>
+                          <m:t>, </m:t>
+                        </m:r>
+                        <m:r>
+                          <a:rPr lang="en-US" i="1">
+                            <a:latin typeface="Cambria Math" panose="02040503050406030204" pitchFamily="18" charset="0"/>
+                            <a:ea typeface="Cambria Math" charset="0"/>
+                            <a:cs typeface="Cambria Math" charset="0"/>
+                          </a:rPr>
+                          <m:t>𝑓</m:t>
                         </m:r>
                       </m:e>
                     </m:d>
                     <m:r>
                       <a:rPr lang="en-US" i="1">
                         <a:latin typeface="Cambria Math" panose="02040503050406030204" pitchFamily="18" charset="0"/>
-                        <a:ea typeface="Cambria Math" panose="02040503050406030204" pitchFamily="18" charset="0"/>
                       </a:rPr>
-                      <m:t>≈</m:t>
+                      <m:t>=</m:t>
                     </m:r>
-                    <m:f>
-                      <m:fPr>
+                    <m:sSup>
+                      <m:sSupPr>
                         <m:ctrlPr>
                           <a:rPr lang="en-US" i="1">
                             <a:latin typeface="Cambria Math" panose="02040503050406030204" pitchFamily="18" charset="0"/>
                           </a:rPr>
                         </m:ctrlPr>
-                      </m:fPr>
-                      <m:num>
-                        <m:r>
-                          <a:rPr lang="en-US" i="1">
-                            <a:latin typeface="Cambria Math" panose="02040503050406030204" pitchFamily="18" charset="0"/>
-                          </a:rPr>
-                          <m:t>1</m:t>
-                        </m:r>
-                      </m:num>
-                      <m:den>
-                        <m:r>
-                          <a:rPr lang="en-US" i="1">
-                            <a:latin typeface="Cambria Math" panose="02040503050406030204" pitchFamily="18" charset="0"/>
-                          </a:rPr>
-                          <m:t>𝑛</m:t>
-                        </m:r>
-                      </m:den>
-                    </m:f>
-                    <m:nary>
-                      <m:naryPr>
-                        <m:chr m:val="∑"/>
-                        <m:ctrlPr>
-                          <a:rPr lang="en-US" i="1">
-                            <a:latin typeface="Cambria Math" panose="02040503050406030204" pitchFamily="18" charset="0"/>
-                          </a:rPr>
-                        </m:ctrlPr>
-                      </m:naryPr>
-                      <m:sub>
-                        <m:r>
-                          <m:rPr>
-                            <m:brk m:alnAt="23"/>
-                          </m:rPr>
-                          <a:rPr lang="en-US" i="1">
-                            <a:latin typeface="Cambria Math" panose="02040503050406030204" pitchFamily="18" charset="0"/>
-                          </a:rPr>
-                          <m:t>𝑖</m:t>
-                        </m:r>
-                        <m:r>
-                          <a:rPr lang="en-US" i="1">
-                            <a:latin typeface="Cambria Math" panose="02040503050406030204" pitchFamily="18" charset="0"/>
-                          </a:rPr>
-                          <m:t>=1</m:t>
-                        </m:r>
-                      </m:sub>
-                      <m:sup>
-                        <m:r>
-                          <a:rPr lang="en-US" i="1">
-                            <a:latin typeface="Cambria Math" panose="02040503050406030204" pitchFamily="18" charset="0"/>
-                          </a:rPr>
-                          <m:t>𝑛</m:t>
-                        </m:r>
-                      </m:sup>
+                      </m:sSupPr>
                       <m:e>
-                        <m:r>
-                          <a:rPr lang="en-US" i="1">
-                            <a:latin typeface="Cambria Math" panose="02040503050406030204" pitchFamily="18" charset="0"/>
-                          </a:rPr>
-                          <m:t>𝐿</m:t>
-                        </m:r>
                         <m:d>
                           <m:dPr>
                             <m:ctrlPr>
@@ -9615,137 +9258,434 @@
                             </m:ctrlPr>
                           </m:dPr>
                           <m:e>
-                            <m:sSub>
-                              <m:sSubPr>
-                                <m:ctrlPr>
-                                  <a:rPr lang="en-US" i="1">
-                                    <a:latin typeface="Cambria Math" panose="02040503050406030204" pitchFamily="18" charset="0"/>
-                                  </a:rPr>
-                                </m:ctrlPr>
-                              </m:sSubPr>
-                              <m:e>
-                                <m:r>
-                                  <a:rPr lang="en-US" i="1">
-                                    <a:latin typeface="Cambria Math" panose="02040503050406030204" pitchFamily="18" charset="0"/>
-                                  </a:rPr>
-                                  <m:t>𝑦</m:t>
-                                </m:r>
-                              </m:e>
-                              <m:sub>
-                                <m:r>
-                                  <a:rPr lang="en-US" i="1">
-                                    <a:latin typeface="Cambria Math" panose="02040503050406030204" pitchFamily="18" charset="0"/>
-                                  </a:rPr>
-                                  <m:t>𝑖</m:t>
-                                </m:r>
-                              </m:sub>
-                            </m:sSub>
                             <m:r>
                               <a:rPr lang="en-US" i="1">
                                 <a:latin typeface="Cambria Math" panose="02040503050406030204" pitchFamily="18" charset="0"/>
                               </a:rPr>
-                              <m:t>, </m:t>
+                              <m:t>𝑦</m:t>
                             </m:r>
-                            <m:sSub>
-                              <m:sSubPr>
-                                <m:ctrlPr>
-                                  <a:rPr lang="en-US" i="1">
-                                    <a:latin typeface="Cambria Math" panose="02040503050406030204" pitchFamily="18" charset="0"/>
-                                  </a:rPr>
-                                </m:ctrlPr>
-                              </m:sSubPr>
-                              <m:e>
-                                <m:r>
-                                  <a:rPr lang="en-US" i="1">
-                                    <a:latin typeface="Cambria Math" panose="02040503050406030204" pitchFamily="18" charset="0"/>
-                                  </a:rPr>
-                                  <m:t>𝑓</m:t>
-                                </m:r>
-                              </m:e>
-                              <m:sub>
-                                <m:r>
-                                  <a:rPr lang="en-US" i="1">
-                                    <a:latin typeface="Cambria Math" panose="02040503050406030204" pitchFamily="18" charset="0"/>
-                                  </a:rPr>
-                                  <m:t>𝑖</m:t>
-                                </m:r>
-                              </m:sub>
-                            </m:sSub>
+                            <m:r>
+                              <a:rPr lang="en-US" i="1">
+                                <a:latin typeface="Cambria Math" panose="02040503050406030204" pitchFamily="18" charset="0"/>
+                              </a:rPr>
+                              <m:t>−</m:t>
+                            </m:r>
+                            <m:r>
+                              <a:rPr lang="en-US" i="1">
+                                <a:latin typeface="Cambria Math" panose="02040503050406030204" pitchFamily="18" charset="0"/>
+                              </a:rPr>
+                              <m:t>𝑓</m:t>
+                            </m:r>
                           </m:e>
                         </m:d>
                       </m:e>
-                    </m:nary>
+                      <m:sup>
+                        <m:r>
+                          <a:rPr lang="en-US" i="1">
+                            <a:latin typeface="Cambria Math" panose="02040503050406030204" pitchFamily="18" charset="0"/>
+                          </a:rPr>
+                          <m:t>2</m:t>
+                        </m:r>
+                      </m:sup>
+                    </m:sSup>
                   </m:oMath>
                 </a14:m>
-                <a:r>
-                  <a:rPr lang="en-US" dirty="0">
-                    <a:solidFill>
-                      <a:srgbClr val="000000"/>
-                    </a:solidFill>
-                  </a:rPr>
-                  <a:t> by </a:t>
-                </a:r>
-                <a:br>
-                  <a:rPr lang="en-US" dirty="0">
-                    <a:solidFill>
-                      <a:srgbClr val="000000"/>
-                    </a:solidFill>
-                  </a:rPr>
-                </a:br>
-                <a:r>
-                  <a:rPr lang="en-US" dirty="0">
-                    <a:solidFill>
-                      <a:srgbClr val="000000"/>
-                    </a:solidFill>
-                  </a:rPr>
-                  <a:t>using a </a:t>
-                </a:r>
+                <a:endParaRPr lang="en-US" dirty="0"/>
+              </a:p>
+              <a:p>
+                <a:pPr marL="0" indent="0">
+                  <a:buNone/>
+                </a:pPr>
                 <a:r>
                   <a:rPr lang="en-US" b="1" dirty="0">
                     <a:solidFill>
                       <a:srgbClr val="0033CC"/>
                     </a:solidFill>
                   </a:rPr>
-                  <a:t>batch</a:t>
+                  <a:t>Binary cross entropy		</a:t>
                 </a:r>
                 <a:r>
+                  <a:rPr lang="en-US" dirty="0"/>
+                  <a:t>(often used for classification)</a:t>
+                </a:r>
+                <a:endParaRPr lang="en-US" b="1" dirty="0">
+                  <a:solidFill>
+                    <a:srgbClr val="0033CC"/>
+                  </a:solidFill>
+                </a:endParaRPr>
+              </a:p>
+              <a:p>
+                <a:pPr marL="0" indent="0">
+                  <a:buNone/>
+                </a:pPr>
+                <a:r>
                   <a:rPr lang="en-US" dirty="0">
-                    <a:solidFill>
-                      <a:srgbClr val="000000"/>
-                    </a:solidFill>
+                    <a:ea typeface="Cambria Math" charset="0"/>
+                    <a:cs typeface="Cambria Math" charset="0"/>
                   </a:rPr>
-                  <a:t> of </a:t>
+                  <a:t>	</a:t>
                 </a:r>
+                <a14:m>
+                  <m:oMath xmlns:m="http://schemas.openxmlformats.org/officeDocument/2006/math">
+                    <m:r>
+                      <a:rPr lang="en-US" i="1">
+                        <a:latin typeface="Cambria Math" panose="02040503050406030204" pitchFamily="18" charset="0"/>
+                        <a:ea typeface="Cambria Math" charset="0"/>
+                        <a:cs typeface="Cambria Math" charset="0"/>
+                      </a:rPr>
+                      <m:t>𝐿</m:t>
+                    </m:r>
+                    <m:d>
+                      <m:dPr>
+                        <m:ctrlPr>
+                          <a:rPr lang="en-US" i="1">
+                            <a:latin typeface="Cambria Math" panose="02040503050406030204" pitchFamily="18" charset="0"/>
+                            <a:ea typeface="Cambria Math" charset="0"/>
+                            <a:cs typeface="Cambria Math" charset="0"/>
+                          </a:rPr>
+                        </m:ctrlPr>
+                      </m:dPr>
+                      <m:e>
+                        <m:r>
+                          <a:rPr lang="en-US" i="1">
+                            <a:latin typeface="Cambria Math" panose="02040503050406030204" pitchFamily="18" charset="0"/>
+                            <a:ea typeface="Cambria Math" charset="0"/>
+                            <a:cs typeface="Cambria Math" charset="0"/>
+                          </a:rPr>
+                          <m:t>𝑦</m:t>
+                        </m:r>
+                        <m:r>
+                          <a:rPr lang="en-US" i="1">
+                            <a:latin typeface="Cambria Math" panose="02040503050406030204" pitchFamily="18" charset="0"/>
+                            <a:ea typeface="Cambria Math" charset="0"/>
+                            <a:cs typeface="Cambria Math" charset="0"/>
+                          </a:rPr>
+                          <m:t>, </m:t>
+                        </m:r>
+                        <m:r>
+                          <a:rPr lang="en-US" i="1">
+                            <a:latin typeface="Cambria Math" panose="02040503050406030204" pitchFamily="18" charset="0"/>
+                            <a:ea typeface="Cambria Math" charset="0"/>
+                            <a:cs typeface="Cambria Math" charset="0"/>
+                          </a:rPr>
+                          <m:t>𝑓</m:t>
+                        </m:r>
+                      </m:e>
+                    </m:d>
+                    <m:r>
+                      <a:rPr lang="en-US" i="1">
+                        <a:latin typeface="Cambria Math" panose="02040503050406030204" pitchFamily="18" charset="0"/>
+                        <a:ea typeface="Cambria Math" charset="0"/>
+                        <a:cs typeface="Cambria Math" charset="0"/>
+                      </a:rPr>
+                      <m:t>=</m:t>
+                    </m:r>
+                    <m:r>
+                      <a:rPr lang="en-US">
+                        <a:latin typeface="Cambria Math" panose="02040503050406030204" pitchFamily="18" charset="0"/>
+                        <a:ea typeface="Cambria Math" charset="0"/>
+                        <a:cs typeface="Cambria Math" charset="0"/>
+                      </a:rPr>
+                      <m:t>−[</m:t>
+                    </m:r>
+                    <m:r>
+                      <a:rPr lang="en-US" i="1">
+                        <a:latin typeface="Cambria Math" panose="02040503050406030204" pitchFamily="18" charset="0"/>
+                        <a:ea typeface="Cambria Math" charset="0"/>
+                        <a:cs typeface="Cambria Math" charset="0"/>
+                      </a:rPr>
+                      <m:t>𝑦</m:t>
+                    </m:r>
+                    <m:func>
+                      <m:funcPr>
+                        <m:ctrlPr>
+                          <a:rPr lang="en-US">
+                            <a:latin typeface="Cambria Math" panose="02040503050406030204" pitchFamily="18" charset="0"/>
+                            <a:ea typeface="Cambria Math" charset="0"/>
+                            <a:cs typeface="Cambria Math" charset="0"/>
+                          </a:rPr>
+                        </m:ctrlPr>
+                      </m:funcPr>
+                      <m:fName>
+                        <m:r>
+                          <m:rPr>
+                            <m:sty m:val="p"/>
+                          </m:rPr>
+                          <a:rPr lang="en-US">
+                            <a:latin typeface="Cambria Math" panose="02040503050406030204" pitchFamily="18" charset="0"/>
+                            <a:ea typeface="Cambria Math" charset="0"/>
+                            <a:cs typeface="Cambria Math" charset="0"/>
+                          </a:rPr>
+                          <m:t>log</m:t>
+                        </m:r>
+                      </m:fName>
+                      <m:e>
+                        <m:r>
+                          <a:rPr lang="en-US" i="1">
+                            <a:latin typeface="Cambria Math" panose="02040503050406030204" pitchFamily="18" charset="0"/>
+                            <a:ea typeface="Cambria Math" charset="0"/>
+                            <a:cs typeface="Cambria Math" charset="0"/>
+                          </a:rPr>
+                          <m:t>𝑓</m:t>
+                        </m:r>
+                        <m:r>
+                          <a:rPr lang="en-US" i="1">
+                            <a:latin typeface="Cambria Math" panose="02040503050406030204" pitchFamily="18" charset="0"/>
+                            <a:ea typeface="Cambria Math" charset="0"/>
+                            <a:cs typeface="Cambria Math" charset="0"/>
+                          </a:rPr>
+                          <m:t>+</m:t>
+                        </m:r>
+                        <m:d>
+                          <m:dPr>
+                            <m:ctrlPr>
+                              <a:rPr lang="en-US" i="1">
+                                <a:latin typeface="Cambria Math" panose="02040503050406030204" pitchFamily="18" charset="0"/>
+                                <a:ea typeface="Cambria Math" charset="0"/>
+                                <a:cs typeface="Cambria Math" charset="0"/>
+                              </a:rPr>
+                            </m:ctrlPr>
+                          </m:dPr>
+                          <m:e>
+                            <m:r>
+                              <a:rPr lang="en-US" i="1">
+                                <a:latin typeface="Cambria Math" panose="02040503050406030204" pitchFamily="18" charset="0"/>
+                                <a:ea typeface="Cambria Math" charset="0"/>
+                                <a:cs typeface="Cambria Math" charset="0"/>
+                              </a:rPr>
+                              <m:t>1−</m:t>
+                            </m:r>
+                            <m:r>
+                              <a:rPr lang="en-US" i="1">
+                                <a:latin typeface="Cambria Math" panose="02040503050406030204" pitchFamily="18" charset="0"/>
+                                <a:ea typeface="Cambria Math" charset="0"/>
+                                <a:cs typeface="Cambria Math" charset="0"/>
+                              </a:rPr>
+                              <m:t>𝑦</m:t>
+                            </m:r>
+                          </m:e>
+                        </m:d>
+                        <m:func>
+                          <m:funcPr>
+                            <m:ctrlPr>
+                              <a:rPr lang="en-US">
+                                <a:latin typeface="Cambria Math" panose="02040503050406030204" pitchFamily="18" charset="0"/>
+                                <a:ea typeface="Cambria Math" charset="0"/>
+                                <a:cs typeface="Cambria Math" charset="0"/>
+                              </a:rPr>
+                            </m:ctrlPr>
+                          </m:funcPr>
+                          <m:fName>
+                            <m:r>
+                              <m:rPr>
+                                <m:sty m:val="p"/>
+                              </m:rPr>
+                              <a:rPr lang="en-US">
+                                <a:latin typeface="Cambria Math" panose="02040503050406030204" pitchFamily="18" charset="0"/>
+                                <a:ea typeface="Cambria Math" charset="0"/>
+                                <a:cs typeface="Cambria Math" charset="0"/>
+                              </a:rPr>
+                              <m:t>log</m:t>
+                            </m:r>
+                          </m:fName>
+                          <m:e>
+                            <m:r>
+                              <a:rPr lang="en-US" i="1">
+                                <a:latin typeface="Cambria Math" panose="02040503050406030204" pitchFamily="18" charset="0"/>
+                                <a:ea typeface="Cambria Math" charset="0"/>
+                                <a:cs typeface="Cambria Math" charset="0"/>
+                              </a:rPr>
+                              <m:t>(1−</m:t>
+                            </m:r>
+                            <m:r>
+                              <a:rPr lang="en-US" i="1">
+                                <a:latin typeface="Cambria Math" panose="02040503050406030204" pitchFamily="18" charset="0"/>
+                                <a:ea typeface="Cambria Math" charset="0"/>
+                                <a:cs typeface="Cambria Math" charset="0"/>
+                              </a:rPr>
+                              <m:t>𝑓</m:t>
+                            </m:r>
+                            <m:r>
+                              <a:rPr lang="en-US" i="1">
+                                <a:latin typeface="Cambria Math" panose="02040503050406030204" pitchFamily="18" charset="0"/>
+                                <a:ea typeface="Cambria Math" charset="0"/>
+                                <a:cs typeface="Cambria Math" charset="0"/>
+                              </a:rPr>
+                              <m:t>)</m:t>
+                            </m:r>
+                          </m:e>
+                        </m:func>
+                      </m:e>
+                    </m:func>
+                    <m:r>
+                      <a:rPr lang="en-US">
+                        <a:latin typeface="Cambria Math" panose="02040503050406030204" pitchFamily="18" charset="0"/>
+                        <a:ea typeface="Cambria Math" charset="0"/>
+                        <a:cs typeface="Cambria Math" charset="0"/>
+                      </a:rPr>
+                      <m:t>]</m:t>
+                    </m:r>
+                  </m:oMath>
+                </a14:m>
+                <a:endParaRPr lang="en-US" dirty="0">
+                  <a:latin typeface="Cambria Math" panose="02040503050406030204" pitchFamily="18" charset="0"/>
+                  <a:ea typeface="Cambria Math" charset="0"/>
+                  <a:cs typeface="Cambria Math" charset="0"/>
+                </a:endParaRPr>
+              </a:p>
+              <a:p>
+                <a:pPr marL="0" indent="0">
+                  <a:buNone/>
+                </a:pPr>
                 <a:r>
                   <a:rPr lang="en-US" b="1" dirty="0">
                     <a:solidFill>
                       <a:srgbClr val="0033CC"/>
                     </a:solidFill>
+                    <a:latin typeface="Cambria Math" panose="02040503050406030204" pitchFamily="18" charset="0"/>
+                    <a:ea typeface="Cambria Math" charset="0"/>
+                    <a:cs typeface="Cambria Math" charset="0"/>
                   </a:rPr>
-                  <a:t>training data</a:t>
+                  <a:t>Exponential loss		</a:t>
                 </a:r>
+              </a:p>
+              <a:p>
+                <a:pPr marL="0" indent="0">
+                  <a:buNone/>
+                </a:pPr>
                 <a:r>
                   <a:rPr lang="en-US" dirty="0">
+                    <a:ea typeface="Cambria Math" charset="0"/>
+                    <a:cs typeface="Cambria Math" charset="0"/>
+                  </a:rPr>
+                  <a:t>	</a:t>
+                </a:r>
+                <a14:m>
+                  <m:oMath xmlns:m="http://schemas.openxmlformats.org/officeDocument/2006/math">
+                    <m:r>
+                      <a:rPr lang="en-US" i="1">
+                        <a:latin typeface="Cambria Math" panose="02040503050406030204" pitchFamily="18" charset="0"/>
+                        <a:ea typeface="Cambria Math" charset="0"/>
+                        <a:cs typeface="Cambria Math" charset="0"/>
+                      </a:rPr>
+                      <m:t>𝐿</m:t>
+                    </m:r>
+                    <m:d>
+                      <m:dPr>
+                        <m:ctrlPr>
+                          <a:rPr lang="en-US" i="1">
+                            <a:latin typeface="Cambria Math" panose="02040503050406030204" pitchFamily="18" charset="0"/>
+                            <a:ea typeface="Cambria Math" charset="0"/>
+                            <a:cs typeface="Cambria Math" charset="0"/>
+                          </a:rPr>
+                        </m:ctrlPr>
+                      </m:dPr>
+                      <m:e>
+                        <m:r>
+                          <a:rPr lang="en-US" i="1">
+                            <a:latin typeface="Cambria Math" panose="02040503050406030204" pitchFamily="18" charset="0"/>
+                            <a:ea typeface="Cambria Math" charset="0"/>
+                            <a:cs typeface="Cambria Math" charset="0"/>
+                          </a:rPr>
+                          <m:t>𝑦</m:t>
+                        </m:r>
+                        <m:r>
+                          <a:rPr lang="en-US" i="1">
+                            <a:latin typeface="Cambria Math" panose="02040503050406030204" pitchFamily="18" charset="0"/>
+                            <a:ea typeface="Cambria Math" charset="0"/>
+                            <a:cs typeface="Cambria Math" charset="0"/>
+                          </a:rPr>
+                          <m:t>, </m:t>
+                        </m:r>
+                        <m:r>
+                          <a:rPr lang="en-US" i="1">
+                            <a:latin typeface="Cambria Math" panose="02040503050406030204" pitchFamily="18" charset="0"/>
+                            <a:ea typeface="Cambria Math" charset="0"/>
+                            <a:cs typeface="Cambria Math" charset="0"/>
+                          </a:rPr>
+                          <m:t>𝑓</m:t>
+                        </m:r>
+                      </m:e>
+                    </m:d>
+                    <m:r>
+                      <a:rPr lang="en-US" i="1">
+                        <a:latin typeface="Cambria Math" panose="02040503050406030204" pitchFamily="18" charset="0"/>
+                        <a:ea typeface="Cambria Math" charset="0"/>
+                        <a:cs typeface="Cambria Math" charset="0"/>
+                      </a:rPr>
+                      <m:t>=</m:t>
+                    </m:r>
+                    <m:func>
+                      <m:funcPr>
+                        <m:ctrlPr>
+                          <a:rPr lang="en-US">
+                            <a:latin typeface="Cambria Math" panose="02040503050406030204" pitchFamily="18" charset="0"/>
+                            <a:ea typeface="Cambria Math" charset="0"/>
+                            <a:cs typeface="Cambria Math" charset="0"/>
+                          </a:rPr>
+                        </m:ctrlPr>
+                      </m:funcPr>
+                      <m:fName>
+                        <m:r>
+                          <m:rPr>
+                            <m:sty m:val="p"/>
+                          </m:rPr>
+                          <a:rPr lang="en-US">
+                            <a:latin typeface="Cambria Math" panose="02040503050406030204" pitchFamily="18" charset="0"/>
+                            <a:ea typeface="Cambria Math" charset="0"/>
+                            <a:cs typeface="Cambria Math" charset="0"/>
+                          </a:rPr>
+                          <m:t>exp</m:t>
+                        </m:r>
+                      </m:fName>
+                      <m:e>
+                        <m:r>
+                          <a:rPr lang="en-US" i="1">
+                            <a:latin typeface="Cambria Math" panose="02040503050406030204" pitchFamily="18" charset="0"/>
+                            <a:ea typeface="Cambria Math" charset="0"/>
+                            <a:cs typeface="Cambria Math" charset="0"/>
+                          </a:rPr>
+                          <m:t>(−</m:t>
+                        </m:r>
+                        <m:r>
+                          <a:rPr lang="en-US" i="1">
+                            <a:latin typeface="Cambria Math" panose="02040503050406030204" pitchFamily="18" charset="0"/>
+                            <a:ea typeface="Cambria Math" charset="0"/>
+                            <a:cs typeface="Cambria Math" charset="0"/>
+                          </a:rPr>
+                          <m:t>𝑤𝑦𝑓</m:t>
+                        </m:r>
+                        <m:r>
+                          <a:rPr lang="en-US" i="1">
+                            <a:latin typeface="Cambria Math" panose="02040503050406030204" pitchFamily="18" charset="0"/>
+                            <a:ea typeface="Cambria Math" charset="0"/>
+                            <a:cs typeface="Cambria Math" charset="0"/>
+                          </a:rPr>
+                          <m:t>/2)</m:t>
+                        </m:r>
+                      </m:e>
+                    </m:func>
+                  </m:oMath>
+                </a14:m>
+                <a:endParaRPr lang="en-US" dirty="0">
+                  <a:latin typeface="Cambria Math" panose="02040503050406030204" pitchFamily="18" charset="0"/>
+                  <a:ea typeface="Cambria Math" charset="0"/>
+                  <a:cs typeface="Cambria Math" charset="0"/>
+                </a:endParaRPr>
+              </a:p>
+              <a:p>
+                <a:pPr marL="0" indent="0">
+                  <a:buNone/>
+                </a:pPr>
+                <a:r>
+                  <a:rPr lang="en-US" b="1" dirty="0">
                     <a:solidFill>
-                      <a:srgbClr val="000000"/>
+                      <a:srgbClr val="0033CC"/>
                     </a:solidFill>
+                    <a:latin typeface="Cambria Math" panose="02040503050406030204" pitchFamily="18" charset="0"/>
+                    <a:ea typeface="Cambria Math" charset="0"/>
                   </a:rPr>
-                  <a:t>, </a:t>
-                </a:r>
-                <a:br>
-                  <a:rPr lang="en-US" dirty="0">
-                    <a:solidFill>
-                      <a:srgbClr val="000000"/>
-                    </a:solidFill>
-                  </a:rPr>
-                </a:br>
-                <a:r>
-                  <a:rPr lang="en-US" dirty="0">
-                    <a:solidFill>
-                      <a:srgbClr val="000000"/>
-                    </a:solidFill>
-                  </a:rPr>
-                  <a:t>where </a:t>
+                  <a:t>Quantile loss (</a:t>
                 </a:r>
                 <a14:m>
                   <m:oMath xmlns:m="http://schemas.openxmlformats.org/officeDocument/2006/math">
@@ -9755,8 +9695,9 @@
                           <a:srgbClr val="0033CC"/>
                         </a:solidFill>
                         <a:latin typeface="Cambria Math" panose="02040503050406030204" pitchFamily="18" charset="0"/>
+                        <a:ea typeface="Cambria Math" charset="0"/>
                       </a:rPr>
-                      <m:t>𝒏</m:t>
+                      <m:t>𝟎</m:t>
                     </m:r>
                     <m:r>
                       <a:rPr lang="en-US" b="1" i="1">
@@ -9766,7 +9707,7 @@
                         <a:latin typeface="Cambria Math" panose="02040503050406030204" pitchFamily="18" charset="0"/>
                         <a:ea typeface="Cambria Math" panose="02040503050406030204" pitchFamily="18" charset="0"/>
                       </a:rPr>
-                      <m:t>≪</m:t>
+                      <m:t>≤</m:t>
                     </m:r>
                     <m:r>
                       <a:rPr lang="en-US" b="1" i="1">
@@ -9776,251 +9717,496 @@
                         <a:latin typeface="Cambria Math" panose="02040503050406030204" pitchFamily="18" charset="0"/>
                         <a:ea typeface="Cambria Math" panose="02040503050406030204" pitchFamily="18" charset="0"/>
                       </a:rPr>
-                      <m:t>𝑵</m:t>
+                      <m:t>𝝉</m:t>
+                    </m:r>
+                    <m:r>
+                      <a:rPr lang="en-US" b="1" i="1">
+                        <a:solidFill>
+                          <a:srgbClr val="0033CC"/>
+                        </a:solidFill>
+                        <a:latin typeface="Cambria Math" panose="02040503050406030204" pitchFamily="18" charset="0"/>
+                        <a:ea typeface="Cambria Math" panose="02040503050406030204" pitchFamily="18" charset="0"/>
+                      </a:rPr>
+                      <m:t>≤</m:t>
+                    </m:r>
+                    <m:r>
+                      <a:rPr lang="en-US" b="1" i="1">
+                        <a:solidFill>
+                          <a:srgbClr val="0033CC"/>
+                        </a:solidFill>
+                        <a:latin typeface="Cambria Math" panose="02040503050406030204" pitchFamily="18" charset="0"/>
+                        <a:ea typeface="Cambria Math" panose="02040503050406030204" pitchFamily="18" charset="0"/>
+                      </a:rPr>
+                      <m:t>𝟏</m:t>
                     </m:r>
                   </m:oMath>
                 </a14:m>
                 <a:r>
-                  <a:rPr lang="en-US" dirty="0"/>
-                  <a:t>.</a:t>
+                  <a:rPr lang="en-US" b="1" dirty="0">
+                    <a:solidFill>
+                      <a:srgbClr val="0033CC"/>
+                    </a:solidFill>
+                    <a:latin typeface="Cambria Math" panose="02040503050406030204" pitchFamily="18" charset="0"/>
+                    <a:ea typeface="Cambria Math" charset="0"/>
+                  </a:rPr>
+                  <a:t>)	</a:t>
                 </a:r>
               </a:p>
               <a:p>
-                <a:pPr marL="457200" indent="-457200">
-                  <a:lnSpc>
-                    <a:spcPct val="90000"/>
-                  </a:lnSpc>
-                  <a:buFont typeface="+mj-lt"/>
-                  <a:buAutoNum type="arabicPeriod"/>
+                <a:pPr marL="0" indent="0">
+                  <a:buNone/>
                 </a:pPr>
                 <a:r>
-                  <a:rPr lang="en-US" dirty="0"/>
-                  <a:t>Move to the next position </a:t>
+                  <a:rPr lang="en-US" dirty="0">
+                    <a:latin typeface="Cambria Math" panose="02040503050406030204" pitchFamily="18" charset="0"/>
+                    <a:ea typeface="Cambria Math" charset="0"/>
+                  </a:rPr>
+                  <a:t>	</a:t>
                 </a:r>
                 <a14:m>
                   <m:oMath xmlns:m="http://schemas.openxmlformats.org/officeDocument/2006/math">
-                    <m:sSub>
-                      <m:sSubPr>
+                    <m:r>
+                      <a:rPr lang="en-US" i="1">
+                        <a:latin typeface="Cambria Math" panose="02040503050406030204" pitchFamily="18" charset="0"/>
+                        <a:ea typeface="Cambria Math" charset="0"/>
+                        <a:cs typeface="Cambria Math" charset="0"/>
+                      </a:rPr>
+                      <m:t>𝐿</m:t>
+                    </m:r>
+                    <m:d>
+                      <m:dPr>
                         <m:ctrlPr>
                           <a:rPr lang="en-US" i="1">
-                            <a:solidFill>
-                              <a:srgbClr val="000000"/>
-                            </a:solidFill>
                             <a:latin typeface="Cambria Math" panose="02040503050406030204" pitchFamily="18" charset="0"/>
-                            <a:ea typeface="Cambria Math" panose="02040503050406030204" pitchFamily="18" charset="0"/>
+                            <a:ea typeface="Cambria Math" charset="0"/>
+                            <a:cs typeface="Cambria Math" charset="0"/>
                           </a:rPr>
                         </m:ctrlPr>
-                      </m:sSubPr>
+                      </m:dPr>
                       <m:e>
                         <m:r>
                           <a:rPr lang="en-US" i="1">
-                            <a:solidFill>
-                              <a:srgbClr val="000000"/>
-                            </a:solidFill>
                             <a:latin typeface="Cambria Math" panose="02040503050406030204" pitchFamily="18" charset="0"/>
-                            <a:ea typeface="Cambria Math" panose="02040503050406030204" pitchFamily="18" charset="0"/>
+                            <a:ea typeface="Cambria Math" charset="0"/>
+                            <a:cs typeface="Cambria Math" charset="0"/>
                           </a:rPr>
-                          <m:t>𝜔</m:t>
-                        </m:r>
-                      </m:e>
-                      <m:sub>
-                        <m:r>
-                          <a:rPr lang="en-US" i="1">
-                            <a:solidFill>
-                              <a:srgbClr val="000000"/>
-                            </a:solidFill>
-                            <a:latin typeface="Cambria Math" panose="02040503050406030204" pitchFamily="18" charset="0"/>
-                            <a:ea typeface="Cambria Math" panose="02040503050406030204" pitchFamily="18" charset="0"/>
-                          </a:rPr>
-                          <m:t>𝑗</m:t>
+                          <m:t>𝑦</m:t>
                         </m:r>
                         <m:r>
                           <a:rPr lang="en-US" i="1">
-                            <a:solidFill>
-                              <a:srgbClr val="000000"/>
-                            </a:solidFill>
                             <a:latin typeface="Cambria Math" panose="02040503050406030204" pitchFamily="18" charset="0"/>
-                            <a:ea typeface="Cambria Math" panose="02040503050406030204" pitchFamily="18" charset="0"/>
+                            <a:ea typeface="Cambria Math" charset="0"/>
+                            <a:cs typeface="Cambria Math" charset="0"/>
                           </a:rPr>
-                          <m:t>+1</m:t>
+                          <m:t>, </m:t>
                         </m:r>
-                      </m:sub>
-                    </m:sSub>
+                        <m:r>
+                          <a:rPr lang="en-US" i="1">
+                            <a:latin typeface="Cambria Math" panose="02040503050406030204" pitchFamily="18" charset="0"/>
+                            <a:ea typeface="Cambria Math" charset="0"/>
+                            <a:cs typeface="Cambria Math" charset="0"/>
+                          </a:rPr>
+                          <m:t>𝑓</m:t>
+                        </m:r>
+                      </m:e>
+                    </m:d>
                     <m:r>
                       <a:rPr lang="en-US" i="1">
-                        <a:solidFill>
-                          <a:srgbClr val="000000"/>
-                        </a:solidFill>
                         <a:latin typeface="Cambria Math" panose="02040503050406030204" pitchFamily="18" charset="0"/>
-                        <a:ea typeface="Cambria Math" panose="02040503050406030204" pitchFamily="18" charset="0"/>
+                        <a:ea typeface="Cambria Math" charset="0"/>
+                        <a:cs typeface="Cambria Math" charset="0"/>
                       </a:rPr>
-                      <m:t> </m:t>
+                      <m:t>=</m:t>
                     </m:r>
+                    <m:d>
+                      <m:dPr>
+                        <m:begChr m:val="{"/>
+                        <m:endChr m:val=""/>
+                        <m:ctrlPr>
+                          <a:rPr lang="en-US" i="1">
+                            <a:latin typeface="Cambria Math" panose="02040503050406030204" pitchFamily="18" charset="0"/>
+                            <a:ea typeface="Cambria Math" charset="0"/>
+                          </a:rPr>
+                        </m:ctrlPr>
+                      </m:dPr>
+                      <m:e>
+                        <m:eqArr>
+                          <m:eqArrPr>
+                            <m:ctrlPr>
+                              <a:rPr lang="en-US" i="1">
+                                <a:latin typeface="Cambria Math" panose="02040503050406030204" pitchFamily="18" charset="0"/>
+                                <a:ea typeface="Cambria Math" charset="0"/>
+                              </a:rPr>
+                            </m:ctrlPr>
+                          </m:eqArrPr>
+                          <m:e>
+                            <m:r>
+                              <a:rPr lang="en-US" i="1">
+                                <a:latin typeface="Cambria Math" panose="02040503050406030204" pitchFamily="18" charset="0"/>
+                                <a:ea typeface="Cambria Math" charset="0"/>
+                              </a:rPr>
+                              <m:t>𝜏</m:t>
+                            </m:r>
+                            <m:d>
+                              <m:dPr>
+                                <m:ctrlPr>
+                                  <a:rPr lang="en-US" i="1">
+                                    <a:latin typeface="Cambria Math" panose="02040503050406030204" pitchFamily="18" charset="0"/>
+                                    <a:ea typeface="Cambria Math" charset="0"/>
+                                  </a:rPr>
+                                </m:ctrlPr>
+                              </m:dPr>
+                              <m:e>
+                                <m:r>
+                                  <a:rPr lang="en-US" i="1">
+                                    <a:latin typeface="Cambria Math" panose="02040503050406030204" pitchFamily="18" charset="0"/>
+                                    <a:ea typeface="Cambria Math" charset="0"/>
+                                  </a:rPr>
+                                  <m:t>𝑦</m:t>
+                                </m:r>
+                                <m:r>
+                                  <a:rPr lang="en-US" i="1">
+                                    <a:latin typeface="Cambria Math" panose="02040503050406030204" pitchFamily="18" charset="0"/>
+                                    <a:ea typeface="Cambria Math" charset="0"/>
+                                  </a:rPr>
+                                  <m:t>−</m:t>
+                                </m:r>
+                                <m:r>
+                                  <a:rPr lang="en-US" i="1">
+                                    <a:latin typeface="Cambria Math" panose="02040503050406030204" pitchFamily="18" charset="0"/>
+                                    <a:ea typeface="Cambria Math" charset="0"/>
+                                  </a:rPr>
+                                  <m:t>𝑓</m:t>
+                                </m:r>
+                              </m:e>
+                            </m:d>
+                            <m:r>
+                              <a:rPr lang="en-US" i="1">
+                                <a:latin typeface="Cambria Math" panose="02040503050406030204" pitchFamily="18" charset="0"/>
+                                <a:ea typeface="Cambria Math" charset="0"/>
+                              </a:rPr>
+                              <m:t>              </m:t>
+                            </m:r>
+                            <m:r>
+                              <a:rPr lang="en-US" i="1">
+                                <a:latin typeface="Cambria Math" panose="02040503050406030204" pitchFamily="18" charset="0"/>
+                                <a:ea typeface="Cambria Math" charset="0"/>
+                              </a:rPr>
+                              <m:t>𝑦</m:t>
+                            </m:r>
+                            <m:r>
+                              <a:rPr lang="en-US" i="1">
+                                <a:latin typeface="Cambria Math" panose="02040503050406030204" pitchFamily="18" charset="0"/>
+                                <a:ea typeface="Cambria Math" panose="02040503050406030204" pitchFamily="18" charset="0"/>
+                              </a:rPr>
+                              <m:t>≥</m:t>
+                            </m:r>
+                            <m:r>
+                              <a:rPr lang="en-US" i="1">
+                                <a:latin typeface="Cambria Math" panose="02040503050406030204" pitchFamily="18" charset="0"/>
+                                <a:ea typeface="Cambria Math" panose="02040503050406030204" pitchFamily="18" charset="0"/>
+                              </a:rPr>
+                              <m:t>𝑓</m:t>
+                            </m:r>
+                            <m:r>
+                              <a:rPr lang="en-US" i="1">
+                                <a:latin typeface="Cambria Math" panose="02040503050406030204" pitchFamily="18" charset="0"/>
+                                <a:ea typeface="Cambria Math" charset="0"/>
+                              </a:rPr>
+                              <m:t> </m:t>
+                            </m:r>
+                          </m:e>
+                          <m:e>
+                            <m:d>
+                              <m:dPr>
+                                <m:ctrlPr>
+                                  <a:rPr lang="en-US" i="1">
+                                    <a:latin typeface="Cambria Math" panose="02040503050406030204" pitchFamily="18" charset="0"/>
+                                  </a:rPr>
+                                </m:ctrlPr>
+                              </m:dPr>
+                              <m:e>
+                                <m:r>
+                                  <a:rPr lang="en-US" i="1">
+                                    <a:latin typeface="Cambria Math" panose="02040503050406030204" pitchFamily="18" charset="0"/>
+                                  </a:rPr>
+                                  <m:t>1−</m:t>
+                                </m:r>
+                                <m:r>
+                                  <a:rPr lang="en-US" i="1">
+                                    <a:latin typeface="Cambria Math" panose="02040503050406030204" pitchFamily="18" charset="0"/>
+                                  </a:rPr>
+                                  <m:t>𝜏</m:t>
+                                </m:r>
+                              </m:e>
+                            </m:d>
+                            <m:d>
+                              <m:dPr>
+                                <m:ctrlPr>
+                                  <a:rPr lang="en-US" i="1">
+                                    <a:latin typeface="Cambria Math" panose="02040503050406030204" pitchFamily="18" charset="0"/>
+                                  </a:rPr>
+                                </m:ctrlPr>
+                              </m:dPr>
+                              <m:e>
+                                <m:r>
+                                  <a:rPr lang="en-US" i="1">
+                                    <a:latin typeface="Cambria Math" panose="02040503050406030204" pitchFamily="18" charset="0"/>
+                                  </a:rPr>
+                                  <m:t>𝑓</m:t>
+                                </m:r>
+                                <m:r>
+                                  <a:rPr lang="en-US" i="1">
+                                    <a:latin typeface="Cambria Math" panose="02040503050406030204" pitchFamily="18" charset="0"/>
+                                  </a:rPr>
+                                  <m:t>−</m:t>
+                                </m:r>
+                                <m:r>
+                                  <a:rPr lang="en-US" i="1">
+                                    <a:latin typeface="Cambria Math" panose="02040503050406030204" pitchFamily="18" charset="0"/>
+                                  </a:rPr>
+                                  <m:t>𝑦</m:t>
+                                </m:r>
+                              </m:e>
+                            </m:d>
+                            <m:r>
+                              <a:rPr lang="en-US" i="1">
+                                <a:latin typeface="Cambria Math" panose="02040503050406030204" pitchFamily="18" charset="0"/>
+                              </a:rPr>
+                              <m:t>  </m:t>
+                            </m:r>
+                            <m:r>
+                              <a:rPr lang="en-US" i="1">
+                                <a:latin typeface="Cambria Math" panose="02040503050406030204" pitchFamily="18" charset="0"/>
+                              </a:rPr>
+                              <m:t>𝑦</m:t>
+                            </m:r>
+                            <m:r>
+                              <a:rPr lang="en-US" i="1">
+                                <a:latin typeface="Cambria Math" panose="02040503050406030204" pitchFamily="18" charset="0"/>
+                              </a:rPr>
+                              <m:t>&lt;</m:t>
+                            </m:r>
+                            <m:r>
+                              <a:rPr lang="en-US" i="1">
+                                <a:latin typeface="Cambria Math" panose="02040503050406030204" pitchFamily="18" charset="0"/>
+                              </a:rPr>
+                              <m:t>𝑓</m:t>
+                            </m:r>
+                          </m:e>
+                        </m:eqArr>
+                      </m:e>
+                    </m:d>
                   </m:oMath>
                 </a14:m>
-                <a:br>
-                  <a:rPr lang="en-US" dirty="0"/>
-                </a:br>
-                <a:r>
-                  <a:rPr lang="en-US" dirty="0"/>
-                  <a:t>in the landscape using </a:t>
-                </a:r>
-                <a:endParaRPr lang="en-US" i="1" dirty="0">
-                  <a:solidFill>
-                    <a:srgbClr val="000000"/>
-                  </a:solidFill>
-                  <a:latin typeface="Cambria Math" panose="02040503050406030204" pitchFamily="18" charset="0"/>
-                  <a:ea typeface="Cambria Math" panose="02040503050406030204" pitchFamily="18" charset="0"/>
-                </a:endParaRPr>
+                <a:endParaRPr lang="en-US" dirty="0"/>
               </a:p>
               <a:p>
                 <a:pPr marL="0" indent="0">
-                  <a:lnSpc>
-                    <a:spcPct val="90000"/>
-                  </a:lnSpc>
+                  <a:buNone/>
+                </a:pPr>
+                <a:r>
+                  <a:rPr lang="en-US" dirty="0">
+                    <a:solidFill>
+                      <a:srgbClr val="0033CC"/>
+                    </a:solidFill>
+                  </a:rPr>
+                  <a:t>Zero-One loss</a:t>
+                </a:r>
+              </a:p>
+              <a:p>
+                <a:pPr marL="0" indent="0">
                   <a:buNone/>
                 </a:pPr>
                 <a14:m>
                   <m:oMathPara xmlns:m="http://schemas.openxmlformats.org/officeDocument/2006/math">
-                    <m:oMathParaPr>
-                      <m:jc m:val="centerGroup"/>
-                    </m:oMathParaPr>
-                    <m:oMath xmlns:m="http://schemas.openxmlformats.org/officeDocument/2006/math">
-                      <m:sSub>
-                        <m:sSubPr>
+                    <m:oMath>
+                      <m:r>
+                        <a:rPr lang="en-US" i="1">
+                          <a:latin typeface="Cambria Math" panose="02040503050406030204" pitchFamily="18" charset="0"/>
+                          <a:ea typeface="Cambria Math" charset="0"/>
+                          <a:cs typeface="Cambria Math" charset="0"/>
+                        </a:rPr>
+                        <m:t>𝐿</m:t>
+                      </m:r>
+                      <m:d>
+                        <m:dPr>
                           <m:ctrlPr>
                             <a:rPr lang="en-US" i="1">
-                              <a:solidFill>
-                                <a:srgbClr val="000000"/>
-                              </a:solidFill>
                               <a:latin typeface="Cambria Math" panose="02040503050406030204" pitchFamily="18" charset="0"/>
-                              <a:ea typeface="Cambria Math" panose="02040503050406030204" pitchFamily="18" charset="0"/>
+                              <a:ea typeface="Cambria Math" charset="0"/>
+                              <a:cs typeface="Cambria Math" charset="0"/>
                             </a:rPr>
                           </m:ctrlPr>
-                        </m:sSubPr>
+                        </m:dPr>
                         <m:e>
                           <m:r>
                             <a:rPr lang="en-US" i="1">
-                              <a:solidFill>
-                                <a:srgbClr val="000000"/>
-                              </a:solidFill>
                               <a:latin typeface="Cambria Math" panose="02040503050406030204" pitchFamily="18" charset="0"/>
-                              <a:ea typeface="Cambria Math" panose="02040503050406030204" pitchFamily="18" charset="0"/>
+                              <a:ea typeface="Cambria Math" charset="0"/>
+                              <a:cs typeface="Cambria Math" charset="0"/>
                             </a:rPr>
-                            <m:t>𝜔</m:t>
-                          </m:r>
-                        </m:e>
-                        <m:sub>
-                          <m:r>
-                            <a:rPr lang="en-US" i="1">
-                              <a:solidFill>
-                                <a:srgbClr val="000000"/>
-                              </a:solidFill>
-                              <a:latin typeface="Cambria Math" panose="02040503050406030204" pitchFamily="18" charset="0"/>
-                              <a:ea typeface="Cambria Math" panose="02040503050406030204" pitchFamily="18" charset="0"/>
-                            </a:rPr>
-                            <m:t>𝑗</m:t>
+                            <m:t>𝑦</m:t>
                           </m:r>
                           <m:r>
                             <a:rPr lang="en-US" i="1">
-                              <a:solidFill>
-                                <a:srgbClr val="000000"/>
-                              </a:solidFill>
                               <a:latin typeface="Cambria Math" panose="02040503050406030204" pitchFamily="18" charset="0"/>
-                              <a:ea typeface="Cambria Math" panose="02040503050406030204" pitchFamily="18" charset="0"/>
+                              <a:ea typeface="Cambria Math" charset="0"/>
+                              <a:cs typeface="Cambria Math" charset="0"/>
                             </a:rPr>
-                            <m:t>+1</m:t>
+                            <m:t>, </m:t>
                           </m:r>
-                        </m:sub>
-                      </m:sSub>
+                          <m:r>
+                            <a:rPr lang="en-US" i="1">
+                              <a:latin typeface="Cambria Math" panose="02040503050406030204" pitchFamily="18" charset="0"/>
+                              <a:ea typeface="Cambria Math" charset="0"/>
+                              <a:cs typeface="Cambria Math" charset="0"/>
+                            </a:rPr>
+                            <m:t>𝑓</m:t>
+                          </m:r>
+                        </m:e>
+                      </m:d>
                       <m:r>
                         <a:rPr lang="en-US" i="1">
-                          <a:solidFill>
-                            <a:srgbClr val="000000"/>
-                          </a:solidFill>
                           <a:latin typeface="Cambria Math" panose="02040503050406030204" pitchFamily="18" charset="0"/>
-                          <a:ea typeface="Cambria Math" panose="02040503050406030204" pitchFamily="18" charset="0"/>
+                          <a:ea typeface="Cambria Math" charset="0"/>
+                          <a:cs typeface="Cambria Math" charset="0"/>
                         </a:rPr>
                         <m:t>=</m:t>
                       </m:r>
-                      <m:sSub>
-                        <m:sSubPr>
+                      <m:d>
+                        <m:dPr>
+                          <m:begChr m:val="{"/>
+                          <m:endChr m:val=""/>
                           <m:ctrlPr>
-                            <a:rPr lang="en-US" i="1">
-                              <a:solidFill>
-                                <a:srgbClr val="000000"/>
-                              </a:solidFill>
+                            <a:rPr lang="en-US" b="0" i="1" smtClean="0">
                               <a:latin typeface="Cambria Math" panose="02040503050406030204" pitchFamily="18" charset="0"/>
-                              <a:ea typeface="Cambria Math" panose="02040503050406030204" pitchFamily="18" charset="0"/>
+                              <a:ea typeface="Cambria Math" charset="0"/>
                             </a:rPr>
                           </m:ctrlPr>
-                        </m:sSubPr>
+                        </m:dPr>
                         <m:e>
-                          <m:r>
-                            <a:rPr lang="en-US" i="1">
-                              <a:solidFill>
-                                <a:srgbClr val="000000"/>
-                              </a:solidFill>
-                              <a:latin typeface="Cambria Math" panose="02040503050406030204" pitchFamily="18" charset="0"/>
-                              <a:ea typeface="Cambria Math" panose="02040503050406030204" pitchFamily="18" charset="0"/>
-                            </a:rPr>
-                            <m:t>𝜔</m:t>
-                          </m:r>
+                          <m:eqArr>
+                            <m:eqArrPr>
+                              <m:ctrlPr>
+                                <a:rPr lang="en-US" b="0" i="1" smtClean="0">
+                                  <a:latin typeface="Cambria Math" panose="02040503050406030204" pitchFamily="18" charset="0"/>
+                                  <a:ea typeface="Cambria Math" charset="0"/>
+                                </a:rPr>
+                              </m:ctrlPr>
+                            </m:eqArrPr>
+                            <m:e>
+                              <m:r>
+                                <a:rPr lang="en-US" b="0" i="1" smtClean="0">
+                                  <a:latin typeface="Cambria Math" panose="02040503050406030204" pitchFamily="18" charset="0"/>
+                                  <a:ea typeface="Cambria Math" charset="0"/>
+                                </a:rPr>
+                                <m:t>0          |</m:t>
+                              </m:r>
+                              <m:r>
+                                <a:rPr lang="en-US" b="0" i="1" smtClean="0">
+                                  <a:latin typeface="Cambria Math" panose="02040503050406030204" pitchFamily="18" charset="0"/>
+                                  <a:ea typeface="Cambria Math" charset="0"/>
+                                </a:rPr>
+                                <m:t>𝑦</m:t>
+                              </m:r>
+                              <m:r>
+                                <a:rPr lang="en-US" b="0" i="1" smtClean="0">
+                                  <a:latin typeface="Cambria Math" panose="02040503050406030204" pitchFamily="18" charset="0"/>
+                                  <a:ea typeface="Cambria Math" charset="0"/>
+                                </a:rPr>
+                                <m:t>−</m:t>
+                              </m:r>
+                              <m:r>
+                                <a:rPr lang="en-US" b="0" i="1" smtClean="0">
+                                  <a:latin typeface="Cambria Math" panose="02040503050406030204" pitchFamily="18" charset="0"/>
+                                  <a:ea typeface="Cambria Math" charset="0"/>
+                                </a:rPr>
+                                <m:t>𝑓</m:t>
+                              </m:r>
+                              <m:r>
+                                <a:rPr lang="en-US" b="0" i="1" smtClean="0">
+                                  <a:latin typeface="Cambria Math" panose="02040503050406030204" pitchFamily="18" charset="0"/>
+                                  <a:ea typeface="Cambria Math" charset="0"/>
+                                </a:rPr>
+                                <m:t>|≤</m:t>
+                              </m:r>
+                              <m:r>
+                                <a:rPr lang="en-US" b="0" i="1" smtClean="0">
+                                  <a:latin typeface="Cambria Math" panose="02040503050406030204" pitchFamily="18" charset="0"/>
+                                  <a:ea typeface="Cambria Math" panose="02040503050406030204" pitchFamily="18" charset="0"/>
+                                </a:rPr>
+                                <m:t>𝑏</m:t>
+                              </m:r>
+                            </m:e>
+                            <m:e>
+                              <m:r>
+                                <a:rPr lang="en-US" b="0" i="1" smtClean="0">
+                                  <a:latin typeface="Cambria Math" panose="02040503050406030204" pitchFamily="18" charset="0"/>
+                                  <a:ea typeface="Cambria Math" charset="0"/>
+                                </a:rPr>
+                                <m:t> 1          </m:t>
+                              </m:r>
+                              <m:d>
+                                <m:dPr>
+                                  <m:begChr m:val="|"/>
+                                  <m:endChr m:val="|"/>
+                                  <m:ctrlPr>
+                                    <a:rPr lang="en-US" b="0" i="1" smtClean="0">
+                                      <a:latin typeface="Cambria Math" panose="02040503050406030204" pitchFamily="18" charset="0"/>
+                                      <a:ea typeface="Cambria Math" charset="0"/>
+                                    </a:rPr>
+                                  </m:ctrlPr>
+                                </m:dPr>
+                                <m:e>
+                                  <m:r>
+                                    <a:rPr lang="en-US" b="0" i="1" smtClean="0">
+                                      <a:latin typeface="Cambria Math" panose="02040503050406030204" pitchFamily="18" charset="0"/>
+                                      <a:ea typeface="Cambria Math" charset="0"/>
+                                    </a:rPr>
+                                    <m:t>𝑦</m:t>
+                                  </m:r>
+                                  <m:r>
+                                    <a:rPr lang="en-US" b="0" i="1" smtClean="0">
+                                      <a:latin typeface="Cambria Math" panose="02040503050406030204" pitchFamily="18" charset="0"/>
+                                      <a:ea typeface="Cambria Math" charset="0"/>
+                                    </a:rPr>
+                                    <m:t>−</m:t>
+                                  </m:r>
+                                  <m:r>
+                                    <a:rPr lang="en-US" b="0" i="1" smtClean="0">
+                                      <a:latin typeface="Cambria Math" panose="02040503050406030204" pitchFamily="18" charset="0"/>
+                                      <a:ea typeface="Cambria Math" charset="0"/>
+                                    </a:rPr>
+                                    <m:t>𝑓</m:t>
+                                  </m:r>
+                                </m:e>
+                              </m:d>
+                              <m:r>
+                                <a:rPr lang="en-US" b="0" i="1" smtClean="0">
+                                  <a:latin typeface="Cambria Math" panose="02040503050406030204" pitchFamily="18" charset="0"/>
+                                  <a:ea typeface="Cambria Math" charset="0"/>
+                                </a:rPr>
+                                <m:t>&gt;</m:t>
+                              </m:r>
+                              <m:r>
+                                <a:rPr lang="en-US" b="0" i="1" smtClean="0">
+                                  <a:latin typeface="Cambria Math" panose="02040503050406030204" pitchFamily="18" charset="0"/>
+                                  <a:ea typeface="Cambria Math" charset="0"/>
+                                </a:rPr>
+                                <m:t>𝑏</m:t>
+                              </m:r>
+                              <m:r>
+                                <a:rPr lang="en-US" b="0" i="1" smtClean="0">
+                                  <a:latin typeface="Cambria Math" panose="02040503050406030204" pitchFamily="18" charset="0"/>
+                                  <a:ea typeface="Cambria Math" charset="0"/>
+                                </a:rPr>
+                                <m:t> </m:t>
+                              </m:r>
+                            </m:e>
+                          </m:eqArr>
                         </m:e>
-                        <m:sub>
-                          <m:r>
-                            <a:rPr lang="en-US" i="1">
-                              <a:solidFill>
-                                <a:srgbClr val="000000"/>
-                              </a:solidFill>
-                              <a:latin typeface="Cambria Math" panose="02040503050406030204" pitchFamily="18" charset="0"/>
-                              <a:ea typeface="Cambria Math" panose="02040503050406030204" pitchFamily="18" charset="0"/>
-                            </a:rPr>
-                            <m:t>𝑗</m:t>
-                          </m:r>
-                        </m:sub>
-                      </m:sSub>
-                      <m:r>
-                        <a:rPr lang="en-US" i="1">
-                          <a:solidFill>
-                            <a:srgbClr val="000000"/>
-                          </a:solidFill>
-                          <a:latin typeface="Cambria Math" charset="0"/>
-                          <a:ea typeface="Cambria Math" charset="0"/>
-                          <a:cs typeface="Cambria Math" charset="0"/>
-                        </a:rPr>
-                        <m:t>−</m:t>
-                      </m:r>
-                      <m:r>
-                        <a:rPr lang="en-US" i="1">
-                          <a:solidFill>
-                            <a:srgbClr val="0033CC"/>
-                          </a:solidFill>
-                          <a:latin typeface="Cambria Math" panose="02040503050406030204" pitchFamily="18" charset="0"/>
-                          <a:ea typeface="Cambria Math" panose="02040503050406030204" pitchFamily="18" charset="0"/>
-                          <a:cs typeface="Cambria Math" charset="0"/>
-                        </a:rPr>
-                        <m:t>𝜂</m:t>
-                      </m:r>
-                      <m:r>
-                        <m:rPr>
-                          <m:sty m:val="p"/>
-                        </m:rPr>
-                        <a:rPr lang="en-US" i="1">
-                          <a:latin typeface="Cambria Math" panose="02040503050406030204" pitchFamily="18" charset="0"/>
-                          <a:ea typeface="Cambria Math" panose="02040503050406030204" pitchFamily="18" charset="0"/>
-                          <a:cs typeface="Cambria Math" charset="0"/>
-                        </a:rPr>
-                        <m:t>∇</m:t>
-                      </m:r>
-                      <m:r>
-                        <a:rPr lang="en-US" i="1">
-                          <a:latin typeface="Cambria Math" panose="02040503050406030204" pitchFamily="18" charset="0"/>
-                          <a:ea typeface="Cambria Math" panose="02040503050406030204" pitchFamily="18" charset="0"/>
-                          <a:cs typeface="Cambria Math" charset="0"/>
-                        </a:rPr>
-                        <m:t>𝑅</m:t>
-                      </m:r>
+                      </m:d>
                     </m:oMath>
                   </m:oMathPara>
                 </a14:m>
@@ -10038,10 +10224,10 @@
         <mc:Fallback xmlns="">
           <p:sp>
             <p:nvSpPr>
-              <p:cNvPr id="2" name="Content Placeholder 1">
+              <p:cNvPr id="4" name="Content Placeholder 3">
                 <a:extLst>
                   <a:ext uri="{FF2B5EF4-FFF2-40B4-BE49-F238E27FC236}">
-                    <a16:creationId xmlns:a16="http://schemas.microsoft.com/office/drawing/2014/main" id="{6907674D-04C0-896E-ECB0-08F4A9BA3844}"/>
+                    <a16:creationId xmlns:a16="http://schemas.microsoft.com/office/drawing/2014/main" id="{51DC6163-A954-DD59-6EC8-A66A6CED9A85}"/>
                   </a:ext>
                 </a:extLst>
               </p:cNvPr>
@@ -10053,10 +10239,14 @@
               </p:nvPr>
             </p:nvSpPr>
             <p:spPr>
+              <a:xfrm>
+                <a:off x="711200" y="1123950"/>
+                <a:ext cx="7747000" cy="4819650"/>
+              </a:xfrm>
               <a:blipFill>
-                <a:blip r:embed="rId3"/>
+                <a:blip r:embed="rId2"/>
                 <a:stretch>
-                  <a:fillRect l="-1309" t="-1842" r="-1964" b="-3158"/>
+                  <a:fillRect l="-1309" t="-1050" b="-65879"/>
                 </a:stretch>
               </a:blipFill>
             </p:spPr>
@@ -10080,7 +10270,7 @@
           <p:cNvPr id="3" name="Title 2">
             <a:extLst>
               <a:ext uri="{FF2B5EF4-FFF2-40B4-BE49-F238E27FC236}">
-                <a16:creationId xmlns:a16="http://schemas.microsoft.com/office/drawing/2014/main" id="{65997FEB-454C-5C8C-3731-F19D54CE6986}"/>
+                <a16:creationId xmlns:a16="http://schemas.microsoft.com/office/drawing/2014/main" id="{B7724020-1E2E-A9CD-0218-AB93D86BC677}"/>
               </a:ext>
             </a:extLst>
           </p:cNvPr>
@@ -10098,7 +10288,7 @@
           <a:p>
             <a:r>
               <a:rPr lang="en-US" dirty="0"/>
-              <a:t>Empirical Risk Minimization (1)</a:t>
+              <a:t>Common Loss Functions (1)</a:t>
             </a:r>
           </a:p>
         </p:txBody>
@@ -10106,251 +10296,13 @@
     </p:spTree>
     <p:extLst>
       <p:ext uri="{BB962C8B-B14F-4D97-AF65-F5344CB8AC3E}">
-        <p14:creationId xmlns:p14="http://schemas.microsoft.com/office/powerpoint/2010/main" val="1849660238"/>
+        <p14:creationId xmlns:p14="http://schemas.microsoft.com/office/powerpoint/2010/main" val="3100751115"/>
       </p:ext>
     </p:extLst>
   </p:cSld>
   <p:clrMapOvr>
     <a:masterClrMapping/>
   </p:clrMapOvr>
-  <p:timing>
-    <p:tnLst>
-      <p:par>
-        <p:cTn id="1" dur="indefinite" restart="never" nodeType="tmRoot">
-          <p:childTnLst>
-            <p:seq concurrent="1" nextAc="seek">
-              <p:cTn id="2" dur="indefinite" nodeType="mainSeq">
-                <p:childTnLst>
-                  <p:par>
-                    <p:cTn id="3" fill="hold">
-                      <p:stCondLst>
-                        <p:cond delay="indefinite"/>
-                      </p:stCondLst>
-                      <p:childTnLst>
-                        <p:par>
-                          <p:cTn id="4" fill="hold">
-                            <p:stCondLst>
-                              <p:cond delay="0"/>
-                            </p:stCondLst>
-                            <p:childTnLst>
-                              <p:par>
-                                <p:cTn id="5" presetID="10" presetClass="entr" presetSubtype="0" fill="hold" nodeType="clickEffect">
-                                  <p:stCondLst>
-                                    <p:cond delay="0"/>
-                                  </p:stCondLst>
-                                  <p:childTnLst>
-                                    <p:set>
-                                      <p:cBhvr>
-                                        <p:cTn id="6" dur="1" fill="hold">
-                                          <p:stCondLst>
-                                            <p:cond delay="0"/>
-                                          </p:stCondLst>
-                                        </p:cTn>
-                                        <p:tgtEl>
-                                          <p:spTgt spid="2">
-                                            <p:txEl>
-                                              <p:pRg st="2" end="2"/>
-                                            </p:txEl>
-                                          </p:spTgt>
-                                        </p:tgtEl>
-                                        <p:attrNameLst>
-                                          <p:attrName>style.visibility</p:attrName>
-                                        </p:attrNameLst>
-                                      </p:cBhvr>
-                                      <p:to>
-                                        <p:strVal val="visible"/>
-                                      </p:to>
-                                    </p:set>
-                                    <p:animEffect transition="in" filter="fade">
-                                      <p:cBhvr>
-                                        <p:cTn id="7" dur="500"/>
-                                        <p:tgtEl>
-                                          <p:spTgt spid="2">
-                                            <p:txEl>
-                                              <p:pRg st="2" end="2"/>
-                                            </p:txEl>
-                                          </p:spTgt>
-                                        </p:tgtEl>
-                                      </p:cBhvr>
-                                    </p:animEffect>
-                                  </p:childTnLst>
-                                </p:cTn>
-                              </p:par>
-                              <p:par>
-                                <p:cTn id="8" presetID="10" presetClass="entr" presetSubtype="0" fill="hold" nodeType="withEffect">
-                                  <p:stCondLst>
-                                    <p:cond delay="0"/>
-                                  </p:stCondLst>
-                                  <p:childTnLst>
-                                    <p:set>
-                                      <p:cBhvr>
-                                        <p:cTn id="9" dur="1" fill="hold">
-                                          <p:stCondLst>
-                                            <p:cond delay="0"/>
-                                          </p:stCondLst>
-                                        </p:cTn>
-                                        <p:tgtEl>
-                                          <p:spTgt spid="2">
-                                            <p:txEl>
-                                              <p:pRg st="3" end="3"/>
-                                            </p:txEl>
-                                          </p:spTgt>
-                                        </p:tgtEl>
-                                        <p:attrNameLst>
-                                          <p:attrName>style.visibility</p:attrName>
-                                        </p:attrNameLst>
-                                      </p:cBhvr>
-                                      <p:to>
-                                        <p:strVal val="visible"/>
-                                      </p:to>
-                                    </p:set>
-                                    <p:animEffect transition="in" filter="fade">
-                                      <p:cBhvr>
-                                        <p:cTn id="10" dur="500"/>
-                                        <p:tgtEl>
-                                          <p:spTgt spid="2">
-                                            <p:txEl>
-                                              <p:pRg st="3" end="3"/>
-                                            </p:txEl>
-                                          </p:spTgt>
-                                        </p:tgtEl>
-                                      </p:cBhvr>
-                                    </p:animEffect>
-                                  </p:childTnLst>
-                                </p:cTn>
-                              </p:par>
-                            </p:childTnLst>
-                          </p:cTn>
-                        </p:par>
-                      </p:childTnLst>
-                    </p:cTn>
-                  </p:par>
-                  <p:par>
-                    <p:cTn id="11" fill="hold">
-                      <p:stCondLst>
-                        <p:cond delay="indefinite"/>
-                      </p:stCondLst>
-                      <p:childTnLst>
-                        <p:par>
-                          <p:cTn id="12" fill="hold">
-                            <p:stCondLst>
-                              <p:cond delay="0"/>
-                            </p:stCondLst>
-                            <p:childTnLst>
-                              <p:par>
-                                <p:cTn id="13" presetID="10" presetClass="entr" presetSubtype="0" fill="hold" nodeType="clickEffect">
-                                  <p:stCondLst>
-                                    <p:cond delay="0"/>
-                                  </p:stCondLst>
-                                  <p:childTnLst>
-                                    <p:set>
-                                      <p:cBhvr>
-                                        <p:cTn id="14" dur="1" fill="hold">
-                                          <p:stCondLst>
-                                            <p:cond delay="0"/>
-                                          </p:stCondLst>
-                                        </p:cTn>
-                                        <p:tgtEl>
-                                          <p:spTgt spid="2">
-                                            <p:txEl>
-                                              <p:pRg st="4" end="4"/>
-                                            </p:txEl>
-                                          </p:spTgt>
-                                        </p:tgtEl>
-                                        <p:attrNameLst>
-                                          <p:attrName>style.visibility</p:attrName>
-                                        </p:attrNameLst>
-                                      </p:cBhvr>
-                                      <p:to>
-                                        <p:strVal val="visible"/>
-                                      </p:to>
-                                    </p:set>
-                                    <p:animEffect transition="in" filter="fade">
-                                      <p:cBhvr>
-                                        <p:cTn id="15" dur="500"/>
-                                        <p:tgtEl>
-                                          <p:spTgt spid="2">
-                                            <p:txEl>
-                                              <p:pRg st="4" end="4"/>
-                                            </p:txEl>
-                                          </p:spTgt>
-                                        </p:tgtEl>
-                                      </p:cBhvr>
-                                    </p:animEffect>
-                                  </p:childTnLst>
-                                </p:cTn>
-                              </p:par>
-                              <p:par>
-                                <p:cTn id="16" presetID="10" presetClass="entr" presetSubtype="0" fill="hold" nodeType="withEffect">
-                                  <p:stCondLst>
-                                    <p:cond delay="0"/>
-                                  </p:stCondLst>
-                                  <p:childTnLst>
-                                    <p:set>
-                                      <p:cBhvr>
-                                        <p:cTn id="17" dur="1" fill="hold">
-                                          <p:stCondLst>
-                                            <p:cond delay="0"/>
-                                          </p:stCondLst>
-                                        </p:cTn>
-                                        <p:tgtEl>
-                                          <p:spTgt spid="2">
-                                            <p:txEl>
-                                              <p:pRg st="5" end="5"/>
-                                            </p:txEl>
-                                          </p:spTgt>
-                                        </p:tgtEl>
-                                        <p:attrNameLst>
-                                          <p:attrName>style.visibility</p:attrName>
-                                        </p:attrNameLst>
-                                      </p:cBhvr>
-                                      <p:to>
-                                        <p:strVal val="visible"/>
-                                      </p:to>
-                                    </p:set>
-                                    <p:animEffect transition="in" filter="fade">
-                                      <p:cBhvr>
-                                        <p:cTn id="18" dur="500"/>
-                                        <p:tgtEl>
-                                          <p:spTgt spid="2">
-                                            <p:txEl>
-                                              <p:pRg st="5" end="5"/>
-                                            </p:txEl>
-                                          </p:spTgt>
-                                        </p:tgtEl>
-                                      </p:cBhvr>
-                                    </p:animEffect>
-                                  </p:childTnLst>
-                                </p:cTn>
-                              </p:par>
-                            </p:childTnLst>
-                          </p:cTn>
-                        </p:par>
-                      </p:childTnLst>
-                    </p:cTn>
-                  </p:par>
-                </p:childTnLst>
-              </p:cTn>
-              <p:prevCondLst>
-                <p:cond evt="onPrev" delay="0">
-                  <p:tgtEl>
-                    <p:sldTgt/>
-                  </p:tgtEl>
-                </p:cond>
-              </p:prevCondLst>
-              <p:nextCondLst>
-                <p:cond evt="onNext" delay="0">
-                  <p:tgtEl>
-                    <p:sldTgt/>
-                  </p:tgtEl>
-                </p:cond>
-              </p:nextCondLst>
-            </p:seq>
-          </p:childTnLst>
-        </p:cTn>
-      </p:par>
-    </p:tnLst>
-  </p:timing>
 </p:sld>
 </file>
 
@@ -10529,10 +10481,7 @@
                       <a:pPr/>
                       <a14:m>
                         <m:oMathPara xmlns:m="http://schemas.openxmlformats.org/officeDocument/2006/math">
-                          <m:oMathParaPr>
-                            <m:jc m:val="centerGroup"/>
-                          </m:oMathParaPr>
-                          <m:oMath xmlns:m="http://schemas.openxmlformats.org/officeDocument/2006/math">
+                          <m:oMath>
                             <m:sSub>
                               <m:sSubPr>
                                 <m:ctrlPr>
@@ -10572,10 +10521,7 @@
                       <a:pPr/>
                       <a14:m>
                         <m:oMathPara xmlns:m="http://schemas.openxmlformats.org/officeDocument/2006/math">
-                          <m:oMathParaPr>
-                            <m:jc m:val="centerGroup"/>
-                          </m:oMathParaPr>
-                          <m:oMath xmlns:m="http://schemas.openxmlformats.org/officeDocument/2006/math">
+                          <m:oMath>
                             <m:sSub>
                               <m:sSubPr>
                                 <m:ctrlPr>
@@ -11662,10 +11608,7 @@
                       <a:pPr/>
                       <a14:m>
                         <m:oMathPara xmlns:m="http://schemas.openxmlformats.org/officeDocument/2006/math">
-                          <m:oMathParaPr>
-                            <m:jc m:val="centerGroup"/>
-                          </m:oMathParaPr>
-                          <m:oMath xmlns:m="http://schemas.openxmlformats.org/officeDocument/2006/math">
+                          <m:oMath>
                             <m:sSub>
                               <m:sSubPr>
                                 <m:ctrlPr>
@@ -11777,10 +11720,7 @@
                       <a:pPr/>
                       <a14:m>
                         <m:oMathPara xmlns:m="http://schemas.openxmlformats.org/officeDocument/2006/math">
-                          <m:oMathParaPr>
-                            <m:jc m:val="centerGroup"/>
-                          </m:oMathParaPr>
-                          <m:oMath xmlns:m="http://schemas.openxmlformats.org/officeDocument/2006/math">
+                          <m:oMath>
                             <m:sSub>
                               <m:sSubPr>
                                 <m:ctrlPr>
@@ -11892,10 +11832,7 @@
                       <a:pPr/>
                       <a14:m>
                         <m:oMathPara xmlns:m="http://schemas.openxmlformats.org/officeDocument/2006/math">
-                          <m:oMathParaPr>
-                            <m:jc m:val="centerGroup"/>
-                          </m:oMathParaPr>
-                          <m:oMath xmlns:m="http://schemas.openxmlformats.org/officeDocument/2006/math">
+                          <m:oMath>
                             <m:sSub>
                               <m:sSubPr>
                                 <m:ctrlPr>
@@ -12007,10 +11944,7 @@
                       <a:pPr/>
                       <a14:m>
                         <m:oMathPara xmlns:m="http://schemas.openxmlformats.org/officeDocument/2006/math">
-                          <m:oMathParaPr>
-                            <m:jc m:val="centerGroup"/>
-                          </m:oMathParaPr>
-                          <m:oMath xmlns:m="http://schemas.openxmlformats.org/officeDocument/2006/math">
+                          <m:oMath>
                             <m:sSub>
                               <m:sSubPr>
                                 <m:ctrlPr>
@@ -12455,10 +12389,7 @@
                 <a:pPr/>
                 <a14:m>
                   <m:oMathPara xmlns:m="http://schemas.openxmlformats.org/officeDocument/2006/math">
-                    <m:oMathParaPr>
-                      <m:jc m:val="centerGroup"/>
-                    </m:oMathParaPr>
-                    <m:oMath xmlns:m="http://schemas.openxmlformats.org/officeDocument/2006/math">
+                    <m:oMath>
                       <m:r>
                         <a:rPr lang="en-US" sz="2800" b="0" i="1" smtClean="0">
                           <a:latin typeface="Cambria Math" panose="02040503050406030204" pitchFamily="18" charset="0"/>
@@ -12642,10 +12573,7 @@
                 <a:pPr/>
                 <a14:m>
                   <m:oMathPara xmlns:m="http://schemas.openxmlformats.org/officeDocument/2006/math">
-                    <m:oMathParaPr>
-                      <m:jc m:val="centerGroup"/>
-                    </m:oMathParaPr>
-                    <m:oMath xmlns:m="http://schemas.openxmlformats.org/officeDocument/2006/math">
+                    <m:oMath>
                       <m:r>
                         <a:rPr lang="en-US" sz="2800" b="0" i="1" smtClean="0">
                           <a:latin typeface="Cambria Math" panose="02040503050406030204" pitchFamily="18" charset="0"/>
@@ -12786,2829 +12714,6 @@
 </file>
 
 <file path=ppt/slides/slide20.xml><?xml version="1.0" encoding="utf-8"?>
-<p:sld xmlns:a="http://schemas.openxmlformats.org/drawingml/2006/main" xmlns:r="http://schemas.openxmlformats.org/officeDocument/2006/relationships" xmlns:p="http://schemas.openxmlformats.org/presentationml/2006/main">
-  <p:cSld>
-    <p:spTree>
-      <p:nvGrpSpPr>
-        <p:cNvPr id="1" name="">
-          <a:extLst>
-            <a:ext uri="{FF2B5EF4-FFF2-40B4-BE49-F238E27FC236}">
-              <a16:creationId xmlns:a16="http://schemas.microsoft.com/office/drawing/2014/main" id="{01763A2D-5754-2FAF-C4D1-4F4BC643010C}"/>
-            </a:ext>
-          </a:extLst>
-        </p:cNvPr>
-        <p:cNvGrpSpPr/>
-        <p:nvPr/>
-      </p:nvGrpSpPr>
-      <p:grpSpPr>
-        <a:xfrm>
-          <a:off x="0" y="0"/>
-          <a:ext cx="0" cy="0"/>
-          <a:chOff x="0" y="0"/>
-          <a:chExt cx="0" cy="0"/>
-        </a:xfrm>
-      </p:grpSpPr>
-      <p:pic>
-        <p:nvPicPr>
-          <p:cNvPr id="4" name="Picture 3" descr="A map of a mountain&#10;&#10;Description automatically generated">
-            <a:extLst>
-              <a:ext uri="{FF2B5EF4-FFF2-40B4-BE49-F238E27FC236}">
-                <a16:creationId xmlns:a16="http://schemas.microsoft.com/office/drawing/2014/main" id="{9E54FDF4-4C20-75CD-A55C-2128FB104199}"/>
-              </a:ext>
-            </a:extLst>
-          </p:cNvPr>
-          <p:cNvPicPr>
-            <a:picLocks noChangeAspect="1"/>
-          </p:cNvPicPr>
-          <p:nvPr/>
-        </p:nvPicPr>
-        <p:blipFill>
-          <a:blip r:embed="rId2"/>
-          <a:stretch>
-            <a:fillRect/>
-          </a:stretch>
-        </p:blipFill>
-        <p:spPr>
-          <a:xfrm>
-            <a:off x="5297518" y="2514600"/>
-            <a:ext cx="3846482" cy="3922200"/>
-          </a:xfrm>
-          <a:prstGeom prst="rect">
-            <a:avLst/>
-          </a:prstGeom>
-        </p:spPr>
-      </p:pic>
-      <mc:AlternateContent xmlns:mc="http://schemas.openxmlformats.org/markup-compatibility/2006" xmlns:a14="http://schemas.microsoft.com/office/drawing/2010/main">
-        <mc:Choice Requires="a14">
-          <p:sp>
-            <p:nvSpPr>
-              <p:cNvPr id="2" name="Content Placeholder 1">
-                <a:extLst>
-                  <a:ext uri="{FF2B5EF4-FFF2-40B4-BE49-F238E27FC236}">
-                    <a16:creationId xmlns:a16="http://schemas.microsoft.com/office/drawing/2014/main" id="{715839D9-08FB-02BE-91C0-05B1224A6521}"/>
-                  </a:ext>
-                </a:extLst>
-              </p:cNvPr>
-              <p:cNvSpPr>
-                <a:spLocks noGrp="1"/>
-              </p:cNvSpPr>
-              <p:nvPr>
-                <p:ph sz="half" idx="1"/>
-              </p:nvPr>
-            </p:nvSpPr>
-            <p:spPr/>
-            <p:txBody>
-              <a:bodyPr/>
-              <a:lstStyle/>
-              <a:p>
-                <a:pPr>
-                  <a:lnSpc>
-                    <a:spcPct val="90000"/>
-                  </a:lnSpc>
-                  <a:buFont typeface="Marlett" pitchFamily="26" charset="0"/>
-                  <a:buNone/>
-                </a:pPr>
-                <a:r>
-                  <a:rPr lang="en-US" dirty="0"/>
-                  <a:t>Why does </a:t>
-                </a:r>
-                <a:r>
-                  <a:rPr lang="en-US" dirty="0">
-                    <a:solidFill>
-                      <a:srgbClr val="000000"/>
-                    </a:solidFill>
-                  </a:rPr>
-                  <a:t>this (1</a:t>
-                </a:r>
-                <a:r>
-                  <a:rPr lang="en-US" baseline="30000" dirty="0">
-                    <a:solidFill>
-                      <a:srgbClr val="000000"/>
-                    </a:solidFill>
-                  </a:rPr>
-                  <a:t>st</a:t>
-                </a:r>
-                <a:r>
-                  <a:rPr lang="en-US" dirty="0">
-                    <a:solidFill>
-                      <a:srgbClr val="000000"/>
-                    </a:solidFill>
-                  </a:rPr>
-                  <a:t>-order) algorithm </a:t>
-                </a:r>
-              </a:p>
-              <a:p>
-                <a:pPr>
-                  <a:lnSpc>
-                    <a:spcPct val="90000"/>
-                  </a:lnSpc>
-                  <a:buFont typeface="Marlett" pitchFamily="26" charset="0"/>
-                  <a:buNone/>
-                </a:pPr>
-                <a14:m>
-                  <m:oMathPara xmlns:m="http://schemas.openxmlformats.org/officeDocument/2006/math">
-                    <m:oMathParaPr>
-                      <m:jc m:val="centerGroup"/>
-                    </m:oMathParaPr>
-                    <m:oMath xmlns:m="http://schemas.openxmlformats.org/officeDocument/2006/math">
-                      <m:sSub>
-                        <m:sSubPr>
-                          <m:ctrlPr>
-                            <a:rPr lang="en-US" i="1">
-                              <a:solidFill>
-                                <a:srgbClr val="000000"/>
-                              </a:solidFill>
-                              <a:latin typeface="Cambria Math" panose="02040503050406030204" pitchFamily="18" charset="0"/>
-                              <a:ea typeface="Cambria Math" panose="02040503050406030204" pitchFamily="18" charset="0"/>
-                            </a:rPr>
-                          </m:ctrlPr>
-                        </m:sSubPr>
-                        <m:e>
-                          <m:r>
-                            <a:rPr lang="en-US" i="1">
-                              <a:solidFill>
-                                <a:srgbClr val="000000"/>
-                              </a:solidFill>
-                              <a:latin typeface="Cambria Math" panose="02040503050406030204" pitchFamily="18" charset="0"/>
-                              <a:ea typeface="Cambria Math" panose="02040503050406030204" pitchFamily="18" charset="0"/>
-                            </a:rPr>
-                            <m:t>𝜔</m:t>
-                          </m:r>
-                        </m:e>
-                        <m:sub>
-                          <m:r>
-                            <a:rPr lang="en-US" i="1">
-                              <a:solidFill>
-                                <a:srgbClr val="000000"/>
-                              </a:solidFill>
-                              <a:latin typeface="Cambria Math" panose="02040503050406030204" pitchFamily="18" charset="0"/>
-                              <a:ea typeface="Cambria Math" panose="02040503050406030204" pitchFamily="18" charset="0"/>
-                            </a:rPr>
-                            <m:t>𝑗</m:t>
-                          </m:r>
-                          <m:r>
-                            <a:rPr lang="en-US" i="1">
-                              <a:solidFill>
-                                <a:srgbClr val="000000"/>
-                              </a:solidFill>
-                              <a:latin typeface="Cambria Math" panose="02040503050406030204" pitchFamily="18" charset="0"/>
-                              <a:ea typeface="Cambria Math" panose="02040503050406030204" pitchFamily="18" charset="0"/>
-                            </a:rPr>
-                            <m:t>+1</m:t>
-                          </m:r>
-                        </m:sub>
-                      </m:sSub>
-                      <m:r>
-                        <a:rPr lang="en-US" i="1">
-                          <a:solidFill>
-                            <a:srgbClr val="000000"/>
-                          </a:solidFill>
-                          <a:latin typeface="Cambria Math" panose="02040503050406030204" pitchFamily="18" charset="0"/>
-                          <a:ea typeface="Cambria Math" panose="02040503050406030204" pitchFamily="18" charset="0"/>
-                        </a:rPr>
-                        <m:t>=</m:t>
-                      </m:r>
-                      <m:sSub>
-                        <m:sSubPr>
-                          <m:ctrlPr>
-                            <a:rPr lang="en-US" i="1">
-                              <a:solidFill>
-                                <a:srgbClr val="000000"/>
-                              </a:solidFill>
-                              <a:latin typeface="Cambria Math" panose="02040503050406030204" pitchFamily="18" charset="0"/>
-                              <a:ea typeface="Cambria Math" panose="02040503050406030204" pitchFamily="18" charset="0"/>
-                            </a:rPr>
-                          </m:ctrlPr>
-                        </m:sSubPr>
-                        <m:e>
-                          <m:r>
-                            <a:rPr lang="en-US" i="1">
-                              <a:solidFill>
-                                <a:srgbClr val="000000"/>
-                              </a:solidFill>
-                              <a:latin typeface="Cambria Math" panose="02040503050406030204" pitchFamily="18" charset="0"/>
-                              <a:ea typeface="Cambria Math" panose="02040503050406030204" pitchFamily="18" charset="0"/>
-                            </a:rPr>
-                            <m:t>𝜔</m:t>
-                          </m:r>
-                        </m:e>
-                        <m:sub>
-                          <m:r>
-                            <a:rPr lang="en-US" i="1">
-                              <a:solidFill>
-                                <a:srgbClr val="000000"/>
-                              </a:solidFill>
-                              <a:latin typeface="Cambria Math" panose="02040503050406030204" pitchFamily="18" charset="0"/>
-                              <a:ea typeface="Cambria Math" panose="02040503050406030204" pitchFamily="18" charset="0"/>
-                            </a:rPr>
-                            <m:t>𝑗</m:t>
-                          </m:r>
-                        </m:sub>
-                      </m:sSub>
-                      <m:r>
-                        <a:rPr lang="en-US" i="1">
-                          <a:solidFill>
-                            <a:srgbClr val="000000"/>
-                          </a:solidFill>
-                          <a:latin typeface="Cambria Math" charset="0"/>
-                          <a:ea typeface="Cambria Math" charset="0"/>
-                          <a:cs typeface="Cambria Math" charset="0"/>
-                        </a:rPr>
-                        <m:t>−</m:t>
-                      </m:r>
-                      <m:r>
-                        <a:rPr lang="en-US" i="1">
-                          <a:solidFill>
-                            <a:srgbClr val="0033CC"/>
-                          </a:solidFill>
-                          <a:latin typeface="Cambria Math" panose="02040503050406030204" pitchFamily="18" charset="0"/>
-                          <a:ea typeface="Cambria Math" panose="02040503050406030204" pitchFamily="18" charset="0"/>
-                          <a:cs typeface="Cambria Math" charset="0"/>
-                        </a:rPr>
-                        <m:t>𝜂</m:t>
-                      </m:r>
-                      <m:r>
-                        <m:rPr>
-                          <m:sty m:val="p"/>
-                        </m:rPr>
-                        <a:rPr lang="en-US" i="1">
-                          <a:latin typeface="Cambria Math" panose="02040503050406030204" pitchFamily="18" charset="0"/>
-                          <a:ea typeface="Cambria Math" panose="02040503050406030204" pitchFamily="18" charset="0"/>
-                          <a:cs typeface="Cambria Math" charset="0"/>
-                        </a:rPr>
-                        <m:t>∇</m:t>
-                      </m:r>
-                      <m:r>
-                        <a:rPr lang="en-US" i="1">
-                          <a:latin typeface="Cambria Math" panose="02040503050406030204" pitchFamily="18" charset="0"/>
-                          <a:ea typeface="Cambria Math" panose="02040503050406030204" pitchFamily="18" charset="0"/>
-                          <a:cs typeface="Cambria Math" charset="0"/>
-                        </a:rPr>
-                        <m:t>𝑅</m:t>
-                      </m:r>
-                    </m:oMath>
-                  </m:oMathPara>
-                </a14:m>
-                <a:endParaRPr lang="en-US" dirty="0">
-                  <a:ea typeface="Cambria Math" panose="02040503050406030204" pitchFamily="18" charset="0"/>
-                  <a:cs typeface="Cambria Math" charset="0"/>
-                </a:endParaRPr>
-              </a:p>
-              <a:p>
-                <a:pPr>
-                  <a:lnSpc>
-                    <a:spcPct val="90000"/>
-                  </a:lnSpc>
-                  <a:buFont typeface="Marlett" pitchFamily="26" charset="0"/>
-                  <a:buNone/>
-                </a:pPr>
-                <a:r>
-                  <a:rPr lang="en-US" dirty="0">
-                    <a:solidFill>
-                      <a:srgbClr val="000000"/>
-                    </a:solidFill>
-                  </a:rPr>
-                  <a:t>work? </a:t>
-                </a:r>
-              </a:p>
-              <a:p>
-                <a:pPr>
-                  <a:lnSpc>
-                    <a:spcPct val="90000"/>
-                  </a:lnSpc>
-                  <a:buFont typeface="Marlett" pitchFamily="26" charset="0"/>
-                  <a:buNone/>
-                </a:pPr>
-                <a:r>
-                  <a:rPr lang="en-US" dirty="0">
-                    <a:solidFill>
-                      <a:srgbClr val="000000"/>
-                    </a:solidFill>
-                  </a:rPr>
-                  <a:t>Consider</a:t>
-                </a:r>
-              </a:p>
-              <a:p>
-                <a:pPr>
-                  <a:lnSpc>
-                    <a:spcPct val="90000"/>
-                  </a:lnSpc>
-                  <a:buFont typeface="Marlett" pitchFamily="26" charset="0"/>
-                  <a:buNone/>
-                </a:pPr>
-                <a14:m>
-                  <m:oMathPara xmlns:m="http://schemas.openxmlformats.org/officeDocument/2006/math">
-                    <m:oMathParaPr>
-                      <m:jc m:val="left"/>
-                    </m:oMathParaPr>
-                    <m:oMath xmlns:m="http://schemas.openxmlformats.org/officeDocument/2006/math">
-                      <m:r>
-                        <a:rPr lang="en-US" i="1">
-                          <a:latin typeface="Cambria Math" panose="02040503050406030204" pitchFamily="18" charset="0"/>
-                        </a:rPr>
-                        <m:t>𝑅</m:t>
-                      </m:r>
-                      <m:d>
-                        <m:dPr>
-                          <m:ctrlPr>
-                            <a:rPr lang="en-US" i="1">
-                              <a:latin typeface="Cambria Math" panose="02040503050406030204" pitchFamily="18" charset="0"/>
-                            </a:rPr>
-                          </m:ctrlPr>
-                        </m:dPr>
-                        <m:e>
-                          <m:sSub>
-                            <m:sSubPr>
-                              <m:ctrlPr>
-                                <a:rPr lang="en-US" i="1">
-                                  <a:solidFill>
-                                    <a:srgbClr val="000000"/>
-                                  </a:solidFill>
-                                  <a:latin typeface="Cambria Math" panose="02040503050406030204" pitchFamily="18" charset="0"/>
-                                  <a:ea typeface="Cambria Math" panose="02040503050406030204" pitchFamily="18" charset="0"/>
-                                </a:rPr>
-                              </m:ctrlPr>
-                            </m:sSubPr>
-                            <m:e>
-                              <m:r>
-                                <a:rPr lang="en-US" i="1">
-                                  <a:solidFill>
-                                    <a:srgbClr val="000000"/>
-                                  </a:solidFill>
-                                  <a:latin typeface="Cambria Math" panose="02040503050406030204" pitchFamily="18" charset="0"/>
-                                  <a:ea typeface="Cambria Math" panose="02040503050406030204" pitchFamily="18" charset="0"/>
-                                </a:rPr>
-                                <m:t>𝜔</m:t>
-                              </m:r>
-                            </m:e>
-                            <m:sub>
-                              <m:r>
-                                <a:rPr lang="en-US" i="1">
-                                  <a:solidFill>
-                                    <a:srgbClr val="000000"/>
-                                  </a:solidFill>
-                                  <a:latin typeface="Cambria Math" panose="02040503050406030204" pitchFamily="18" charset="0"/>
-                                  <a:ea typeface="Cambria Math" panose="02040503050406030204" pitchFamily="18" charset="0"/>
-                                </a:rPr>
-                                <m:t>𝑗</m:t>
-                              </m:r>
-                              <m:r>
-                                <a:rPr lang="en-US" i="1">
-                                  <a:solidFill>
-                                    <a:srgbClr val="000000"/>
-                                  </a:solidFill>
-                                  <a:latin typeface="Cambria Math" panose="02040503050406030204" pitchFamily="18" charset="0"/>
-                                  <a:ea typeface="Cambria Math" panose="02040503050406030204" pitchFamily="18" charset="0"/>
-                                </a:rPr>
-                                <m:t>+1</m:t>
-                              </m:r>
-                            </m:sub>
-                          </m:sSub>
-                        </m:e>
-                      </m:d>
-                      <m:r>
-                        <a:rPr lang="en-US">
-                          <a:solidFill>
-                            <a:srgbClr val="000000"/>
-                          </a:solidFill>
-                          <a:latin typeface="Cambria Math" panose="02040503050406030204" pitchFamily="18" charset="0"/>
-                          <a:ea typeface="Cambria Math" panose="02040503050406030204" pitchFamily="18" charset="0"/>
-                        </a:rPr>
-                        <m:t>=</m:t>
-                      </m:r>
-                      <m:r>
-                        <a:rPr lang="en-US" i="1">
-                          <a:latin typeface="Cambria Math" panose="02040503050406030204" pitchFamily="18" charset="0"/>
-                        </a:rPr>
-                        <m:t>𝑅</m:t>
-                      </m:r>
-                      <m:d>
-                        <m:dPr>
-                          <m:ctrlPr>
-                            <a:rPr lang="en-US" i="1">
-                              <a:latin typeface="Cambria Math" panose="02040503050406030204" pitchFamily="18" charset="0"/>
-                            </a:rPr>
-                          </m:ctrlPr>
-                        </m:dPr>
-                        <m:e>
-                          <m:sSub>
-                            <m:sSubPr>
-                              <m:ctrlPr>
-                                <a:rPr lang="en-US" i="1">
-                                  <a:solidFill>
-                                    <a:srgbClr val="000000"/>
-                                  </a:solidFill>
-                                  <a:latin typeface="Cambria Math" panose="02040503050406030204" pitchFamily="18" charset="0"/>
-                                  <a:ea typeface="Cambria Math" panose="02040503050406030204" pitchFamily="18" charset="0"/>
-                                </a:rPr>
-                              </m:ctrlPr>
-                            </m:sSubPr>
-                            <m:e>
-                              <m:r>
-                                <a:rPr lang="en-US" i="1">
-                                  <a:solidFill>
-                                    <a:srgbClr val="000000"/>
-                                  </a:solidFill>
-                                  <a:latin typeface="Cambria Math" panose="02040503050406030204" pitchFamily="18" charset="0"/>
-                                  <a:ea typeface="Cambria Math" panose="02040503050406030204" pitchFamily="18" charset="0"/>
-                                </a:rPr>
-                                <m:t>𝜔</m:t>
-                              </m:r>
-                            </m:e>
-                            <m:sub>
-                              <m:r>
-                                <a:rPr lang="en-US" i="1">
-                                  <a:solidFill>
-                                    <a:srgbClr val="000000"/>
-                                  </a:solidFill>
-                                  <a:latin typeface="Cambria Math" panose="02040503050406030204" pitchFamily="18" charset="0"/>
-                                  <a:ea typeface="Cambria Math" panose="02040503050406030204" pitchFamily="18" charset="0"/>
-                                </a:rPr>
-                                <m:t>𝑗</m:t>
-                              </m:r>
-                            </m:sub>
-                          </m:sSub>
-                          <m:r>
-                            <a:rPr lang="en-US" i="1">
-                              <a:solidFill>
-                                <a:srgbClr val="000000"/>
-                              </a:solidFill>
-                              <a:latin typeface="Cambria Math" charset="0"/>
-                              <a:ea typeface="Cambria Math" charset="0"/>
-                              <a:cs typeface="Cambria Math" charset="0"/>
-                            </a:rPr>
-                            <m:t>−</m:t>
-                          </m:r>
-                          <m:r>
-                            <a:rPr lang="en-US" i="1">
-                              <a:solidFill>
-                                <a:srgbClr val="0033CC"/>
-                              </a:solidFill>
-                              <a:latin typeface="Cambria Math" panose="02040503050406030204" pitchFamily="18" charset="0"/>
-                              <a:ea typeface="Cambria Math" panose="02040503050406030204" pitchFamily="18" charset="0"/>
-                              <a:cs typeface="Cambria Math" charset="0"/>
-                            </a:rPr>
-                            <m:t>𝜂</m:t>
-                          </m:r>
-                          <m:r>
-                            <m:rPr>
-                              <m:sty m:val="p"/>
-                            </m:rPr>
-                            <a:rPr lang="en-US" i="1">
-                              <a:latin typeface="Cambria Math" panose="02040503050406030204" pitchFamily="18" charset="0"/>
-                              <a:ea typeface="Cambria Math" panose="02040503050406030204" pitchFamily="18" charset="0"/>
-                              <a:cs typeface="Cambria Math" charset="0"/>
-                            </a:rPr>
-                            <m:t>∇</m:t>
-                          </m:r>
-                          <m:r>
-                            <a:rPr lang="en-US" i="1">
-                              <a:latin typeface="Cambria Math" panose="02040503050406030204" pitchFamily="18" charset="0"/>
-                              <a:ea typeface="Cambria Math" panose="02040503050406030204" pitchFamily="18" charset="0"/>
-                              <a:cs typeface="Cambria Math" charset="0"/>
-                            </a:rPr>
-                            <m:t>𝑅</m:t>
-                          </m:r>
-                          <m:r>
-                            <m:rPr>
-                              <m:nor/>
-                            </m:rPr>
-                            <a:rPr lang="en-US" dirty="0">
-                              <a:solidFill>
-                                <a:srgbClr val="000000"/>
-                              </a:solidFill>
-                            </a:rPr>
-                            <m:t> </m:t>
-                          </m:r>
-                        </m:e>
-                      </m:d>
-                    </m:oMath>
-                  </m:oMathPara>
-                </a14:m>
-                <a:endParaRPr lang="en-US" i="1" dirty="0">
-                  <a:solidFill>
-                    <a:srgbClr val="000000"/>
-                  </a:solidFill>
-                  <a:latin typeface="Cambria Math" panose="02040503050406030204" pitchFamily="18" charset="0"/>
-                </a:endParaRPr>
-              </a:p>
-              <a:p>
-                <a:pPr>
-                  <a:lnSpc>
-                    <a:spcPct val="90000"/>
-                  </a:lnSpc>
-                  <a:buFont typeface="Marlett" pitchFamily="26" charset="0"/>
-                  <a:buNone/>
-                </a:pPr>
-                <a:r>
-                  <a:rPr lang="en-US" dirty="0">
-                    <a:solidFill>
-                      <a:srgbClr val="000000"/>
-                    </a:solidFill>
-                    <a:ea typeface="Cambria Math" panose="02040503050406030204" pitchFamily="18" charset="0"/>
-                  </a:rPr>
-                  <a:t>  		 </a:t>
-                </a:r>
-                <a14:m>
-                  <m:oMath xmlns:m="http://schemas.openxmlformats.org/officeDocument/2006/math">
-                    <m:r>
-                      <a:rPr lang="en-US" i="1">
-                        <a:solidFill>
-                          <a:srgbClr val="000000"/>
-                        </a:solidFill>
-                        <a:latin typeface="Cambria Math" panose="02040503050406030204" pitchFamily="18" charset="0"/>
-                        <a:ea typeface="Cambria Math" panose="02040503050406030204" pitchFamily="18" charset="0"/>
-                      </a:rPr>
-                      <m:t>=</m:t>
-                    </m:r>
-                    <m:r>
-                      <a:rPr lang="en-US" i="1">
-                        <a:solidFill>
-                          <a:srgbClr val="000000"/>
-                        </a:solidFill>
-                        <a:latin typeface="Cambria Math" panose="02040503050406030204" pitchFamily="18" charset="0"/>
-                        <a:ea typeface="Cambria Math" panose="02040503050406030204" pitchFamily="18" charset="0"/>
-                      </a:rPr>
-                      <m:t>𝑅</m:t>
-                    </m:r>
-                    <m:d>
-                      <m:dPr>
-                        <m:ctrlPr>
-                          <a:rPr lang="en-US" i="1">
-                            <a:solidFill>
-                              <a:srgbClr val="000000"/>
-                            </a:solidFill>
-                            <a:latin typeface="Cambria Math" panose="02040503050406030204" pitchFamily="18" charset="0"/>
-                            <a:ea typeface="Cambria Math" panose="02040503050406030204" pitchFamily="18" charset="0"/>
-                          </a:rPr>
-                        </m:ctrlPr>
-                      </m:dPr>
-                      <m:e>
-                        <m:sSub>
-                          <m:sSubPr>
-                            <m:ctrlPr>
-                              <a:rPr lang="en-US" i="1">
-                                <a:solidFill>
-                                  <a:srgbClr val="000000"/>
-                                </a:solidFill>
-                                <a:latin typeface="Cambria Math" panose="02040503050406030204" pitchFamily="18" charset="0"/>
-                                <a:ea typeface="Cambria Math" panose="02040503050406030204" pitchFamily="18" charset="0"/>
-                              </a:rPr>
-                            </m:ctrlPr>
-                          </m:sSubPr>
-                          <m:e>
-                            <m:r>
-                              <a:rPr lang="en-US" i="1">
-                                <a:solidFill>
-                                  <a:srgbClr val="000000"/>
-                                </a:solidFill>
-                                <a:latin typeface="Cambria Math" panose="02040503050406030204" pitchFamily="18" charset="0"/>
-                                <a:ea typeface="Cambria Math" panose="02040503050406030204" pitchFamily="18" charset="0"/>
-                              </a:rPr>
-                              <m:t>𝜔</m:t>
-                            </m:r>
-                          </m:e>
-                          <m:sub>
-                            <m:r>
-                              <a:rPr lang="en-US" i="1">
-                                <a:solidFill>
-                                  <a:srgbClr val="000000"/>
-                                </a:solidFill>
-                                <a:latin typeface="Cambria Math" panose="02040503050406030204" pitchFamily="18" charset="0"/>
-                                <a:ea typeface="Cambria Math" panose="02040503050406030204" pitchFamily="18" charset="0"/>
-                              </a:rPr>
-                              <m:t>𝑗</m:t>
-                            </m:r>
-                          </m:sub>
-                        </m:sSub>
-                      </m:e>
-                    </m:d>
-                    <m:r>
-                      <a:rPr lang="en-US" i="1">
-                        <a:solidFill>
-                          <a:srgbClr val="000000"/>
-                        </a:solidFill>
-                        <a:latin typeface="Cambria Math" panose="02040503050406030204" pitchFamily="18" charset="0"/>
-                        <a:ea typeface="Cambria Math" panose="02040503050406030204" pitchFamily="18" charset="0"/>
-                      </a:rPr>
-                      <m:t>−</m:t>
-                    </m:r>
-                    <m:r>
-                      <m:rPr>
-                        <m:nor/>
-                      </m:rPr>
-                      <a:rPr lang="en-US" dirty="0">
-                        <a:solidFill>
-                          <a:srgbClr val="0033CC"/>
-                        </a:solidFill>
-                        <a:ea typeface="Cambria Math" panose="02040503050406030204" pitchFamily="18" charset="0"/>
-                        <a:cs typeface="Cambria Math" charset="0"/>
-                      </a:rPr>
-                      <m:t> </m:t>
-                    </m:r>
-                    <m:r>
-                      <a:rPr lang="en-US" i="1">
-                        <a:solidFill>
-                          <a:srgbClr val="0033CC"/>
-                        </a:solidFill>
-                        <a:latin typeface="Cambria Math" panose="02040503050406030204" pitchFamily="18" charset="0"/>
-                        <a:ea typeface="Cambria Math" panose="02040503050406030204" pitchFamily="18" charset="0"/>
-                        <a:cs typeface="Cambria Math" charset="0"/>
-                      </a:rPr>
-                      <m:t>𝜂</m:t>
-                    </m:r>
-                    <m:r>
-                      <m:rPr>
-                        <m:sty m:val="p"/>
-                      </m:rPr>
-                      <a:rPr lang="en-US" i="1">
-                        <a:latin typeface="Cambria Math" panose="02040503050406030204" pitchFamily="18" charset="0"/>
-                        <a:ea typeface="Cambria Math" panose="02040503050406030204" pitchFamily="18" charset="0"/>
-                        <a:cs typeface="Cambria Math" charset="0"/>
-                      </a:rPr>
-                      <m:t>∇</m:t>
-                    </m:r>
-                    <m:r>
-                      <a:rPr lang="en-US" i="1">
-                        <a:latin typeface="Cambria Math" panose="02040503050406030204" pitchFamily="18" charset="0"/>
-                        <a:ea typeface="Cambria Math" panose="02040503050406030204" pitchFamily="18" charset="0"/>
-                        <a:cs typeface="Cambria Math" charset="0"/>
-                      </a:rPr>
-                      <m:t>𝑅</m:t>
-                    </m:r>
-                    <m:r>
-                      <a:rPr lang="en-US" i="1">
-                        <a:latin typeface="Cambria Math" panose="02040503050406030204" pitchFamily="18" charset="0"/>
-                        <a:ea typeface="Cambria Math" panose="02040503050406030204" pitchFamily="18" charset="0"/>
-                        <a:cs typeface="Cambria Math" charset="0"/>
-                      </a:rPr>
-                      <m:t>∙</m:t>
-                    </m:r>
-                    <m:r>
-                      <m:rPr>
-                        <m:sty m:val="p"/>
-                      </m:rPr>
-                      <a:rPr lang="en-US" i="1">
-                        <a:latin typeface="Cambria Math" panose="02040503050406030204" pitchFamily="18" charset="0"/>
-                        <a:ea typeface="Cambria Math" panose="02040503050406030204" pitchFamily="18" charset="0"/>
-                        <a:cs typeface="Cambria Math" charset="0"/>
-                      </a:rPr>
-                      <m:t>∇</m:t>
-                    </m:r>
-                    <m:r>
-                      <a:rPr lang="en-US" i="1">
-                        <a:latin typeface="Cambria Math" panose="02040503050406030204" pitchFamily="18" charset="0"/>
-                        <a:ea typeface="Cambria Math" panose="02040503050406030204" pitchFamily="18" charset="0"/>
-                        <a:cs typeface="Cambria Math" charset="0"/>
-                      </a:rPr>
-                      <m:t>𝑅</m:t>
-                    </m:r>
-                    <m:r>
-                      <a:rPr lang="en-US" i="1">
-                        <a:latin typeface="Cambria Math" panose="02040503050406030204" pitchFamily="18" charset="0"/>
-                        <a:ea typeface="Cambria Math" panose="02040503050406030204" pitchFamily="18" charset="0"/>
-                        <a:cs typeface="Cambria Math" charset="0"/>
-                      </a:rPr>
-                      <m:t>+</m:t>
-                    </m:r>
-                    <m:r>
-                      <a:rPr lang="en-US" i="1">
-                        <a:latin typeface="Cambria Math" panose="02040503050406030204" pitchFamily="18" charset="0"/>
-                        <a:ea typeface="Cambria Math" panose="02040503050406030204" pitchFamily="18" charset="0"/>
-                        <a:cs typeface="Cambria Math" charset="0"/>
-                      </a:rPr>
-                      <m:t>𝑂</m:t>
-                    </m:r>
-                    <m:r>
-                      <a:rPr lang="en-US" i="1">
-                        <a:latin typeface="Cambria Math" panose="02040503050406030204" pitchFamily="18" charset="0"/>
-                        <a:ea typeface="Cambria Math" panose="02040503050406030204" pitchFamily="18" charset="0"/>
-                        <a:cs typeface="Cambria Math" charset="0"/>
-                      </a:rPr>
-                      <m:t>(</m:t>
-                    </m:r>
-                    <m:sSup>
-                      <m:sSupPr>
-                        <m:ctrlPr>
-                          <a:rPr lang="en-US" i="1">
-                            <a:latin typeface="Cambria Math" panose="02040503050406030204" pitchFamily="18" charset="0"/>
-                            <a:ea typeface="Cambria Math" panose="02040503050406030204" pitchFamily="18" charset="0"/>
-                          </a:rPr>
-                        </m:ctrlPr>
-                      </m:sSupPr>
-                      <m:e>
-                        <m:r>
-                          <a:rPr lang="en-US" i="1">
-                            <a:latin typeface="Cambria Math" panose="02040503050406030204" pitchFamily="18" charset="0"/>
-                            <a:ea typeface="Cambria Math" panose="02040503050406030204" pitchFamily="18" charset="0"/>
-                          </a:rPr>
-                          <m:t>𝜂</m:t>
-                        </m:r>
-                      </m:e>
-                      <m:sup>
-                        <m:r>
-                          <a:rPr lang="en-US" i="1">
-                            <a:latin typeface="Cambria Math" panose="02040503050406030204" pitchFamily="18" charset="0"/>
-                            <a:ea typeface="Cambria Math" panose="02040503050406030204" pitchFamily="18" charset="0"/>
-                          </a:rPr>
-                          <m:t>2</m:t>
-                        </m:r>
-                      </m:sup>
-                    </m:sSup>
-                    <m:r>
-                      <a:rPr lang="en-US" i="1">
-                        <a:latin typeface="Cambria Math" panose="02040503050406030204" pitchFamily="18" charset="0"/>
-                        <a:ea typeface="Cambria Math" panose="02040503050406030204" pitchFamily="18" charset="0"/>
-                      </a:rPr>
-                      <m:t>)</m:t>
-                    </m:r>
-                  </m:oMath>
-                </a14:m>
-                <a:endParaRPr lang="en-US" i="1" dirty="0">
-                  <a:solidFill>
-                    <a:srgbClr val="000000"/>
-                  </a:solidFill>
-                  <a:latin typeface="Cambria Math" panose="02040503050406030204" pitchFamily="18" charset="0"/>
-                  <a:ea typeface="Cambria Math" panose="02040503050406030204" pitchFamily="18" charset="0"/>
-                </a:endParaRPr>
-              </a:p>
-              <a:p>
-                <a:pPr>
-                  <a:lnSpc>
-                    <a:spcPct val="90000"/>
-                  </a:lnSpc>
-                  <a:buFont typeface="Marlett" pitchFamily="26" charset="0"/>
-                  <a:buNone/>
-                </a:pPr>
-                <a14:m>
-                  <m:oMathPara xmlns:m="http://schemas.openxmlformats.org/officeDocument/2006/math">
-                    <m:oMathParaPr>
-                      <m:jc m:val="centerGroup"/>
-                    </m:oMathParaPr>
-                    <m:oMath xmlns:m="http://schemas.openxmlformats.org/officeDocument/2006/math">
-                      <m:r>
-                        <a:rPr lang="en-US" i="1">
-                          <a:solidFill>
-                            <a:srgbClr val="000000"/>
-                          </a:solidFill>
-                          <a:latin typeface="Cambria Math" panose="02040503050406030204" pitchFamily="18" charset="0"/>
-                          <a:ea typeface="Cambria Math" panose="02040503050406030204" pitchFamily="18" charset="0"/>
-                        </a:rPr>
-                        <m:t> </m:t>
-                      </m:r>
-                    </m:oMath>
-                  </m:oMathPara>
-                </a14:m>
-                <a:endParaRPr lang="en-US" dirty="0"/>
-              </a:p>
-              <a:p>
-                <a:pPr>
-                  <a:lnSpc>
-                    <a:spcPct val="90000"/>
-                  </a:lnSpc>
-                  <a:buFont typeface="Marlett" pitchFamily="26" charset="0"/>
-                  <a:buNone/>
-                </a:pPr>
-                <a:r>
-                  <a:rPr lang="en-US" dirty="0"/>
-                  <a:t>If the </a:t>
-                </a:r>
-                <a14:m>
-                  <m:oMath xmlns:m="http://schemas.openxmlformats.org/officeDocument/2006/math">
-                    <m:r>
-                      <a:rPr lang="en-US" i="1">
-                        <a:solidFill>
-                          <a:srgbClr val="0033CC"/>
-                        </a:solidFill>
-                        <a:latin typeface="Cambria Math" panose="02040503050406030204" pitchFamily="18" charset="0"/>
-                        <a:ea typeface="Cambria Math" panose="02040503050406030204" pitchFamily="18" charset="0"/>
-                        <a:cs typeface="Cambria Math" charset="0"/>
-                      </a:rPr>
-                      <m:t>𝑂</m:t>
-                    </m:r>
-                    <m:r>
-                      <a:rPr lang="en-US" i="1">
-                        <a:solidFill>
-                          <a:srgbClr val="0033CC"/>
-                        </a:solidFill>
-                        <a:latin typeface="Cambria Math" panose="02040503050406030204" pitchFamily="18" charset="0"/>
-                        <a:ea typeface="Cambria Math" panose="02040503050406030204" pitchFamily="18" charset="0"/>
-                        <a:cs typeface="Cambria Math" charset="0"/>
-                      </a:rPr>
-                      <m:t>(</m:t>
-                    </m:r>
-                    <m:sSup>
-                      <m:sSupPr>
-                        <m:ctrlPr>
-                          <a:rPr lang="en-US" i="1">
-                            <a:solidFill>
-                              <a:srgbClr val="0033CC"/>
-                            </a:solidFill>
-                            <a:latin typeface="Cambria Math" panose="02040503050406030204" pitchFamily="18" charset="0"/>
-                            <a:ea typeface="Cambria Math" panose="02040503050406030204" pitchFamily="18" charset="0"/>
-                          </a:rPr>
-                        </m:ctrlPr>
-                      </m:sSupPr>
-                      <m:e>
-                        <m:r>
-                          <a:rPr lang="en-US" i="1">
-                            <a:solidFill>
-                              <a:srgbClr val="0033CC"/>
-                            </a:solidFill>
-                            <a:latin typeface="Cambria Math" panose="02040503050406030204" pitchFamily="18" charset="0"/>
-                            <a:ea typeface="Cambria Math" panose="02040503050406030204" pitchFamily="18" charset="0"/>
-                          </a:rPr>
-                          <m:t>𝜂</m:t>
-                        </m:r>
-                      </m:e>
-                      <m:sup>
-                        <m:r>
-                          <a:rPr lang="en-US" i="1">
-                            <a:solidFill>
-                              <a:srgbClr val="0033CC"/>
-                            </a:solidFill>
-                            <a:latin typeface="Cambria Math" panose="02040503050406030204" pitchFamily="18" charset="0"/>
-                            <a:ea typeface="Cambria Math" panose="02040503050406030204" pitchFamily="18" charset="0"/>
-                          </a:rPr>
-                          <m:t>2</m:t>
-                        </m:r>
-                      </m:sup>
-                    </m:sSup>
-                    <m:r>
-                      <a:rPr lang="en-US" i="1">
-                        <a:solidFill>
-                          <a:srgbClr val="0033CC"/>
-                        </a:solidFill>
-                        <a:latin typeface="Cambria Math" panose="02040503050406030204" pitchFamily="18" charset="0"/>
-                        <a:ea typeface="Cambria Math" panose="02040503050406030204" pitchFamily="18" charset="0"/>
-                      </a:rPr>
-                      <m:t>)</m:t>
-                    </m:r>
-                  </m:oMath>
-                </a14:m>
-                <a:r>
-                  <a:rPr lang="en-US" dirty="0">
-                    <a:solidFill>
-                      <a:srgbClr val="0033CC"/>
-                    </a:solidFill>
-                  </a:rPr>
-                  <a:t> </a:t>
-                </a:r>
-                <a:r>
-                  <a:rPr lang="en-US" dirty="0"/>
-                  <a:t>can be neglected, and </a:t>
-                </a:r>
-              </a:p>
-              <a:p>
-                <a:pPr>
-                  <a:lnSpc>
-                    <a:spcPct val="90000"/>
-                  </a:lnSpc>
-                  <a:buFont typeface="Marlett" pitchFamily="26" charset="0"/>
-                  <a:buNone/>
-                </a:pPr>
-                <a:r>
-                  <a:rPr lang="en-US" dirty="0"/>
-                  <a:t>given that the </a:t>
-                </a:r>
-                <a14:m>
-                  <m:oMath xmlns:m="http://schemas.openxmlformats.org/officeDocument/2006/math">
-                    <m:r>
-                      <a:rPr lang="en-US" i="1">
-                        <a:solidFill>
-                          <a:srgbClr val="0033CC"/>
-                        </a:solidFill>
-                        <a:latin typeface="Cambria Math" panose="02040503050406030204" pitchFamily="18" charset="0"/>
-                        <a:ea typeface="Cambria Math" panose="02040503050406030204" pitchFamily="18" charset="0"/>
-                        <a:cs typeface="Cambria Math" charset="0"/>
-                      </a:rPr>
-                      <m:t>𝑂</m:t>
-                    </m:r>
-                    <m:r>
-                      <a:rPr lang="en-US" i="1">
-                        <a:solidFill>
-                          <a:srgbClr val="0033CC"/>
-                        </a:solidFill>
-                        <a:latin typeface="Cambria Math" panose="02040503050406030204" pitchFamily="18" charset="0"/>
-                        <a:ea typeface="Cambria Math" panose="02040503050406030204" pitchFamily="18" charset="0"/>
-                        <a:cs typeface="Cambria Math" charset="0"/>
-                      </a:rPr>
-                      <m:t>(</m:t>
-                    </m:r>
-                    <m:r>
-                      <a:rPr lang="en-US" i="1">
-                        <a:solidFill>
-                          <a:srgbClr val="0033CC"/>
-                        </a:solidFill>
-                        <a:latin typeface="Cambria Math" panose="02040503050406030204" pitchFamily="18" charset="0"/>
-                        <a:ea typeface="Cambria Math" panose="02040503050406030204" pitchFamily="18" charset="0"/>
-                        <a:cs typeface="Cambria Math" charset="0"/>
-                      </a:rPr>
-                      <m:t>𝜂</m:t>
-                    </m:r>
-                    <m:r>
-                      <a:rPr lang="en-US" i="1">
-                        <a:solidFill>
-                          <a:srgbClr val="0033CC"/>
-                        </a:solidFill>
-                        <a:latin typeface="Cambria Math" panose="02040503050406030204" pitchFamily="18" charset="0"/>
-                        <a:ea typeface="Cambria Math" panose="02040503050406030204" pitchFamily="18" charset="0"/>
-                      </a:rPr>
-                      <m:t>)</m:t>
-                    </m:r>
-                  </m:oMath>
-                </a14:m>
-                <a:r>
-                  <a:rPr lang="en-US" dirty="0">
-                    <a:solidFill>
-                      <a:srgbClr val="0033CC"/>
-                    </a:solidFill>
-                  </a:rPr>
-                  <a:t> </a:t>
-                </a:r>
-                <a:r>
-                  <a:rPr lang="en-US" dirty="0"/>
-                  <a:t>term is always</a:t>
-                </a:r>
-              </a:p>
-              <a:p>
-                <a:pPr>
-                  <a:lnSpc>
-                    <a:spcPct val="90000"/>
-                  </a:lnSpc>
-                  <a:buFont typeface="Marlett" pitchFamily="26" charset="0"/>
-                  <a:buNone/>
-                </a:pPr>
-                <a:r>
-                  <a:rPr lang="en-US" dirty="0"/>
-                  <a:t>negative, it follows that</a:t>
-                </a:r>
-              </a:p>
-              <a:p>
-                <a:pPr>
-                  <a:lnSpc>
-                    <a:spcPct val="90000"/>
-                  </a:lnSpc>
-                  <a:buFont typeface="Marlett" pitchFamily="26" charset="0"/>
-                  <a:buNone/>
-                </a:pPr>
-                <a:br>
-                  <a:rPr lang="en-US" dirty="0"/>
-                </a:br>
-                <a:r>
-                  <a:rPr lang="en-US" dirty="0"/>
-                  <a:t>	 </a:t>
-                </a:r>
-                <a14:m>
-                  <m:oMath xmlns:m="http://schemas.openxmlformats.org/officeDocument/2006/math">
-                    <m:r>
-                      <a:rPr lang="en-US" i="1">
-                        <a:latin typeface="Cambria Math" panose="02040503050406030204" pitchFamily="18" charset="0"/>
-                      </a:rPr>
-                      <m:t>𝑅</m:t>
-                    </m:r>
-                    <m:d>
-                      <m:dPr>
-                        <m:ctrlPr>
-                          <a:rPr lang="en-US" i="1">
-                            <a:latin typeface="Cambria Math" panose="02040503050406030204" pitchFamily="18" charset="0"/>
-                          </a:rPr>
-                        </m:ctrlPr>
-                      </m:dPr>
-                      <m:e>
-                        <m:sSub>
-                          <m:sSubPr>
-                            <m:ctrlPr>
-                              <a:rPr lang="en-US" i="1">
-                                <a:solidFill>
-                                  <a:srgbClr val="000000"/>
-                                </a:solidFill>
-                                <a:latin typeface="Cambria Math" panose="02040503050406030204" pitchFamily="18" charset="0"/>
-                                <a:ea typeface="Cambria Math" panose="02040503050406030204" pitchFamily="18" charset="0"/>
-                              </a:rPr>
-                            </m:ctrlPr>
-                          </m:sSubPr>
-                          <m:e>
-                            <m:r>
-                              <a:rPr lang="en-US" i="1">
-                                <a:solidFill>
-                                  <a:srgbClr val="000000"/>
-                                </a:solidFill>
-                                <a:latin typeface="Cambria Math" panose="02040503050406030204" pitchFamily="18" charset="0"/>
-                                <a:ea typeface="Cambria Math" panose="02040503050406030204" pitchFamily="18" charset="0"/>
-                              </a:rPr>
-                              <m:t>𝜔</m:t>
-                            </m:r>
-                          </m:e>
-                          <m:sub>
-                            <m:r>
-                              <a:rPr lang="en-US" i="1">
-                                <a:solidFill>
-                                  <a:srgbClr val="000000"/>
-                                </a:solidFill>
-                                <a:latin typeface="Cambria Math" panose="02040503050406030204" pitchFamily="18" charset="0"/>
-                                <a:ea typeface="Cambria Math" panose="02040503050406030204" pitchFamily="18" charset="0"/>
-                              </a:rPr>
-                              <m:t>𝑗</m:t>
-                            </m:r>
-                            <m:r>
-                              <a:rPr lang="en-US" i="1">
-                                <a:solidFill>
-                                  <a:srgbClr val="000000"/>
-                                </a:solidFill>
-                                <a:latin typeface="Cambria Math" panose="02040503050406030204" pitchFamily="18" charset="0"/>
-                                <a:ea typeface="Cambria Math" panose="02040503050406030204" pitchFamily="18" charset="0"/>
-                              </a:rPr>
-                              <m:t>+1</m:t>
-                            </m:r>
-                          </m:sub>
-                        </m:sSub>
-                      </m:e>
-                    </m:d>
-                    <m:r>
-                      <a:rPr lang="en-US">
-                        <a:solidFill>
-                          <a:srgbClr val="000000"/>
-                        </a:solidFill>
-                        <a:latin typeface="Cambria Math" panose="02040503050406030204" pitchFamily="18" charset="0"/>
-                        <a:ea typeface="Cambria Math" panose="02040503050406030204" pitchFamily="18" charset="0"/>
-                      </a:rPr>
-                      <m:t>&lt;</m:t>
-                    </m:r>
-                    <m:r>
-                      <a:rPr lang="en-US" i="1">
-                        <a:latin typeface="Cambria Math" panose="02040503050406030204" pitchFamily="18" charset="0"/>
-                      </a:rPr>
-                      <m:t>𝑅</m:t>
-                    </m:r>
-                    <m:d>
-                      <m:dPr>
-                        <m:ctrlPr>
-                          <a:rPr lang="en-US" i="1">
-                            <a:latin typeface="Cambria Math" panose="02040503050406030204" pitchFamily="18" charset="0"/>
-                          </a:rPr>
-                        </m:ctrlPr>
-                      </m:dPr>
-                      <m:e>
-                        <m:sSub>
-                          <m:sSubPr>
-                            <m:ctrlPr>
-                              <a:rPr lang="en-US" i="1">
-                                <a:solidFill>
-                                  <a:srgbClr val="000000"/>
-                                </a:solidFill>
-                                <a:latin typeface="Cambria Math" panose="02040503050406030204" pitchFamily="18" charset="0"/>
-                                <a:ea typeface="Cambria Math" panose="02040503050406030204" pitchFamily="18" charset="0"/>
-                              </a:rPr>
-                            </m:ctrlPr>
-                          </m:sSubPr>
-                          <m:e>
-                            <m:r>
-                              <a:rPr lang="en-US" i="1">
-                                <a:solidFill>
-                                  <a:srgbClr val="000000"/>
-                                </a:solidFill>
-                                <a:latin typeface="Cambria Math" panose="02040503050406030204" pitchFamily="18" charset="0"/>
-                                <a:ea typeface="Cambria Math" panose="02040503050406030204" pitchFamily="18" charset="0"/>
-                              </a:rPr>
-                              <m:t>𝜔</m:t>
-                            </m:r>
-                          </m:e>
-                          <m:sub>
-                            <m:r>
-                              <a:rPr lang="en-US" i="1">
-                                <a:solidFill>
-                                  <a:srgbClr val="000000"/>
-                                </a:solidFill>
-                                <a:latin typeface="Cambria Math" panose="02040503050406030204" pitchFamily="18" charset="0"/>
-                                <a:ea typeface="Cambria Math" panose="02040503050406030204" pitchFamily="18" charset="0"/>
-                              </a:rPr>
-                              <m:t>𝑗</m:t>
-                            </m:r>
-                          </m:sub>
-                        </m:sSub>
-                      </m:e>
-                    </m:d>
-                  </m:oMath>
-                </a14:m>
-                <a:r>
-                  <a:rPr lang="en-US" dirty="0"/>
-                  <a:t>.</a:t>
-                </a:r>
-              </a:p>
-              <a:p>
-                <a:pPr marL="0" indent="0">
-                  <a:buNone/>
-                </a:pPr>
-                <a:endParaRPr lang="en-US" dirty="0"/>
-              </a:p>
-            </p:txBody>
-          </p:sp>
-        </mc:Choice>
-        <mc:Fallback xmlns="">
-          <p:sp>
-            <p:nvSpPr>
-              <p:cNvPr id="2" name="Content Placeholder 1">
-                <a:extLst>
-                  <a:ext uri="{FF2B5EF4-FFF2-40B4-BE49-F238E27FC236}">
-                    <a16:creationId xmlns:a16="http://schemas.microsoft.com/office/drawing/2014/main" id="{715839D9-08FB-02BE-91C0-05B1224A6521}"/>
-                  </a:ext>
-                </a:extLst>
-              </p:cNvPr>
-              <p:cNvSpPr>
-                <a:spLocks noGrp="1" noRot="1" noChangeAspect="1" noMove="1" noResize="1" noEditPoints="1" noAdjustHandles="1" noChangeArrowheads="1" noChangeShapeType="1" noTextEdit="1"/>
-              </p:cNvSpPr>
-              <p:nvPr>
-                <p:ph sz="half" idx="1"/>
-              </p:nvPr>
-            </p:nvSpPr>
-            <p:spPr>
-              <a:blipFill>
-                <a:blip r:embed="rId3"/>
-                <a:stretch>
-                  <a:fillRect l="-1309" t="-1842" b="-1053"/>
-                </a:stretch>
-              </a:blipFill>
-            </p:spPr>
-            <p:txBody>
-              <a:bodyPr/>
-              <a:lstStyle/>
-              <a:p>
-                <a:r>
-                  <a:rPr lang="en-US">
-                    <a:noFill/>
-                  </a:rPr>
-                  <a:t> </a:t>
-                </a:r>
-              </a:p>
-            </p:txBody>
-          </p:sp>
-        </mc:Fallback>
-      </mc:AlternateContent>
-      <p:sp>
-        <p:nvSpPr>
-          <p:cNvPr id="3" name="Title 2">
-            <a:extLst>
-              <a:ext uri="{FF2B5EF4-FFF2-40B4-BE49-F238E27FC236}">
-                <a16:creationId xmlns:a16="http://schemas.microsoft.com/office/drawing/2014/main" id="{5B48CDEA-88F8-3CA5-B26A-0F384AAF6DAD}"/>
-              </a:ext>
-            </a:extLst>
-          </p:cNvPr>
-          <p:cNvSpPr>
-            <a:spLocks noGrp="1"/>
-          </p:cNvSpPr>
-          <p:nvPr>
-            <p:ph type="title"/>
-          </p:nvPr>
-        </p:nvSpPr>
-        <p:spPr/>
-        <p:txBody>
-          <a:bodyPr/>
-          <a:lstStyle/>
-          <a:p>
-            <a:r>
-              <a:rPr lang="en-US" dirty="0"/>
-              <a:t>Empirical Risk Minimization (2)</a:t>
-            </a:r>
-          </a:p>
-        </p:txBody>
-      </p:sp>
-    </p:spTree>
-    <p:extLst>
-      <p:ext uri="{BB962C8B-B14F-4D97-AF65-F5344CB8AC3E}">
-        <p14:creationId xmlns:p14="http://schemas.microsoft.com/office/powerpoint/2010/main" val="710313575"/>
-      </p:ext>
-    </p:extLst>
-  </p:cSld>
-  <p:clrMapOvr>
-    <a:masterClrMapping/>
-  </p:clrMapOvr>
-  <p:timing>
-    <p:tnLst>
-      <p:par>
-        <p:cTn id="1" dur="indefinite" restart="never" nodeType="tmRoot">
-          <p:childTnLst>
-            <p:seq concurrent="1" nextAc="seek">
-              <p:cTn id="2" dur="indefinite" nodeType="mainSeq">
-                <p:childTnLst>
-                  <p:par>
-                    <p:cTn id="3" fill="hold">
-                      <p:stCondLst>
-                        <p:cond delay="indefinite"/>
-                      </p:stCondLst>
-                      <p:childTnLst>
-                        <p:par>
-                          <p:cTn id="4" fill="hold">
-                            <p:stCondLst>
-                              <p:cond delay="0"/>
-                            </p:stCondLst>
-                            <p:childTnLst>
-                              <p:par>
-                                <p:cTn id="5" presetID="10" presetClass="entr" presetSubtype="0" fill="hold" nodeType="clickEffect">
-                                  <p:stCondLst>
-                                    <p:cond delay="0"/>
-                                  </p:stCondLst>
-                                  <p:childTnLst>
-                                    <p:set>
-                                      <p:cBhvr>
-                                        <p:cTn id="6" dur="1" fill="hold">
-                                          <p:stCondLst>
-                                            <p:cond delay="0"/>
-                                          </p:stCondLst>
-                                        </p:cTn>
-                                        <p:tgtEl>
-                                          <p:spTgt spid="2">
-                                            <p:txEl>
-                                              <p:pRg st="3" end="3"/>
-                                            </p:txEl>
-                                          </p:spTgt>
-                                        </p:tgtEl>
-                                        <p:attrNameLst>
-                                          <p:attrName>style.visibility</p:attrName>
-                                        </p:attrNameLst>
-                                      </p:cBhvr>
-                                      <p:to>
-                                        <p:strVal val="visible"/>
-                                      </p:to>
-                                    </p:set>
-                                    <p:animEffect transition="in" filter="fade">
-                                      <p:cBhvr>
-                                        <p:cTn id="7" dur="500"/>
-                                        <p:tgtEl>
-                                          <p:spTgt spid="2">
-                                            <p:txEl>
-                                              <p:pRg st="3" end="3"/>
-                                            </p:txEl>
-                                          </p:spTgt>
-                                        </p:tgtEl>
-                                      </p:cBhvr>
-                                    </p:animEffect>
-                                  </p:childTnLst>
-                                </p:cTn>
-                              </p:par>
-                              <p:par>
-                                <p:cTn id="8" presetID="10" presetClass="entr" presetSubtype="0" fill="hold" nodeType="withEffect">
-                                  <p:stCondLst>
-                                    <p:cond delay="0"/>
-                                  </p:stCondLst>
-                                  <p:childTnLst>
-                                    <p:set>
-                                      <p:cBhvr>
-                                        <p:cTn id="9" dur="1" fill="hold">
-                                          <p:stCondLst>
-                                            <p:cond delay="0"/>
-                                          </p:stCondLst>
-                                        </p:cTn>
-                                        <p:tgtEl>
-                                          <p:spTgt spid="2">
-                                            <p:txEl>
-                                              <p:pRg st="4" end="4"/>
-                                            </p:txEl>
-                                          </p:spTgt>
-                                        </p:tgtEl>
-                                        <p:attrNameLst>
-                                          <p:attrName>style.visibility</p:attrName>
-                                        </p:attrNameLst>
-                                      </p:cBhvr>
-                                      <p:to>
-                                        <p:strVal val="visible"/>
-                                      </p:to>
-                                    </p:set>
-                                    <p:animEffect transition="in" filter="fade">
-                                      <p:cBhvr>
-                                        <p:cTn id="10" dur="500"/>
-                                        <p:tgtEl>
-                                          <p:spTgt spid="2">
-                                            <p:txEl>
-                                              <p:pRg st="4" end="4"/>
-                                            </p:txEl>
-                                          </p:spTgt>
-                                        </p:tgtEl>
-                                      </p:cBhvr>
-                                    </p:animEffect>
-                                  </p:childTnLst>
-                                </p:cTn>
-                              </p:par>
-                              <p:par>
-                                <p:cTn id="11" presetID="10" presetClass="entr" presetSubtype="0" fill="hold" nodeType="withEffect">
-                                  <p:stCondLst>
-                                    <p:cond delay="0"/>
-                                  </p:stCondLst>
-                                  <p:childTnLst>
-                                    <p:set>
-                                      <p:cBhvr>
-                                        <p:cTn id="12" dur="1" fill="hold">
-                                          <p:stCondLst>
-                                            <p:cond delay="0"/>
-                                          </p:stCondLst>
-                                        </p:cTn>
-                                        <p:tgtEl>
-                                          <p:spTgt spid="2">
-                                            <p:txEl>
-                                              <p:pRg st="5" end="5"/>
-                                            </p:txEl>
-                                          </p:spTgt>
-                                        </p:tgtEl>
-                                        <p:attrNameLst>
-                                          <p:attrName>style.visibility</p:attrName>
-                                        </p:attrNameLst>
-                                      </p:cBhvr>
-                                      <p:to>
-                                        <p:strVal val="visible"/>
-                                      </p:to>
-                                    </p:set>
-                                    <p:animEffect transition="in" filter="fade">
-                                      <p:cBhvr>
-                                        <p:cTn id="13" dur="500"/>
-                                        <p:tgtEl>
-                                          <p:spTgt spid="2">
-                                            <p:txEl>
-                                              <p:pRg st="5" end="5"/>
-                                            </p:txEl>
-                                          </p:spTgt>
-                                        </p:tgtEl>
-                                      </p:cBhvr>
-                                    </p:animEffect>
-                                  </p:childTnLst>
-                                </p:cTn>
-                              </p:par>
-                            </p:childTnLst>
-                          </p:cTn>
-                        </p:par>
-                      </p:childTnLst>
-                    </p:cTn>
-                  </p:par>
-                  <p:par>
-                    <p:cTn id="14" fill="hold">
-                      <p:stCondLst>
-                        <p:cond delay="indefinite"/>
-                      </p:stCondLst>
-                      <p:childTnLst>
-                        <p:par>
-                          <p:cTn id="15" fill="hold">
-                            <p:stCondLst>
-                              <p:cond delay="0"/>
-                            </p:stCondLst>
-                            <p:childTnLst>
-                              <p:par>
-                                <p:cTn id="16" presetID="10" presetClass="entr" presetSubtype="0" fill="hold" nodeType="clickEffect">
-                                  <p:stCondLst>
-                                    <p:cond delay="0"/>
-                                  </p:stCondLst>
-                                  <p:childTnLst>
-                                    <p:set>
-                                      <p:cBhvr>
-                                        <p:cTn id="17" dur="1" fill="hold">
-                                          <p:stCondLst>
-                                            <p:cond delay="0"/>
-                                          </p:stCondLst>
-                                        </p:cTn>
-                                        <p:tgtEl>
-                                          <p:spTgt spid="2">
-                                            <p:txEl>
-                                              <p:pRg st="7" end="7"/>
-                                            </p:txEl>
-                                          </p:spTgt>
-                                        </p:tgtEl>
-                                        <p:attrNameLst>
-                                          <p:attrName>style.visibility</p:attrName>
-                                        </p:attrNameLst>
-                                      </p:cBhvr>
-                                      <p:to>
-                                        <p:strVal val="visible"/>
-                                      </p:to>
-                                    </p:set>
-                                    <p:animEffect transition="in" filter="fade">
-                                      <p:cBhvr>
-                                        <p:cTn id="18" dur="500"/>
-                                        <p:tgtEl>
-                                          <p:spTgt spid="2">
-                                            <p:txEl>
-                                              <p:pRg st="7" end="7"/>
-                                            </p:txEl>
-                                          </p:spTgt>
-                                        </p:tgtEl>
-                                      </p:cBhvr>
-                                    </p:animEffect>
-                                  </p:childTnLst>
-                                </p:cTn>
-                              </p:par>
-                              <p:par>
-                                <p:cTn id="19" presetID="10" presetClass="entr" presetSubtype="0" fill="hold" nodeType="withEffect">
-                                  <p:stCondLst>
-                                    <p:cond delay="0"/>
-                                  </p:stCondLst>
-                                  <p:childTnLst>
-                                    <p:set>
-                                      <p:cBhvr>
-                                        <p:cTn id="20" dur="1" fill="hold">
-                                          <p:stCondLst>
-                                            <p:cond delay="0"/>
-                                          </p:stCondLst>
-                                        </p:cTn>
-                                        <p:tgtEl>
-                                          <p:spTgt spid="2">
-                                            <p:txEl>
-                                              <p:pRg st="8" end="8"/>
-                                            </p:txEl>
-                                          </p:spTgt>
-                                        </p:tgtEl>
-                                        <p:attrNameLst>
-                                          <p:attrName>style.visibility</p:attrName>
-                                        </p:attrNameLst>
-                                      </p:cBhvr>
-                                      <p:to>
-                                        <p:strVal val="visible"/>
-                                      </p:to>
-                                    </p:set>
-                                    <p:animEffect transition="in" filter="fade">
-                                      <p:cBhvr>
-                                        <p:cTn id="21" dur="500"/>
-                                        <p:tgtEl>
-                                          <p:spTgt spid="2">
-                                            <p:txEl>
-                                              <p:pRg st="8" end="8"/>
-                                            </p:txEl>
-                                          </p:spTgt>
-                                        </p:tgtEl>
-                                      </p:cBhvr>
-                                    </p:animEffect>
-                                  </p:childTnLst>
-                                </p:cTn>
-                              </p:par>
-                              <p:par>
-                                <p:cTn id="22" presetID="10" presetClass="entr" presetSubtype="0" fill="hold" nodeType="withEffect">
-                                  <p:stCondLst>
-                                    <p:cond delay="0"/>
-                                  </p:stCondLst>
-                                  <p:childTnLst>
-                                    <p:set>
-                                      <p:cBhvr>
-                                        <p:cTn id="23" dur="1" fill="hold">
-                                          <p:stCondLst>
-                                            <p:cond delay="0"/>
-                                          </p:stCondLst>
-                                        </p:cTn>
-                                        <p:tgtEl>
-                                          <p:spTgt spid="2">
-                                            <p:txEl>
-                                              <p:pRg st="9" end="9"/>
-                                            </p:txEl>
-                                          </p:spTgt>
-                                        </p:tgtEl>
-                                        <p:attrNameLst>
-                                          <p:attrName>style.visibility</p:attrName>
-                                        </p:attrNameLst>
-                                      </p:cBhvr>
-                                      <p:to>
-                                        <p:strVal val="visible"/>
-                                      </p:to>
-                                    </p:set>
-                                    <p:animEffect transition="in" filter="fade">
-                                      <p:cBhvr>
-                                        <p:cTn id="24" dur="500"/>
-                                        <p:tgtEl>
-                                          <p:spTgt spid="2">
-                                            <p:txEl>
-                                              <p:pRg st="9" end="9"/>
-                                            </p:txEl>
-                                          </p:spTgt>
-                                        </p:tgtEl>
-                                      </p:cBhvr>
-                                    </p:animEffect>
-                                  </p:childTnLst>
-                                </p:cTn>
-                              </p:par>
-                              <p:par>
-                                <p:cTn id="25" presetID="10" presetClass="entr" presetSubtype="0" fill="hold" nodeType="withEffect">
-                                  <p:stCondLst>
-                                    <p:cond delay="0"/>
-                                  </p:stCondLst>
-                                  <p:childTnLst>
-                                    <p:set>
-                                      <p:cBhvr>
-                                        <p:cTn id="26" dur="1" fill="hold">
-                                          <p:stCondLst>
-                                            <p:cond delay="0"/>
-                                          </p:stCondLst>
-                                        </p:cTn>
-                                        <p:tgtEl>
-                                          <p:spTgt spid="2">
-                                            <p:txEl>
-                                              <p:pRg st="10" end="10"/>
-                                            </p:txEl>
-                                          </p:spTgt>
-                                        </p:tgtEl>
-                                        <p:attrNameLst>
-                                          <p:attrName>style.visibility</p:attrName>
-                                        </p:attrNameLst>
-                                      </p:cBhvr>
-                                      <p:to>
-                                        <p:strVal val="visible"/>
-                                      </p:to>
-                                    </p:set>
-                                    <p:animEffect transition="in" filter="fade">
-                                      <p:cBhvr>
-                                        <p:cTn id="27" dur="500"/>
-                                        <p:tgtEl>
-                                          <p:spTgt spid="2">
-                                            <p:txEl>
-                                              <p:pRg st="10" end="10"/>
-                                            </p:txEl>
-                                          </p:spTgt>
-                                        </p:tgtEl>
-                                      </p:cBhvr>
-                                    </p:animEffect>
-                                  </p:childTnLst>
-                                </p:cTn>
-                              </p:par>
-                            </p:childTnLst>
-                          </p:cTn>
-                        </p:par>
-                      </p:childTnLst>
-                    </p:cTn>
-                  </p:par>
-                </p:childTnLst>
-              </p:cTn>
-              <p:prevCondLst>
-                <p:cond evt="onPrev" delay="0">
-                  <p:tgtEl>
-                    <p:sldTgt/>
-                  </p:tgtEl>
-                </p:cond>
-              </p:prevCondLst>
-              <p:nextCondLst>
-                <p:cond evt="onNext" delay="0">
-                  <p:tgtEl>
-                    <p:sldTgt/>
-                  </p:tgtEl>
-                </p:cond>
-              </p:nextCondLst>
-            </p:seq>
-          </p:childTnLst>
-        </p:cTn>
-      </p:par>
-    </p:tnLst>
-  </p:timing>
-</p:sld>
-</file>
-
-<file path=ppt/slides/slide21.xml><?xml version="1.0" encoding="utf-8"?>
-<p:sld xmlns:a="http://schemas.openxmlformats.org/drawingml/2006/main" xmlns:r="http://schemas.openxmlformats.org/officeDocument/2006/relationships" xmlns:p="http://schemas.openxmlformats.org/presentationml/2006/main">
-  <p:cSld>
-    <p:spTree>
-      <p:nvGrpSpPr>
-        <p:cNvPr id="1" name=""/>
-        <p:cNvGrpSpPr/>
-        <p:nvPr/>
-      </p:nvGrpSpPr>
-      <p:grpSpPr>
-        <a:xfrm>
-          <a:off x="0" y="0"/>
-          <a:ext cx="0" cy="0"/>
-          <a:chOff x="0" y="0"/>
-          <a:chExt cx="0" cy="0"/>
-        </a:xfrm>
-      </p:grpSpPr>
-      <p:sp>
-        <p:nvSpPr>
-          <p:cNvPr id="3" name="Title 2">
-            <a:extLst>
-              <a:ext uri="{FF2B5EF4-FFF2-40B4-BE49-F238E27FC236}">
-                <a16:creationId xmlns:a16="http://schemas.microsoft.com/office/drawing/2014/main" id="{0CFDF7CA-B744-B3B5-850E-543CCDA16258}"/>
-              </a:ext>
-            </a:extLst>
-          </p:cNvPr>
-          <p:cNvSpPr>
-            <a:spLocks noGrp="1"/>
-          </p:cNvSpPr>
-          <p:nvPr>
-            <p:ph type="ctrTitle"/>
-          </p:nvPr>
-        </p:nvSpPr>
-        <p:spPr/>
-        <p:txBody>
-          <a:bodyPr/>
-          <a:lstStyle/>
-          <a:p>
-            <a:r>
-              <a:rPr lang="en-US" dirty="0"/>
-              <a:t>Common loss functions</a:t>
-            </a:r>
-          </a:p>
-        </p:txBody>
-      </p:sp>
-    </p:spTree>
-    <p:extLst>
-      <p:ext uri="{BB962C8B-B14F-4D97-AF65-F5344CB8AC3E}">
-        <p14:creationId xmlns:p14="http://schemas.microsoft.com/office/powerpoint/2010/main" val="4210722022"/>
-      </p:ext>
-    </p:extLst>
-  </p:cSld>
-  <p:clrMapOvr>
-    <a:masterClrMapping/>
-  </p:clrMapOvr>
-  <p:transition>
-    <p:fade/>
-  </p:transition>
-</p:sld>
-</file>
-
-<file path=ppt/slides/slide22.xml><?xml version="1.0" encoding="utf-8"?>
-<p:sld xmlns:a="http://schemas.openxmlformats.org/drawingml/2006/main" xmlns:r="http://schemas.openxmlformats.org/officeDocument/2006/relationships" xmlns:p="http://schemas.openxmlformats.org/presentationml/2006/main">
-  <p:cSld>
-    <p:spTree>
-      <p:nvGrpSpPr>
-        <p:cNvPr id="1" name=""/>
-        <p:cNvGrpSpPr/>
-        <p:nvPr/>
-      </p:nvGrpSpPr>
-      <p:grpSpPr>
-        <a:xfrm>
-          <a:off x="0" y="0"/>
-          <a:ext cx="0" cy="0"/>
-          <a:chOff x="0" y="0"/>
-          <a:chExt cx="0" cy="0"/>
-        </a:xfrm>
-      </p:grpSpPr>
-      <mc:AlternateContent xmlns:mc="http://schemas.openxmlformats.org/markup-compatibility/2006" xmlns:a14="http://schemas.microsoft.com/office/drawing/2010/main">
-        <mc:Choice Requires="a14">
-          <p:sp>
-            <p:nvSpPr>
-              <p:cNvPr id="4" name="Content Placeholder 3">
-                <a:extLst>
-                  <a:ext uri="{FF2B5EF4-FFF2-40B4-BE49-F238E27FC236}">
-                    <a16:creationId xmlns:a16="http://schemas.microsoft.com/office/drawing/2014/main" id="{51DC6163-A954-DD59-6EC8-A66A6CED9A85}"/>
-                  </a:ext>
-                </a:extLst>
-              </p:cNvPr>
-              <p:cNvSpPr>
-                <a:spLocks noGrp="1"/>
-              </p:cNvSpPr>
-              <p:nvPr>
-                <p:ph sz="half" idx="1"/>
-              </p:nvPr>
-            </p:nvSpPr>
-            <p:spPr>
-              <a:xfrm>
-                <a:off x="711200" y="1123950"/>
-                <a:ext cx="7747000" cy="4819650"/>
-              </a:xfrm>
-            </p:spPr>
-            <p:txBody>
-              <a:bodyPr/>
-              <a:lstStyle/>
-              <a:p>
-                <a:pPr marL="0" indent="0">
-                  <a:buNone/>
-                </a:pPr>
-                <a:r>
-                  <a:rPr lang="en-US" b="1" dirty="0">
-                    <a:solidFill>
-                      <a:srgbClr val="0033CC"/>
-                    </a:solidFill>
-                  </a:rPr>
-                  <a:t>Quadratic loss		</a:t>
-                </a:r>
-                <a:r>
-                  <a:rPr lang="en-US" dirty="0"/>
-                  <a:t>(often used for regression)</a:t>
-                </a:r>
-              </a:p>
-              <a:p>
-                <a:pPr marL="0" indent="0">
-                  <a:buNone/>
-                </a:pPr>
-                <a:r>
-                  <a:rPr lang="en-US" dirty="0">
-                    <a:ea typeface="Cambria Math" charset="0"/>
-                    <a:cs typeface="Cambria Math" charset="0"/>
-                  </a:rPr>
-                  <a:t>	</a:t>
-                </a:r>
-                <a14:m>
-                  <m:oMath xmlns:m="http://schemas.openxmlformats.org/officeDocument/2006/math">
-                    <m:r>
-                      <a:rPr lang="en-US" i="1">
-                        <a:latin typeface="Cambria Math" panose="02040503050406030204" pitchFamily="18" charset="0"/>
-                        <a:ea typeface="Cambria Math" charset="0"/>
-                        <a:cs typeface="Cambria Math" charset="0"/>
-                      </a:rPr>
-                      <m:t>𝐿</m:t>
-                    </m:r>
-                    <m:d>
-                      <m:dPr>
-                        <m:ctrlPr>
-                          <a:rPr lang="en-US" i="1">
-                            <a:latin typeface="Cambria Math" panose="02040503050406030204" pitchFamily="18" charset="0"/>
-                            <a:ea typeface="Cambria Math" charset="0"/>
-                            <a:cs typeface="Cambria Math" charset="0"/>
-                          </a:rPr>
-                        </m:ctrlPr>
-                      </m:dPr>
-                      <m:e>
-                        <m:r>
-                          <a:rPr lang="en-US" i="1">
-                            <a:latin typeface="Cambria Math" panose="02040503050406030204" pitchFamily="18" charset="0"/>
-                            <a:ea typeface="Cambria Math" charset="0"/>
-                            <a:cs typeface="Cambria Math" charset="0"/>
-                          </a:rPr>
-                          <m:t>𝑦</m:t>
-                        </m:r>
-                        <m:r>
-                          <a:rPr lang="en-US" i="1">
-                            <a:latin typeface="Cambria Math" panose="02040503050406030204" pitchFamily="18" charset="0"/>
-                            <a:ea typeface="Cambria Math" charset="0"/>
-                            <a:cs typeface="Cambria Math" charset="0"/>
-                          </a:rPr>
-                          <m:t>, </m:t>
-                        </m:r>
-                        <m:r>
-                          <a:rPr lang="en-US" i="1">
-                            <a:latin typeface="Cambria Math" panose="02040503050406030204" pitchFamily="18" charset="0"/>
-                            <a:ea typeface="Cambria Math" charset="0"/>
-                            <a:cs typeface="Cambria Math" charset="0"/>
-                          </a:rPr>
-                          <m:t>𝑓</m:t>
-                        </m:r>
-                      </m:e>
-                    </m:d>
-                    <m:r>
-                      <a:rPr lang="en-US" i="1">
-                        <a:latin typeface="Cambria Math" panose="02040503050406030204" pitchFamily="18" charset="0"/>
-                      </a:rPr>
-                      <m:t>=</m:t>
-                    </m:r>
-                    <m:sSup>
-                      <m:sSupPr>
-                        <m:ctrlPr>
-                          <a:rPr lang="en-US" i="1">
-                            <a:latin typeface="Cambria Math" panose="02040503050406030204" pitchFamily="18" charset="0"/>
-                          </a:rPr>
-                        </m:ctrlPr>
-                      </m:sSupPr>
-                      <m:e>
-                        <m:d>
-                          <m:dPr>
-                            <m:ctrlPr>
-                              <a:rPr lang="en-US" i="1">
-                                <a:latin typeface="Cambria Math" panose="02040503050406030204" pitchFamily="18" charset="0"/>
-                              </a:rPr>
-                            </m:ctrlPr>
-                          </m:dPr>
-                          <m:e>
-                            <m:r>
-                              <a:rPr lang="en-US" i="1">
-                                <a:latin typeface="Cambria Math" panose="02040503050406030204" pitchFamily="18" charset="0"/>
-                              </a:rPr>
-                              <m:t>𝑦</m:t>
-                            </m:r>
-                            <m:r>
-                              <a:rPr lang="en-US" i="1">
-                                <a:latin typeface="Cambria Math" panose="02040503050406030204" pitchFamily="18" charset="0"/>
-                              </a:rPr>
-                              <m:t>−</m:t>
-                            </m:r>
-                            <m:r>
-                              <a:rPr lang="en-US" i="1">
-                                <a:latin typeface="Cambria Math" panose="02040503050406030204" pitchFamily="18" charset="0"/>
-                              </a:rPr>
-                              <m:t>𝑓</m:t>
-                            </m:r>
-                          </m:e>
-                        </m:d>
-                      </m:e>
-                      <m:sup>
-                        <m:r>
-                          <a:rPr lang="en-US" i="1">
-                            <a:latin typeface="Cambria Math" panose="02040503050406030204" pitchFamily="18" charset="0"/>
-                          </a:rPr>
-                          <m:t>2</m:t>
-                        </m:r>
-                      </m:sup>
-                    </m:sSup>
-                  </m:oMath>
-                </a14:m>
-                <a:endParaRPr lang="en-US" dirty="0"/>
-              </a:p>
-              <a:p>
-                <a:pPr marL="0" indent="0">
-                  <a:buNone/>
-                </a:pPr>
-                <a:r>
-                  <a:rPr lang="en-US" b="1" dirty="0">
-                    <a:solidFill>
-                      <a:srgbClr val="0033CC"/>
-                    </a:solidFill>
-                  </a:rPr>
-                  <a:t>Binary cross entropy		</a:t>
-                </a:r>
-                <a:r>
-                  <a:rPr lang="en-US" dirty="0"/>
-                  <a:t>(often used for classification)</a:t>
-                </a:r>
-                <a:endParaRPr lang="en-US" b="1" dirty="0">
-                  <a:solidFill>
-                    <a:srgbClr val="0033CC"/>
-                  </a:solidFill>
-                </a:endParaRPr>
-              </a:p>
-              <a:p>
-                <a:pPr marL="0" indent="0">
-                  <a:buNone/>
-                </a:pPr>
-                <a:r>
-                  <a:rPr lang="en-US" dirty="0">
-                    <a:ea typeface="Cambria Math" charset="0"/>
-                    <a:cs typeface="Cambria Math" charset="0"/>
-                  </a:rPr>
-                  <a:t>	</a:t>
-                </a:r>
-                <a14:m>
-                  <m:oMath xmlns:m="http://schemas.openxmlformats.org/officeDocument/2006/math">
-                    <m:r>
-                      <a:rPr lang="en-US" i="1">
-                        <a:latin typeface="Cambria Math" panose="02040503050406030204" pitchFamily="18" charset="0"/>
-                        <a:ea typeface="Cambria Math" charset="0"/>
-                        <a:cs typeface="Cambria Math" charset="0"/>
-                      </a:rPr>
-                      <m:t>𝐿</m:t>
-                    </m:r>
-                    <m:d>
-                      <m:dPr>
-                        <m:ctrlPr>
-                          <a:rPr lang="en-US" i="1">
-                            <a:latin typeface="Cambria Math" panose="02040503050406030204" pitchFamily="18" charset="0"/>
-                            <a:ea typeface="Cambria Math" charset="0"/>
-                            <a:cs typeface="Cambria Math" charset="0"/>
-                          </a:rPr>
-                        </m:ctrlPr>
-                      </m:dPr>
-                      <m:e>
-                        <m:r>
-                          <a:rPr lang="en-US" i="1">
-                            <a:latin typeface="Cambria Math" panose="02040503050406030204" pitchFamily="18" charset="0"/>
-                            <a:ea typeface="Cambria Math" charset="0"/>
-                            <a:cs typeface="Cambria Math" charset="0"/>
-                          </a:rPr>
-                          <m:t>𝑦</m:t>
-                        </m:r>
-                        <m:r>
-                          <a:rPr lang="en-US" i="1">
-                            <a:latin typeface="Cambria Math" panose="02040503050406030204" pitchFamily="18" charset="0"/>
-                            <a:ea typeface="Cambria Math" charset="0"/>
-                            <a:cs typeface="Cambria Math" charset="0"/>
-                          </a:rPr>
-                          <m:t>, </m:t>
-                        </m:r>
-                        <m:r>
-                          <a:rPr lang="en-US" i="1">
-                            <a:latin typeface="Cambria Math" panose="02040503050406030204" pitchFamily="18" charset="0"/>
-                            <a:ea typeface="Cambria Math" charset="0"/>
-                            <a:cs typeface="Cambria Math" charset="0"/>
-                          </a:rPr>
-                          <m:t>𝑓</m:t>
-                        </m:r>
-                      </m:e>
-                    </m:d>
-                    <m:r>
-                      <a:rPr lang="en-US" i="1">
-                        <a:latin typeface="Cambria Math" panose="02040503050406030204" pitchFamily="18" charset="0"/>
-                        <a:ea typeface="Cambria Math" charset="0"/>
-                        <a:cs typeface="Cambria Math" charset="0"/>
-                      </a:rPr>
-                      <m:t>=</m:t>
-                    </m:r>
-                    <m:r>
-                      <a:rPr lang="en-US">
-                        <a:latin typeface="Cambria Math" panose="02040503050406030204" pitchFamily="18" charset="0"/>
-                        <a:ea typeface="Cambria Math" charset="0"/>
-                        <a:cs typeface="Cambria Math" charset="0"/>
-                      </a:rPr>
-                      <m:t>−[</m:t>
-                    </m:r>
-                    <m:r>
-                      <a:rPr lang="en-US" i="1">
-                        <a:latin typeface="Cambria Math" panose="02040503050406030204" pitchFamily="18" charset="0"/>
-                        <a:ea typeface="Cambria Math" charset="0"/>
-                        <a:cs typeface="Cambria Math" charset="0"/>
-                      </a:rPr>
-                      <m:t>𝑦</m:t>
-                    </m:r>
-                    <m:func>
-                      <m:funcPr>
-                        <m:ctrlPr>
-                          <a:rPr lang="en-US" i="1">
-                            <a:latin typeface="Cambria Math" panose="02040503050406030204" pitchFamily="18" charset="0"/>
-                            <a:ea typeface="Cambria Math" charset="0"/>
-                            <a:cs typeface="Cambria Math" charset="0"/>
-                          </a:rPr>
-                        </m:ctrlPr>
-                      </m:funcPr>
-                      <m:fName>
-                        <m:r>
-                          <m:rPr>
-                            <m:sty m:val="p"/>
-                          </m:rPr>
-                          <a:rPr lang="en-US">
-                            <a:latin typeface="Cambria Math" panose="02040503050406030204" pitchFamily="18" charset="0"/>
-                            <a:ea typeface="Cambria Math" charset="0"/>
-                            <a:cs typeface="Cambria Math" charset="0"/>
-                          </a:rPr>
-                          <m:t>log</m:t>
-                        </m:r>
-                      </m:fName>
-                      <m:e>
-                        <m:r>
-                          <a:rPr lang="en-US" i="1">
-                            <a:latin typeface="Cambria Math" panose="02040503050406030204" pitchFamily="18" charset="0"/>
-                            <a:ea typeface="Cambria Math" charset="0"/>
-                            <a:cs typeface="Cambria Math" charset="0"/>
-                          </a:rPr>
-                          <m:t>𝑓</m:t>
-                        </m:r>
-                        <m:r>
-                          <a:rPr lang="en-US" i="1">
-                            <a:latin typeface="Cambria Math" panose="02040503050406030204" pitchFamily="18" charset="0"/>
-                            <a:ea typeface="Cambria Math" charset="0"/>
-                            <a:cs typeface="Cambria Math" charset="0"/>
-                          </a:rPr>
-                          <m:t>+</m:t>
-                        </m:r>
-                        <m:d>
-                          <m:dPr>
-                            <m:ctrlPr>
-                              <a:rPr lang="en-US" i="1">
-                                <a:latin typeface="Cambria Math" panose="02040503050406030204" pitchFamily="18" charset="0"/>
-                                <a:ea typeface="Cambria Math" charset="0"/>
-                                <a:cs typeface="Cambria Math" charset="0"/>
-                              </a:rPr>
-                            </m:ctrlPr>
-                          </m:dPr>
-                          <m:e>
-                            <m:r>
-                              <a:rPr lang="en-US" i="1">
-                                <a:latin typeface="Cambria Math" panose="02040503050406030204" pitchFamily="18" charset="0"/>
-                                <a:ea typeface="Cambria Math" charset="0"/>
-                                <a:cs typeface="Cambria Math" charset="0"/>
-                              </a:rPr>
-                              <m:t>1−</m:t>
-                            </m:r>
-                            <m:r>
-                              <a:rPr lang="en-US" i="1">
-                                <a:latin typeface="Cambria Math" panose="02040503050406030204" pitchFamily="18" charset="0"/>
-                                <a:ea typeface="Cambria Math" charset="0"/>
-                                <a:cs typeface="Cambria Math" charset="0"/>
-                              </a:rPr>
-                              <m:t>𝑦</m:t>
-                            </m:r>
-                          </m:e>
-                        </m:d>
-                        <m:func>
-                          <m:funcPr>
-                            <m:ctrlPr>
-                              <a:rPr lang="en-US" i="1">
-                                <a:latin typeface="Cambria Math" panose="02040503050406030204" pitchFamily="18" charset="0"/>
-                                <a:ea typeface="Cambria Math" charset="0"/>
-                                <a:cs typeface="Cambria Math" charset="0"/>
-                              </a:rPr>
-                            </m:ctrlPr>
-                          </m:funcPr>
-                          <m:fName>
-                            <m:r>
-                              <m:rPr>
-                                <m:sty m:val="p"/>
-                              </m:rPr>
-                              <a:rPr lang="en-US">
-                                <a:latin typeface="Cambria Math" panose="02040503050406030204" pitchFamily="18" charset="0"/>
-                                <a:ea typeface="Cambria Math" charset="0"/>
-                                <a:cs typeface="Cambria Math" charset="0"/>
-                              </a:rPr>
-                              <m:t>log</m:t>
-                            </m:r>
-                          </m:fName>
-                          <m:e>
-                            <m:r>
-                              <a:rPr lang="en-US" i="1">
-                                <a:latin typeface="Cambria Math" panose="02040503050406030204" pitchFamily="18" charset="0"/>
-                                <a:ea typeface="Cambria Math" charset="0"/>
-                                <a:cs typeface="Cambria Math" charset="0"/>
-                              </a:rPr>
-                              <m:t>(1−</m:t>
-                            </m:r>
-                            <m:r>
-                              <a:rPr lang="en-US" i="1">
-                                <a:latin typeface="Cambria Math" panose="02040503050406030204" pitchFamily="18" charset="0"/>
-                                <a:ea typeface="Cambria Math" charset="0"/>
-                                <a:cs typeface="Cambria Math" charset="0"/>
-                              </a:rPr>
-                              <m:t>𝑓</m:t>
-                            </m:r>
-                            <m:r>
-                              <a:rPr lang="en-US" i="1">
-                                <a:latin typeface="Cambria Math" panose="02040503050406030204" pitchFamily="18" charset="0"/>
-                                <a:ea typeface="Cambria Math" charset="0"/>
-                                <a:cs typeface="Cambria Math" charset="0"/>
-                              </a:rPr>
-                              <m:t>)</m:t>
-                            </m:r>
-                          </m:e>
-                        </m:func>
-                      </m:e>
-                    </m:func>
-                    <m:r>
-                      <a:rPr lang="en-US">
-                        <a:latin typeface="Cambria Math" panose="02040503050406030204" pitchFamily="18" charset="0"/>
-                        <a:ea typeface="Cambria Math" charset="0"/>
-                        <a:cs typeface="Cambria Math" charset="0"/>
-                      </a:rPr>
-                      <m:t>]</m:t>
-                    </m:r>
-                  </m:oMath>
-                </a14:m>
-                <a:endParaRPr lang="en-US" dirty="0">
-                  <a:latin typeface="Cambria Math" panose="02040503050406030204" pitchFamily="18" charset="0"/>
-                  <a:ea typeface="Cambria Math" charset="0"/>
-                  <a:cs typeface="Cambria Math" charset="0"/>
-                </a:endParaRPr>
-              </a:p>
-              <a:p>
-                <a:pPr marL="0" indent="0">
-                  <a:buNone/>
-                </a:pPr>
-                <a:r>
-                  <a:rPr lang="en-US" b="1" dirty="0">
-                    <a:solidFill>
-                      <a:srgbClr val="0033CC"/>
-                    </a:solidFill>
-                    <a:latin typeface="Cambria Math" panose="02040503050406030204" pitchFamily="18" charset="0"/>
-                    <a:ea typeface="Cambria Math" charset="0"/>
-                    <a:cs typeface="Cambria Math" charset="0"/>
-                  </a:rPr>
-                  <a:t>Exponential loss		</a:t>
-                </a:r>
-              </a:p>
-              <a:p>
-                <a:pPr marL="0" indent="0">
-                  <a:buNone/>
-                </a:pPr>
-                <a:r>
-                  <a:rPr lang="en-US" dirty="0">
-                    <a:ea typeface="Cambria Math" charset="0"/>
-                    <a:cs typeface="Cambria Math" charset="0"/>
-                  </a:rPr>
-                  <a:t>	</a:t>
-                </a:r>
-                <a14:m>
-                  <m:oMath xmlns:m="http://schemas.openxmlformats.org/officeDocument/2006/math">
-                    <m:r>
-                      <a:rPr lang="en-US" i="1">
-                        <a:latin typeface="Cambria Math" panose="02040503050406030204" pitchFamily="18" charset="0"/>
-                        <a:ea typeface="Cambria Math" charset="0"/>
-                        <a:cs typeface="Cambria Math" charset="0"/>
-                      </a:rPr>
-                      <m:t>𝐿</m:t>
-                    </m:r>
-                    <m:d>
-                      <m:dPr>
-                        <m:ctrlPr>
-                          <a:rPr lang="en-US" i="1">
-                            <a:latin typeface="Cambria Math" panose="02040503050406030204" pitchFamily="18" charset="0"/>
-                            <a:ea typeface="Cambria Math" charset="0"/>
-                            <a:cs typeface="Cambria Math" charset="0"/>
-                          </a:rPr>
-                        </m:ctrlPr>
-                      </m:dPr>
-                      <m:e>
-                        <m:r>
-                          <a:rPr lang="en-US" i="1">
-                            <a:latin typeface="Cambria Math" panose="02040503050406030204" pitchFamily="18" charset="0"/>
-                            <a:ea typeface="Cambria Math" charset="0"/>
-                            <a:cs typeface="Cambria Math" charset="0"/>
-                          </a:rPr>
-                          <m:t>𝑦</m:t>
-                        </m:r>
-                        <m:r>
-                          <a:rPr lang="en-US" i="1">
-                            <a:latin typeface="Cambria Math" panose="02040503050406030204" pitchFamily="18" charset="0"/>
-                            <a:ea typeface="Cambria Math" charset="0"/>
-                            <a:cs typeface="Cambria Math" charset="0"/>
-                          </a:rPr>
-                          <m:t>, </m:t>
-                        </m:r>
-                        <m:r>
-                          <a:rPr lang="en-US" i="1">
-                            <a:latin typeface="Cambria Math" panose="02040503050406030204" pitchFamily="18" charset="0"/>
-                            <a:ea typeface="Cambria Math" charset="0"/>
-                            <a:cs typeface="Cambria Math" charset="0"/>
-                          </a:rPr>
-                          <m:t>𝑓</m:t>
-                        </m:r>
-                      </m:e>
-                    </m:d>
-                    <m:r>
-                      <a:rPr lang="en-US" i="1">
-                        <a:latin typeface="Cambria Math" panose="02040503050406030204" pitchFamily="18" charset="0"/>
-                        <a:ea typeface="Cambria Math" charset="0"/>
-                        <a:cs typeface="Cambria Math" charset="0"/>
-                      </a:rPr>
-                      <m:t>=</m:t>
-                    </m:r>
-                    <m:func>
-                      <m:funcPr>
-                        <m:ctrlPr>
-                          <a:rPr lang="en-US" i="1">
-                            <a:latin typeface="Cambria Math" panose="02040503050406030204" pitchFamily="18" charset="0"/>
-                            <a:ea typeface="Cambria Math" charset="0"/>
-                            <a:cs typeface="Cambria Math" charset="0"/>
-                          </a:rPr>
-                        </m:ctrlPr>
-                      </m:funcPr>
-                      <m:fName>
-                        <m:r>
-                          <m:rPr>
-                            <m:sty m:val="p"/>
-                          </m:rPr>
-                          <a:rPr lang="en-US">
-                            <a:latin typeface="Cambria Math" panose="02040503050406030204" pitchFamily="18" charset="0"/>
-                            <a:ea typeface="Cambria Math" charset="0"/>
-                            <a:cs typeface="Cambria Math" charset="0"/>
-                          </a:rPr>
-                          <m:t>exp</m:t>
-                        </m:r>
-                      </m:fName>
-                      <m:e>
-                        <m:r>
-                          <a:rPr lang="en-US" i="1">
-                            <a:latin typeface="Cambria Math" panose="02040503050406030204" pitchFamily="18" charset="0"/>
-                            <a:ea typeface="Cambria Math" charset="0"/>
-                            <a:cs typeface="Cambria Math" charset="0"/>
-                          </a:rPr>
-                          <m:t>(−</m:t>
-                        </m:r>
-                        <m:r>
-                          <a:rPr lang="en-US" i="1">
-                            <a:latin typeface="Cambria Math" panose="02040503050406030204" pitchFamily="18" charset="0"/>
-                            <a:ea typeface="Cambria Math" charset="0"/>
-                            <a:cs typeface="Cambria Math" charset="0"/>
-                          </a:rPr>
-                          <m:t>𝑤𝑦𝑓</m:t>
-                        </m:r>
-                        <m:r>
-                          <a:rPr lang="en-US" i="1">
-                            <a:latin typeface="Cambria Math" panose="02040503050406030204" pitchFamily="18" charset="0"/>
-                            <a:ea typeface="Cambria Math" charset="0"/>
-                            <a:cs typeface="Cambria Math" charset="0"/>
-                          </a:rPr>
-                          <m:t>/2)</m:t>
-                        </m:r>
-                      </m:e>
-                    </m:func>
-                  </m:oMath>
-                </a14:m>
-                <a:endParaRPr lang="en-US" dirty="0">
-                  <a:latin typeface="Cambria Math" panose="02040503050406030204" pitchFamily="18" charset="0"/>
-                  <a:ea typeface="Cambria Math" charset="0"/>
-                  <a:cs typeface="Cambria Math" charset="0"/>
-                </a:endParaRPr>
-              </a:p>
-              <a:p>
-                <a:pPr marL="0" indent="0">
-                  <a:buNone/>
-                </a:pPr>
-                <a:r>
-                  <a:rPr lang="en-US" b="1" dirty="0">
-                    <a:solidFill>
-                      <a:srgbClr val="0033CC"/>
-                    </a:solidFill>
-                    <a:latin typeface="Cambria Math" panose="02040503050406030204" pitchFamily="18" charset="0"/>
-                    <a:ea typeface="Cambria Math" charset="0"/>
-                  </a:rPr>
-                  <a:t>Quantile loss (</a:t>
-                </a:r>
-                <a14:m>
-                  <m:oMath xmlns:m="http://schemas.openxmlformats.org/officeDocument/2006/math">
-                    <m:r>
-                      <a:rPr lang="en-US" b="1" i="1">
-                        <a:solidFill>
-                          <a:srgbClr val="0033CC"/>
-                        </a:solidFill>
-                        <a:latin typeface="Cambria Math" panose="02040503050406030204" pitchFamily="18" charset="0"/>
-                        <a:ea typeface="Cambria Math" charset="0"/>
-                      </a:rPr>
-                      <m:t>𝟎</m:t>
-                    </m:r>
-                    <m:r>
-                      <a:rPr lang="en-US" b="1" i="1">
-                        <a:solidFill>
-                          <a:srgbClr val="0033CC"/>
-                        </a:solidFill>
-                        <a:latin typeface="Cambria Math" panose="02040503050406030204" pitchFamily="18" charset="0"/>
-                        <a:ea typeface="Cambria Math" panose="02040503050406030204" pitchFamily="18" charset="0"/>
-                      </a:rPr>
-                      <m:t>≤</m:t>
-                    </m:r>
-                    <m:r>
-                      <a:rPr lang="en-US" b="1" i="1">
-                        <a:solidFill>
-                          <a:srgbClr val="0033CC"/>
-                        </a:solidFill>
-                        <a:latin typeface="Cambria Math" panose="02040503050406030204" pitchFamily="18" charset="0"/>
-                        <a:ea typeface="Cambria Math" panose="02040503050406030204" pitchFamily="18" charset="0"/>
-                      </a:rPr>
-                      <m:t>𝝉</m:t>
-                    </m:r>
-                    <m:r>
-                      <a:rPr lang="en-US" b="1" i="1">
-                        <a:solidFill>
-                          <a:srgbClr val="0033CC"/>
-                        </a:solidFill>
-                        <a:latin typeface="Cambria Math" panose="02040503050406030204" pitchFamily="18" charset="0"/>
-                        <a:ea typeface="Cambria Math" panose="02040503050406030204" pitchFamily="18" charset="0"/>
-                      </a:rPr>
-                      <m:t>≤</m:t>
-                    </m:r>
-                    <m:r>
-                      <a:rPr lang="en-US" b="1" i="1">
-                        <a:solidFill>
-                          <a:srgbClr val="0033CC"/>
-                        </a:solidFill>
-                        <a:latin typeface="Cambria Math" panose="02040503050406030204" pitchFamily="18" charset="0"/>
-                        <a:ea typeface="Cambria Math" panose="02040503050406030204" pitchFamily="18" charset="0"/>
-                      </a:rPr>
-                      <m:t>𝟏</m:t>
-                    </m:r>
-                  </m:oMath>
-                </a14:m>
-                <a:r>
-                  <a:rPr lang="en-US" b="1" dirty="0">
-                    <a:solidFill>
-                      <a:srgbClr val="0033CC"/>
-                    </a:solidFill>
-                    <a:latin typeface="Cambria Math" panose="02040503050406030204" pitchFamily="18" charset="0"/>
-                    <a:ea typeface="Cambria Math" charset="0"/>
-                  </a:rPr>
-                  <a:t>)	</a:t>
-                </a:r>
-              </a:p>
-              <a:p>
-                <a:pPr marL="0" indent="0">
-                  <a:buNone/>
-                </a:pPr>
-                <a:r>
-                  <a:rPr lang="en-US" dirty="0">
-                    <a:latin typeface="Cambria Math" panose="02040503050406030204" pitchFamily="18" charset="0"/>
-                    <a:ea typeface="Cambria Math" charset="0"/>
-                  </a:rPr>
-                  <a:t>	</a:t>
-                </a:r>
-                <a14:m>
-                  <m:oMath xmlns:m="http://schemas.openxmlformats.org/officeDocument/2006/math">
-                    <m:r>
-                      <a:rPr lang="en-US" i="1">
-                        <a:latin typeface="Cambria Math" panose="02040503050406030204" pitchFamily="18" charset="0"/>
-                        <a:ea typeface="Cambria Math" charset="0"/>
-                        <a:cs typeface="Cambria Math" charset="0"/>
-                      </a:rPr>
-                      <m:t>𝐿</m:t>
-                    </m:r>
-                    <m:d>
-                      <m:dPr>
-                        <m:ctrlPr>
-                          <a:rPr lang="en-US" i="1">
-                            <a:latin typeface="Cambria Math" panose="02040503050406030204" pitchFamily="18" charset="0"/>
-                            <a:ea typeface="Cambria Math" charset="0"/>
-                            <a:cs typeface="Cambria Math" charset="0"/>
-                          </a:rPr>
-                        </m:ctrlPr>
-                      </m:dPr>
-                      <m:e>
-                        <m:r>
-                          <a:rPr lang="en-US" i="1">
-                            <a:latin typeface="Cambria Math" panose="02040503050406030204" pitchFamily="18" charset="0"/>
-                            <a:ea typeface="Cambria Math" charset="0"/>
-                            <a:cs typeface="Cambria Math" charset="0"/>
-                          </a:rPr>
-                          <m:t>𝑦</m:t>
-                        </m:r>
-                        <m:r>
-                          <a:rPr lang="en-US" i="1">
-                            <a:latin typeface="Cambria Math" panose="02040503050406030204" pitchFamily="18" charset="0"/>
-                            <a:ea typeface="Cambria Math" charset="0"/>
-                            <a:cs typeface="Cambria Math" charset="0"/>
-                          </a:rPr>
-                          <m:t>, </m:t>
-                        </m:r>
-                        <m:r>
-                          <a:rPr lang="en-US" i="1">
-                            <a:latin typeface="Cambria Math" panose="02040503050406030204" pitchFamily="18" charset="0"/>
-                            <a:ea typeface="Cambria Math" charset="0"/>
-                            <a:cs typeface="Cambria Math" charset="0"/>
-                          </a:rPr>
-                          <m:t>𝑓</m:t>
-                        </m:r>
-                      </m:e>
-                    </m:d>
-                    <m:r>
-                      <a:rPr lang="en-US" i="1">
-                        <a:latin typeface="Cambria Math" panose="02040503050406030204" pitchFamily="18" charset="0"/>
-                        <a:ea typeface="Cambria Math" charset="0"/>
-                        <a:cs typeface="Cambria Math" charset="0"/>
-                      </a:rPr>
-                      <m:t>=</m:t>
-                    </m:r>
-                    <m:d>
-                      <m:dPr>
-                        <m:begChr m:val="{"/>
-                        <m:endChr m:val=""/>
-                        <m:ctrlPr>
-                          <a:rPr lang="en-US" i="1">
-                            <a:latin typeface="Cambria Math" panose="02040503050406030204" pitchFamily="18" charset="0"/>
-                            <a:ea typeface="Cambria Math" charset="0"/>
-                          </a:rPr>
-                        </m:ctrlPr>
-                      </m:dPr>
-                      <m:e>
-                        <m:eqArr>
-                          <m:eqArrPr>
-                            <m:ctrlPr>
-                              <a:rPr lang="en-US" i="1">
-                                <a:latin typeface="Cambria Math" panose="02040503050406030204" pitchFamily="18" charset="0"/>
-                                <a:ea typeface="Cambria Math" charset="0"/>
-                              </a:rPr>
-                            </m:ctrlPr>
-                          </m:eqArrPr>
-                          <m:e>
-                            <m:r>
-                              <a:rPr lang="en-US" i="1">
-                                <a:latin typeface="Cambria Math" panose="02040503050406030204" pitchFamily="18" charset="0"/>
-                                <a:ea typeface="Cambria Math" charset="0"/>
-                              </a:rPr>
-                              <m:t>𝜏</m:t>
-                            </m:r>
-                            <m:d>
-                              <m:dPr>
-                                <m:ctrlPr>
-                                  <a:rPr lang="en-US" i="1">
-                                    <a:latin typeface="Cambria Math" panose="02040503050406030204" pitchFamily="18" charset="0"/>
-                                    <a:ea typeface="Cambria Math" charset="0"/>
-                                  </a:rPr>
-                                </m:ctrlPr>
-                              </m:dPr>
-                              <m:e>
-                                <m:r>
-                                  <a:rPr lang="en-US" i="1">
-                                    <a:latin typeface="Cambria Math" panose="02040503050406030204" pitchFamily="18" charset="0"/>
-                                    <a:ea typeface="Cambria Math" charset="0"/>
-                                  </a:rPr>
-                                  <m:t>𝑦</m:t>
-                                </m:r>
-                                <m:r>
-                                  <a:rPr lang="en-US" i="1">
-                                    <a:latin typeface="Cambria Math" panose="02040503050406030204" pitchFamily="18" charset="0"/>
-                                    <a:ea typeface="Cambria Math" charset="0"/>
-                                  </a:rPr>
-                                  <m:t>−</m:t>
-                                </m:r>
-                                <m:r>
-                                  <a:rPr lang="en-US" i="1">
-                                    <a:latin typeface="Cambria Math" panose="02040503050406030204" pitchFamily="18" charset="0"/>
-                                    <a:ea typeface="Cambria Math" charset="0"/>
-                                  </a:rPr>
-                                  <m:t>𝑓</m:t>
-                                </m:r>
-                              </m:e>
-                            </m:d>
-                            <m:r>
-                              <a:rPr lang="en-US" i="1">
-                                <a:latin typeface="Cambria Math" panose="02040503050406030204" pitchFamily="18" charset="0"/>
-                                <a:ea typeface="Cambria Math" charset="0"/>
-                              </a:rPr>
-                              <m:t>              </m:t>
-                            </m:r>
-                            <m:r>
-                              <a:rPr lang="en-US" i="1">
-                                <a:latin typeface="Cambria Math" panose="02040503050406030204" pitchFamily="18" charset="0"/>
-                                <a:ea typeface="Cambria Math" charset="0"/>
-                              </a:rPr>
-                              <m:t>𝑦</m:t>
-                            </m:r>
-                            <m:r>
-                              <a:rPr lang="en-US" i="1">
-                                <a:latin typeface="Cambria Math" panose="02040503050406030204" pitchFamily="18" charset="0"/>
-                                <a:ea typeface="Cambria Math" panose="02040503050406030204" pitchFamily="18" charset="0"/>
-                              </a:rPr>
-                              <m:t>≥</m:t>
-                            </m:r>
-                            <m:r>
-                              <a:rPr lang="en-US" i="1">
-                                <a:latin typeface="Cambria Math" panose="02040503050406030204" pitchFamily="18" charset="0"/>
-                                <a:ea typeface="Cambria Math" panose="02040503050406030204" pitchFamily="18" charset="0"/>
-                              </a:rPr>
-                              <m:t>𝑓</m:t>
-                            </m:r>
-                            <m:r>
-                              <a:rPr lang="en-US" i="1">
-                                <a:latin typeface="Cambria Math" panose="02040503050406030204" pitchFamily="18" charset="0"/>
-                                <a:ea typeface="Cambria Math" charset="0"/>
-                              </a:rPr>
-                              <m:t> </m:t>
-                            </m:r>
-                          </m:e>
-                          <m:e>
-                            <m:d>
-                              <m:dPr>
-                                <m:ctrlPr>
-                                  <a:rPr lang="en-US" i="1">
-                                    <a:latin typeface="Cambria Math" panose="02040503050406030204" pitchFamily="18" charset="0"/>
-                                  </a:rPr>
-                                </m:ctrlPr>
-                              </m:dPr>
-                              <m:e>
-                                <m:r>
-                                  <a:rPr lang="en-US" i="1">
-                                    <a:latin typeface="Cambria Math" panose="02040503050406030204" pitchFamily="18" charset="0"/>
-                                  </a:rPr>
-                                  <m:t>1−</m:t>
-                                </m:r>
-                                <m:r>
-                                  <a:rPr lang="en-US" i="1">
-                                    <a:latin typeface="Cambria Math" panose="02040503050406030204" pitchFamily="18" charset="0"/>
-                                  </a:rPr>
-                                  <m:t>𝜏</m:t>
-                                </m:r>
-                              </m:e>
-                            </m:d>
-                            <m:d>
-                              <m:dPr>
-                                <m:ctrlPr>
-                                  <a:rPr lang="en-US" i="1">
-                                    <a:latin typeface="Cambria Math" panose="02040503050406030204" pitchFamily="18" charset="0"/>
-                                  </a:rPr>
-                                </m:ctrlPr>
-                              </m:dPr>
-                              <m:e>
-                                <m:r>
-                                  <a:rPr lang="en-US" i="1">
-                                    <a:latin typeface="Cambria Math" panose="02040503050406030204" pitchFamily="18" charset="0"/>
-                                  </a:rPr>
-                                  <m:t>𝑓</m:t>
-                                </m:r>
-                                <m:r>
-                                  <a:rPr lang="en-US" i="1">
-                                    <a:latin typeface="Cambria Math" panose="02040503050406030204" pitchFamily="18" charset="0"/>
-                                  </a:rPr>
-                                  <m:t>−</m:t>
-                                </m:r>
-                                <m:r>
-                                  <a:rPr lang="en-US" i="1">
-                                    <a:latin typeface="Cambria Math" panose="02040503050406030204" pitchFamily="18" charset="0"/>
-                                  </a:rPr>
-                                  <m:t>𝑦</m:t>
-                                </m:r>
-                              </m:e>
-                            </m:d>
-                            <m:r>
-                              <a:rPr lang="en-US" i="1">
-                                <a:latin typeface="Cambria Math" panose="02040503050406030204" pitchFamily="18" charset="0"/>
-                              </a:rPr>
-                              <m:t>  </m:t>
-                            </m:r>
-                            <m:r>
-                              <a:rPr lang="en-US" i="1">
-                                <a:latin typeface="Cambria Math" panose="02040503050406030204" pitchFamily="18" charset="0"/>
-                              </a:rPr>
-                              <m:t>𝑦</m:t>
-                            </m:r>
-                            <m:r>
-                              <a:rPr lang="en-US" i="1">
-                                <a:latin typeface="Cambria Math" panose="02040503050406030204" pitchFamily="18" charset="0"/>
-                              </a:rPr>
-                              <m:t>&lt;</m:t>
-                            </m:r>
-                            <m:r>
-                              <a:rPr lang="en-US" i="1">
-                                <a:latin typeface="Cambria Math" panose="02040503050406030204" pitchFamily="18" charset="0"/>
-                              </a:rPr>
-                              <m:t>𝑓</m:t>
-                            </m:r>
-                          </m:e>
-                        </m:eqArr>
-                      </m:e>
-                    </m:d>
-                  </m:oMath>
-                </a14:m>
-                <a:endParaRPr lang="en-US" dirty="0"/>
-              </a:p>
-              <a:p>
-                <a:pPr marL="0" indent="0">
-                  <a:buNone/>
-                </a:pPr>
-                <a:r>
-                  <a:rPr lang="en-US" dirty="0">
-                    <a:solidFill>
-                      <a:srgbClr val="0033CC"/>
-                    </a:solidFill>
-                  </a:rPr>
-                  <a:t>Zero-One loss</a:t>
-                </a:r>
-              </a:p>
-              <a:p>
-                <a:pPr marL="0" indent="0">
-                  <a:buNone/>
-                </a:pPr>
-                <a14:m>
-                  <m:oMathPara xmlns:m="http://schemas.openxmlformats.org/officeDocument/2006/math">
-                    <m:oMathParaPr>
-                      <m:jc m:val="centerGroup"/>
-                    </m:oMathParaPr>
-                    <m:oMath xmlns:m="http://schemas.openxmlformats.org/officeDocument/2006/math">
-                      <m:r>
-                        <a:rPr lang="en-US" i="1">
-                          <a:latin typeface="Cambria Math" panose="02040503050406030204" pitchFamily="18" charset="0"/>
-                          <a:ea typeface="Cambria Math" charset="0"/>
-                          <a:cs typeface="Cambria Math" charset="0"/>
-                        </a:rPr>
-                        <m:t>𝐿</m:t>
-                      </m:r>
-                      <m:d>
-                        <m:dPr>
-                          <m:ctrlPr>
-                            <a:rPr lang="en-US" i="1">
-                              <a:latin typeface="Cambria Math" panose="02040503050406030204" pitchFamily="18" charset="0"/>
-                              <a:ea typeface="Cambria Math" charset="0"/>
-                              <a:cs typeface="Cambria Math" charset="0"/>
-                            </a:rPr>
-                          </m:ctrlPr>
-                        </m:dPr>
-                        <m:e>
-                          <m:r>
-                            <a:rPr lang="en-US" i="1">
-                              <a:latin typeface="Cambria Math" panose="02040503050406030204" pitchFamily="18" charset="0"/>
-                              <a:ea typeface="Cambria Math" charset="0"/>
-                              <a:cs typeface="Cambria Math" charset="0"/>
-                            </a:rPr>
-                            <m:t>𝑦</m:t>
-                          </m:r>
-                          <m:r>
-                            <a:rPr lang="en-US" i="1">
-                              <a:latin typeface="Cambria Math" panose="02040503050406030204" pitchFamily="18" charset="0"/>
-                              <a:ea typeface="Cambria Math" charset="0"/>
-                              <a:cs typeface="Cambria Math" charset="0"/>
-                            </a:rPr>
-                            <m:t>, </m:t>
-                          </m:r>
-                          <m:r>
-                            <a:rPr lang="en-US" i="1">
-                              <a:latin typeface="Cambria Math" panose="02040503050406030204" pitchFamily="18" charset="0"/>
-                              <a:ea typeface="Cambria Math" charset="0"/>
-                              <a:cs typeface="Cambria Math" charset="0"/>
-                            </a:rPr>
-                            <m:t>𝑓</m:t>
-                          </m:r>
-                        </m:e>
-                      </m:d>
-                      <m:r>
-                        <a:rPr lang="en-US" i="1">
-                          <a:latin typeface="Cambria Math" panose="02040503050406030204" pitchFamily="18" charset="0"/>
-                          <a:ea typeface="Cambria Math" charset="0"/>
-                          <a:cs typeface="Cambria Math" charset="0"/>
-                        </a:rPr>
-                        <m:t>=</m:t>
-                      </m:r>
-                      <m:d>
-                        <m:dPr>
-                          <m:begChr m:val="{"/>
-                          <m:endChr m:val=""/>
-                          <m:ctrlPr>
-                            <a:rPr lang="en-US" i="1">
-                              <a:latin typeface="Cambria Math" panose="02040503050406030204" pitchFamily="18" charset="0"/>
-                              <a:ea typeface="Cambria Math" charset="0"/>
-                            </a:rPr>
-                          </m:ctrlPr>
-                        </m:dPr>
-                        <m:e>
-                          <m:eqArr>
-                            <m:eqArrPr>
-                              <m:ctrlPr>
-                                <a:rPr lang="en-US" b="0" i="1" smtClean="0">
-                                  <a:latin typeface="Cambria Math" panose="02040503050406030204" pitchFamily="18" charset="0"/>
-                                  <a:ea typeface="Cambria Math" charset="0"/>
-                                </a:rPr>
-                              </m:ctrlPr>
-                            </m:eqArrPr>
-                            <m:e>
-                              <m:r>
-                                <a:rPr lang="en-US" b="0" i="1" smtClean="0">
-                                  <a:latin typeface="Cambria Math" panose="02040503050406030204" pitchFamily="18" charset="0"/>
-                                  <a:ea typeface="Cambria Math" charset="0"/>
-                                </a:rPr>
-                                <m:t>0          |</m:t>
-                              </m:r>
-                              <m:r>
-                                <a:rPr lang="en-US" b="0" i="1" smtClean="0">
-                                  <a:latin typeface="Cambria Math" panose="02040503050406030204" pitchFamily="18" charset="0"/>
-                                  <a:ea typeface="Cambria Math" charset="0"/>
-                                </a:rPr>
-                                <m:t>𝑦</m:t>
-                              </m:r>
-                              <m:r>
-                                <a:rPr lang="en-US" b="0" i="1" smtClean="0">
-                                  <a:latin typeface="Cambria Math" panose="02040503050406030204" pitchFamily="18" charset="0"/>
-                                  <a:ea typeface="Cambria Math" charset="0"/>
-                                </a:rPr>
-                                <m:t>−</m:t>
-                              </m:r>
-                              <m:r>
-                                <a:rPr lang="en-US" b="0" i="1" smtClean="0">
-                                  <a:latin typeface="Cambria Math" panose="02040503050406030204" pitchFamily="18" charset="0"/>
-                                  <a:ea typeface="Cambria Math" charset="0"/>
-                                </a:rPr>
-                                <m:t>𝑓</m:t>
-                              </m:r>
-                              <m:r>
-                                <a:rPr lang="en-US" b="0" i="1" smtClean="0">
-                                  <a:latin typeface="Cambria Math" panose="02040503050406030204" pitchFamily="18" charset="0"/>
-                                  <a:ea typeface="Cambria Math" charset="0"/>
-                                </a:rPr>
-                                <m:t>|≤</m:t>
-                              </m:r>
-                              <m:r>
-                                <a:rPr lang="en-US" b="0" i="1" smtClean="0">
-                                  <a:latin typeface="Cambria Math" panose="02040503050406030204" pitchFamily="18" charset="0"/>
-                                  <a:ea typeface="Cambria Math" panose="02040503050406030204" pitchFamily="18" charset="0"/>
-                                </a:rPr>
-                                <m:t>𝑏</m:t>
-                              </m:r>
-                            </m:e>
-                            <m:e>
-                              <m:r>
-                                <a:rPr lang="en-US" b="0" i="1" smtClean="0">
-                                  <a:latin typeface="Cambria Math" panose="02040503050406030204" pitchFamily="18" charset="0"/>
-                                  <a:ea typeface="Cambria Math" charset="0"/>
-                                </a:rPr>
-                                <m:t> 1          </m:t>
-                              </m:r>
-                              <m:d>
-                                <m:dPr>
-                                  <m:begChr m:val="|"/>
-                                  <m:endChr m:val="|"/>
-                                  <m:ctrlPr>
-                                    <a:rPr lang="en-US" b="0" i="1" smtClean="0">
-                                      <a:latin typeface="Cambria Math" panose="02040503050406030204" pitchFamily="18" charset="0"/>
-                                      <a:ea typeface="Cambria Math" charset="0"/>
-                                    </a:rPr>
-                                  </m:ctrlPr>
-                                </m:dPr>
-                                <m:e>
-                                  <m:r>
-                                    <a:rPr lang="en-US" b="0" i="1" smtClean="0">
-                                      <a:latin typeface="Cambria Math" panose="02040503050406030204" pitchFamily="18" charset="0"/>
-                                      <a:ea typeface="Cambria Math" charset="0"/>
-                                    </a:rPr>
-                                    <m:t>𝑦</m:t>
-                                  </m:r>
-                                  <m:r>
-                                    <a:rPr lang="en-US" b="0" i="1" smtClean="0">
-                                      <a:latin typeface="Cambria Math" panose="02040503050406030204" pitchFamily="18" charset="0"/>
-                                      <a:ea typeface="Cambria Math" charset="0"/>
-                                    </a:rPr>
-                                    <m:t>−</m:t>
-                                  </m:r>
-                                  <m:r>
-                                    <a:rPr lang="en-US" b="0" i="1" smtClean="0">
-                                      <a:latin typeface="Cambria Math" panose="02040503050406030204" pitchFamily="18" charset="0"/>
-                                      <a:ea typeface="Cambria Math" charset="0"/>
-                                    </a:rPr>
-                                    <m:t>𝑓</m:t>
-                                  </m:r>
-                                </m:e>
-                              </m:d>
-                              <m:r>
-                                <a:rPr lang="en-US" b="0" i="1" smtClean="0">
-                                  <a:latin typeface="Cambria Math" panose="02040503050406030204" pitchFamily="18" charset="0"/>
-                                  <a:ea typeface="Cambria Math" charset="0"/>
-                                </a:rPr>
-                                <m:t>&gt;</m:t>
-                              </m:r>
-                              <m:r>
-                                <a:rPr lang="en-US" b="0" i="1" smtClean="0">
-                                  <a:latin typeface="Cambria Math" panose="02040503050406030204" pitchFamily="18" charset="0"/>
-                                  <a:ea typeface="Cambria Math" charset="0"/>
-                                </a:rPr>
-                                <m:t>𝑏</m:t>
-                              </m:r>
-                              <m:r>
-                                <a:rPr lang="en-US" b="0" i="1" smtClean="0">
-                                  <a:latin typeface="Cambria Math" panose="02040503050406030204" pitchFamily="18" charset="0"/>
-                                  <a:ea typeface="Cambria Math" charset="0"/>
-                                </a:rPr>
-                                <m:t> </m:t>
-                              </m:r>
-                            </m:e>
-                          </m:eqArr>
-                        </m:e>
-                      </m:d>
-                    </m:oMath>
-                  </m:oMathPara>
-                </a14:m>
-                <a:endParaRPr lang="en-US" dirty="0"/>
-              </a:p>
-              <a:p>
-                <a:pPr marL="0" indent="0">
-                  <a:buNone/>
-                </a:pPr>
-                <a:endParaRPr lang="en-US" dirty="0"/>
-              </a:p>
-            </p:txBody>
-          </p:sp>
-        </mc:Choice>
-        <mc:Fallback xmlns="">
-          <p:sp>
-            <p:nvSpPr>
-              <p:cNvPr id="4" name="Content Placeholder 3">
-                <a:extLst>
-                  <a:ext uri="{FF2B5EF4-FFF2-40B4-BE49-F238E27FC236}">
-                    <a16:creationId xmlns:a16="http://schemas.microsoft.com/office/drawing/2014/main" id="{51DC6163-A954-DD59-6EC8-A66A6CED9A85}"/>
-                  </a:ext>
-                </a:extLst>
-              </p:cNvPr>
-              <p:cNvSpPr>
-                <a:spLocks noGrp="1" noRot="1" noChangeAspect="1" noMove="1" noResize="1" noEditPoints="1" noAdjustHandles="1" noChangeArrowheads="1" noChangeShapeType="1" noTextEdit="1"/>
-              </p:cNvSpPr>
-              <p:nvPr>
-                <p:ph sz="half" idx="1"/>
-              </p:nvPr>
-            </p:nvSpPr>
-            <p:spPr>
-              <a:xfrm>
-                <a:off x="711200" y="1123950"/>
-                <a:ext cx="7747000" cy="4819650"/>
-              </a:xfrm>
-              <a:blipFill>
-                <a:blip r:embed="rId2"/>
-                <a:stretch>
-                  <a:fillRect l="-1309" t="-1050" b="-65879"/>
-                </a:stretch>
-              </a:blipFill>
-            </p:spPr>
-            <p:txBody>
-              <a:bodyPr/>
-              <a:lstStyle/>
-              <a:p>
-                <a:r>
-                  <a:rPr lang="en-US">
-                    <a:noFill/>
-                  </a:rPr>
-                  <a:t> </a:t>
-                </a:r>
-              </a:p>
-            </p:txBody>
-          </p:sp>
-        </mc:Fallback>
-      </mc:AlternateContent>
-      <p:sp>
-        <p:nvSpPr>
-          <p:cNvPr id="3" name="Title 2">
-            <a:extLst>
-              <a:ext uri="{FF2B5EF4-FFF2-40B4-BE49-F238E27FC236}">
-                <a16:creationId xmlns:a16="http://schemas.microsoft.com/office/drawing/2014/main" id="{B7724020-1E2E-A9CD-0218-AB93D86BC677}"/>
-              </a:ext>
-            </a:extLst>
-          </p:cNvPr>
-          <p:cNvSpPr>
-            <a:spLocks noGrp="1"/>
-          </p:cNvSpPr>
-          <p:nvPr>
-            <p:ph type="title"/>
-          </p:nvPr>
-        </p:nvSpPr>
-        <p:spPr/>
-        <p:txBody>
-          <a:bodyPr/>
-          <a:lstStyle/>
-          <a:p>
-            <a:r>
-              <a:rPr lang="en-US" dirty="0"/>
-              <a:t>Common Loss Functions (1)</a:t>
-            </a:r>
-          </a:p>
-        </p:txBody>
-      </p:sp>
-    </p:spTree>
-    <p:extLst>
-      <p:ext uri="{BB962C8B-B14F-4D97-AF65-F5344CB8AC3E}">
-        <p14:creationId xmlns:p14="http://schemas.microsoft.com/office/powerpoint/2010/main" val="3100751115"/>
-      </p:ext>
-    </p:extLst>
-  </p:cSld>
-  <p:clrMapOvr>
-    <a:masterClrMapping/>
-  </p:clrMapOvr>
-</p:sld>
-</file>
-
-<file path=ppt/slides/slide23.xml><?xml version="1.0" encoding="utf-8"?>
 <p:sld xmlns:a="http://schemas.openxmlformats.org/drawingml/2006/main" xmlns:r="http://schemas.openxmlformats.org/officeDocument/2006/relationships" xmlns:p="http://schemas.openxmlformats.org/presentationml/2006/main">
   <p:cSld>
     <p:spTree>
@@ -15830,10 +12935,7 @@
                 </a:pPr>
                 <a14:m>
                   <m:oMathPara xmlns:m="http://schemas.openxmlformats.org/officeDocument/2006/math">
-                    <m:oMathParaPr>
-                      <m:jc m:val="centerGroup"/>
-                    </m:oMathParaPr>
-                    <m:oMath xmlns:m="http://schemas.openxmlformats.org/officeDocument/2006/math">
+                    <m:oMath>
                       <m:nary>
                         <m:naryPr>
                           <m:limLoc m:val="undOvr"/>
@@ -16095,7 +13197,7 @@
                     <m:d>
                       <m:dPr>
                         <m:ctrlPr>
-                          <a:rPr lang="en-US" i="1">
+                          <a:rPr lang="en-US" b="0" i="1" smtClean="0">
                             <a:solidFill>
                               <a:srgbClr val="0033CC"/>
                             </a:solidFill>
@@ -16278,7 +13380,7 @@
                     <m:oMathParaPr>
                       <m:jc m:val="left"/>
                     </m:oMathParaPr>
-                    <m:oMath xmlns:m="http://schemas.openxmlformats.org/officeDocument/2006/math">
+                    <m:oMath>
                       <m:r>
                         <a:rPr lang="en-US" i="1" dirty="0" smtClean="0">
                           <a:latin typeface="Cambria Math" panose="02040503050406030204" pitchFamily="18" charset="0"/>
@@ -16376,7 +13478,7 @@
                             <m:dPr>
                               <m:endChr m:val="|"/>
                               <m:ctrlPr>
-                                <a:rPr lang="en-US" i="1">
+                                <a:rPr lang="en-US" b="0" i="1" smtClean="0">
                                   <a:latin typeface="Cambria Math" panose="02040503050406030204" pitchFamily="18" charset="0"/>
                                 </a:rPr>
                               </m:ctrlPr>
@@ -16696,7 +13798,7 @@
 </p:sld>
 </file>
 
-<file path=ppt/slides/slide24.xml><?xml version="1.0" encoding="utf-8"?>
+<file path=ppt/slides/slide21.xml><?xml version="1.0" encoding="utf-8"?>
 <p:sld xmlns:a="http://schemas.openxmlformats.org/drawingml/2006/main" xmlns:r="http://schemas.openxmlformats.org/officeDocument/2006/relationships" xmlns:p="http://schemas.openxmlformats.org/presentationml/2006/main">
   <p:cSld>
     <p:spTree>
@@ -16780,7 +13882,7 @@
                     <m:func>
                       <m:funcPr>
                         <m:ctrlPr>
-                          <a:rPr lang="en-US" i="1">
+                          <a:rPr lang="en-US">
                             <a:solidFill>
                               <a:srgbClr val="0033CC"/>
                             </a:solidFill>
@@ -16870,7 +13972,7 @@
                         <m:func>
                           <m:funcPr>
                             <m:ctrlPr>
-                              <a:rPr lang="en-US" i="1">
+                              <a:rPr lang="en-US">
                                 <a:solidFill>
                                   <a:srgbClr val="0033CC"/>
                                 </a:solidFill>
@@ -16960,10 +14062,7 @@
                 </a:pPr>
                 <a14:m>
                   <m:oMathPara xmlns:m="http://schemas.openxmlformats.org/officeDocument/2006/math">
-                    <m:oMathParaPr>
-                      <m:jc m:val="centerGroup"/>
-                    </m:oMathParaPr>
-                    <m:oMath xmlns:m="http://schemas.openxmlformats.org/officeDocument/2006/math">
+                    <m:oMath>
                       <m:nary>
                         <m:naryPr>
                           <m:limLoc m:val="undOvr"/>
@@ -17099,10 +14198,7 @@
                 </a:pPr>
                 <a14:m>
                   <m:oMathPara xmlns:m="http://schemas.openxmlformats.org/officeDocument/2006/math">
-                    <m:oMathParaPr>
-                      <m:jc m:val="centerGroup"/>
-                    </m:oMathParaPr>
-                    <m:oMath xmlns:m="http://schemas.openxmlformats.org/officeDocument/2006/math">
+                    <m:oMath>
                       <m:nary>
                         <m:naryPr>
                           <m:limLoc m:val="undOvr"/>
@@ -17131,7 +14227,7 @@
                               <m:f>
                                 <m:fPr>
                                   <m:ctrlPr>
-                                    <a:rPr lang="en-US" i="1" smtClean="0">
+                                    <a:rPr lang="en-US" b="0" i="1" smtClean="0">
                                       <a:latin typeface="Cambria Math" panose="02040503050406030204" pitchFamily="18" charset="0"/>
                                     </a:rPr>
                                   </m:ctrlPr>
@@ -17356,10 +14452,7 @@
                 </a:pPr>
                 <a14:m>
                   <m:oMathPara xmlns:m="http://schemas.openxmlformats.org/officeDocument/2006/math">
-                    <m:oMathParaPr>
-                      <m:jc m:val="centerGroup"/>
-                    </m:oMathParaPr>
-                    <m:oMath xmlns:m="http://schemas.openxmlformats.org/officeDocument/2006/math">
+                    <m:oMath>
                       <m:r>
                         <a:rPr lang="en-US" b="0" i="1" smtClean="0">
                           <a:latin typeface="Cambria Math" panose="02040503050406030204" pitchFamily="18" charset="0"/>
@@ -17369,7 +14462,7 @@
                       <m:f>
                         <m:fPr>
                           <m:ctrlPr>
-                            <a:rPr lang="en-US" i="1" smtClean="0">
+                            <a:rPr lang="en-US" b="0" i="1" smtClean="0">
                               <a:latin typeface="Cambria Math" panose="02040503050406030204" pitchFamily="18" charset="0"/>
                             </a:rPr>
                           </m:ctrlPr>
@@ -17639,7 +14732,7 @@
                     <m:oMathParaPr>
                       <m:jc m:val="left"/>
                     </m:oMathParaPr>
-                    <m:oMath xmlns:m="http://schemas.openxmlformats.org/officeDocument/2006/math">
+                    <m:oMath>
                       <m:r>
                         <a:rPr lang="en-US" i="1" dirty="0" smtClean="0">
                           <a:latin typeface="Cambria Math" panose="02040503050406030204" pitchFamily="18" charset="0"/>
@@ -18194,7 +15287,7 @@
 </p:sld>
 </file>
 
-<file path=ppt/slides/slide25.xml><?xml version="1.0" encoding="utf-8"?>
+<file path=ppt/slides/slide22.xml><?xml version="1.0" encoding="utf-8"?>
 <p:sld xmlns:a="http://schemas.openxmlformats.org/drawingml/2006/main" xmlns:r="http://schemas.openxmlformats.org/officeDocument/2006/relationships" xmlns:p="http://schemas.openxmlformats.org/presentationml/2006/main">
   <p:cSld>
     <p:spTree>
@@ -18254,10 +15347,7 @@
                 </a:pPr>
                 <a14:m>
                   <m:oMathPara xmlns:m="http://schemas.openxmlformats.org/officeDocument/2006/math">
-                    <m:oMathParaPr>
-                      <m:jc m:val="centerGroup"/>
-                    </m:oMathParaPr>
-                    <m:oMath xmlns:m="http://schemas.openxmlformats.org/officeDocument/2006/math">
+                    <m:oMath>
                       <m:r>
                         <a:rPr lang="en-US" i="1" dirty="0">
                           <a:latin typeface="Cambria Math" panose="02040503050406030204" pitchFamily="18" charset="0"/>
@@ -19343,7 +16433,7 @@
 </p:sld>
 </file>
 
-<file path=ppt/slides/slide26.xml><?xml version="1.0" encoding="utf-8"?>
+<file path=ppt/slides/slide23.xml><?xml version="1.0" encoding="utf-8"?>
 <p:sld xmlns:a="http://schemas.openxmlformats.org/drawingml/2006/main" xmlns:r="http://schemas.openxmlformats.org/officeDocument/2006/relationships" xmlns:p="http://schemas.openxmlformats.org/presentationml/2006/main">
   <p:cSld>
     <p:spTree>
@@ -19664,7 +16754,7 @@
                     <m:d>
                       <m:dPr>
                         <m:ctrlPr>
-                          <a:rPr lang="en-US" i="1">
+                          <a:rPr lang="en-US" b="0" i="1">
                             <a:solidFill>
                               <a:srgbClr val="0033CC"/>
                             </a:solidFill>
@@ -19713,7 +16803,7 @@
                     <m:d>
                       <m:dPr>
                         <m:ctrlPr>
-                          <a:rPr lang="en-US" i="1">
+                          <a:rPr lang="en-US" b="0" i="1" smtClean="0">
                             <a:solidFill>
                               <a:srgbClr val="0033CC"/>
                             </a:solidFill>
@@ -19849,7 +16939,7 @@
 </p:sld>
 </file>
 
-<file path=ppt/slides/slide27.xml><?xml version="1.0" encoding="utf-8"?>
+<file path=ppt/slides/slide24.xml><?xml version="1.0" encoding="utf-8"?>
 <p:sld xmlns:a="http://schemas.openxmlformats.org/drawingml/2006/main" xmlns:r="http://schemas.openxmlformats.org/officeDocument/2006/relationships" xmlns:p="http://schemas.openxmlformats.org/presentationml/2006/main">
   <p:cSld>
     <p:spTree>
@@ -19857,7 +16947,7 @@
         <p:cNvPr id="1" name="">
           <a:extLst>
             <a:ext uri="{FF2B5EF4-FFF2-40B4-BE49-F238E27FC236}">
-              <a16:creationId xmlns:a16="http://schemas.microsoft.com/office/drawing/2014/main" id="{C4B0FA07-4D08-91C5-822D-EA30DA04B7A9}"/>
+              <a16:creationId xmlns:a16="http://schemas.microsoft.com/office/drawing/2014/main" id="{2930BD22-A552-7619-8B27-EBFA13453DA8}"/>
             </a:ext>
           </a:extLst>
         </p:cNvPr>
@@ -19879,7 +16969,7 @@
               <p:cNvPr id="4" name="Content Placeholder 3">
                 <a:extLst>
                   <a:ext uri="{FF2B5EF4-FFF2-40B4-BE49-F238E27FC236}">
-                    <a16:creationId xmlns:a16="http://schemas.microsoft.com/office/drawing/2014/main" id="{84FBE111-5277-6CD5-CDB1-358D32EF551E}"/>
+                    <a16:creationId xmlns:a16="http://schemas.microsoft.com/office/drawing/2014/main" id="{1E630BBC-189E-5D63-12C1-97C1E92F8F38}"/>
                   </a:ext>
                 </a:extLst>
               </p:cNvPr>
@@ -19890,12 +16980,7 @@
                 <p:ph sz="half" idx="1"/>
               </p:nvPr>
             </p:nvSpPr>
-            <p:spPr>
-              <a:xfrm>
-                <a:off x="711200" y="1295400"/>
-                <a:ext cx="7747000" cy="4819650"/>
-              </a:xfrm>
-            </p:spPr>
+            <p:spPr/>
             <p:txBody>
               <a:bodyPr/>
               <a:lstStyle/>
@@ -19904,19 +16989,370 @@
                   <a:buNone/>
                 </a:pPr>
                 <a:r>
+                  <a:rPr lang="en-US" b="1" dirty="0"/>
+                  <a:t>Stochastic Gradient Descent</a:t>
+                </a:r>
+              </a:p>
+              <a:p>
+                <a:r>
                   <a:rPr lang="en-US" dirty="0"/>
-                  <a:t>When the training dataset is balanced, the classification probability </a:t>
+                  <a:t>Many (1</a:t>
+                </a:r>
+                <a:r>
+                  <a:rPr lang="en-US" baseline="30000" dirty="0"/>
+                  <a:t>st</a:t>
+                </a:r>
+                <a:r>
+                  <a:rPr lang="en-US" dirty="0"/>
+                  <a:t>-order) minimization algorithms are variations of the following algorithm:</a:t>
+                </a:r>
+                <a:endParaRPr lang="en-US" i="1" dirty="0">
+                  <a:solidFill>
+                    <a:srgbClr val="000000"/>
+                  </a:solidFill>
+                  <a:latin typeface="Cambria Math" panose="02040503050406030204" pitchFamily="18" charset="0"/>
+                  <a:ea typeface="Cambria Math" panose="02040503050406030204" pitchFamily="18" charset="0"/>
+                </a:endParaRPr>
+              </a:p>
+              <a:p>
+                <a:pPr marL="0" indent="0">
+                  <a:buNone/>
+                </a:pPr>
+                <a14:m>
+                  <m:oMathPara xmlns:m="http://schemas.openxmlformats.org/officeDocument/2006/math">
+                    <m:oMath>
+                      <m:sSub>
+                        <m:sSubPr>
+                          <m:ctrlPr>
+                            <a:rPr lang="en-US" i="1">
+                              <a:solidFill>
+                                <a:srgbClr val="000000"/>
+                              </a:solidFill>
+                              <a:latin typeface="Cambria Math" panose="02040503050406030204" pitchFamily="18" charset="0"/>
+                              <a:ea typeface="Cambria Math" panose="02040503050406030204" pitchFamily="18" charset="0"/>
+                            </a:rPr>
+                          </m:ctrlPr>
+                        </m:sSubPr>
+                        <m:e>
+                          <m:r>
+                            <a:rPr lang="en-US" i="1">
+                              <a:solidFill>
+                                <a:srgbClr val="000000"/>
+                              </a:solidFill>
+                              <a:latin typeface="Cambria Math" panose="02040503050406030204" pitchFamily="18" charset="0"/>
+                              <a:ea typeface="Cambria Math" panose="02040503050406030204" pitchFamily="18" charset="0"/>
+                            </a:rPr>
+                            <m:t>𝜔</m:t>
+                          </m:r>
+                        </m:e>
+                        <m:sub>
+                          <m:r>
+                            <a:rPr lang="en-US" i="1">
+                              <a:solidFill>
+                                <a:srgbClr val="000000"/>
+                              </a:solidFill>
+                              <a:latin typeface="Cambria Math" panose="02040503050406030204" pitchFamily="18" charset="0"/>
+                              <a:ea typeface="Cambria Math" panose="02040503050406030204" pitchFamily="18" charset="0"/>
+                            </a:rPr>
+                            <m:t>𝑗</m:t>
+                          </m:r>
+                          <m:r>
+                            <a:rPr lang="en-US" i="1">
+                              <a:solidFill>
+                                <a:srgbClr val="000000"/>
+                              </a:solidFill>
+                              <a:latin typeface="Cambria Math" panose="02040503050406030204" pitchFamily="18" charset="0"/>
+                              <a:ea typeface="Cambria Math" panose="02040503050406030204" pitchFamily="18" charset="0"/>
+                            </a:rPr>
+                            <m:t>+1</m:t>
+                          </m:r>
+                        </m:sub>
+                      </m:sSub>
+                      <m:r>
+                        <a:rPr lang="en-US" i="1">
+                          <a:solidFill>
+                            <a:srgbClr val="000000"/>
+                          </a:solidFill>
+                          <a:latin typeface="Cambria Math" panose="02040503050406030204" pitchFamily="18" charset="0"/>
+                          <a:ea typeface="Cambria Math" panose="02040503050406030204" pitchFamily="18" charset="0"/>
+                        </a:rPr>
+                        <m:t>=</m:t>
+                      </m:r>
+                      <m:sSub>
+                        <m:sSubPr>
+                          <m:ctrlPr>
+                            <a:rPr lang="en-US" i="1">
+                              <a:solidFill>
+                                <a:srgbClr val="000000"/>
+                              </a:solidFill>
+                              <a:latin typeface="Cambria Math" panose="02040503050406030204" pitchFamily="18" charset="0"/>
+                              <a:ea typeface="Cambria Math" panose="02040503050406030204" pitchFamily="18" charset="0"/>
+                            </a:rPr>
+                          </m:ctrlPr>
+                        </m:sSubPr>
+                        <m:e>
+                          <m:r>
+                            <a:rPr lang="en-US" i="1">
+                              <a:solidFill>
+                                <a:srgbClr val="000000"/>
+                              </a:solidFill>
+                              <a:latin typeface="Cambria Math" panose="02040503050406030204" pitchFamily="18" charset="0"/>
+                              <a:ea typeface="Cambria Math" panose="02040503050406030204" pitchFamily="18" charset="0"/>
+                            </a:rPr>
+                            <m:t>𝜔</m:t>
+                          </m:r>
+                        </m:e>
+                        <m:sub>
+                          <m:r>
+                            <a:rPr lang="en-US" i="1">
+                              <a:solidFill>
+                                <a:srgbClr val="000000"/>
+                              </a:solidFill>
+                              <a:latin typeface="Cambria Math" panose="02040503050406030204" pitchFamily="18" charset="0"/>
+                              <a:ea typeface="Cambria Math" panose="02040503050406030204" pitchFamily="18" charset="0"/>
+                            </a:rPr>
+                            <m:t>𝑗</m:t>
+                          </m:r>
+                        </m:sub>
+                      </m:sSub>
+                      <m:r>
+                        <a:rPr lang="en-US" i="1">
+                          <a:solidFill>
+                            <a:srgbClr val="000000"/>
+                          </a:solidFill>
+                          <a:latin typeface="Cambria Math" charset="0"/>
+                          <a:ea typeface="Cambria Math" charset="0"/>
+                          <a:cs typeface="Cambria Math" charset="0"/>
+                        </a:rPr>
+                        <m:t>−</m:t>
+                      </m:r>
+                      <m:r>
+                        <a:rPr lang="en-US" i="1">
+                          <a:solidFill>
+                            <a:srgbClr val="0033CC"/>
+                          </a:solidFill>
+                          <a:latin typeface="Cambria Math" panose="02040503050406030204" pitchFamily="18" charset="0"/>
+                          <a:ea typeface="Cambria Math" panose="02040503050406030204" pitchFamily="18" charset="0"/>
+                          <a:cs typeface="Cambria Math" charset="0"/>
+                        </a:rPr>
+                        <m:t>𝜂</m:t>
+                      </m:r>
+                      <m:r>
+                        <m:rPr>
+                          <m:sty m:val="p"/>
+                        </m:rPr>
+                        <a:rPr lang="en-US" i="1">
+                          <a:latin typeface="Cambria Math" panose="02040503050406030204" pitchFamily="18" charset="0"/>
+                          <a:ea typeface="Cambria Math" panose="02040503050406030204" pitchFamily="18" charset="0"/>
+                          <a:cs typeface="Cambria Math" charset="0"/>
+                        </a:rPr>
+                        <m:t>∇</m:t>
+                      </m:r>
+                      <m:r>
+                        <a:rPr lang="en-US" i="1">
+                          <a:latin typeface="Cambria Math" panose="02040503050406030204" pitchFamily="18" charset="0"/>
+                          <a:ea typeface="Cambria Math" panose="02040503050406030204" pitchFamily="18" charset="0"/>
+                          <a:cs typeface="Cambria Math" charset="0"/>
+                        </a:rPr>
+                        <m:t>𝑅</m:t>
+                      </m:r>
+                    </m:oMath>
+                  </m:oMathPara>
+                </a14:m>
+                <a:endParaRPr lang="en-US" dirty="0">
+                  <a:ea typeface="Cambria Math" panose="02040503050406030204" pitchFamily="18" charset="0"/>
+                  <a:cs typeface="Cambria Math" charset="0"/>
+                </a:endParaRPr>
+              </a:p>
+              <a:p>
+                <a:r>
+                  <a:rPr lang="en-US" dirty="0"/>
+                  <a:t>Batches of data are used, which introduces noise into </a:t>
                 </a:r>
                 <a14:m>
                   <m:oMath xmlns:m="http://schemas.openxmlformats.org/officeDocument/2006/math">
                     <m:r>
-                      <a:rPr lang="en-US" i="1" smtClean="0">
+                      <m:rPr>
+                        <m:sty m:val="p"/>
+                      </m:rPr>
+                      <a:rPr lang="en-US" i="1">
+                        <a:latin typeface="Cambria Math" panose="02040503050406030204" pitchFamily="18" charset="0"/>
+                        <a:ea typeface="Cambria Math" panose="02040503050406030204" pitchFamily="18" charset="0"/>
+                        <a:cs typeface="Cambria Math" charset="0"/>
+                      </a:rPr>
+                      <m:t>∇</m:t>
+                    </m:r>
+                    <m:r>
+                      <a:rPr lang="en-US" i="1">
+                        <a:latin typeface="Cambria Math" panose="02040503050406030204" pitchFamily="18" charset="0"/>
+                        <a:ea typeface="Cambria Math" panose="02040503050406030204" pitchFamily="18" charset="0"/>
+                        <a:cs typeface="Cambria Math" charset="0"/>
+                      </a:rPr>
+                      <m:t>𝑅</m:t>
+                    </m:r>
+                  </m:oMath>
+                </a14:m>
+                <a:r>
+                  <a:rPr lang="en-US" dirty="0"/>
+                  <a:t>.</a:t>
+                </a:r>
+                <a:br>
+                  <a:rPr lang="en-US" dirty="0"/>
+                </a:br>
+                <a:endParaRPr lang="en-US" dirty="0"/>
+              </a:p>
+              <a:p>
+                <a:pPr marL="0" indent="0">
+                  <a:buNone/>
+                </a:pPr>
+                <a:r>
+                  <a:rPr lang="en-US" b="1" dirty="0"/>
+                  <a:t>Risk Minimization</a:t>
+                </a:r>
+              </a:p>
+              <a:p>
+                <a:r>
+                  <a:rPr lang="en-US" dirty="0"/>
+                  <a:t>Given a data set </a:t>
+                </a:r>
+                <a14:m>
+                  <m:oMath xmlns:m="http://schemas.openxmlformats.org/officeDocument/2006/math">
+                    <m:r>
+                      <a:rPr lang="en-US" i="1">
                         <a:solidFill>
                           <a:srgbClr val="0033CC"/>
                         </a:solidFill>
                         <a:latin typeface="Cambria Math" panose="02040503050406030204" pitchFamily="18" charset="0"/>
                       </a:rPr>
-                      <m:t>𝑝</m:t>
+                      <m:t>𝐷</m:t>
+                    </m:r>
+                    <m:r>
+                      <a:rPr lang="en-US" i="1">
+                        <a:solidFill>
+                          <a:srgbClr val="0033CC"/>
+                        </a:solidFill>
+                        <a:latin typeface="Cambria Math" panose="02040503050406030204" pitchFamily="18" charset="0"/>
+                      </a:rPr>
+                      <m:t>=</m:t>
+                    </m:r>
+                    <m:sSubSup>
+                      <m:sSubSupPr>
+                        <m:ctrlPr>
+                          <a:rPr lang="en-US" i="1">
+                            <a:solidFill>
+                              <a:srgbClr val="0033CC"/>
+                            </a:solidFill>
+                            <a:latin typeface="Cambria Math" panose="02040503050406030204" pitchFamily="18" charset="0"/>
+                          </a:rPr>
+                        </m:ctrlPr>
+                      </m:sSubSupPr>
+                      <m:e>
+                        <m:d>
+                          <m:dPr>
+                            <m:begChr m:val="{"/>
+                            <m:endChr m:val="}"/>
+                            <m:ctrlPr>
+                              <a:rPr lang="en-US" i="1">
+                                <a:solidFill>
+                                  <a:srgbClr val="0033CC"/>
+                                </a:solidFill>
+                                <a:latin typeface="Cambria Math" panose="02040503050406030204" pitchFamily="18" charset="0"/>
+                              </a:rPr>
+                            </m:ctrlPr>
+                          </m:dPr>
+                          <m:e>
+                            <m:d>
+                              <m:dPr>
+                                <m:ctrlPr>
+                                  <a:rPr lang="en-US" i="1">
+                                    <a:solidFill>
+                                      <a:srgbClr val="0033CC"/>
+                                    </a:solidFill>
+                                    <a:latin typeface="Cambria Math" panose="02040503050406030204" pitchFamily="18" charset="0"/>
+                                  </a:rPr>
+                                </m:ctrlPr>
+                              </m:dPr>
+                              <m:e>
+                                <m:r>
+                                  <a:rPr lang="en-US" i="1">
+                                    <a:solidFill>
+                                      <a:srgbClr val="0033CC"/>
+                                    </a:solidFill>
+                                    <a:latin typeface="Cambria Math" panose="02040503050406030204" pitchFamily="18" charset="0"/>
+                                  </a:rPr>
+                                  <m:t>𝑥</m:t>
+                                </m:r>
+                                <m:r>
+                                  <a:rPr lang="en-US" i="1">
+                                    <a:solidFill>
+                                      <a:srgbClr val="0033CC"/>
+                                    </a:solidFill>
+                                    <a:latin typeface="Cambria Math" panose="02040503050406030204" pitchFamily="18" charset="0"/>
+                                  </a:rPr>
+                                  <m:t>,</m:t>
+                                </m:r>
+                                <m:r>
+                                  <a:rPr lang="en-US" i="1">
+                                    <a:solidFill>
+                                      <a:srgbClr val="0033CC"/>
+                                    </a:solidFill>
+                                    <a:latin typeface="Cambria Math" panose="02040503050406030204" pitchFamily="18" charset="0"/>
+                                  </a:rPr>
+                                  <m:t>𝑦</m:t>
+                                </m:r>
+                              </m:e>
+                            </m:d>
+                          </m:e>
+                        </m:d>
+                      </m:e>
+                      <m:sub>
+                        <m:r>
+                          <a:rPr lang="en-US" i="1">
+                            <a:solidFill>
+                              <a:srgbClr val="0033CC"/>
+                            </a:solidFill>
+                            <a:latin typeface="Cambria Math" panose="02040503050406030204" pitchFamily="18" charset="0"/>
+                          </a:rPr>
+                          <m:t>𝑖</m:t>
+                        </m:r>
+                        <m:r>
+                          <a:rPr lang="en-US" i="1">
+                            <a:solidFill>
+                              <a:srgbClr val="0033CC"/>
+                            </a:solidFill>
+                            <a:latin typeface="Cambria Math" panose="02040503050406030204" pitchFamily="18" charset="0"/>
+                          </a:rPr>
+                          <m:t>=1</m:t>
+                        </m:r>
+                      </m:sub>
+                      <m:sup>
+                        <m:r>
+                          <a:rPr lang="en-US" i="1">
+                            <a:solidFill>
+                              <a:srgbClr val="0033CC"/>
+                            </a:solidFill>
+                            <a:latin typeface="Cambria Math" panose="02040503050406030204" pitchFamily="18" charset="0"/>
+                          </a:rPr>
+                          <m:t>𝑁</m:t>
+                        </m:r>
+                      </m:sup>
+                    </m:sSubSup>
+                  </m:oMath>
+                </a14:m>
+                <a:r>
+                  <a:rPr lang="en-US" dirty="0"/>
+                  <a:t>, a model </a:t>
+                </a:r>
+                <a14:m>
+                  <m:oMath xmlns:m="http://schemas.openxmlformats.org/officeDocument/2006/math">
+                    <m:r>
+                      <a:rPr lang="en-US" i="1">
+                        <a:solidFill>
+                          <a:srgbClr val="0033CC"/>
+                        </a:solidFill>
+                        <a:latin typeface="Cambria Math" panose="02040503050406030204" pitchFamily="18" charset="0"/>
+                      </a:rPr>
+                      <m:t>𝑓</m:t>
                     </m:r>
                     <m:d>
                       <m:dPr>
@@ -19931,18 +17367,7 @@
                       </m:dPr>
                       <m:e>
                         <m:r>
-                          <a:rPr lang="en-US" b="0" i="1" smtClean="0">
-                            <a:solidFill>
-                              <a:srgbClr val="0033CC"/>
-                            </a:solidFill>
-                            <a:latin typeface="Cambria Math" panose="02040503050406030204" pitchFamily="18" charset="0"/>
-                          </a:rPr>
-                          <m:t>1</m:t>
-                        </m:r>
-                      </m:e>
-                      <m:e>
-                        <m:r>
-                          <a:rPr lang="en-US" b="0" i="1" smtClean="0">
+                          <a:rPr lang="en-US" i="1">
                             <a:solidFill>
                               <a:srgbClr val="0033CC"/>
                             </a:solidFill>
@@ -19950,30 +17375,235 @@
                           </a:rPr>
                           <m:t>𝑥</m:t>
                         </m:r>
+                        <m:r>
+                          <a:rPr lang="en-US" i="1">
+                            <a:solidFill>
+                              <a:srgbClr val="0033CC"/>
+                            </a:solidFill>
+                            <a:latin typeface="Cambria Math" panose="02040503050406030204" pitchFamily="18" charset="0"/>
+                          </a:rPr>
+                          <m:t>,</m:t>
+                        </m:r>
+                        <m:r>
+                          <a:rPr lang="en-US" i="1">
+                            <a:solidFill>
+                              <a:srgbClr val="0033CC"/>
+                            </a:solidFill>
+                            <a:latin typeface="Cambria Math" panose="02040503050406030204" pitchFamily="18" charset="0"/>
+                          </a:rPr>
+                          <m:t>𝜔</m:t>
+                        </m:r>
                       </m:e>
                     </m:d>
                   </m:oMath>
                 </a14:m>
                 <a:r>
                   <a:rPr lang="en-US" dirty="0"/>
-                  <a:t>, which in physics is often refer to as a </a:t>
+                  <a:t>, and a loss function </a:t>
                 </a:r>
+                <a14:m>
+                  <m:oMath xmlns:m="http://schemas.openxmlformats.org/officeDocument/2006/math">
+                    <m:r>
+                      <a:rPr lang="en-US" i="1">
+                        <a:solidFill>
+                          <a:srgbClr val="0033CC"/>
+                        </a:solidFill>
+                        <a:latin typeface="Cambria Math" panose="02040503050406030204" pitchFamily="18" charset="0"/>
+                      </a:rPr>
+                      <m:t>𝐿</m:t>
+                    </m:r>
+                    <m:r>
+                      <a:rPr lang="en-US" i="1">
+                        <a:solidFill>
+                          <a:srgbClr val="0033CC"/>
+                        </a:solidFill>
+                        <a:latin typeface="Cambria Math" panose="02040503050406030204" pitchFamily="18" charset="0"/>
+                      </a:rPr>
+                      <m:t>(</m:t>
+                    </m:r>
+                    <m:r>
+                      <a:rPr lang="en-US" i="1">
+                        <a:solidFill>
+                          <a:srgbClr val="0033CC"/>
+                        </a:solidFill>
+                        <a:latin typeface="Cambria Math" panose="02040503050406030204" pitchFamily="18" charset="0"/>
+                      </a:rPr>
+                      <m:t>𝑦</m:t>
+                    </m:r>
+                    <m:r>
+                      <a:rPr lang="en-US" i="1">
+                        <a:solidFill>
+                          <a:srgbClr val="0033CC"/>
+                        </a:solidFill>
+                        <a:latin typeface="Cambria Math" panose="02040503050406030204" pitchFamily="18" charset="0"/>
+                      </a:rPr>
+                      <m:t>, </m:t>
+                    </m:r>
+                    <m:r>
+                      <a:rPr lang="en-US" i="1">
+                        <a:solidFill>
+                          <a:srgbClr val="0033CC"/>
+                        </a:solidFill>
+                        <a:latin typeface="Cambria Math" panose="02040503050406030204" pitchFamily="18" charset="0"/>
+                      </a:rPr>
+                      <m:t>𝑓</m:t>
+                    </m:r>
+                    <m:r>
+                      <a:rPr lang="en-US" i="1">
+                        <a:solidFill>
+                          <a:srgbClr val="0033CC"/>
+                        </a:solidFill>
+                        <a:latin typeface="Cambria Math" panose="02040503050406030204" pitchFamily="18" charset="0"/>
+                      </a:rPr>
+                      <m:t>)</m:t>
+                    </m:r>
+                  </m:oMath>
+                </a14:m>
                 <a:r>
-                  <a:rPr lang="en-US" b="1" dirty="0">
+                  <a:rPr lang="en-US" dirty="0"/>
+                  <a:t>, the optimal function </a:t>
+                </a:r>
+                <a14:m>
+                  <m:oMath xmlns:m="http://schemas.openxmlformats.org/officeDocument/2006/math">
+                    <m:sSup>
+                      <m:sSupPr>
+                        <m:ctrlPr>
+                          <a:rPr lang="en-US" i="1">
+                            <a:solidFill>
+                              <a:srgbClr val="0033CC"/>
+                            </a:solidFill>
+                            <a:latin typeface="Cambria Math" panose="02040503050406030204" pitchFamily="18" charset="0"/>
+                          </a:rPr>
+                        </m:ctrlPr>
+                      </m:sSupPr>
+                      <m:e>
+                        <m:r>
+                          <a:rPr lang="en-US" i="1">
+                            <a:solidFill>
+                              <a:srgbClr val="0033CC"/>
+                            </a:solidFill>
+                            <a:latin typeface="Cambria Math" panose="02040503050406030204" pitchFamily="18" charset="0"/>
+                          </a:rPr>
+                          <m:t>𝑓</m:t>
+                        </m:r>
+                      </m:e>
+                      <m:sup>
+                        <m:r>
+                          <a:rPr lang="en-US" i="1">
+                            <a:solidFill>
+                              <a:srgbClr val="0033CC"/>
+                            </a:solidFill>
+                            <a:latin typeface="Cambria Math" panose="02040503050406030204" pitchFamily="18" charset="0"/>
+                          </a:rPr>
+                          <m:t>∗</m:t>
+                        </m:r>
+                      </m:sup>
+                    </m:sSup>
+                    <m:r>
+                      <a:rPr lang="en-US" i="1">
+                        <a:solidFill>
+                          <a:srgbClr val="0033CC"/>
+                        </a:solidFill>
+                        <a:latin typeface="Cambria Math" panose="02040503050406030204" pitchFamily="18" charset="0"/>
+                      </a:rPr>
+                      <m:t>=</m:t>
+                    </m:r>
+                    <m:r>
+                      <a:rPr lang="en-US" i="1">
+                        <a:solidFill>
+                          <a:srgbClr val="0033CC"/>
+                        </a:solidFill>
+                        <a:latin typeface="Cambria Math" panose="02040503050406030204" pitchFamily="18" charset="0"/>
+                      </a:rPr>
+                      <m:t>𝑓</m:t>
+                    </m:r>
+                    <m:r>
+                      <a:rPr lang="en-US" i="1">
+                        <a:solidFill>
+                          <a:srgbClr val="0033CC"/>
+                        </a:solidFill>
+                        <a:latin typeface="Cambria Math" panose="02040503050406030204" pitchFamily="18" charset="0"/>
+                      </a:rPr>
+                      <m:t>(</m:t>
+                    </m:r>
+                    <m:r>
+                      <a:rPr lang="en-US" i="1">
+                        <a:solidFill>
+                          <a:srgbClr val="0033CC"/>
+                        </a:solidFill>
+                        <a:latin typeface="Cambria Math" panose="02040503050406030204" pitchFamily="18" charset="0"/>
+                      </a:rPr>
+                      <m:t>𝑥</m:t>
+                    </m:r>
+                    <m:r>
+                      <a:rPr lang="en-US" i="1">
+                        <a:solidFill>
+                          <a:srgbClr val="0033CC"/>
+                        </a:solidFill>
+                        <a:latin typeface="Cambria Math" panose="02040503050406030204" pitchFamily="18" charset="0"/>
+                      </a:rPr>
+                      <m:t>,</m:t>
+                    </m:r>
+                    <m:sSup>
+                      <m:sSupPr>
+                        <m:ctrlPr>
+                          <a:rPr lang="en-US" i="1">
+                            <a:solidFill>
+                              <a:srgbClr val="0033CC"/>
+                            </a:solidFill>
+                            <a:latin typeface="Cambria Math" panose="02040503050406030204" pitchFamily="18" charset="0"/>
+                          </a:rPr>
+                        </m:ctrlPr>
+                      </m:sSupPr>
+                      <m:e>
+                        <m:r>
+                          <a:rPr lang="en-US" i="1">
+                            <a:solidFill>
+                              <a:srgbClr val="0033CC"/>
+                            </a:solidFill>
+                            <a:latin typeface="Cambria Math" panose="02040503050406030204" pitchFamily="18" charset="0"/>
+                          </a:rPr>
+                          <m:t>𝜔</m:t>
+                        </m:r>
+                      </m:e>
+                      <m:sup>
+                        <m:r>
+                          <a:rPr lang="en-US" i="1">
+                            <a:solidFill>
+                              <a:srgbClr val="0033CC"/>
+                            </a:solidFill>
+                            <a:latin typeface="Cambria Math" panose="02040503050406030204" pitchFamily="18" charset="0"/>
+                          </a:rPr>
+                          <m:t>∗</m:t>
+                        </m:r>
+                      </m:sup>
+                    </m:sSup>
+                    <m:r>
+                      <a:rPr lang="en-US" i="1">
+                        <a:solidFill>
+                          <a:srgbClr val="0033CC"/>
+                        </a:solidFill>
+                        <a:latin typeface="Cambria Math" panose="02040503050406030204" pitchFamily="18" charset="0"/>
+                      </a:rPr>
+                      <m:t>)</m:t>
+                    </m:r>
+                  </m:oMath>
+                </a14:m>
+                <a:r>
+                  <a:rPr lang="en-US" dirty="0">
                     <a:solidFill>
                       <a:srgbClr val="0033CC"/>
                     </a:solidFill>
                   </a:rPr>
-                  <a:t>discriminant</a:t>
+                  <a:t> </a:t>
                 </a:r>
                 <a:r>
                   <a:rPr lang="en-US" dirty="0"/>
-                  <a:t>, becomes</a:t>
+                  <a:t>satisfies: </a:t>
                 </a:r>
-                <a:br>
-                  <a:rPr lang="en-US" dirty="0"/>
-                </a:br>
-                <a:endParaRPr lang="en-US" dirty="0"/>
+                <a:endParaRPr lang="en-US" i="1" dirty="0">
+                  <a:latin typeface="Cambria Math" panose="02040503050406030204" pitchFamily="18" charset="0"/>
+                </a:endParaRPr>
               </a:p>
               <a:p>
                 <a:pPr marL="0" indent="0">
@@ -19981,48 +17611,64 @@
                 </a:pPr>
                 <a14:m>
                   <m:oMathPara xmlns:m="http://schemas.openxmlformats.org/officeDocument/2006/math">
-                    <m:oMathParaPr>
-                      <m:jc m:val="centerGroup"/>
-                    </m:oMathParaPr>
-                    <m:oMath xmlns:m="http://schemas.openxmlformats.org/officeDocument/2006/math">
-                      <m:r>
-                        <a:rPr lang="en-US" b="0" i="1" smtClean="0">
-                          <a:latin typeface="Cambria Math" panose="02040503050406030204" pitchFamily="18" charset="0"/>
-                        </a:rPr>
-                        <m:t>𝐷</m:t>
-                      </m:r>
-                      <m:d>
-                        <m:dPr>
-                          <m:ctrlPr>
-                            <a:rPr lang="en-US" b="0" i="1" smtClean="0">
-                              <a:latin typeface="Cambria Math" panose="02040503050406030204" pitchFamily="18" charset="0"/>
-                            </a:rPr>
-                          </m:ctrlPr>
-                        </m:dPr>
-                        <m:e>
-                          <m:r>
-                            <a:rPr lang="en-US" b="0" i="1" smtClean="0">
-                              <a:latin typeface="Cambria Math" panose="02040503050406030204" pitchFamily="18" charset="0"/>
-                            </a:rPr>
-                            <m:t>𝑥</m:t>
-                          </m:r>
-                        </m:e>
-                      </m:d>
-                      <m:r>
-                        <a:rPr lang="en-US" b="0" i="1" smtClean="0">
-                          <a:latin typeface="Cambria Math" panose="02040503050406030204" pitchFamily="18" charset="0"/>
-                        </a:rPr>
-                        <m:t>=</m:t>
-                      </m:r>
-                      <m:f>
-                        <m:fPr>
+                    <m:oMath>
+                      <m:nary>
+                        <m:naryPr>
+                          <m:limLoc m:val="undOvr"/>
+                          <m:subHide m:val="on"/>
+                          <m:supHide m:val="on"/>
                           <m:ctrlPr>
                             <a:rPr lang="en-US" i="1">
                               <a:latin typeface="Cambria Math" panose="02040503050406030204" pitchFamily="18" charset="0"/>
                             </a:rPr>
                           </m:ctrlPr>
-                        </m:fPr>
-                        <m:num>
+                        </m:naryPr>
+                        <m:sub/>
+                        <m:sup/>
+                        <m:e>
+                          <m:r>
+                            <a:rPr lang="en-US" i="1">
+                              <a:latin typeface="Cambria Math" panose="02040503050406030204" pitchFamily="18" charset="0"/>
+                            </a:rPr>
+                            <m:t> </m:t>
+                          </m:r>
+                          <m:f>
+                            <m:fPr>
+                              <m:ctrlPr>
+                                <a:rPr lang="en-US" i="1">
+                                  <a:latin typeface="Cambria Math" panose="02040503050406030204" pitchFamily="18" charset="0"/>
+                                </a:rPr>
+                              </m:ctrlPr>
+                            </m:fPr>
+                            <m:num>
+                              <m:r>
+                                <a:rPr lang="en-US" i="1">
+                                  <a:latin typeface="Cambria Math" panose="02040503050406030204" pitchFamily="18" charset="0"/>
+                                </a:rPr>
+                                <m:t>𝜕</m:t>
+                              </m:r>
+                              <m:r>
+                                <a:rPr lang="en-US" i="1">
+                                  <a:latin typeface="Cambria Math" panose="02040503050406030204" pitchFamily="18" charset="0"/>
+                                </a:rPr>
+                                <m:t>𝐿</m:t>
+                              </m:r>
+                            </m:num>
+                            <m:den>
+                              <m:r>
+                                <a:rPr lang="en-US" i="1">
+                                  <a:latin typeface="Cambria Math" panose="02040503050406030204" pitchFamily="18" charset="0"/>
+                                </a:rPr>
+                                <m:t>𝜕</m:t>
+                              </m:r>
+                              <m:r>
+                                <a:rPr lang="en-US" i="1">
+                                  <a:latin typeface="Cambria Math" panose="02040503050406030204" pitchFamily="18" charset="0"/>
+                                </a:rPr>
+                                <m:t>𝑓</m:t>
+                              </m:r>
+                            </m:den>
+                          </m:f>
                           <m:r>
                             <a:rPr lang="en-US" i="1">
                               <a:latin typeface="Cambria Math" panose="02040503050406030204" pitchFamily="18" charset="0"/>
@@ -20042,15 +17688,19 @@
                                 <a:rPr lang="en-US" i="1">
                                   <a:latin typeface="Cambria Math" panose="02040503050406030204" pitchFamily="18" charset="0"/>
                                 </a:rPr>
-                                <m:t>𝑥</m:t>
+                                <m:t>𝑦</m:t>
                               </m:r>
-                            </m:e>
-                            <m:e>
                               <m:r>
                                 <a:rPr lang="en-US" i="1">
                                   <a:latin typeface="Cambria Math" panose="02040503050406030204" pitchFamily="18" charset="0"/>
                                 </a:rPr>
-                                <m:t>1</m:t>
+                                <m:t> | </m:t>
+                              </m:r>
+                              <m:r>
+                                <a:rPr lang="en-US" i="1">
+                                  <a:latin typeface="Cambria Math" panose="02040503050406030204" pitchFamily="18" charset="0"/>
+                                </a:rPr>
+                                <m:t>𝑥</m:t>
                               </m:r>
                             </m:e>
                           </m:d>
@@ -20058,162 +17708,19 @@
                             <a:rPr lang="en-US" i="1">
                               <a:latin typeface="Cambria Math" panose="02040503050406030204" pitchFamily="18" charset="0"/>
                             </a:rPr>
-                            <m:t> </m:t>
-                          </m:r>
-                        </m:num>
-                        <m:den>
-                          <m:r>
-                            <a:rPr lang="en-US" i="1">
-                              <a:latin typeface="Cambria Math" panose="02040503050406030204" pitchFamily="18" charset="0"/>
-                            </a:rPr>
-                            <m:t>𝑝</m:t>
-                          </m:r>
-                          <m:d>
-                            <m:dPr>
-                              <m:ctrlPr>
-                                <a:rPr lang="en-US" i="1">
-                                  <a:latin typeface="Cambria Math" panose="02040503050406030204" pitchFamily="18" charset="0"/>
-                                </a:rPr>
-                              </m:ctrlPr>
-                            </m:dPr>
-                            <m:e>
-                              <m:r>
-                                <a:rPr lang="en-US" i="1">
-                                  <a:latin typeface="Cambria Math" panose="02040503050406030204" pitchFamily="18" charset="0"/>
-                                </a:rPr>
-                                <m:t>𝑥</m:t>
-                              </m:r>
-                            </m:e>
-                            <m:e>
-                              <m:r>
-                                <a:rPr lang="en-US" i="1">
-                                  <a:latin typeface="Cambria Math" panose="02040503050406030204" pitchFamily="18" charset="0"/>
-                                </a:rPr>
-                                <m:t>1</m:t>
-                              </m:r>
-                            </m:e>
-                          </m:d>
-                          <m:r>
-                            <a:rPr lang="en-US" i="1">
-                              <a:latin typeface="Cambria Math" panose="02040503050406030204" pitchFamily="18" charset="0"/>
-                            </a:rPr>
-                            <m:t>+</m:t>
+                            <m:t>𝑑𝑦</m:t>
                           </m:r>
                           <m:r>
                             <a:rPr lang="en-US" i="1">
                               <a:latin typeface="Cambria Math" panose="02040503050406030204" pitchFamily="18" charset="0"/>
                             </a:rPr>
-                            <m:t>𝑝</m:t>
+                            <m:t>=0</m:t>
                           </m:r>
-                          <m:d>
-                            <m:dPr>
-                              <m:ctrlPr>
-                                <a:rPr lang="en-US" i="1">
-                                  <a:latin typeface="Cambria Math" panose="02040503050406030204" pitchFamily="18" charset="0"/>
-                                </a:rPr>
-                              </m:ctrlPr>
-                            </m:dPr>
-                            <m:e>
-                              <m:r>
-                                <a:rPr lang="en-US" i="1">
-                                  <a:latin typeface="Cambria Math" panose="02040503050406030204" pitchFamily="18" charset="0"/>
-                                </a:rPr>
-                                <m:t>𝑥</m:t>
-                              </m:r>
-                            </m:e>
-                            <m:e>
-                              <m:r>
-                                <a:rPr lang="en-US" i="1">
-                                  <a:latin typeface="Cambria Math" panose="02040503050406030204" pitchFamily="18" charset="0"/>
-                                </a:rPr>
-                                <m:t>0</m:t>
-                              </m:r>
-                            </m:e>
-                          </m:d>
-                        </m:den>
-                      </m:f>
+                        </m:e>
+                      </m:nary>
                     </m:oMath>
                   </m:oMathPara>
                 </a14:m>
-                <a:endParaRPr lang="en-US" dirty="0">
-                  <a:effectLst>
-                    <a:outerShdw blurRad="38100" dist="38100" dir="2700000" algn="tl">
-                      <a:srgbClr val="DDDDDD"/>
-                    </a:outerShdw>
-                  </a:effectLst>
-                </a:endParaRPr>
-              </a:p>
-              <a:p>
-                <a:pPr marL="0" indent="0">
-                  <a:buNone/>
-                </a:pPr>
-                <a:endParaRPr lang="en-US" dirty="0">
-                  <a:effectLst>
-                    <a:outerShdw blurRad="38100" dist="38100" dir="2700000" algn="tl">
-                      <a:srgbClr val="DDDDDD"/>
-                    </a:outerShdw>
-                  </a:effectLst>
-                </a:endParaRPr>
-              </a:p>
-              <a:p>
-                <a:pPr marL="0" indent="0">
-                  <a:buNone/>
-                </a:pPr>
-                <a:r>
-                  <a:rPr lang="en-US" i="1" dirty="0">
-                    <a:solidFill>
-                      <a:srgbClr val="0033CC"/>
-                    </a:solidFill>
-                    <a:effectLst>
-                      <a:outerShdw blurRad="38100" dist="38100" dir="2700000" algn="tl">
-                        <a:srgbClr val="DDDDDD"/>
-                      </a:outerShdw>
-                    </a:effectLst>
-                  </a:rPr>
-                  <a:t>This is one of the most useful results in machine learning</a:t>
-                </a:r>
-                <a:r>
-                  <a:rPr lang="en-US" dirty="0">
-                    <a:effectLst>
-                      <a:outerShdw blurRad="38100" dist="38100" dir="2700000" algn="tl">
-                        <a:srgbClr val="DDDDDD"/>
-                      </a:outerShdw>
-                    </a:effectLst>
-                  </a:rPr>
-                  <a:t>. </a:t>
-                </a:r>
-              </a:p>
-              <a:p>
-                <a:pPr marL="0" indent="0">
-                  <a:buNone/>
-                </a:pPr>
-                <a:endParaRPr lang="en-US" dirty="0">
-                  <a:effectLst>
-                    <a:outerShdw blurRad="38100" dist="38100" dir="2700000" algn="tl">
-                      <a:srgbClr val="DDDDDD"/>
-                    </a:outerShdw>
-                  </a:effectLst>
-                </a:endParaRPr>
-              </a:p>
-              <a:p>
-                <a:pPr marL="0" indent="0">
-                  <a:buNone/>
-                </a:pPr>
-                <a:r>
-                  <a:rPr lang="en-US" dirty="0">
-                    <a:effectLst>
-                      <a:outerShdw blurRad="38100" dist="38100" dir="2700000" algn="tl">
-                        <a:srgbClr val="DDDDDD"/>
-                      </a:outerShdw>
-                    </a:effectLst>
-                  </a:rPr>
-                  <a:t>The next couple of slides offer some examples of how useful a result this is.</a:t>
-                </a:r>
-              </a:p>
-              <a:p>
-                <a:pPr marL="0" indent="0">
-                  <a:buNone/>
-                </a:pPr>
                 <a:endParaRPr lang="en-US" dirty="0"/>
               </a:p>
               <a:p>
@@ -20231,7 +17738,7 @@
               <p:cNvPr id="4" name="Content Placeholder 3">
                 <a:extLst>
                   <a:ext uri="{FF2B5EF4-FFF2-40B4-BE49-F238E27FC236}">
-                    <a16:creationId xmlns:a16="http://schemas.microsoft.com/office/drawing/2014/main" id="{84FBE111-5277-6CD5-CDB1-358D32EF551E}"/>
+                    <a16:creationId xmlns:a16="http://schemas.microsoft.com/office/drawing/2014/main" id="{1E630BBC-189E-5D63-12C1-97C1E92F8F38}"/>
                   </a:ext>
                 </a:extLst>
               </p:cNvPr>
@@ -20243,14 +17750,10 @@
               </p:nvPr>
             </p:nvSpPr>
             <p:spPr>
-              <a:xfrm>
-                <a:off x="711200" y="1295400"/>
-                <a:ext cx="7747000" cy="4819650"/>
-              </a:xfrm>
               <a:blipFill>
                 <a:blip r:embed="rId2"/>
                 <a:stretch>
-                  <a:fillRect l="-1309" t="-1316" r="-818"/>
+                  <a:fillRect l="-1309" t="-1316" r="-1309" b="-47895"/>
                 </a:stretch>
               </a:blipFill>
             </p:spPr>
@@ -20274,7 +17777,7 @@
           <p:cNvPr id="3" name="Title 2">
             <a:extLst>
               <a:ext uri="{FF2B5EF4-FFF2-40B4-BE49-F238E27FC236}">
-                <a16:creationId xmlns:a16="http://schemas.microsoft.com/office/drawing/2014/main" id="{8260803B-6204-0C12-7211-987376BA4117}"/>
+                <a16:creationId xmlns:a16="http://schemas.microsoft.com/office/drawing/2014/main" id="{851E9639-C2BE-648A-6B74-658A698E1BC4}"/>
               </a:ext>
             </a:extLst>
           </p:cNvPr>
@@ -20292,93 +17795,15 @@
           <a:p>
             <a:r>
               <a:rPr lang="en-US" dirty="0"/>
-              <a:t>The Discriminant</a:t>
+              <a:t>Summary (1)</a:t>
             </a:r>
-          </a:p>
-        </p:txBody>
-      </p:sp>
-      <p:sp>
-        <p:nvSpPr>
-          <p:cNvPr id="2" name="Rectangle 1">
-            <a:extLst>
-              <a:ext uri="{FF2B5EF4-FFF2-40B4-BE49-F238E27FC236}">
-                <a16:creationId xmlns:a16="http://schemas.microsoft.com/office/drawing/2014/main" id="{4181070C-C4FA-0018-0FFC-DB553E5FD2D0}"/>
-              </a:ext>
-            </a:extLst>
-          </p:cNvPr>
-          <p:cNvSpPr/>
-          <p:nvPr/>
-        </p:nvSpPr>
-        <p:spPr bwMode="auto">
-          <a:xfrm>
-            <a:off x="2895600" y="2590800"/>
-            <a:ext cx="3657600" cy="1219200"/>
-          </a:xfrm>
-          <a:prstGeom prst="rect">
-            <a:avLst/>
-          </a:prstGeom>
-          <a:noFill/>
-          <a:ln>
-            <a:headEnd type="none" w="med" len="med"/>
-            <a:tailEnd type="none" w="med" len="med"/>
-          </a:ln>
-        </p:spPr>
-        <p:style>
-          <a:lnRef idx="2">
-            <a:schemeClr val="accent1"/>
-          </a:lnRef>
-          <a:fillRef idx="1">
-            <a:schemeClr val="lt1"/>
-          </a:fillRef>
-          <a:effectRef idx="0">
-            <a:schemeClr val="accent1"/>
-          </a:effectRef>
-          <a:fontRef idx="minor">
-            <a:schemeClr val="dk1"/>
-          </a:fontRef>
-        </p:style>
-        <p:txBody>
-          <a:bodyPr vert="horz" wrap="square" lIns="91440" tIns="45720" rIns="91440" bIns="45720" numCol="1" rtlCol="0" anchor="t" anchorCtr="0" compatLnSpc="1">
-            <a:prstTxWarp prst="textNoShape">
-              <a:avLst/>
-            </a:prstTxWarp>
-            <a:spAutoFit/>
-          </a:bodyPr>
-          <a:lstStyle/>
-          <a:p>
-            <a:pPr marL="0" marR="0" indent="0" algn="l" defTabSz="914400" rtl="0" eaLnBrk="0" fontAlgn="base" latinLnBrk="0" hangingPunct="0">
-              <a:lnSpc>
-                <a:spcPct val="100000"/>
-              </a:lnSpc>
-              <a:spcBef>
-                <a:spcPct val="0"/>
-              </a:spcBef>
-              <a:spcAft>
-                <a:spcPct val="0"/>
-              </a:spcAft>
-              <a:buClrTx/>
-              <a:buSzTx/>
-              <a:buFontTx/>
-              <a:buNone/>
-              <a:tabLst/>
-            </a:pPr>
-            <a:endParaRPr kumimoji="0" lang="en-US" sz="2400" b="0" i="0" u="none" strike="noStrike" cap="none" normalizeH="0" baseline="0">
-              <a:ln>
-                <a:noFill/>
-              </a:ln>
-              <a:solidFill>
-                <a:schemeClr val="tx1"/>
-              </a:solidFill>
-              <a:effectLst/>
-              <a:latin typeface="Times New Roman" pitchFamily="-65" charset="0"/>
-            </a:endParaRPr>
           </a:p>
         </p:txBody>
       </p:sp>
     </p:spTree>
     <p:extLst>
       <p:ext uri="{BB962C8B-B14F-4D97-AF65-F5344CB8AC3E}">
-        <p14:creationId xmlns:p14="http://schemas.microsoft.com/office/powerpoint/2010/main" val="1821398235"/>
+        <p14:creationId xmlns:p14="http://schemas.microsoft.com/office/powerpoint/2010/main" val="3395332133"/>
       </p:ext>
     </p:extLst>
   </p:cSld>
@@ -20388,18 +17813,12 @@
 </p:sld>
 </file>
 
-<file path=ppt/slides/slide28.xml><?xml version="1.0" encoding="utf-8"?>
+<file path=ppt/slides/slide25.xml><?xml version="1.0" encoding="utf-8"?>
 <p:sld xmlns:a="http://schemas.openxmlformats.org/drawingml/2006/main" xmlns:r="http://schemas.openxmlformats.org/officeDocument/2006/relationships" xmlns:p="http://schemas.openxmlformats.org/presentationml/2006/main">
   <p:cSld>
     <p:spTree>
       <p:nvGrpSpPr>
-        <p:cNvPr id="1" name="">
-          <a:extLst>
-            <a:ext uri="{FF2B5EF4-FFF2-40B4-BE49-F238E27FC236}">
-              <a16:creationId xmlns:a16="http://schemas.microsoft.com/office/drawing/2014/main" id="{517C65E5-B875-3CDA-6D69-16B5471434D9}"/>
-            </a:ext>
-          </a:extLst>
-        </p:cNvPr>
+        <p:cNvPr id="1" name=""/>
         <p:cNvGrpSpPr/>
         <p:nvPr/>
       </p:nvGrpSpPr>
@@ -20411,613 +17830,69 @@
           <a:chExt cx="0" cy="0"/>
         </a:xfrm>
       </p:grpSpPr>
-      <mc:AlternateContent xmlns:mc="http://schemas.openxmlformats.org/markup-compatibility/2006" xmlns:a14="http://schemas.microsoft.com/office/drawing/2010/main">
-        <mc:Choice Requires="a14">
-          <p:sp>
-            <p:nvSpPr>
-              <p:cNvPr id="4" name="Content Placeholder 3">
-                <a:extLst>
-                  <a:ext uri="{FF2B5EF4-FFF2-40B4-BE49-F238E27FC236}">
-                    <a16:creationId xmlns:a16="http://schemas.microsoft.com/office/drawing/2014/main" id="{17AEFDB6-F50F-F8CA-6518-78625CBBA631}"/>
-                  </a:ext>
-                </a:extLst>
-              </p:cNvPr>
-              <p:cNvSpPr>
-                <a:spLocks noGrp="1"/>
-              </p:cNvSpPr>
-              <p:nvPr>
-                <p:ph sz="half" idx="1"/>
-              </p:nvPr>
-            </p:nvSpPr>
-            <p:spPr/>
-            <p:txBody>
-              <a:bodyPr/>
-              <a:lstStyle/>
-              <a:p>
-                <a:pPr marL="0" indent="0">
-                  <a:buNone/>
-                </a:pPr>
-                <a:r>
-                  <a:rPr lang="en-US" b="0" dirty="0"/>
-                  <a:t>The discriminant suggests a way to model a probability density, given a known density. First note that</a:t>
-                </a:r>
-                <a:br>
-                  <a:rPr lang="en-US" b="0" dirty="0"/>
-                </a:br>
-                <a:endParaRPr lang="en-US" b="0" dirty="0"/>
-              </a:p>
-              <a:p>
-                <a:pPr marL="0" indent="0">
-                  <a:buNone/>
-                </a:pPr>
-                <a14:m>
-                  <m:oMathPara xmlns:m="http://schemas.openxmlformats.org/officeDocument/2006/math">
-                    <m:oMathParaPr>
-                      <m:jc m:val="centerGroup"/>
-                    </m:oMathParaPr>
-                    <m:oMath xmlns:m="http://schemas.openxmlformats.org/officeDocument/2006/math">
-                      <m:r>
-                        <a:rPr lang="en-US" b="0" i="1" smtClean="0">
-                          <a:latin typeface="Cambria Math" panose="02040503050406030204" pitchFamily="18" charset="0"/>
-                        </a:rPr>
-                        <m:t>𝐷</m:t>
-                      </m:r>
-                      <m:d>
-                        <m:dPr>
-                          <m:ctrlPr>
-                            <a:rPr lang="en-US" b="0" i="1" smtClean="0">
-                              <a:latin typeface="Cambria Math" panose="02040503050406030204" pitchFamily="18" charset="0"/>
-                            </a:rPr>
-                          </m:ctrlPr>
-                        </m:dPr>
-                        <m:e>
-                          <m:r>
-                            <a:rPr lang="en-US" b="0" i="1" smtClean="0">
-                              <a:latin typeface="Cambria Math" panose="02040503050406030204" pitchFamily="18" charset="0"/>
-                            </a:rPr>
-                            <m:t>𝑥</m:t>
-                          </m:r>
-                        </m:e>
-                      </m:d>
-                      <m:r>
-                        <a:rPr lang="en-US" b="0" i="1" smtClean="0">
-                          <a:latin typeface="Cambria Math" panose="02040503050406030204" pitchFamily="18" charset="0"/>
-                        </a:rPr>
-                        <m:t>=</m:t>
-                      </m:r>
-                      <m:f>
-                        <m:fPr>
-                          <m:ctrlPr>
-                            <a:rPr lang="en-US" i="1">
-                              <a:latin typeface="Cambria Math" panose="02040503050406030204" pitchFamily="18" charset="0"/>
-                            </a:rPr>
-                          </m:ctrlPr>
-                        </m:fPr>
-                        <m:num>
-                          <m:r>
-                            <a:rPr lang="en-US" i="1">
-                              <a:latin typeface="Cambria Math" panose="02040503050406030204" pitchFamily="18" charset="0"/>
-                            </a:rPr>
-                            <m:t>𝑝</m:t>
-                          </m:r>
-                          <m:d>
-                            <m:dPr>
-                              <m:ctrlPr>
-                                <a:rPr lang="en-US" i="1">
-                                  <a:latin typeface="Cambria Math" panose="02040503050406030204" pitchFamily="18" charset="0"/>
-                                </a:rPr>
-                              </m:ctrlPr>
-                            </m:dPr>
-                            <m:e>
-                              <m:r>
-                                <a:rPr lang="en-US" i="1">
-                                  <a:latin typeface="Cambria Math" panose="02040503050406030204" pitchFamily="18" charset="0"/>
-                                </a:rPr>
-                                <m:t>𝑥</m:t>
-                              </m:r>
-                            </m:e>
-                            <m:e>
-                              <m:r>
-                                <a:rPr lang="en-US" i="1">
-                                  <a:latin typeface="Cambria Math" panose="02040503050406030204" pitchFamily="18" charset="0"/>
-                                </a:rPr>
-                                <m:t>1</m:t>
-                              </m:r>
-                            </m:e>
-                          </m:d>
-                          <m:r>
-                            <a:rPr lang="en-US" i="1">
-                              <a:latin typeface="Cambria Math" panose="02040503050406030204" pitchFamily="18" charset="0"/>
-                            </a:rPr>
-                            <m:t> </m:t>
-                          </m:r>
-                        </m:num>
-                        <m:den>
-                          <m:r>
-                            <a:rPr lang="en-US" i="1">
-                              <a:latin typeface="Cambria Math" panose="02040503050406030204" pitchFamily="18" charset="0"/>
-                            </a:rPr>
-                            <m:t>𝑝</m:t>
-                          </m:r>
-                          <m:d>
-                            <m:dPr>
-                              <m:ctrlPr>
-                                <a:rPr lang="en-US" i="1">
-                                  <a:latin typeface="Cambria Math" panose="02040503050406030204" pitchFamily="18" charset="0"/>
-                                </a:rPr>
-                              </m:ctrlPr>
-                            </m:dPr>
-                            <m:e>
-                              <m:r>
-                                <a:rPr lang="en-US" i="1">
-                                  <a:latin typeface="Cambria Math" panose="02040503050406030204" pitchFamily="18" charset="0"/>
-                                </a:rPr>
-                                <m:t>𝑥</m:t>
-                              </m:r>
-                            </m:e>
-                            <m:e>
-                              <m:r>
-                                <a:rPr lang="en-US" i="1">
-                                  <a:latin typeface="Cambria Math" panose="02040503050406030204" pitchFamily="18" charset="0"/>
-                                </a:rPr>
-                                <m:t>1</m:t>
-                              </m:r>
-                            </m:e>
-                          </m:d>
-                          <m:r>
-                            <a:rPr lang="en-US" i="1">
-                              <a:latin typeface="Cambria Math" panose="02040503050406030204" pitchFamily="18" charset="0"/>
-                            </a:rPr>
-                            <m:t>+</m:t>
-                          </m:r>
-                          <m:r>
-                            <a:rPr lang="en-US" i="1">
-                              <a:latin typeface="Cambria Math" panose="02040503050406030204" pitchFamily="18" charset="0"/>
-                            </a:rPr>
-                            <m:t>𝑝</m:t>
-                          </m:r>
-                          <m:d>
-                            <m:dPr>
-                              <m:ctrlPr>
-                                <a:rPr lang="en-US" i="1">
-                                  <a:latin typeface="Cambria Math" panose="02040503050406030204" pitchFamily="18" charset="0"/>
-                                </a:rPr>
-                              </m:ctrlPr>
-                            </m:dPr>
-                            <m:e>
-                              <m:r>
-                                <a:rPr lang="en-US" i="1">
-                                  <a:latin typeface="Cambria Math" panose="02040503050406030204" pitchFamily="18" charset="0"/>
-                                </a:rPr>
-                                <m:t>𝑥</m:t>
-                              </m:r>
-                            </m:e>
-                            <m:e>
-                              <m:r>
-                                <a:rPr lang="en-US" i="1">
-                                  <a:latin typeface="Cambria Math" panose="02040503050406030204" pitchFamily="18" charset="0"/>
-                                </a:rPr>
-                                <m:t>0</m:t>
-                              </m:r>
-                            </m:e>
-                          </m:d>
-                        </m:den>
-                      </m:f>
-                    </m:oMath>
-                  </m:oMathPara>
-                </a14:m>
-                <a:endParaRPr lang="en-US" dirty="0">
-                  <a:effectLst>
-                    <a:outerShdw blurRad="38100" dist="38100" dir="2700000" algn="tl">
-                      <a:srgbClr val="DDDDDD"/>
-                    </a:outerShdw>
-                  </a:effectLst>
-                </a:endParaRPr>
-              </a:p>
-              <a:p>
-                <a:pPr marL="0" indent="0">
-                  <a:buNone/>
-                </a:pPr>
-                <a:r>
-                  <a:rPr lang="en-US" dirty="0">
-                    <a:effectLst>
-                      <a:outerShdw blurRad="38100" dist="38100" dir="2700000" algn="tl">
-                        <a:srgbClr val="DDDDDD"/>
-                      </a:outerShdw>
-                    </a:effectLst>
-                  </a:rPr>
-                  <a:t>can be rewritten as</a:t>
-                </a:r>
-              </a:p>
-              <a:p>
-                <a:pPr marL="0" indent="0">
-                  <a:buNone/>
-                </a:pPr>
-                <a14:m>
-                  <m:oMathPara xmlns:m="http://schemas.openxmlformats.org/officeDocument/2006/math">
-                    <m:oMathParaPr>
-                      <m:jc m:val="centerGroup"/>
-                    </m:oMathParaPr>
-                    <m:oMath xmlns:m="http://schemas.openxmlformats.org/officeDocument/2006/math">
-                      <m:r>
-                        <a:rPr lang="en-US" b="0" i="1" smtClean="0">
-                          <a:latin typeface="Cambria Math" panose="02040503050406030204" pitchFamily="18" charset="0"/>
-                        </a:rPr>
-                        <m:t>𝑝</m:t>
-                      </m:r>
-                      <m:r>
-                        <a:rPr lang="en-US" b="0" i="1" smtClean="0">
-                          <a:latin typeface="Cambria Math" panose="02040503050406030204" pitchFamily="18" charset="0"/>
-                        </a:rPr>
-                        <m:t>(</m:t>
-                      </m:r>
-                      <m:r>
-                        <a:rPr lang="en-US" b="0" i="1" smtClean="0">
-                          <a:latin typeface="Cambria Math" panose="02040503050406030204" pitchFamily="18" charset="0"/>
-                        </a:rPr>
-                        <m:t>𝑥</m:t>
-                      </m:r>
-                      <m:r>
-                        <a:rPr lang="en-US" b="0" i="1" smtClean="0">
-                          <a:latin typeface="Cambria Math" panose="02040503050406030204" pitchFamily="18" charset="0"/>
-                        </a:rPr>
-                        <m:t>|1)=</m:t>
-                      </m:r>
-                      <m:d>
-                        <m:dPr>
-                          <m:begChr m:val="["/>
-                          <m:endChr m:val="]"/>
-                          <m:ctrlPr>
-                            <a:rPr lang="en-US" b="0" i="1" smtClean="0">
-                              <a:latin typeface="Cambria Math" panose="02040503050406030204" pitchFamily="18" charset="0"/>
-                            </a:rPr>
-                          </m:ctrlPr>
-                        </m:dPr>
-                        <m:e>
-                          <m:f>
-                            <m:fPr>
-                              <m:ctrlPr>
-                                <a:rPr lang="en-US" b="0" i="1" smtClean="0">
-                                  <a:solidFill>
-                                    <a:srgbClr val="0033CC"/>
-                                  </a:solidFill>
-                                  <a:latin typeface="Cambria Math" panose="02040503050406030204" pitchFamily="18" charset="0"/>
-                                </a:rPr>
-                              </m:ctrlPr>
-                            </m:fPr>
-                            <m:num>
-                              <m:r>
-                                <a:rPr lang="en-US" b="0" i="1" smtClean="0">
-                                  <a:solidFill>
-                                    <a:srgbClr val="0033CC"/>
-                                  </a:solidFill>
-                                  <a:latin typeface="Cambria Math" panose="02040503050406030204" pitchFamily="18" charset="0"/>
-                                </a:rPr>
-                                <m:t>𝐷</m:t>
-                              </m:r>
-                              <m:r>
-                                <a:rPr lang="en-US" b="0" i="1" smtClean="0">
-                                  <a:solidFill>
-                                    <a:srgbClr val="0033CC"/>
-                                  </a:solidFill>
-                                  <a:latin typeface="Cambria Math" panose="02040503050406030204" pitchFamily="18" charset="0"/>
-                                </a:rPr>
-                                <m:t>(</m:t>
-                              </m:r>
-                              <m:r>
-                                <a:rPr lang="en-US" b="0" i="1" smtClean="0">
-                                  <a:solidFill>
-                                    <a:srgbClr val="0033CC"/>
-                                  </a:solidFill>
-                                  <a:latin typeface="Cambria Math" panose="02040503050406030204" pitchFamily="18" charset="0"/>
-                                </a:rPr>
-                                <m:t>𝑥</m:t>
-                              </m:r>
-                              <m:r>
-                                <a:rPr lang="en-US" b="0" i="1" smtClean="0">
-                                  <a:solidFill>
-                                    <a:srgbClr val="0033CC"/>
-                                  </a:solidFill>
-                                  <a:latin typeface="Cambria Math" panose="02040503050406030204" pitchFamily="18" charset="0"/>
-                                </a:rPr>
-                                <m:t>)</m:t>
-                              </m:r>
-                            </m:num>
-                            <m:den>
-                              <m:r>
-                                <a:rPr lang="en-US" b="0" i="1" smtClean="0">
-                                  <a:solidFill>
-                                    <a:srgbClr val="0033CC"/>
-                                  </a:solidFill>
-                                  <a:latin typeface="Cambria Math" panose="02040503050406030204" pitchFamily="18" charset="0"/>
-                                </a:rPr>
-                                <m:t>1−</m:t>
-                              </m:r>
-                              <m:r>
-                                <a:rPr lang="en-US" b="0" i="1" smtClean="0">
-                                  <a:solidFill>
-                                    <a:srgbClr val="0033CC"/>
-                                  </a:solidFill>
-                                  <a:latin typeface="Cambria Math" panose="02040503050406030204" pitchFamily="18" charset="0"/>
-                                </a:rPr>
-                                <m:t>𝐷</m:t>
-                              </m:r>
-                              <m:r>
-                                <a:rPr lang="en-US" b="0" i="1" smtClean="0">
-                                  <a:solidFill>
-                                    <a:srgbClr val="0033CC"/>
-                                  </a:solidFill>
-                                  <a:latin typeface="Cambria Math" panose="02040503050406030204" pitchFamily="18" charset="0"/>
-                                </a:rPr>
-                                <m:t>(</m:t>
-                              </m:r>
-                              <m:r>
-                                <a:rPr lang="en-US" b="0" i="1" smtClean="0">
-                                  <a:solidFill>
-                                    <a:srgbClr val="0033CC"/>
-                                  </a:solidFill>
-                                  <a:latin typeface="Cambria Math" panose="02040503050406030204" pitchFamily="18" charset="0"/>
-                                </a:rPr>
-                                <m:t>𝑥</m:t>
-                              </m:r>
-                              <m:r>
-                                <a:rPr lang="en-US" b="0" i="1" smtClean="0">
-                                  <a:solidFill>
-                                    <a:srgbClr val="0033CC"/>
-                                  </a:solidFill>
-                                  <a:latin typeface="Cambria Math" panose="02040503050406030204" pitchFamily="18" charset="0"/>
-                                </a:rPr>
-                                <m:t>)</m:t>
-                              </m:r>
-                            </m:den>
-                          </m:f>
-                        </m:e>
-                      </m:d>
-                      <m:r>
-                        <a:rPr lang="en-US" b="0" i="1" smtClean="0">
-                          <a:latin typeface="Cambria Math" panose="02040503050406030204" pitchFamily="18" charset="0"/>
-                        </a:rPr>
-                        <m:t>𝑝</m:t>
-                      </m:r>
-                      <m:r>
-                        <a:rPr lang="en-US" b="0" i="1" smtClean="0">
-                          <a:latin typeface="Cambria Math" panose="02040503050406030204" pitchFamily="18" charset="0"/>
-                        </a:rPr>
-                        <m:t>(</m:t>
-                      </m:r>
-                      <m:r>
-                        <a:rPr lang="en-US" b="0" i="1" smtClean="0">
-                          <a:latin typeface="Cambria Math" panose="02040503050406030204" pitchFamily="18" charset="0"/>
-                        </a:rPr>
-                        <m:t>𝑥</m:t>
-                      </m:r>
-                      <m:r>
-                        <a:rPr lang="en-US" b="0" i="1" smtClean="0">
-                          <a:latin typeface="Cambria Math" panose="02040503050406030204" pitchFamily="18" charset="0"/>
-                        </a:rPr>
-                        <m:t>|0)</m:t>
-                      </m:r>
-                    </m:oMath>
-                  </m:oMathPara>
-                </a14:m>
-                <a:endParaRPr lang="en-US" dirty="0">
-                  <a:effectLst>
-                    <a:outerShdw blurRad="38100" dist="38100" dir="2700000" algn="tl">
-                      <a:srgbClr val="DDDDDD"/>
-                    </a:outerShdw>
-                  </a:effectLst>
-                </a:endParaRPr>
-              </a:p>
-              <a:p>
-                <a:pPr marL="0" indent="0">
-                  <a:buNone/>
-                </a:pPr>
-                <a:r>
-                  <a:rPr lang="en-US" dirty="0">
-                    <a:effectLst>
-                      <a:outerShdw blurRad="38100" dist="38100" dir="2700000" algn="tl">
-                        <a:srgbClr val="DDDDDD"/>
-                      </a:outerShdw>
-                    </a:effectLst>
-                  </a:rPr>
-                  <a:t>using the so-called likelihood ratio trick. If </a:t>
-                </a:r>
-                <a14:m>
-                  <m:oMath xmlns:m="http://schemas.openxmlformats.org/officeDocument/2006/math">
-                    <m:r>
-                      <a:rPr lang="en-US" i="1" smtClean="0">
-                        <a:solidFill>
-                          <a:srgbClr val="0033CC"/>
-                        </a:solidFill>
-                        <a:latin typeface="Cambria Math" panose="02040503050406030204" pitchFamily="18" charset="0"/>
-                      </a:rPr>
-                      <m:t>𝑝</m:t>
-                    </m:r>
-                    <m:r>
-                      <a:rPr lang="en-US" i="1" smtClean="0">
-                        <a:solidFill>
-                          <a:srgbClr val="0033CC"/>
-                        </a:solidFill>
-                        <a:latin typeface="Cambria Math" panose="02040503050406030204" pitchFamily="18" charset="0"/>
-                      </a:rPr>
-                      <m:t>(</m:t>
-                    </m:r>
-                    <m:r>
-                      <a:rPr lang="en-US" i="1" smtClean="0">
-                        <a:solidFill>
-                          <a:srgbClr val="0033CC"/>
-                        </a:solidFill>
-                        <a:latin typeface="Cambria Math" panose="02040503050406030204" pitchFamily="18" charset="0"/>
-                      </a:rPr>
-                      <m:t>𝑥</m:t>
-                    </m:r>
-                    <m:r>
-                      <a:rPr lang="en-US" i="1" smtClean="0">
-                        <a:solidFill>
-                          <a:srgbClr val="0033CC"/>
-                        </a:solidFill>
-                        <a:latin typeface="Cambria Math" panose="02040503050406030204" pitchFamily="18" charset="0"/>
-                      </a:rPr>
-                      <m:t>|0)</m:t>
-                    </m:r>
-                  </m:oMath>
-                </a14:m>
-                <a:r>
-                  <a:rPr lang="en-US" dirty="0">
-                    <a:solidFill>
-                      <a:srgbClr val="0033CC"/>
-                    </a:solidFill>
-                    <a:effectLst>
-                      <a:outerShdw blurRad="38100" dist="38100" dir="2700000" algn="tl">
-                        <a:srgbClr val="DDDDDD"/>
-                      </a:outerShdw>
-                    </a:effectLst>
-                  </a:rPr>
-                  <a:t> </a:t>
-                </a:r>
-                <a:r>
-                  <a:rPr lang="en-US" dirty="0">
-                    <a:effectLst>
-                      <a:outerShdw blurRad="38100" dist="38100" dir="2700000" algn="tl">
-                        <a:srgbClr val="DDDDDD"/>
-                      </a:outerShdw>
-                    </a:effectLst>
-                  </a:rPr>
-                  <a:t>is a known density, from which the class </a:t>
-                </a:r>
-                <a14:m>
-                  <m:oMath xmlns:m="http://schemas.openxmlformats.org/officeDocument/2006/math">
-                    <m:r>
-                      <a:rPr lang="en-US" b="0" i="1" smtClean="0">
-                        <a:solidFill>
-                          <a:srgbClr val="0033CC"/>
-                        </a:solidFill>
-                        <a:effectLst>
-                          <a:outerShdw blurRad="38100" dist="38100" dir="2700000" algn="tl">
-                            <a:srgbClr val="DDDDDD"/>
-                          </a:outerShdw>
-                        </a:effectLst>
-                        <a:latin typeface="Cambria Math" panose="02040503050406030204" pitchFamily="18" charset="0"/>
-                      </a:rPr>
-                      <m:t>𝑦</m:t>
-                    </m:r>
-                    <m:r>
-                      <a:rPr lang="en-US" b="0" i="1" smtClean="0">
-                        <a:solidFill>
-                          <a:srgbClr val="0033CC"/>
-                        </a:solidFill>
-                        <a:effectLst>
-                          <a:outerShdw blurRad="38100" dist="38100" dir="2700000" algn="tl">
-                            <a:srgbClr val="DDDDDD"/>
-                          </a:outerShdw>
-                        </a:effectLst>
-                        <a:latin typeface="Cambria Math" panose="02040503050406030204" pitchFamily="18" charset="0"/>
-                      </a:rPr>
-                      <m:t>=0</m:t>
-                    </m:r>
-                  </m:oMath>
-                </a14:m>
-                <a:r>
-                  <a:rPr lang="en-US" dirty="0">
-                    <a:effectLst>
-                      <a:outerShdw blurRad="38100" dist="38100" dir="2700000" algn="tl">
-                        <a:srgbClr val="DDDDDD"/>
-                      </a:outerShdw>
-                    </a:effectLst>
-                  </a:rPr>
-                  <a:t> vectors are sampled, then the discriminant can be repurposed as a </a:t>
-                </a:r>
-                <a:r>
-                  <a:rPr lang="en-US" b="1" dirty="0">
-                    <a:solidFill>
-                      <a:srgbClr val="0033CC"/>
-                    </a:solidFill>
-                    <a:effectLst>
-                      <a:outerShdw blurRad="38100" dist="38100" dir="2700000" algn="tl">
-                        <a:srgbClr val="DDDDDD"/>
-                      </a:outerShdw>
-                    </a:effectLst>
-                  </a:rPr>
-                  <a:t>probability density estimator</a:t>
-                </a:r>
-                <a:r>
-                  <a:rPr lang="en-US" dirty="0">
-                    <a:effectLst>
-                      <a:outerShdw blurRad="38100" dist="38100" dir="2700000" algn="tl">
-                        <a:srgbClr val="DDDDDD"/>
-                      </a:outerShdw>
-                    </a:effectLst>
-                  </a:rPr>
-                  <a:t>.</a:t>
-                </a:r>
-              </a:p>
-              <a:p>
-                <a:pPr marL="0" indent="0">
-                  <a:buNone/>
-                </a:pPr>
-                <a:endParaRPr lang="en-US" dirty="0">
-                  <a:effectLst>
-                    <a:outerShdw blurRad="38100" dist="38100" dir="2700000" algn="tl">
-                      <a:srgbClr val="DDDDDD"/>
-                    </a:outerShdw>
-                  </a:effectLst>
-                </a:endParaRPr>
-              </a:p>
-              <a:p>
-                <a:pPr marL="0" indent="0">
-                  <a:buNone/>
-                </a:pPr>
-                <a:endParaRPr lang="en-US" dirty="0"/>
-              </a:p>
-            </p:txBody>
-          </p:sp>
-        </mc:Choice>
-        <mc:Fallback xmlns="">
-          <p:sp>
-            <p:nvSpPr>
-              <p:cNvPr id="4" name="Content Placeholder 3">
-                <a:extLst>
-                  <a:ext uri="{FF2B5EF4-FFF2-40B4-BE49-F238E27FC236}">
-                    <a16:creationId xmlns:a16="http://schemas.microsoft.com/office/drawing/2014/main" id="{17AEFDB6-F50F-F8CA-6518-78625CBBA631}"/>
-                  </a:ext>
-                </a:extLst>
-              </p:cNvPr>
-              <p:cNvSpPr>
-                <a:spLocks noGrp="1" noRot="1" noChangeAspect="1" noMove="1" noResize="1" noEditPoints="1" noAdjustHandles="1" noChangeArrowheads="1" noChangeShapeType="1" noTextEdit="1"/>
-              </p:cNvSpPr>
-              <p:nvPr>
-                <p:ph sz="half" idx="1"/>
-              </p:nvPr>
-            </p:nvSpPr>
-            <p:spPr>
-              <a:blipFill>
-                <a:blip r:embed="rId2"/>
-                <a:stretch>
-                  <a:fillRect l="-1309" t="-1316" r="-2455" b="-1316"/>
-                </a:stretch>
-              </a:blipFill>
-            </p:spPr>
-            <p:txBody>
-              <a:bodyPr/>
-              <a:lstStyle/>
-              <a:p>
-                <a:r>
-                  <a:rPr lang="en-US">
-                    <a:noFill/>
-                  </a:rPr>
-                  <a:t> </a:t>
-                </a:r>
-              </a:p>
-            </p:txBody>
-          </p:sp>
-        </mc:Fallback>
-      </mc:AlternateContent>
+      <p:sp>
+        <p:nvSpPr>
+          <p:cNvPr id="4" name="Content Placeholder 3">
+            <a:extLst>
+              <a:ext uri="{FF2B5EF4-FFF2-40B4-BE49-F238E27FC236}">
+                <a16:creationId xmlns:a16="http://schemas.microsoft.com/office/drawing/2014/main" id="{FF77C061-60F4-12F7-25F5-D6B0B4F3CC4E}"/>
+              </a:ext>
+            </a:extLst>
+          </p:cNvPr>
+          <p:cNvSpPr>
+            <a:spLocks noGrp="1"/>
+          </p:cNvSpPr>
+          <p:nvPr>
+            <p:ph sz="half" idx="1"/>
+          </p:nvPr>
+        </p:nvSpPr>
+        <p:spPr/>
+        <p:txBody>
+          <a:bodyPr/>
+          <a:lstStyle/>
+          <a:p>
+            <a:pPr marL="0" indent="0">
+              <a:buNone/>
+            </a:pPr>
+            <a:r>
+              <a:rPr lang="en-US" b="1" dirty="0"/>
+              <a:t>Binary Cross Entropy</a:t>
+            </a:r>
+          </a:p>
+          <a:p>
+            <a:r>
+              <a:rPr lang="en-US" dirty="0"/>
+              <a:t>Training with the binary cross entropy loss yields a classifier that approximates the class probability.</a:t>
+            </a:r>
+            <a:br>
+              <a:rPr lang="en-US" dirty="0"/>
+            </a:br>
+            <a:endParaRPr lang="en-US" dirty="0"/>
+          </a:p>
+          <a:p>
+            <a:r>
+              <a:rPr lang="en-US" dirty="0"/>
+              <a:t>This fact can be exploited in creative ways. Two examples were given.</a:t>
+            </a:r>
+            <a:br>
+              <a:rPr lang="en-US" dirty="0"/>
+            </a:br>
+            <a:endParaRPr lang="en-US" dirty="0"/>
+          </a:p>
+          <a:p>
+            <a:pPr marL="0" indent="0">
+              <a:buNone/>
+            </a:pPr>
+            <a:endParaRPr lang="en-US" dirty="0"/>
+          </a:p>
+        </p:txBody>
+      </p:sp>
       <p:sp>
         <p:nvSpPr>
           <p:cNvPr id="3" name="Title 2">
             <a:extLst>
               <a:ext uri="{FF2B5EF4-FFF2-40B4-BE49-F238E27FC236}">
-                <a16:creationId xmlns:a16="http://schemas.microsoft.com/office/drawing/2014/main" id="{B6BF1F42-9D07-58C2-7DEF-AAD977C15647}"/>
+                <a16:creationId xmlns:a16="http://schemas.microsoft.com/office/drawing/2014/main" id="{7145E3B4-D021-15F8-995C-F301FA0FDACE}"/>
               </a:ext>
             </a:extLst>
           </p:cNvPr>
@@ -21035,15 +17910,7 @@
           <a:p>
             <a:r>
               <a:rPr lang="en-US" dirty="0"/>
-              <a:t>The Discriminant: </a:t>
-            </a:r>
-            <a:r>
-              <a:rPr lang="en-US" dirty="0">
-                <a:solidFill>
-                  <a:schemeClr val="accent1"/>
-                </a:solidFill>
-              </a:rPr>
-              <a:t>Uses (1)</a:t>
+              <a:t>Summary (2)</a:t>
             </a:r>
           </a:p>
         </p:txBody>
@@ -21051,1100 +17918,13 @@
     </p:spTree>
     <p:extLst>
       <p:ext uri="{BB962C8B-B14F-4D97-AF65-F5344CB8AC3E}">
-        <p14:creationId xmlns:p14="http://schemas.microsoft.com/office/powerpoint/2010/main" val="1626973928"/>
+        <p14:creationId xmlns:p14="http://schemas.microsoft.com/office/powerpoint/2010/main" val="3638525717"/>
       </p:ext>
     </p:extLst>
   </p:cSld>
   <p:clrMapOvr>
     <a:masterClrMapping/>
   </p:clrMapOvr>
-</p:sld>
-</file>
-
-<file path=ppt/slides/slide29.xml><?xml version="1.0" encoding="utf-8"?>
-<p:sld xmlns:a="http://schemas.openxmlformats.org/drawingml/2006/main" xmlns:r="http://schemas.openxmlformats.org/officeDocument/2006/relationships" xmlns:p="http://schemas.openxmlformats.org/presentationml/2006/main">
-  <p:cSld>
-    <p:spTree>
-      <p:nvGrpSpPr>
-        <p:cNvPr id="1" name="">
-          <a:extLst>
-            <a:ext uri="{FF2B5EF4-FFF2-40B4-BE49-F238E27FC236}">
-              <a16:creationId xmlns:a16="http://schemas.microsoft.com/office/drawing/2014/main" id="{59801C9A-C562-4209-2742-5C63B4220064}"/>
-            </a:ext>
-          </a:extLst>
-        </p:cNvPr>
-        <p:cNvGrpSpPr/>
-        <p:nvPr/>
-      </p:nvGrpSpPr>
-      <p:grpSpPr>
-        <a:xfrm>
-          <a:off x="0" y="0"/>
-          <a:ext cx="0" cy="0"/>
-          <a:chOff x="0" y="0"/>
-          <a:chExt cx="0" cy="0"/>
-        </a:xfrm>
-      </p:grpSpPr>
-      <mc:AlternateContent xmlns:mc="http://schemas.openxmlformats.org/markup-compatibility/2006" xmlns:a14="http://schemas.microsoft.com/office/drawing/2010/main">
-        <mc:Choice Requires="a14">
-          <p:sp>
-            <p:nvSpPr>
-              <p:cNvPr id="4" name="Content Placeholder 3">
-                <a:extLst>
-                  <a:ext uri="{FF2B5EF4-FFF2-40B4-BE49-F238E27FC236}">
-                    <a16:creationId xmlns:a16="http://schemas.microsoft.com/office/drawing/2014/main" id="{55270A78-B3C6-0C0C-96AB-1507A7B10D43}"/>
-                  </a:ext>
-                </a:extLst>
-              </p:cNvPr>
-              <p:cNvSpPr>
-                <a:spLocks noGrp="1"/>
-              </p:cNvSpPr>
-              <p:nvPr>
-                <p:ph sz="half" idx="1"/>
-              </p:nvPr>
-            </p:nvSpPr>
-            <p:spPr/>
-            <p:txBody>
-              <a:bodyPr/>
-              <a:lstStyle/>
-              <a:p>
-                <a:pPr marL="0" indent="0">
-                  <a:buNone/>
-                </a:pPr>
-                <a:r>
-                  <a:rPr lang="en-US" b="0" dirty="0"/>
-                  <a:t>It is of course possible to train a classifier using an unbalanced dataset: </a:t>
-                </a:r>
-                <a14:m>
-                  <m:oMath xmlns:m="http://schemas.openxmlformats.org/officeDocument/2006/math">
-                    <m:r>
-                      <a:rPr lang="en-US" b="0" i="1" smtClean="0">
-                        <a:solidFill>
-                          <a:srgbClr val="0033CC"/>
-                        </a:solidFill>
-                        <a:latin typeface="Cambria Math" panose="02040503050406030204" pitchFamily="18" charset="0"/>
-                      </a:rPr>
-                      <m:t>𝜋</m:t>
-                    </m:r>
-                    <m:r>
-                      <a:rPr lang="en-US" b="0" i="1" smtClean="0">
-                        <a:solidFill>
-                          <a:srgbClr val="0033CC"/>
-                        </a:solidFill>
-                        <a:latin typeface="Cambria Math" panose="02040503050406030204" pitchFamily="18" charset="0"/>
-                      </a:rPr>
-                      <m:t>(1)≠</m:t>
-                    </m:r>
-                    <m:r>
-                      <a:rPr lang="en-US" b="0" i="1" smtClean="0">
-                        <a:solidFill>
-                          <a:srgbClr val="0033CC"/>
-                        </a:solidFill>
-                        <a:latin typeface="Cambria Math" panose="02040503050406030204" pitchFamily="18" charset="0"/>
-                        <a:ea typeface="Cambria Math" panose="02040503050406030204" pitchFamily="18" charset="0"/>
-                      </a:rPr>
-                      <m:t>𝜋</m:t>
-                    </m:r>
-                    <m:r>
-                      <a:rPr lang="en-US" b="0" i="1" smtClean="0">
-                        <a:solidFill>
-                          <a:srgbClr val="0033CC"/>
-                        </a:solidFill>
-                        <a:latin typeface="Cambria Math" panose="02040503050406030204" pitchFamily="18" charset="0"/>
-                        <a:ea typeface="Cambria Math" panose="02040503050406030204" pitchFamily="18" charset="0"/>
-                      </a:rPr>
-                      <m:t>(0)</m:t>
-                    </m:r>
-                  </m:oMath>
-                </a14:m>
-                <a:r>
-                  <a:rPr lang="en-US" b="0" dirty="0"/>
-                  <a:t>. </a:t>
-                </a:r>
-                <a:r>
-                  <a:rPr lang="en-US" dirty="0"/>
-                  <a:t>We’ve just shown that the model will </a:t>
-                </a:r>
-                <a:r>
-                  <a:rPr lang="en-US" b="0" dirty="0"/>
-                  <a:t>approximate the classification probability </a:t>
-                </a:r>
-                <a14:m>
-                  <m:oMath xmlns:m="http://schemas.openxmlformats.org/officeDocument/2006/math">
-                    <m:r>
-                      <a:rPr lang="en-US" i="1" smtClean="0">
-                        <a:solidFill>
-                          <a:srgbClr val="0033CC"/>
-                        </a:solidFill>
-                        <a:latin typeface="Cambria Math" panose="02040503050406030204" pitchFamily="18" charset="0"/>
-                      </a:rPr>
-                      <m:t>𝑝</m:t>
-                    </m:r>
-                    <m:d>
-                      <m:dPr>
-                        <m:ctrlPr>
-                          <a:rPr lang="en-US" i="1">
-                            <a:solidFill>
-                              <a:srgbClr val="0033CC"/>
-                            </a:solidFill>
-                            <a:latin typeface="Cambria Math" panose="02040503050406030204" pitchFamily="18" charset="0"/>
-                          </a:rPr>
-                        </m:ctrlPr>
-                      </m:dPr>
-                      <m:e>
-                        <m:r>
-                          <a:rPr lang="en-US" b="0" i="1" smtClean="0">
-                            <a:solidFill>
-                              <a:srgbClr val="0033CC"/>
-                            </a:solidFill>
-                            <a:latin typeface="Cambria Math" panose="02040503050406030204" pitchFamily="18" charset="0"/>
-                          </a:rPr>
-                          <m:t>1</m:t>
-                        </m:r>
-                      </m:e>
-                      <m:e>
-                        <m:r>
-                          <a:rPr lang="en-US" b="0" i="1" smtClean="0">
-                            <a:solidFill>
-                              <a:srgbClr val="0033CC"/>
-                            </a:solidFill>
-                            <a:latin typeface="Cambria Math" panose="02040503050406030204" pitchFamily="18" charset="0"/>
-                          </a:rPr>
-                          <m:t>𝑥</m:t>
-                        </m:r>
-                      </m:e>
-                    </m:d>
-                  </m:oMath>
-                </a14:m>
-                <a:r>
-                  <a:rPr lang="en-US" b="0" dirty="0"/>
-                  <a:t>. </a:t>
-                </a:r>
-              </a:p>
-              <a:p>
-                <a:pPr marL="0" indent="0">
-                  <a:buNone/>
-                </a:pPr>
-                <a:endParaRPr lang="en-US" dirty="0"/>
-              </a:p>
-              <a:p>
-                <a:pPr marL="0" indent="0">
-                  <a:buNone/>
-                </a:pPr>
-                <a:r>
-                  <a:rPr lang="en-US" b="0" dirty="0"/>
-                  <a:t>But what if </a:t>
-                </a:r>
-                <a14:m>
-                  <m:oMath xmlns:m="http://schemas.openxmlformats.org/officeDocument/2006/math">
-                    <m:r>
-                      <a:rPr lang="en-US" i="1">
-                        <a:solidFill>
-                          <a:srgbClr val="0033CC"/>
-                        </a:solidFill>
-                        <a:latin typeface="Cambria Math" panose="02040503050406030204" pitchFamily="18" charset="0"/>
-                      </a:rPr>
-                      <m:t>𝜋</m:t>
-                    </m:r>
-                    <m:r>
-                      <a:rPr lang="en-US" i="1">
-                        <a:solidFill>
-                          <a:srgbClr val="0033CC"/>
-                        </a:solidFill>
-                        <a:latin typeface="Cambria Math" panose="02040503050406030204" pitchFamily="18" charset="0"/>
-                      </a:rPr>
-                      <m:t>(1)≪</m:t>
-                    </m:r>
-                    <m:r>
-                      <a:rPr lang="en-US" i="1">
-                        <a:solidFill>
-                          <a:srgbClr val="0033CC"/>
-                        </a:solidFill>
-                        <a:latin typeface="Cambria Math" panose="02040503050406030204" pitchFamily="18" charset="0"/>
-                        <a:ea typeface="Cambria Math" panose="02040503050406030204" pitchFamily="18" charset="0"/>
-                      </a:rPr>
-                      <m:t>𝜋</m:t>
-                    </m:r>
-                    <m:r>
-                      <a:rPr lang="en-US" i="1">
-                        <a:solidFill>
-                          <a:srgbClr val="0033CC"/>
-                        </a:solidFill>
-                        <a:latin typeface="Cambria Math" panose="02040503050406030204" pitchFamily="18" charset="0"/>
-                        <a:ea typeface="Cambria Math" panose="02040503050406030204" pitchFamily="18" charset="0"/>
-                      </a:rPr>
-                      <m:t>(0)</m:t>
-                    </m:r>
-                  </m:oMath>
-                </a14:m>
-                <a:r>
-                  <a:rPr lang="en-US" dirty="0"/>
-                  <a:t>? The classifier is unlikely to be very good. (</a:t>
-                </a:r>
-                <a:r>
-                  <a:rPr lang="en-US" dirty="0">
-                    <a:solidFill>
-                      <a:srgbClr val="0033CC"/>
-                    </a:solidFill>
-                  </a:rPr>
-                  <a:t>Why do you think this is</a:t>
-                </a:r>
-                <a:r>
-                  <a:rPr lang="en-US" dirty="0"/>
-                  <a:t>?) </a:t>
-                </a:r>
-              </a:p>
-              <a:p>
-                <a:pPr marL="0" indent="0">
-                  <a:buNone/>
-                </a:pPr>
-                <a:r>
-                  <a:rPr lang="en-US" dirty="0"/>
-                  <a:t>Instead, train with a balanced dataset and compute </a:t>
-                </a:r>
-                <a14:m>
-                  <m:oMath xmlns:m="http://schemas.openxmlformats.org/officeDocument/2006/math">
-                    <m:r>
-                      <a:rPr lang="en-US" i="1">
-                        <a:solidFill>
-                          <a:srgbClr val="0033CC"/>
-                        </a:solidFill>
-                        <a:latin typeface="Cambria Math" panose="02040503050406030204" pitchFamily="18" charset="0"/>
-                      </a:rPr>
-                      <m:t>𝑝</m:t>
-                    </m:r>
-                    <m:d>
-                      <m:dPr>
-                        <m:ctrlPr>
-                          <a:rPr lang="en-US" i="1">
-                            <a:solidFill>
-                              <a:srgbClr val="0033CC"/>
-                            </a:solidFill>
-                            <a:latin typeface="Cambria Math" panose="02040503050406030204" pitchFamily="18" charset="0"/>
-                          </a:rPr>
-                        </m:ctrlPr>
-                      </m:dPr>
-                      <m:e>
-                        <m:r>
-                          <a:rPr lang="en-US" b="0" i="1" smtClean="0">
-                            <a:solidFill>
-                              <a:srgbClr val="0033CC"/>
-                            </a:solidFill>
-                            <a:latin typeface="Cambria Math" panose="02040503050406030204" pitchFamily="18" charset="0"/>
-                          </a:rPr>
-                          <m:t>1</m:t>
-                        </m:r>
-                      </m:e>
-                      <m:e>
-                        <m:r>
-                          <a:rPr lang="en-US" b="0" i="1" smtClean="0">
-                            <a:solidFill>
-                              <a:srgbClr val="0033CC"/>
-                            </a:solidFill>
-                            <a:latin typeface="Cambria Math" panose="02040503050406030204" pitchFamily="18" charset="0"/>
-                          </a:rPr>
-                          <m:t>𝑥</m:t>
-                        </m:r>
-                      </m:e>
-                    </m:d>
-                  </m:oMath>
-                </a14:m>
-                <a:r>
-                  <a:rPr lang="en-US" dirty="0"/>
-                  <a:t> using</a:t>
-                </a:r>
-              </a:p>
-              <a:p>
-                <a:pPr marL="0" indent="0">
-                  <a:buNone/>
-                </a:pPr>
-                <a14:m>
-                  <m:oMathPara xmlns:m="http://schemas.openxmlformats.org/officeDocument/2006/math">
-                    <m:oMathParaPr>
-                      <m:jc m:val="centerGroup"/>
-                    </m:oMathParaPr>
-                    <m:oMath xmlns:m="http://schemas.openxmlformats.org/officeDocument/2006/math">
-                      <m:r>
-                        <a:rPr lang="en-US" b="0" i="1" smtClean="0">
-                          <a:latin typeface="Cambria Math" panose="02040503050406030204" pitchFamily="18" charset="0"/>
-                        </a:rPr>
-                        <m:t>𝑝</m:t>
-                      </m:r>
-                      <m:d>
-                        <m:dPr>
-                          <m:ctrlPr>
-                            <a:rPr lang="en-US" b="0" i="1" smtClean="0">
-                              <a:latin typeface="Cambria Math" panose="02040503050406030204" pitchFamily="18" charset="0"/>
-                            </a:rPr>
-                          </m:ctrlPr>
-                        </m:dPr>
-                        <m:e>
-                          <m:r>
-                            <a:rPr lang="en-US" b="0" i="1" smtClean="0">
-                              <a:latin typeface="Cambria Math" panose="02040503050406030204" pitchFamily="18" charset="0"/>
-                            </a:rPr>
-                            <m:t>1</m:t>
-                          </m:r>
-                        </m:e>
-                        <m:e>
-                          <m:r>
-                            <a:rPr lang="en-US" b="0" i="1" smtClean="0">
-                              <a:latin typeface="Cambria Math" panose="02040503050406030204" pitchFamily="18" charset="0"/>
-                            </a:rPr>
-                            <m:t>𝑥</m:t>
-                          </m:r>
-                        </m:e>
-                      </m:d>
-                      <m:r>
-                        <a:rPr lang="en-US" b="0" i="1" smtClean="0">
-                          <a:latin typeface="Cambria Math" panose="02040503050406030204" pitchFamily="18" charset="0"/>
-                        </a:rPr>
-                        <m:t>=</m:t>
-                      </m:r>
-                      <m:f>
-                        <m:fPr>
-                          <m:ctrlPr>
-                            <a:rPr lang="en-US" i="1">
-                              <a:latin typeface="Cambria Math" panose="02040503050406030204" pitchFamily="18" charset="0"/>
-                            </a:rPr>
-                          </m:ctrlPr>
-                        </m:fPr>
-                        <m:num>
-                          <m:r>
-                            <a:rPr lang="en-US" b="0" i="1" smtClean="0">
-                              <a:latin typeface="Cambria Math" panose="02040503050406030204" pitchFamily="18" charset="0"/>
-                            </a:rPr>
-                            <m:t>𝐷</m:t>
-                          </m:r>
-                          <m:r>
-                            <a:rPr lang="en-US" b="0" i="1" smtClean="0">
-                              <a:latin typeface="Cambria Math" panose="02040503050406030204" pitchFamily="18" charset="0"/>
-                            </a:rPr>
-                            <m:t>(</m:t>
-                          </m:r>
-                          <m:r>
-                            <a:rPr lang="en-US" b="0" i="1" smtClean="0">
-                              <a:latin typeface="Cambria Math" panose="02040503050406030204" pitchFamily="18" charset="0"/>
-                            </a:rPr>
-                            <m:t>𝑥</m:t>
-                          </m:r>
-                          <m:r>
-                            <a:rPr lang="en-US" b="0" i="1" smtClean="0">
-                              <a:latin typeface="Cambria Math" panose="02040503050406030204" pitchFamily="18" charset="0"/>
-                            </a:rPr>
-                            <m:t>)</m:t>
-                          </m:r>
-                          <m:r>
-                            <a:rPr lang="en-US" b="0" i="1" smtClean="0">
-                              <a:latin typeface="Cambria Math" panose="02040503050406030204" pitchFamily="18" charset="0"/>
-                            </a:rPr>
-                            <m:t>𝜋</m:t>
-                          </m:r>
-                          <m:r>
-                            <a:rPr lang="en-US" b="0" i="1" smtClean="0">
-                              <a:latin typeface="Cambria Math" panose="02040503050406030204" pitchFamily="18" charset="0"/>
-                            </a:rPr>
-                            <m:t>(1) </m:t>
-                          </m:r>
-                        </m:num>
-                        <m:den>
-                          <m:r>
-                            <a:rPr lang="en-US" i="1">
-                              <a:latin typeface="Cambria Math" panose="02040503050406030204" pitchFamily="18" charset="0"/>
-                            </a:rPr>
-                            <m:t>𝐷</m:t>
-                          </m:r>
-                          <m:r>
-                            <a:rPr lang="en-US" i="1">
-                              <a:latin typeface="Cambria Math" panose="02040503050406030204" pitchFamily="18" charset="0"/>
-                            </a:rPr>
-                            <m:t>(</m:t>
-                          </m:r>
-                          <m:r>
-                            <a:rPr lang="en-US" i="1">
-                              <a:latin typeface="Cambria Math" panose="02040503050406030204" pitchFamily="18" charset="0"/>
-                            </a:rPr>
-                            <m:t>𝑥</m:t>
-                          </m:r>
-                          <m:r>
-                            <a:rPr lang="en-US" i="1">
-                              <a:latin typeface="Cambria Math" panose="02040503050406030204" pitchFamily="18" charset="0"/>
-                            </a:rPr>
-                            <m:t>)</m:t>
-                          </m:r>
-                          <m:r>
-                            <a:rPr lang="en-US" i="1">
-                              <a:latin typeface="Cambria Math" panose="02040503050406030204" pitchFamily="18" charset="0"/>
-                            </a:rPr>
-                            <m:t>𝜋</m:t>
-                          </m:r>
-                          <m:r>
-                            <a:rPr lang="en-US" i="1">
-                              <a:latin typeface="Cambria Math" panose="02040503050406030204" pitchFamily="18" charset="0"/>
-                            </a:rPr>
-                            <m:t>(1)+</m:t>
-                          </m:r>
-                          <m:d>
-                            <m:dPr>
-                              <m:begChr m:val="["/>
-                              <m:endChr m:val="]"/>
-                              <m:ctrlPr>
-                                <a:rPr lang="en-US" i="1" smtClean="0">
-                                  <a:latin typeface="Cambria Math" panose="02040503050406030204" pitchFamily="18" charset="0"/>
-                                </a:rPr>
-                              </m:ctrlPr>
-                            </m:dPr>
-                            <m:e>
-                              <m:r>
-                                <a:rPr lang="en-US" b="0" i="1" smtClean="0">
-                                  <a:latin typeface="Cambria Math" panose="02040503050406030204" pitchFamily="18" charset="0"/>
-                                </a:rPr>
-                                <m:t>1−</m:t>
-                              </m:r>
-                              <m:r>
-                                <a:rPr lang="en-US" b="0" i="1" smtClean="0">
-                                  <a:latin typeface="Cambria Math" panose="02040503050406030204" pitchFamily="18" charset="0"/>
-                                </a:rPr>
-                                <m:t>𝐷</m:t>
-                              </m:r>
-                              <m:d>
-                                <m:dPr>
-                                  <m:ctrlPr>
-                                    <a:rPr lang="en-US" b="0" i="1" smtClean="0">
-                                      <a:latin typeface="Cambria Math" panose="02040503050406030204" pitchFamily="18" charset="0"/>
-                                    </a:rPr>
-                                  </m:ctrlPr>
-                                </m:dPr>
-                                <m:e>
-                                  <m:r>
-                                    <a:rPr lang="en-US" b="0" i="1" smtClean="0">
-                                      <a:latin typeface="Cambria Math" panose="02040503050406030204" pitchFamily="18" charset="0"/>
-                                    </a:rPr>
-                                    <m:t>𝑥</m:t>
-                                  </m:r>
-                                </m:e>
-                              </m:d>
-                            </m:e>
-                          </m:d>
-                          <m:r>
-                            <a:rPr lang="en-US" b="0" i="1" smtClean="0">
-                              <a:latin typeface="Cambria Math" panose="02040503050406030204" pitchFamily="18" charset="0"/>
-                            </a:rPr>
-                            <m:t>𝜋</m:t>
-                          </m:r>
-                          <m:r>
-                            <a:rPr lang="en-US" b="0" i="1" smtClean="0">
-                              <a:latin typeface="Cambria Math" panose="02040503050406030204" pitchFamily="18" charset="0"/>
-                            </a:rPr>
-                            <m:t>(0)</m:t>
-                          </m:r>
-                        </m:den>
-                      </m:f>
-                    </m:oMath>
-                  </m:oMathPara>
-                </a14:m>
-                <a:br>
-                  <a:rPr lang="en-US" dirty="0">
-                    <a:effectLst>
-                      <a:outerShdw blurRad="38100" dist="38100" dir="2700000" algn="tl">
-                        <a:srgbClr val="DDDDDD"/>
-                      </a:outerShdw>
-                    </a:effectLst>
-                  </a:rPr>
-                </a:br>
-                <a:endParaRPr lang="en-US" dirty="0">
-                  <a:effectLst>
-                    <a:outerShdw blurRad="38100" dist="38100" dir="2700000" algn="tl">
-                      <a:srgbClr val="DDDDDD"/>
-                    </a:outerShdw>
-                  </a:effectLst>
-                </a:endParaRPr>
-              </a:p>
-              <a:p>
-                <a:pPr marL="0" indent="0">
-                  <a:buNone/>
-                </a:pPr>
-                <a:r>
-                  <a:rPr lang="en-US" dirty="0">
-                    <a:effectLst>
-                      <a:outerShdw blurRad="38100" dist="38100" dir="2700000" algn="tl">
-                        <a:srgbClr val="DDDDDD"/>
-                      </a:outerShdw>
-                    </a:effectLst>
-                  </a:rPr>
-                  <a:t>where</a:t>
-                </a:r>
-              </a:p>
-              <a:p>
-                <a:pPr marL="0" indent="0">
-                  <a:buNone/>
-                </a:pPr>
-                <a14:m>
-                  <m:oMathPara xmlns:m="http://schemas.openxmlformats.org/officeDocument/2006/math">
-                    <m:oMathParaPr>
-                      <m:jc m:val="centerGroup"/>
-                    </m:oMathParaPr>
-                    <m:oMath xmlns:m="http://schemas.openxmlformats.org/officeDocument/2006/math">
-                      <m:r>
-                        <a:rPr lang="en-US" b="0" i="1" smtClean="0">
-                          <a:effectLst>
-                            <a:outerShdw blurRad="38100" dist="38100" dir="2700000" algn="tl">
-                              <a:srgbClr val="DDDDDD"/>
-                            </a:outerShdw>
-                          </a:effectLst>
-                          <a:latin typeface="Cambria Math" panose="02040503050406030204" pitchFamily="18" charset="0"/>
-                        </a:rPr>
-                        <m:t>𝐷</m:t>
-                      </m:r>
-                      <m:d>
-                        <m:dPr>
-                          <m:ctrlPr>
-                            <a:rPr lang="en-US" b="0" i="1" smtClean="0">
-                              <a:effectLst>
-                                <a:outerShdw blurRad="38100" dist="38100" dir="2700000" algn="tl">
-                                  <a:srgbClr val="DDDDDD"/>
-                                </a:outerShdw>
-                              </a:effectLst>
-                              <a:latin typeface="Cambria Math" panose="02040503050406030204" pitchFamily="18" charset="0"/>
-                            </a:rPr>
-                          </m:ctrlPr>
-                        </m:dPr>
-                        <m:e>
-                          <m:r>
-                            <a:rPr lang="en-US" b="0" i="1" smtClean="0">
-                              <a:effectLst>
-                                <a:outerShdw blurRad="38100" dist="38100" dir="2700000" algn="tl">
-                                  <a:srgbClr val="DDDDDD"/>
-                                </a:outerShdw>
-                              </a:effectLst>
-                              <a:latin typeface="Cambria Math" panose="02040503050406030204" pitchFamily="18" charset="0"/>
-                            </a:rPr>
-                            <m:t>𝑥</m:t>
-                          </m:r>
-                        </m:e>
-                      </m:d>
-                      <m:r>
-                        <a:rPr lang="en-US" b="0" i="1" smtClean="0">
-                          <a:effectLst>
-                            <a:outerShdw blurRad="38100" dist="38100" dir="2700000" algn="tl">
-                              <a:srgbClr val="DDDDDD"/>
-                            </a:outerShdw>
-                          </a:effectLst>
-                          <a:latin typeface="Cambria Math" panose="02040503050406030204" pitchFamily="18" charset="0"/>
-                        </a:rPr>
-                        <m:t>=</m:t>
-                      </m:r>
-                      <m:r>
-                        <a:rPr lang="en-US" b="0" i="1" smtClean="0">
-                          <a:effectLst>
-                            <a:outerShdw blurRad="38100" dist="38100" dir="2700000" algn="tl">
-                              <a:srgbClr val="DDDDDD"/>
-                            </a:outerShdw>
-                          </a:effectLst>
-                          <a:latin typeface="Cambria Math" panose="02040503050406030204" pitchFamily="18" charset="0"/>
-                        </a:rPr>
-                        <m:t>𝑝</m:t>
-                      </m:r>
-                      <m:d>
-                        <m:dPr>
-                          <m:ctrlPr>
-                            <a:rPr lang="en-US" b="0" i="1" smtClean="0">
-                              <a:effectLst>
-                                <a:outerShdw blurRad="38100" dist="38100" dir="2700000" algn="tl">
-                                  <a:srgbClr val="DDDDDD"/>
-                                </a:outerShdw>
-                              </a:effectLst>
-                              <a:latin typeface="Cambria Math" panose="02040503050406030204" pitchFamily="18" charset="0"/>
-                            </a:rPr>
-                          </m:ctrlPr>
-                        </m:dPr>
-                        <m:e>
-                          <m:r>
-                            <a:rPr lang="en-US" b="0" i="1" smtClean="0">
-                              <a:effectLst>
-                                <a:outerShdw blurRad="38100" dist="38100" dir="2700000" algn="tl">
-                                  <a:srgbClr val="DDDDDD"/>
-                                </a:outerShdw>
-                              </a:effectLst>
-                              <a:latin typeface="Cambria Math" panose="02040503050406030204" pitchFamily="18" charset="0"/>
-                            </a:rPr>
-                            <m:t>𝑥</m:t>
-                          </m:r>
-                        </m:e>
-                        <m:e>
-                          <m:r>
-                            <a:rPr lang="en-US" b="0" i="1" smtClean="0">
-                              <a:effectLst>
-                                <a:outerShdw blurRad="38100" dist="38100" dir="2700000" algn="tl">
-                                  <a:srgbClr val="DDDDDD"/>
-                                </a:outerShdw>
-                              </a:effectLst>
-                              <a:latin typeface="Cambria Math" panose="02040503050406030204" pitchFamily="18" charset="0"/>
-                            </a:rPr>
-                            <m:t>1</m:t>
-                          </m:r>
-                        </m:e>
-                      </m:d>
-                      <m:r>
-                        <a:rPr lang="en-US" b="0" i="1" smtClean="0">
-                          <a:effectLst>
-                            <a:outerShdw blurRad="38100" dist="38100" dir="2700000" algn="tl">
-                              <a:srgbClr val="DDDDDD"/>
-                            </a:outerShdw>
-                          </a:effectLst>
-                          <a:latin typeface="Cambria Math" panose="02040503050406030204" pitchFamily="18" charset="0"/>
-                        </a:rPr>
-                        <m:t>/</m:t>
-                      </m:r>
-                      <m:d>
-                        <m:dPr>
-                          <m:begChr m:val="["/>
-                          <m:endChr m:val="]"/>
-                          <m:ctrlPr>
-                            <a:rPr lang="en-US" b="0" i="1" smtClean="0">
-                              <a:effectLst>
-                                <a:outerShdw blurRad="38100" dist="38100" dir="2700000" algn="tl">
-                                  <a:srgbClr val="DDDDDD"/>
-                                </a:outerShdw>
-                              </a:effectLst>
-                              <a:latin typeface="Cambria Math" panose="02040503050406030204" pitchFamily="18" charset="0"/>
-                            </a:rPr>
-                          </m:ctrlPr>
-                        </m:dPr>
-                        <m:e>
-                          <m:r>
-                            <a:rPr lang="en-US" b="0" i="1" smtClean="0">
-                              <a:effectLst>
-                                <a:outerShdw blurRad="38100" dist="38100" dir="2700000" algn="tl">
-                                  <a:srgbClr val="DDDDDD"/>
-                                </a:outerShdw>
-                              </a:effectLst>
-                              <a:latin typeface="Cambria Math" panose="02040503050406030204" pitchFamily="18" charset="0"/>
-                            </a:rPr>
-                            <m:t>𝑝</m:t>
-                          </m:r>
-                          <m:d>
-                            <m:dPr>
-                              <m:ctrlPr>
-                                <a:rPr lang="en-US" b="0" i="1" smtClean="0">
-                                  <a:effectLst>
-                                    <a:outerShdw blurRad="38100" dist="38100" dir="2700000" algn="tl">
-                                      <a:srgbClr val="DDDDDD"/>
-                                    </a:outerShdw>
-                                  </a:effectLst>
-                                  <a:latin typeface="Cambria Math" panose="02040503050406030204" pitchFamily="18" charset="0"/>
-                                </a:rPr>
-                              </m:ctrlPr>
-                            </m:dPr>
-                            <m:e>
-                              <m:r>
-                                <a:rPr lang="en-US" b="0" i="1" smtClean="0">
-                                  <a:effectLst>
-                                    <a:outerShdw blurRad="38100" dist="38100" dir="2700000" algn="tl">
-                                      <a:srgbClr val="DDDDDD"/>
-                                    </a:outerShdw>
-                                  </a:effectLst>
-                                  <a:latin typeface="Cambria Math" panose="02040503050406030204" pitchFamily="18" charset="0"/>
-                                </a:rPr>
-                                <m:t>𝑥</m:t>
-                              </m:r>
-                            </m:e>
-                            <m:e>
-                              <m:r>
-                                <a:rPr lang="en-US" b="0" i="1" smtClean="0">
-                                  <a:effectLst>
-                                    <a:outerShdw blurRad="38100" dist="38100" dir="2700000" algn="tl">
-                                      <a:srgbClr val="DDDDDD"/>
-                                    </a:outerShdw>
-                                  </a:effectLst>
-                                  <a:latin typeface="Cambria Math" panose="02040503050406030204" pitchFamily="18" charset="0"/>
-                                </a:rPr>
-                                <m:t>1</m:t>
-                              </m:r>
-                            </m:e>
-                          </m:d>
-                          <m:r>
-                            <a:rPr lang="en-US" b="0" i="1" smtClean="0">
-                              <a:effectLst>
-                                <a:outerShdw blurRad="38100" dist="38100" dir="2700000" algn="tl">
-                                  <a:srgbClr val="DDDDDD"/>
-                                </a:outerShdw>
-                              </a:effectLst>
-                              <a:latin typeface="Cambria Math" panose="02040503050406030204" pitchFamily="18" charset="0"/>
-                            </a:rPr>
-                            <m:t>+</m:t>
-                          </m:r>
-                          <m:r>
-                            <a:rPr lang="en-US" b="0" i="1" smtClean="0">
-                              <a:effectLst>
-                                <a:outerShdw blurRad="38100" dist="38100" dir="2700000" algn="tl">
-                                  <a:srgbClr val="DDDDDD"/>
-                                </a:outerShdw>
-                              </a:effectLst>
-                              <a:latin typeface="Cambria Math" panose="02040503050406030204" pitchFamily="18" charset="0"/>
-                            </a:rPr>
-                            <m:t>𝑝</m:t>
-                          </m:r>
-                          <m:r>
-                            <a:rPr lang="en-US" b="0" i="1" smtClean="0">
-                              <a:effectLst>
-                                <a:outerShdw blurRad="38100" dist="38100" dir="2700000" algn="tl">
-                                  <a:srgbClr val="DDDDDD"/>
-                                </a:outerShdw>
-                              </a:effectLst>
-                              <a:latin typeface="Cambria Math" panose="02040503050406030204" pitchFamily="18" charset="0"/>
-                            </a:rPr>
-                            <m:t>(</m:t>
-                          </m:r>
-                          <m:r>
-                            <a:rPr lang="en-US" b="0" i="1" smtClean="0">
-                              <a:effectLst>
-                                <a:outerShdw blurRad="38100" dist="38100" dir="2700000" algn="tl">
-                                  <a:srgbClr val="DDDDDD"/>
-                                </a:outerShdw>
-                              </a:effectLst>
-                              <a:latin typeface="Cambria Math" panose="02040503050406030204" pitchFamily="18" charset="0"/>
-                            </a:rPr>
-                            <m:t>𝑥</m:t>
-                          </m:r>
-                          <m:r>
-                            <a:rPr lang="en-US" b="0" i="1" smtClean="0">
-                              <a:effectLst>
-                                <a:outerShdw blurRad="38100" dist="38100" dir="2700000" algn="tl">
-                                  <a:srgbClr val="DDDDDD"/>
-                                </a:outerShdw>
-                              </a:effectLst>
-                              <a:latin typeface="Cambria Math" panose="02040503050406030204" pitchFamily="18" charset="0"/>
-                            </a:rPr>
-                            <m:t>|0)</m:t>
-                          </m:r>
-                        </m:e>
-                      </m:d>
-                    </m:oMath>
-                  </m:oMathPara>
-                </a14:m>
-                <a:endParaRPr lang="en-US" dirty="0">
-                  <a:effectLst>
-                    <a:outerShdw blurRad="38100" dist="38100" dir="2700000" algn="tl">
-                      <a:srgbClr val="DDDDDD"/>
-                    </a:outerShdw>
-                  </a:effectLst>
-                </a:endParaRPr>
-              </a:p>
-              <a:p>
-                <a:pPr marL="0" indent="0">
-                  <a:buNone/>
-                </a:pPr>
-                <a:endParaRPr lang="en-US" dirty="0"/>
-              </a:p>
-            </p:txBody>
-          </p:sp>
-        </mc:Choice>
-        <mc:Fallback xmlns="">
-          <p:sp>
-            <p:nvSpPr>
-              <p:cNvPr id="4" name="Content Placeholder 3">
-                <a:extLst>
-                  <a:ext uri="{FF2B5EF4-FFF2-40B4-BE49-F238E27FC236}">
-                    <a16:creationId xmlns:a16="http://schemas.microsoft.com/office/drawing/2014/main" id="{55270A78-B3C6-0C0C-96AB-1507A7B10D43}"/>
-                  </a:ext>
-                </a:extLst>
-              </p:cNvPr>
-              <p:cNvSpPr>
-                <a:spLocks noGrp="1" noRot="1" noChangeAspect="1" noMove="1" noResize="1" noEditPoints="1" noAdjustHandles="1" noChangeArrowheads="1" noChangeShapeType="1" noTextEdit="1"/>
-              </p:cNvSpPr>
-              <p:nvPr>
-                <p:ph sz="half" idx="1"/>
-              </p:nvPr>
-            </p:nvSpPr>
-            <p:spPr>
-              <a:blipFill>
-                <a:blip r:embed="rId2"/>
-                <a:stretch>
-                  <a:fillRect l="-1309" t="-1316" r="-818" b="-2105"/>
-                </a:stretch>
-              </a:blipFill>
-            </p:spPr>
-            <p:txBody>
-              <a:bodyPr/>
-              <a:lstStyle/>
-              <a:p>
-                <a:r>
-                  <a:rPr lang="en-US">
-                    <a:noFill/>
-                  </a:rPr>
-                  <a:t> </a:t>
-                </a:r>
-              </a:p>
-            </p:txBody>
-          </p:sp>
-        </mc:Fallback>
-      </mc:AlternateContent>
-      <p:sp>
-        <p:nvSpPr>
-          <p:cNvPr id="3" name="Title 2">
-            <a:extLst>
-              <a:ext uri="{FF2B5EF4-FFF2-40B4-BE49-F238E27FC236}">
-                <a16:creationId xmlns:a16="http://schemas.microsoft.com/office/drawing/2014/main" id="{6499AF41-7810-2449-4FA8-B6D0A34DFF25}"/>
-              </a:ext>
-            </a:extLst>
-          </p:cNvPr>
-          <p:cNvSpPr>
-            <a:spLocks noGrp="1"/>
-          </p:cNvSpPr>
-          <p:nvPr>
-            <p:ph type="title"/>
-          </p:nvPr>
-        </p:nvSpPr>
-        <p:spPr/>
-        <p:txBody>
-          <a:bodyPr/>
-          <a:lstStyle/>
-          <a:p>
-            <a:r>
-              <a:rPr lang="en-US" dirty="0"/>
-              <a:t>The Discriminant: </a:t>
-            </a:r>
-            <a:r>
-              <a:rPr lang="en-US" dirty="0">
-                <a:solidFill>
-                  <a:schemeClr val="accent1"/>
-                </a:solidFill>
-              </a:rPr>
-              <a:t>Uses (2)</a:t>
-            </a:r>
-          </a:p>
-        </p:txBody>
-      </p:sp>
-    </p:spTree>
-    <p:extLst>
-      <p:ext uri="{BB962C8B-B14F-4D97-AF65-F5344CB8AC3E}">
-        <p14:creationId xmlns:p14="http://schemas.microsoft.com/office/powerpoint/2010/main" val="646150381"/>
-      </p:ext>
-    </p:extLst>
-  </p:cSld>
-  <p:clrMapOvr>
-    <a:masterClrMapping/>
-  </p:clrMapOvr>
-  <p:timing>
-    <p:tnLst>
-      <p:par>
-        <p:cTn id="1" dur="indefinite" restart="never" nodeType="tmRoot">
-          <p:childTnLst>
-            <p:seq concurrent="1" nextAc="seek">
-              <p:cTn id="2" dur="indefinite" nodeType="mainSeq">
-                <p:childTnLst>
-                  <p:par>
-                    <p:cTn id="3" fill="hold">
-                      <p:stCondLst>
-                        <p:cond delay="indefinite"/>
-                      </p:stCondLst>
-                      <p:childTnLst>
-                        <p:par>
-                          <p:cTn id="4" fill="hold">
-                            <p:stCondLst>
-                              <p:cond delay="0"/>
-                            </p:stCondLst>
-                            <p:childTnLst>
-                              <p:par>
-                                <p:cTn id="5" presetID="10" presetClass="entr" presetSubtype="0" fill="hold" nodeType="clickEffect">
-                                  <p:stCondLst>
-                                    <p:cond delay="0"/>
-                                  </p:stCondLst>
-                                  <p:childTnLst>
-                                    <p:set>
-                                      <p:cBhvr>
-                                        <p:cTn id="6" dur="1" fill="hold">
-                                          <p:stCondLst>
-                                            <p:cond delay="0"/>
-                                          </p:stCondLst>
-                                        </p:cTn>
-                                        <p:tgtEl>
-                                          <p:spTgt spid="4">
-                                            <p:txEl>
-                                              <p:pRg st="3" end="3"/>
-                                            </p:txEl>
-                                          </p:spTgt>
-                                        </p:tgtEl>
-                                        <p:attrNameLst>
-                                          <p:attrName>style.visibility</p:attrName>
-                                        </p:attrNameLst>
-                                      </p:cBhvr>
-                                      <p:to>
-                                        <p:strVal val="visible"/>
-                                      </p:to>
-                                    </p:set>
-                                    <p:animEffect transition="in" filter="fade">
-                                      <p:cBhvr>
-                                        <p:cTn id="7" dur="500"/>
-                                        <p:tgtEl>
-                                          <p:spTgt spid="4">
-                                            <p:txEl>
-                                              <p:pRg st="3" end="3"/>
-                                            </p:txEl>
-                                          </p:spTgt>
-                                        </p:tgtEl>
-                                      </p:cBhvr>
-                                    </p:animEffect>
-                                  </p:childTnLst>
-                                </p:cTn>
-                              </p:par>
-                              <p:par>
-                                <p:cTn id="8" presetID="10" presetClass="entr" presetSubtype="0" fill="hold" nodeType="withEffect">
-                                  <p:stCondLst>
-                                    <p:cond delay="0"/>
-                                  </p:stCondLst>
-                                  <p:childTnLst>
-                                    <p:set>
-                                      <p:cBhvr>
-                                        <p:cTn id="9" dur="1" fill="hold">
-                                          <p:stCondLst>
-                                            <p:cond delay="0"/>
-                                          </p:stCondLst>
-                                        </p:cTn>
-                                        <p:tgtEl>
-                                          <p:spTgt spid="4">
-                                            <p:txEl>
-                                              <p:pRg st="4" end="4"/>
-                                            </p:txEl>
-                                          </p:spTgt>
-                                        </p:tgtEl>
-                                        <p:attrNameLst>
-                                          <p:attrName>style.visibility</p:attrName>
-                                        </p:attrNameLst>
-                                      </p:cBhvr>
-                                      <p:to>
-                                        <p:strVal val="visible"/>
-                                      </p:to>
-                                    </p:set>
-                                    <p:animEffect transition="in" filter="fade">
-                                      <p:cBhvr>
-                                        <p:cTn id="10" dur="500"/>
-                                        <p:tgtEl>
-                                          <p:spTgt spid="4">
-                                            <p:txEl>
-                                              <p:pRg st="4" end="4"/>
-                                            </p:txEl>
-                                          </p:spTgt>
-                                        </p:tgtEl>
-                                      </p:cBhvr>
-                                    </p:animEffect>
-                                  </p:childTnLst>
-                                </p:cTn>
-                              </p:par>
-                              <p:par>
-                                <p:cTn id="11" presetID="10" presetClass="entr" presetSubtype="0" fill="hold" nodeType="withEffect">
-                                  <p:stCondLst>
-                                    <p:cond delay="0"/>
-                                  </p:stCondLst>
-                                  <p:childTnLst>
-                                    <p:set>
-                                      <p:cBhvr>
-                                        <p:cTn id="12" dur="1" fill="hold">
-                                          <p:stCondLst>
-                                            <p:cond delay="0"/>
-                                          </p:stCondLst>
-                                        </p:cTn>
-                                        <p:tgtEl>
-                                          <p:spTgt spid="4">
-                                            <p:txEl>
-                                              <p:pRg st="5" end="5"/>
-                                            </p:txEl>
-                                          </p:spTgt>
-                                        </p:tgtEl>
-                                        <p:attrNameLst>
-                                          <p:attrName>style.visibility</p:attrName>
-                                        </p:attrNameLst>
-                                      </p:cBhvr>
-                                      <p:to>
-                                        <p:strVal val="visible"/>
-                                      </p:to>
-                                    </p:set>
-                                    <p:animEffect transition="in" filter="fade">
-                                      <p:cBhvr>
-                                        <p:cTn id="13" dur="500"/>
-                                        <p:tgtEl>
-                                          <p:spTgt spid="4">
-                                            <p:txEl>
-                                              <p:pRg st="5" end="5"/>
-                                            </p:txEl>
-                                          </p:spTgt>
-                                        </p:tgtEl>
-                                      </p:cBhvr>
-                                    </p:animEffect>
-                                  </p:childTnLst>
-                                </p:cTn>
-                              </p:par>
-                              <p:par>
-                                <p:cTn id="14" presetID="10" presetClass="entr" presetSubtype="0" fill="hold" nodeType="withEffect">
-                                  <p:stCondLst>
-                                    <p:cond delay="0"/>
-                                  </p:stCondLst>
-                                  <p:childTnLst>
-                                    <p:set>
-                                      <p:cBhvr>
-                                        <p:cTn id="15" dur="1" fill="hold">
-                                          <p:stCondLst>
-                                            <p:cond delay="0"/>
-                                          </p:stCondLst>
-                                        </p:cTn>
-                                        <p:tgtEl>
-                                          <p:spTgt spid="4">
-                                            <p:txEl>
-                                              <p:pRg st="6" end="6"/>
-                                            </p:txEl>
-                                          </p:spTgt>
-                                        </p:tgtEl>
-                                        <p:attrNameLst>
-                                          <p:attrName>style.visibility</p:attrName>
-                                        </p:attrNameLst>
-                                      </p:cBhvr>
-                                      <p:to>
-                                        <p:strVal val="visible"/>
-                                      </p:to>
-                                    </p:set>
-                                    <p:animEffect transition="in" filter="fade">
-                                      <p:cBhvr>
-                                        <p:cTn id="16" dur="500"/>
-                                        <p:tgtEl>
-                                          <p:spTgt spid="4">
-                                            <p:txEl>
-                                              <p:pRg st="6" end="6"/>
-                                            </p:txEl>
-                                          </p:spTgt>
-                                        </p:tgtEl>
-                                      </p:cBhvr>
-                                    </p:animEffect>
-                                  </p:childTnLst>
-                                </p:cTn>
-                              </p:par>
-                            </p:childTnLst>
-                          </p:cTn>
-                        </p:par>
-                      </p:childTnLst>
-                    </p:cTn>
-                  </p:par>
-                </p:childTnLst>
-              </p:cTn>
-              <p:prevCondLst>
-                <p:cond evt="onPrev" delay="0">
-                  <p:tgtEl>
-                    <p:sldTgt/>
-                  </p:tgtEl>
-                </p:cond>
-              </p:prevCondLst>
-              <p:nextCondLst>
-                <p:cond evt="onNext" delay="0">
-                  <p:tgtEl>
-                    <p:sldTgt/>
-                  </p:tgtEl>
-                </p:cond>
-              </p:nextCondLst>
-            </p:seq>
-          </p:childTnLst>
-        </p:cTn>
-      </p:par>
-    </p:tnLst>
-  </p:timing>
 </p:sld>
 </file>
 
@@ -22870,10 +18650,7 @@
                   </a:pPr>
                   <a14:m>
                     <m:oMathPara xmlns:m="http://schemas.openxmlformats.org/officeDocument/2006/math">
-                      <m:oMathParaPr>
-                        <m:jc m:val="centerGroup"/>
-                      </m:oMathParaPr>
-                      <m:oMath xmlns:m="http://schemas.openxmlformats.org/officeDocument/2006/math">
+                      <m:oMath>
                         <m:r>
                           <m:rPr>
                             <m:nor/>
@@ -23076,10 +18853,7 @@
                   </a:pPr>
                   <a14:m>
                     <m:oMathPara xmlns:m="http://schemas.openxmlformats.org/officeDocument/2006/math">
-                      <m:oMathParaPr>
-                        <m:jc m:val="centerGroup"/>
-                      </m:oMathParaPr>
-                      <m:oMath xmlns:m="http://schemas.openxmlformats.org/officeDocument/2006/math">
+                      <m:oMath>
                         <m:r>
                           <a:rPr kumimoji="0" lang="en-US" sz="2400" b="0" i="1" u="none" strike="noStrike" cap="none" normalizeH="0" baseline="0" smtClean="0">
                             <a:ln>
@@ -23394,10 +19168,7 @@
                   <a:pPr/>
                   <a14:m>
                     <m:oMathPara xmlns:m="http://schemas.openxmlformats.org/officeDocument/2006/math">
-                      <m:oMathParaPr>
-                        <m:jc m:val="centerGroup"/>
-                      </m:oMathParaPr>
-                      <m:oMath xmlns:m="http://schemas.openxmlformats.org/officeDocument/2006/math">
+                      <m:oMath>
                         <m:r>
                           <a:rPr lang="en-US" sz="3200" b="0" i="1" smtClean="0">
                             <a:latin typeface="Cambria Math" panose="02040503050406030204" pitchFamily="18" charset="0"/>
@@ -24036,1001 +19807,6 @@
       </p:transition>
     </mc:Fallback>
   </mc:AlternateContent>
-</p:sld>
-</file>
-
-<file path=ppt/slides/slide30.xml><?xml version="1.0" encoding="utf-8"?>
-<p:sld xmlns:a="http://schemas.openxmlformats.org/drawingml/2006/main" xmlns:r="http://schemas.openxmlformats.org/officeDocument/2006/relationships" xmlns:p="http://schemas.openxmlformats.org/presentationml/2006/main">
-  <p:cSld>
-    <p:spTree>
-      <p:nvGrpSpPr>
-        <p:cNvPr id="1" name="">
-          <a:extLst>
-            <a:ext uri="{FF2B5EF4-FFF2-40B4-BE49-F238E27FC236}">
-              <a16:creationId xmlns:a16="http://schemas.microsoft.com/office/drawing/2014/main" id="{2930BD22-A552-7619-8B27-EBFA13453DA8}"/>
-            </a:ext>
-          </a:extLst>
-        </p:cNvPr>
-        <p:cNvGrpSpPr/>
-        <p:nvPr/>
-      </p:nvGrpSpPr>
-      <p:grpSpPr>
-        <a:xfrm>
-          <a:off x="0" y="0"/>
-          <a:ext cx="0" cy="0"/>
-          <a:chOff x="0" y="0"/>
-          <a:chExt cx="0" cy="0"/>
-        </a:xfrm>
-      </p:grpSpPr>
-      <mc:AlternateContent xmlns:mc="http://schemas.openxmlformats.org/markup-compatibility/2006" xmlns:a14="http://schemas.microsoft.com/office/drawing/2010/main">
-        <mc:Choice Requires="a14">
-          <p:sp>
-            <p:nvSpPr>
-              <p:cNvPr id="4" name="Content Placeholder 3">
-                <a:extLst>
-                  <a:ext uri="{FF2B5EF4-FFF2-40B4-BE49-F238E27FC236}">
-                    <a16:creationId xmlns:a16="http://schemas.microsoft.com/office/drawing/2014/main" id="{1E630BBC-189E-5D63-12C1-97C1E92F8F38}"/>
-                  </a:ext>
-                </a:extLst>
-              </p:cNvPr>
-              <p:cNvSpPr>
-                <a:spLocks noGrp="1"/>
-              </p:cNvSpPr>
-              <p:nvPr>
-                <p:ph sz="half" idx="1"/>
-              </p:nvPr>
-            </p:nvSpPr>
-            <p:spPr/>
-            <p:txBody>
-              <a:bodyPr/>
-              <a:lstStyle/>
-              <a:p>
-                <a:pPr marL="0" indent="0">
-                  <a:buNone/>
-                </a:pPr>
-                <a:r>
-                  <a:rPr lang="en-US" b="1" dirty="0"/>
-                  <a:t>Stochastic Gradient Descent</a:t>
-                </a:r>
-              </a:p>
-              <a:p>
-                <a:r>
-                  <a:rPr lang="en-US" dirty="0"/>
-                  <a:t>Many (1</a:t>
-                </a:r>
-                <a:r>
-                  <a:rPr lang="en-US" baseline="30000" dirty="0"/>
-                  <a:t>st</a:t>
-                </a:r>
-                <a:r>
-                  <a:rPr lang="en-US" dirty="0"/>
-                  <a:t>-order) minimization algorithms are variations of the following algorithm:</a:t>
-                </a:r>
-                <a:endParaRPr lang="en-US" i="1" dirty="0">
-                  <a:solidFill>
-                    <a:srgbClr val="000000"/>
-                  </a:solidFill>
-                  <a:latin typeface="Cambria Math" panose="02040503050406030204" pitchFamily="18" charset="0"/>
-                  <a:ea typeface="Cambria Math" panose="02040503050406030204" pitchFamily="18" charset="0"/>
-                </a:endParaRPr>
-              </a:p>
-              <a:p>
-                <a:pPr marL="0" indent="0">
-                  <a:buNone/>
-                </a:pPr>
-                <a14:m>
-                  <m:oMathPara xmlns:m="http://schemas.openxmlformats.org/officeDocument/2006/math">
-                    <m:oMathParaPr>
-                      <m:jc m:val="centerGroup"/>
-                    </m:oMathParaPr>
-                    <m:oMath xmlns:m="http://schemas.openxmlformats.org/officeDocument/2006/math">
-                      <m:sSub>
-                        <m:sSubPr>
-                          <m:ctrlPr>
-                            <a:rPr lang="en-US" i="1">
-                              <a:solidFill>
-                                <a:srgbClr val="000000"/>
-                              </a:solidFill>
-                              <a:latin typeface="Cambria Math" panose="02040503050406030204" pitchFamily="18" charset="0"/>
-                              <a:ea typeface="Cambria Math" panose="02040503050406030204" pitchFamily="18" charset="0"/>
-                            </a:rPr>
-                          </m:ctrlPr>
-                        </m:sSubPr>
-                        <m:e>
-                          <m:r>
-                            <a:rPr lang="en-US" i="1">
-                              <a:solidFill>
-                                <a:srgbClr val="000000"/>
-                              </a:solidFill>
-                              <a:latin typeface="Cambria Math" panose="02040503050406030204" pitchFamily="18" charset="0"/>
-                              <a:ea typeface="Cambria Math" panose="02040503050406030204" pitchFamily="18" charset="0"/>
-                            </a:rPr>
-                            <m:t>𝜔</m:t>
-                          </m:r>
-                        </m:e>
-                        <m:sub>
-                          <m:r>
-                            <a:rPr lang="en-US" i="1">
-                              <a:solidFill>
-                                <a:srgbClr val="000000"/>
-                              </a:solidFill>
-                              <a:latin typeface="Cambria Math" panose="02040503050406030204" pitchFamily="18" charset="0"/>
-                              <a:ea typeface="Cambria Math" panose="02040503050406030204" pitchFamily="18" charset="0"/>
-                            </a:rPr>
-                            <m:t>𝑗</m:t>
-                          </m:r>
-                          <m:r>
-                            <a:rPr lang="en-US" i="1">
-                              <a:solidFill>
-                                <a:srgbClr val="000000"/>
-                              </a:solidFill>
-                              <a:latin typeface="Cambria Math" panose="02040503050406030204" pitchFamily="18" charset="0"/>
-                              <a:ea typeface="Cambria Math" panose="02040503050406030204" pitchFamily="18" charset="0"/>
-                            </a:rPr>
-                            <m:t>+1</m:t>
-                          </m:r>
-                        </m:sub>
-                      </m:sSub>
-                      <m:r>
-                        <a:rPr lang="en-US" i="1">
-                          <a:solidFill>
-                            <a:srgbClr val="000000"/>
-                          </a:solidFill>
-                          <a:latin typeface="Cambria Math" panose="02040503050406030204" pitchFamily="18" charset="0"/>
-                          <a:ea typeface="Cambria Math" panose="02040503050406030204" pitchFamily="18" charset="0"/>
-                        </a:rPr>
-                        <m:t>=</m:t>
-                      </m:r>
-                      <m:sSub>
-                        <m:sSubPr>
-                          <m:ctrlPr>
-                            <a:rPr lang="en-US" i="1">
-                              <a:solidFill>
-                                <a:srgbClr val="000000"/>
-                              </a:solidFill>
-                              <a:latin typeface="Cambria Math" panose="02040503050406030204" pitchFamily="18" charset="0"/>
-                              <a:ea typeface="Cambria Math" panose="02040503050406030204" pitchFamily="18" charset="0"/>
-                            </a:rPr>
-                          </m:ctrlPr>
-                        </m:sSubPr>
-                        <m:e>
-                          <m:r>
-                            <a:rPr lang="en-US" i="1">
-                              <a:solidFill>
-                                <a:srgbClr val="000000"/>
-                              </a:solidFill>
-                              <a:latin typeface="Cambria Math" panose="02040503050406030204" pitchFamily="18" charset="0"/>
-                              <a:ea typeface="Cambria Math" panose="02040503050406030204" pitchFamily="18" charset="0"/>
-                            </a:rPr>
-                            <m:t>𝜔</m:t>
-                          </m:r>
-                        </m:e>
-                        <m:sub>
-                          <m:r>
-                            <a:rPr lang="en-US" i="1">
-                              <a:solidFill>
-                                <a:srgbClr val="000000"/>
-                              </a:solidFill>
-                              <a:latin typeface="Cambria Math" panose="02040503050406030204" pitchFamily="18" charset="0"/>
-                              <a:ea typeface="Cambria Math" panose="02040503050406030204" pitchFamily="18" charset="0"/>
-                            </a:rPr>
-                            <m:t>𝑗</m:t>
-                          </m:r>
-                        </m:sub>
-                      </m:sSub>
-                      <m:r>
-                        <a:rPr lang="en-US" i="1">
-                          <a:solidFill>
-                            <a:srgbClr val="000000"/>
-                          </a:solidFill>
-                          <a:latin typeface="Cambria Math" charset="0"/>
-                          <a:ea typeface="Cambria Math" charset="0"/>
-                          <a:cs typeface="Cambria Math" charset="0"/>
-                        </a:rPr>
-                        <m:t>−</m:t>
-                      </m:r>
-                      <m:r>
-                        <a:rPr lang="en-US" i="1">
-                          <a:solidFill>
-                            <a:srgbClr val="0033CC"/>
-                          </a:solidFill>
-                          <a:latin typeface="Cambria Math" panose="02040503050406030204" pitchFamily="18" charset="0"/>
-                          <a:ea typeface="Cambria Math" panose="02040503050406030204" pitchFamily="18" charset="0"/>
-                          <a:cs typeface="Cambria Math" charset="0"/>
-                        </a:rPr>
-                        <m:t>𝜂</m:t>
-                      </m:r>
-                      <m:r>
-                        <m:rPr>
-                          <m:sty m:val="p"/>
-                        </m:rPr>
-                        <a:rPr lang="en-US" i="1">
-                          <a:latin typeface="Cambria Math" panose="02040503050406030204" pitchFamily="18" charset="0"/>
-                          <a:ea typeface="Cambria Math" panose="02040503050406030204" pitchFamily="18" charset="0"/>
-                          <a:cs typeface="Cambria Math" charset="0"/>
-                        </a:rPr>
-                        <m:t>∇</m:t>
-                      </m:r>
-                      <m:r>
-                        <a:rPr lang="en-US" i="1">
-                          <a:latin typeface="Cambria Math" panose="02040503050406030204" pitchFamily="18" charset="0"/>
-                          <a:ea typeface="Cambria Math" panose="02040503050406030204" pitchFamily="18" charset="0"/>
-                          <a:cs typeface="Cambria Math" charset="0"/>
-                        </a:rPr>
-                        <m:t>𝑅</m:t>
-                      </m:r>
-                    </m:oMath>
-                  </m:oMathPara>
-                </a14:m>
-                <a:endParaRPr lang="en-US" dirty="0">
-                  <a:ea typeface="Cambria Math" panose="02040503050406030204" pitchFamily="18" charset="0"/>
-                  <a:cs typeface="Cambria Math" charset="0"/>
-                </a:endParaRPr>
-              </a:p>
-              <a:p>
-                <a:r>
-                  <a:rPr lang="en-US" dirty="0"/>
-                  <a:t>Batches of data are used, which introduces noise into </a:t>
-                </a:r>
-                <a14:m>
-                  <m:oMath xmlns:m="http://schemas.openxmlformats.org/officeDocument/2006/math">
-                    <m:r>
-                      <m:rPr>
-                        <m:sty m:val="p"/>
-                      </m:rPr>
-                      <a:rPr lang="en-US" i="1">
-                        <a:latin typeface="Cambria Math" panose="02040503050406030204" pitchFamily="18" charset="0"/>
-                        <a:ea typeface="Cambria Math" panose="02040503050406030204" pitchFamily="18" charset="0"/>
-                        <a:cs typeface="Cambria Math" charset="0"/>
-                      </a:rPr>
-                      <m:t>∇</m:t>
-                    </m:r>
-                    <m:r>
-                      <a:rPr lang="en-US" i="1">
-                        <a:latin typeface="Cambria Math" panose="02040503050406030204" pitchFamily="18" charset="0"/>
-                        <a:ea typeface="Cambria Math" panose="02040503050406030204" pitchFamily="18" charset="0"/>
-                        <a:cs typeface="Cambria Math" charset="0"/>
-                      </a:rPr>
-                      <m:t>𝑅</m:t>
-                    </m:r>
-                  </m:oMath>
-                </a14:m>
-                <a:r>
-                  <a:rPr lang="en-US" dirty="0"/>
-                  <a:t>.</a:t>
-                </a:r>
-                <a:br>
-                  <a:rPr lang="en-US" dirty="0"/>
-                </a:br>
-                <a:endParaRPr lang="en-US" dirty="0"/>
-              </a:p>
-              <a:p>
-                <a:pPr marL="0" indent="0">
-                  <a:buNone/>
-                </a:pPr>
-                <a:r>
-                  <a:rPr lang="en-US" b="1" dirty="0"/>
-                  <a:t>Risk Minimization</a:t>
-                </a:r>
-              </a:p>
-              <a:p>
-                <a:r>
-                  <a:rPr lang="en-US" dirty="0"/>
-                  <a:t>Given a data set </a:t>
-                </a:r>
-                <a14:m>
-                  <m:oMath xmlns:m="http://schemas.openxmlformats.org/officeDocument/2006/math">
-                    <m:r>
-                      <a:rPr lang="en-US" i="1">
-                        <a:solidFill>
-                          <a:srgbClr val="0033CC"/>
-                        </a:solidFill>
-                        <a:latin typeface="Cambria Math" panose="02040503050406030204" pitchFamily="18" charset="0"/>
-                      </a:rPr>
-                      <m:t>𝐷</m:t>
-                    </m:r>
-                    <m:r>
-                      <a:rPr lang="en-US" i="1">
-                        <a:solidFill>
-                          <a:srgbClr val="0033CC"/>
-                        </a:solidFill>
-                        <a:latin typeface="Cambria Math" panose="02040503050406030204" pitchFamily="18" charset="0"/>
-                      </a:rPr>
-                      <m:t>=</m:t>
-                    </m:r>
-                    <m:sSubSup>
-                      <m:sSubSupPr>
-                        <m:ctrlPr>
-                          <a:rPr lang="en-US" i="1">
-                            <a:solidFill>
-                              <a:srgbClr val="0033CC"/>
-                            </a:solidFill>
-                            <a:latin typeface="Cambria Math" panose="02040503050406030204" pitchFamily="18" charset="0"/>
-                          </a:rPr>
-                        </m:ctrlPr>
-                      </m:sSubSupPr>
-                      <m:e>
-                        <m:d>
-                          <m:dPr>
-                            <m:begChr m:val="{"/>
-                            <m:endChr m:val="}"/>
-                            <m:ctrlPr>
-                              <a:rPr lang="en-US" i="1">
-                                <a:solidFill>
-                                  <a:srgbClr val="0033CC"/>
-                                </a:solidFill>
-                                <a:latin typeface="Cambria Math" panose="02040503050406030204" pitchFamily="18" charset="0"/>
-                              </a:rPr>
-                            </m:ctrlPr>
-                          </m:dPr>
-                          <m:e>
-                            <m:d>
-                              <m:dPr>
-                                <m:ctrlPr>
-                                  <a:rPr lang="en-US" i="1">
-                                    <a:solidFill>
-                                      <a:srgbClr val="0033CC"/>
-                                    </a:solidFill>
-                                    <a:latin typeface="Cambria Math" panose="02040503050406030204" pitchFamily="18" charset="0"/>
-                                  </a:rPr>
-                                </m:ctrlPr>
-                              </m:dPr>
-                              <m:e>
-                                <m:r>
-                                  <a:rPr lang="en-US" i="1">
-                                    <a:solidFill>
-                                      <a:srgbClr val="0033CC"/>
-                                    </a:solidFill>
-                                    <a:latin typeface="Cambria Math" panose="02040503050406030204" pitchFamily="18" charset="0"/>
-                                  </a:rPr>
-                                  <m:t>𝑥</m:t>
-                                </m:r>
-                                <m:r>
-                                  <a:rPr lang="en-US" i="1">
-                                    <a:solidFill>
-                                      <a:srgbClr val="0033CC"/>
-                                    </a:solidFill>
-                                    <a:latin typeface="Cambria Math" panose="02040503050406030204" pitchFamily="18" charset="0"/>
-                                  </a:rPr>
-                                  <m:t>,</m:t>
-                                </m:r>
-                                <m:r>
-                                  <a:rPr lang="en-US" i="1">
-                                    <a:solidFill>
-                                      <a:srgbClr val="0033CC"/>
-                                    </a:solidFill>
-                                    <a:latin typeface="Cambria Math" panose="02040503050406030204" pitchFamily="18" charset="0"/>
-                                  </a:rPr>
-                                  <m:t>𝑦</m:t>
-                                </m:r>
-                              </m:e>
-                            </m:d>
-                          </m:e>
-                        </m:d>
-                      </m:e>
-                      <m:sub>
-                        <m:r>
-                          <a:rPr lang="en-US" i="1">
-                            <a:solidFill>
-                              <a:srgbClr val="0033CC"/>
-                            </a:solidFill>
-                            <a:latin typeface="Cambria Math" panose="02040503050406030204" pitchFamily="18" charset="0"/>
-                          </a:rPr>
-                          <m:t>𝑖</m:t>
-                        </m:r>
-                        <m:r>
-                          <a:rPr lang="en-US" i="1">
-                            <a:solidFill>
-                              <a:srgbClr val="0033CC"/>
-                            </a:solidFill>
-                            <a:latin typeface="Cambria Math" panose="02040503050406030204" pitchFamily="18" charset="0"/>
-                          </a:rPr>
-                          <m:t>=1</m:t>
-                        </m:r>
-                      </m:sub>
-                      <m:sup>
-                        <m:r>
-                          <a:rPr lang="en-US" i="1">
-                            <a:solidFill>
-                              <a:srgbClr val="0033CC"/>
-                            </a:solidFill>
-                            <a:latin typeface="Cambria Math" panose="02040503050406030204" pitchFamily="18" charset="0"/>
-                          </a:rPr>
-                          <m:t>𝑁</m:t>
-                        </m:r>
-                      </m:sup>
-                    </m:sSubSup>
-                  </m:oMath>
-                </a14:m>
-                <a:r>
-                  <a:rPr lang="en-US" dirty="0"/>
-                  <a:t>, a model </a:t>
-                </a:r>
-                <a14:m>
-                  <m:oMath xmlns:m="http://schemas.openxmlformats.org/officeDocument/2006/math">
-                    <m:r>
-                      <a:rPr lang="en-US" i="1">
-                        <a:solidFill>
-                          <a:srgbClr val="0033CC"/>
-                        </a:solidFill>
-                        <a:latin typeface="Cambria Math" panose="02040503050406030204" pitchFamily="18" charset="0"/>
-                      </a:rPr>
-                      <m:t>𝑓</m:t>
-                    </m:r>
-                    <m:d>
-                      <m:dPr>
-                        <m:ctrlPr>
-                          <a:rPr lang="en-US" i="1">
-                            <a:solidFill>
-                              <a:srgbClr val="0033CC"/>
-                            </a:solidFill>
-                            <a:latin typeface="Cambria Math" panose="02040503050406030204" pitchFamily="18" charset="0"/>
-                          </a:rPr>
-                        </m:ctrlPr>
-                      </m:dPr>
-                      <m:e>
-                        <m:r>
-                          <a:rPr lang="en-US" i="1">
-                            <a:solidFill>
-                              <a:srgbClr val="0033CC"/>
-                            </a:solidFill>
-                            <a:latin typeface="Cambria Math" panose="02040503050406030204" pitchFamily="18" charset="0"/>
-                          </a:rPr>
-                          <m:t>𝑥</m:t>
-                        </m:r>
-                        <m:r>
-                          <a:rPr lang="en-US" i="1">
-                            <a:solidFill>
-                              <a:srgbClr val="0033CC"/>
-                            </a:solidFill>
-                            <a:latin typeface="Cambria Math" panose="02040503050406030204" pitchFamily="18" charset="0"/>
-                          </a:rPr>
-                          <m:t>,</m:t>
-                        </m:r>
-                        <m:r>
-                          <a:rPr lang="en-US" i="1">
-                            <a:solidFill>
-                              <a:srgbClr val="0033CC"/>
-                            </a:solidFill>
-                            <a:latin typeface="Cambria Math" panose="02040503050406030204" pitchFamily="18" charset="0"/>
-                          </a:rPr>
-                          <m:t>𝜔</m:t>
-                        </m:r>
-                      </m:e>
-                    </m:d>
-                  </m:oMath>
-                </a14:m>
-                <a:r>
-                  <a:rPr lang="en-US" dirty="0"/>
-                  <a:t>, and a loss function </a:t>
-                </a:r>
-                <a14:m>
-                  <m:oMath xmlns:m="http://schemas.openxmlformats.org/officeDocument/2006/math">
-                    <m:r>
-                      <a:rPr lang="en-US" i="1">
-                        <a:solidFill>
-                          <a:srgbClr val="0033CC"/>
-                        </a:solidFill>
-                        <a:latin typeface="Cambria Math" panose="02040503050406030204" pitchFamily="18" charset="0"/>
-                      </a:rPr>
-                      <m:t>𝐿</m:t>
-                    </m:r>
-                    <m:r>
-                      <a:rPr lang="en-US" i="1">
-                        <a:solidFill>
-                          <a:srgbClr val="0033CC"/>
-                        </a:solidFill>
-                        <a:latin typeface="Cambria Math" panose="02040503050406030204" pitchFamily="18" charset="0"/>
-                      </a:rPr>
-                      <m:t>(</m:t>
-                    </m:r>
-                    <m:r>
-                      <a:rPr lang="en-US" i="1">
-                        <a:solidFill>
-                          <a:srgbClr val="0033CC"/>
-                        </a:solidFill>
-                        <a:latin typeface="Cambria Math" panose="02040503050406030204" pitchFamily="18" charset="0"/>
-                      </a:rPr>
-                      <m:t>𝑦</m:t>
-                    </m:r>
-                    <m:r>
-                      <a:rPr lang="en-US" i="1">
-                        <a:solidFill>
-                          <a:srgbClr val="0033CC"/>
-                        </a:solidFill>
-                        <a:latin typeface="Cambria Math" panose="02040503050406030204" pitchFamily="18" charset="0"/>
-                      </a:rPr>
-                      <m:t>, </m:t>
-                    </m:r>
-                    <m:r>
-                      <a:rPr lang="en-US" i="1">
-                        <a:solidFill>
-                          <a:srgbClr val="0033CC"/>
-                        </a:solidFill>
-                        <a:latin typeface="Cambria Math" panose="02040503050406030204" pitchFamily="18" charset="0"/>
-                      </a:rPr>
-                      <m:t>𝑓</m:t>
-                    </m:r>
-                    <m:r>
-                      <a:rPr lang="en-US" i="1">
-                        <a:solidFill>
-                          <a:srgbClr val="0033CC"/>
-                        </a:solidFill>
-                        <a:latin typeface="Cambria Math" panose="02040503050406030204" pitchFamily="18" charset="0"/>
-                      </a:rPr>
-                      <m:t>)</m:t>
-                    </m:r>
-                  </m:oMath>
-                </a14:m>
-                <a:r>
-                  <a:rPr lang="en-US" dirty="0"/>
-                  <a:t>, the optimal function </a:t>
-                </a:r>
-                <a14:m>
-                  <m:oMath xmlns:m="http://schemas.openxmlformats.org/officeDocument/2006/math">
-                    <m:sSup>
-                      <m:sSupPr>
-                        <m:ctrlPr>
-                          <a:rPr lang="en-US" i="1">
-                            <a:solidFill>
-                              <a:srgbClr val="0033CC"/>
-                            </a:solidFill>
-                            <a:latin typeface="Cambria Math" panose="02040503050406030204" pitchFamily="18" charset="0"/>
-                          </a:rPr>
-                        </m:ctrlPr>
-                      </m:sSupPr>
-                      <m:e>
-                        <m:r>
-                          <a:rPr lang="en-US" i="1">
-                            <a:solidFill>
-                              <a:srgbClr val="0033CC"/>
-                            </a:solidFill>
-                            <a:latin typeface="Cambria Math" panose="02040503050406030204" pitchFamily="18" charset="0"/>
-                          </a:rPr>
-                          <m:t>𝑓</m:t>
-                        </m:r>
-                      </m:e>
-                      <m:sup>
-                        <m:r>
-                          <a:rPr lang="en-US" i="1">
-                            <a:solidFill>
-                              <a:srgbClr val="0033CC"/>
-                            </a:solidFill>
-                            <a:latin typeface="Cambria Math" panose="02040503050406030204" pitchFamily="18" charset="0"/>
-                          </a:rPr>
-                          <m:t>∗</m:t>
-                        </m:r>
-                      </m:sup>
-                    </m:sSup>
-                    <m:r>
-                      <a:rPr lang="en-US" i="1">
-                        <a:solidFill>
-                          <a:srgbClr val="0033CC"/>
-                        </a:solidFill>
-                        <a:latin typeface="Cambria Math" panose="02040503050406030204" pitchFamily="18" charset="0"/>
-                      </a:rPr>
-                      <m:t>=</m:t>
-                    </m:r>
-                    <m:r>
-                      <a:rPr lang="en-US" i="1">
-                        <a:solidFill>
-                          <a:srgbClr val="0033CC"/>
-                        </a:solidFill>
-                        <a:latin typeface="Cambria Math" panose="02040503050406030204" pitchFamily="18" charset="0"/>
-                      </a:rPr>
-                      <m:t>𝑓</m:t>
-                    </m:r>
-                    <m:r>
-                      <a:rPr lang="en-US" i="1">
-                        <a:solidFill>
-                          <a:srgbClr val="0033CC"/>
-                        </a:solidFill>
-                        <a:latin typeface="Cambria Math" panose="02040503050406030204" pitchFamily="18" charset="0"/>
-                      </a:rPr>
-                      <m:t>(</m:t>
-                    </m:r>
-                    <m:r>
-                      <a:rPr lang="en-US" i="1">
-                        <a:solidFill>
-                          <a:srgbClr val="0033CC"/>
-                        </a:solidFill>
-                        <a:latin typeface="Cambria Math" panose="02040503050406030204" pitchFamily="18" charset="0"/>
-                      </a:rPr>
-                      <m:t>𝑥</m:t>
-                    </m:r>
-                    <m:r>
-                      <a:rPr lang="en-US" i="1">
-                        <a:solidFill>
-                          <a:srgbClr val="0033CC"/>
-                        </a:solidFill>
-                        <a:latin typeface="Cambria Math" panose="02040503050406030204" pitchFamily="18" charset="0"/>
-                      </a:rPr>
-                      <m:t>,</m:t>
-                    </m:r>
-                    <m:sSup>
-                      <m:sSupPr>
-                        <m:ctrlPr>
-                          <a:rPr lang="en-US" i="1">
-                            <a:solidFill>
-                              <a:srgbClr val="0033CC"/>
-                            </a:solidFill>
-                            <a:latin typeface="Cambria Math" panose="02040503050406030204" pitchFamily="18" charset="0"/>
-                          </a:rPr>
-                        </m:ctrlPr>
-                      </m:sSupPr>
-                      <m:e>
-                        <m:r>
-                          <a:rPr lang="en-US" i="1">
-                            <a:solidFill>
-                              <a:srgbClr val="0033CC"/>
-                            </a:solidFill>
-                            <a:latin typeface="Cambria Math" panose="02040503050406030204" pitchFamily="18" charset="0"/>
-                          </a:rPr>
-                          <m:t>𝜔</m:t>
-                        </m:r>
-                      </m:e>
-                      <m:sup>
-                        <m:r>
-                          <a:rPr lang="en-US" i="1">
-                            <a:solidFill>
-                              <a:srgbClr val="0033CC"/>
-                            </a:solidFill>
-                            <a:latin typeface="Cambria Math" panose="02040503050406030204" pitchFamily="18" charset="0"/>
-                          </a:rPr>
-                          <m:t>∗</m:t>
-                        </m:r>
-                      </m:sup>
-                    </m:sSup>
-                    <m:r>
-                      <a:rPr lang="en-US" i="1">
-                        <a:solidFill>
-                          <a:srgbClr val="0033CC"/>
-                        </a:solidFill>
-                        <a:latin typeface="Cambria Math" panose="02040503050406030204" pitchFamily="18" charset="0"/>
-                      </a:rPr>
-                      <m:t>)</m:t>
-                    </m:r>
-                  </m:oMath>
-                </a14:m>
-                <a:r>
-                  <a:rPr lang="en-US" dirty="0">
-                    <a:solidFill>
-                      <a:srgbClr val="0033CC"/>
-                    </a:solidFill>
-                  </a:rPr>
-                  <a:t> </a:t>
-                </a:r>
-                <a:r>
-                  <a:rPr lang="en-US" dirty="0"/>
-                  <a:t>satisfies: </a:t>
-                </a:r>
-                <a:endParaRPr lang="en-US" i="1" dirty="0">
-                  <a:latin typeface="Cambria Math" panose="02040503050406030204" pitchFamily="18" charset="0"/>
-                </a:endParaRPr>
-              </a:p>
-              <a:p>
-                <a:pPr marL="0" indent="0">
-                  <a:buNone/>
-                </a:pPr>
-                <a14:m>
-                  <m:oMathPara xmlns:m="http://schemas.openxmlformats.org/officeDocument/2006/math">
-                    <m:oMathParaPr>
-                      <m:jc m:val="centerGroup"/>
-                    </m:oMathParaPr>
-                    <m:oMath xmlns:m="http://schemas.openxmlformats.org/officeDocument/2006/math">
-                      <m:nary>
-                        <m:naryPr>
-                          <m:limLoc m:val="undOvr"/>
-                          <m:subHide m:val="on"/>
-                          <m:supHide m:val="on"/>
-                          <m:ctrlPr>
-                            <a:rPr lang="en-US" i="1">
-                              <a:latin typeface="Cambria Math" panose="02040503050406030204" pitchFamily="18" charset="0"/>
-                            </a:rPr>
-                          </m:ctrlPr>
-                        </m:naryPr>
-                        <m:sub/>
-                        <m:sup/>
-                        <m:e>
-                          <m:r>
-                            <a:rPr lang="en-US" i="1">
-                              <a:latin typeface="Cambria Math" panose="02040503050406030204" pitchFamily="18" charset="0"/>
-                            </a:rPr>
-                            <m:t> </m:t>
-                          </m:r>
-                          <m:f>
-                            <m:fPr>
-                              <m:ctrlPr>
-                                <a:rPr lang="en-US" i="1">
-                                  <a:latin typeface="Cambria Math" panose="02040503050406030204" pitchFamily="18" charset="0"/>
-                                </a:rPr>
-                              </m:ctrlPr>
-                            </m:fPr>
-                            <m:num>
-                              <m:r>
-                                <a:rPr lang="en-US" i="1">
-                                  <a:latin typeface="Cambria Math" panose="02040503050406030204" pitchFamily="18" charset="0"/>
-                                </a:rPr>
-                                <m:t>𝜕</m:t>
-                              </m:r>
-                              <m:r>
-                                <a:rPr lang="en-US" i="1">
-                                  <a:latin typeface="Cambria Math" panose="02040503050406030204" pitchFamily="18" charset="0"/>
-                                </a:rPr>
-                                <m:t>𝐿</m:t>
-                              </m:r>
-                            </m:num>
-                            <m:den>
-                              <m:r>
-                                <a:rPr lang="en-US" i="1">
-                                  <a:latin typeface="Cambria Math" panose="02040503050406030204" pitchFamily="18" charset="0"/>
-                                </a:rPr>
-                                <m:t>𝜕</m:t>
-                              </m:r>
-                              <m:r>
-                                <a:rPr lang="en-US" i="1">
-                                  <a:latin typeface="Cambria Math" panose="02040503050406030204" pitchFamily="18" charset="0"/>
-                                </a:rPr>
-                                <m:t>𝑓</m:t>
-                              </m:r>
-                            </m:den>
-                          </m:f>
-                          <m:r>
-                            <a:rPr lang="en-US" i="1">
-                              <a:latin typeface="Cambria Math" panose="02040503050406030204" pitchFamily="18" charset="0"/>
-                            </a:rPr>
-                            <m:t>𝑝</m:t>
-                          </m:r>
-                          <m:d>
-                            <m:dPr>
-                              <m:ctrlPr>
-                                <a:rPr lang="en-US" i="1">
-                                  <a:latin typeface="Cambria Math" panose="02040503050406030204" pitchFamily="18" charset="0"/>
-                                </a:rPr>
-                              </m:ctrlPr>
-                            </m:dPr>
-                            <m:e>
-                              <m:r>
-                                <a:rPr lang="en-US" i="1">
-                                  <a:latin typeface="Cambria Math" panose="02040503050406030204" pitchFamily="18" charset="0"/>
-                                </a:rPr>
-                                <m:t>𝑦</m:t>
-                              </m:r>
-                              <m:r>
-                                <a:rPr lang="en-US" i="1">
-                                  <a:latin typeface="Cambria Math" panose="02040503050406030204" pitchFamily="18" charset="0"/>
-                                </a:rPr>
-                                <m:t> | </m:t>
-                              </m:r>
-                              <m:r>
-                                <a:rPr lang="en-US" i="1">
-                                  <a:latin typeface="Cambria Math" panose="02040503050406030204" pitchFamily="18" charset="0"/>
-                                </a:rPr>
-                                <m:t>𝑥</m:t>
-                              </m:r>
-                            </m:e>
-                          </m:d>
-                          <m:r>
-                            <a:rPr lang="en-US" i="1">
-                              <a:latin typeface="Cambria Math" panose="02040503050406030204" pitchFamily="18" charset="0"/>
-                            </a:rPr>
-                            <m:t>𝑑𝑦</m:t>
-                          </m:r>
-                          <m:r>
-                            <a:rPr lang="en-US" i="1">
-                              <a:latin typeface="Cambria Math" panose="02040503050406030204" pitchFamily="18" charset="0"/>
-                            </a:rPr>
-                            <m:t>=0</m:t>
-                          </m:r>
-                        </m:e>
-                      </m:nary>
-                    </m:oMath>
-                  </m:oMathPara>
-                </a14:m>
-                <a:endParaRPr lang="en-US" dirty="0"/>
-              </a:p>
-              <a:p>
-                <a:pPr marL="0" indent="0">
-                  <a:buNone/>
-                </a:pPr>
-                <a:endParaRPr lang="en-US" dirty="0"/>
-              </a:p>
-            </p:txBody>
-          </p:sp>
-        </mc:Choice>
-        <mc:Fallback xmlns="">
-          <p:sp>
-            <p:nvSpPr>
-              <p:cNvPr id="4" name="Content Placeholder 3">
-                <a:extLst>
-                  <a:ext uri="{FF2B5EF4-FFF2-40B4-BE49-F238E27FC236}">
-                    <a16:creationId xmlns:a16="http://schemas.microsoft.com/office/drawing/2014/main" id="{1E630BBC-189E-5D63-12C1-97C1E92F8F38}"/>
-                  </a:ext>
-                </a:extLst>
-              </p:cNvPr>
-              <p:cNvSpPr>
-                <a:spLocks noGrp="1" noRot="1" noChangeAspect="1" noMove="1" noResize="1" noEditPoints="1" noAdjustHandles="1" noChangeArrowheads="1" noChangeShapeType="1" noTextEdit="1"/>
-              </p:cNvSpPr>
-              <p:nvPr>
-                <p:ph sz="half" idx="1"/>
-              </p:nvPr>
-            </p:nvSpPr>
-            <p:spPr>
-              <a:blipFill>
-                <a:blip r:embed="rId2"/>
-                <a:stretch>
-                  <a:fillRect l="-1309" t="-1316" r="-1309" b="-47895"/>
-                </a:stretch>
-              </a:blipFill>
-            </p:spPr>
-            <p:txBody>
-              <a:bodyPr/>
-              <a:lstStyle/>
-              <a:p>
-                <a:r>
-                  <a:rPr lang="en-US">
-                    <a:noFill/>
-                  </a:rPr>
-                  <a:t> </a:t>
-                </a:r>
-              </a:p>
-            </p:txBody>
-          </p:sp>
-        </mc:Fallback>
-      </mc:AlternateContent>
-      <p:sp>
-        <p:nvSpPr>
-          <p:cNvPr id="3" name="Title 2">
-            <a:extLst>
-              <a:ext uri="{FF2B5EF4-FFF2-40B4-BE49-F238E27FC236}">
-                <a16:creationId xmlns:a16="http://schemas.microsoft.com/office/drawing/2014/main" id="{851E9639-C2BE-648A-6B74-658A698E1BC4}"/>
-              </a:ext>
-            </a:extLst>
-          </p:cNvPr>
-          <p:cNvSpPr>
-            <a:spLocks noGrp="1"/>
-          </p:cNvSpPr>
-          <p:nvPr>
-            <p:ph type="title"/>
-          </p:nvPr>
-        </p:nvSpPr>
-        <p:spPr/>
-        <p:txBody>
-          <a:bodyPr/>
-          <a:lstStyle/>
-          <a:p>
-            <a:r>
-              <a:rPr lang="en-US" dirty="0"/>
-              <a:t>Summary (1)</a:t>
-            </a:r>
-          </a:p>
-        </p:txBody>
-      </p:sp>
-    </p:spTree>
-    <p:extLst>
-      <p:ext uri="{BB962C8B-B14F-4D97-AF65-F5344CB8AC3E}">
-        <p14:creationId xmlns:p14="http://schemas.microsoft.com/office/powerpoint/2010/main" val="3395332133"/>
-      </p:ext>
-    </p:extLst>
-  </p:cSld>
-  <p:clrMapOvr>
-    <a:masterClrMapping/>
-  </p:clrMapOvr>
-</p:sld>
-</file>
-
-<file path=ppt/slides/slide31.xml><?xml version="1.0" encoding="utf-8"?>
-<p:sld xmlns:a="http://schemas.openxmlformats.org/drawingml/2006/main" xmlns:r="http://schemas.openxmlformats.org/officeDocument/2006/relationships" xmlns:p="http://schemas.openxmlformats.org/presentationml/2006/main">
-  <p:cSld>
-    <p:spTree>
-      <p:nvGrpSpPr>
-        <p:cNvPr id="1" name=""/>
-        <p:cNvGrpSpPr/>
-        <p:nvPr/>
-      </p:nvGrpSpPr>
-      <p:grpSpPr>
-        <a:xfrm>
-          <a:off x="0" y="0"/>
-          <a:ext cx="0" cy="0"/>
-          <a:chOff x="0" y="0"/>
-          <a:chExt cx="0" cy="0"/>
-        </a:xfrm>
-      </p:grpSpPr>
-      <p:sp>
-        <p:nvSpPr>
-          <p:cNvPr id="4" name="Content Placeholder 3">
-            <a:extLst>
-              <a:ext uri="{FF2B5EF4-FFF2-40B4-BE49-F238E27FC236}">
-                <a16:creationId xmlns:a16="http://schemas.microsoft.com/office/drawing/2014/main" id="{FF77C061-60F4-12F7-25F5-D6B0B4F3CC4E}"/>
-              </a:ext>
-            </a:extLst>
-          </p:cNvPr>
-          <p:cNvSpPr>
-            <a:spLocks noGrp="1"/>
-          </p:cNvSpPr>
-          <p:nvPr>
-            <p:ph sz="half" idx="1"/>
-          </p:nvPr>
-        </p:nvSpPr>
-        <p:spPr/>
-        <p:txBody>
-          <a:bodyPr/>
-          <a:lstStyle/>
-          <a:p>
-            <a:pPr marL="0" indent="0">
-              <a:buNone/>
-            </a:pPr>
-            <a:r>
-              <a:rPr lang="en-US" b="1" dirty="0"/>
-              <a:t>Binary Cross Entropy</a:t>
-            </a:r>
-          </a:p>
-          <a:p>
-            <a:r>
-              <a:rPr lang="en-US" dirty="0"/>
-              <a:t>Training with the binary cross entropy loss yields a classifier that approximates the class probability.</a:t>
-            </a:r>
-            <a:br>
-              <a:rPr lang="en-US" dirty="0"/>
-            </a:br>
-            <a:endParaRPr lang="en-US" dirty="0"/>
-          </a:p>
-          <a:p>
-            <a:r>
-              <a:rPr lang="en-US" dirty="0"/>
-              <a:t>This fact can be exploited in creative ways. Two examples were given.</a:t>
-            </a:r>
-            <a:br>
-              <a:rPr lang="en-US" dirty="0"/>
-            </a:br>
-            <a:endParaRPr lang="en-US" dirty="0"/>
-          </a:p>
-          <a:p>
-            <a:pPr marL="0" indent="0">
-              <a:buNone/>
-            </a:pPr>
-            <a:endParaRPr lang="en-US" dirty="0"/>
-          </a:p>
-        </p:txBody>
-      </p:sp>
-      <p:sp>
-        <p:nvSpPr>
-          <p:cNvPr id="3" name="Title 2">
-            <a:extLst>
-              <a:ext uri="{FF2B5EF4-FFF2-40B4-BE49-F238E27FC236}">
-                <a16:creationId xmlns:a16="http://schemas.microsoft.com/office/drawing/2014/main" id="{7145E3B4-D021-15F8-995C-F301FA0FDACE}"/>
-              </a:ext>
-            </a:extLst>
-          </p:cNvPr>
-          <p:cNvSpPr>
-            <a:spLocks noGrp="1"/>
-          </p:cNvSpPr>
-          <p:nvPr>
-            <p:ph type="title"/>
-          </p:nvPr>
-        </p:nvSpPr>
-        <p:spPr/>
-        <p:txBody>
-          <a:bodyPr/>
-          <a:lstStyle/>
-          <a:p>
-            <a:r>
-              <a:rPr lang="en-US" dirty="0"/>
-              <a:t>Summary (2)</a:t>
-            </a:r>
-          </a:p>
-        </p:txBody>
-      </p:sp>
-    </p:spTree>
-    <p:extLst>
-      <p:ext uri="{BB962C8B-B14F-4D97-AF65-F5344CB8AC3E}">
-        <p14:creationId xmlns:p14="http://schemas.microsoft.com/office/powerpoint/2010/main" val="3638525717"/>
-      </p:ext>
-    </p:extLst>
-  </p:cSld>
-  <p:clrMapOvr>
-    <a:masterClrMapping/>
-  </p:clrMapOvr>
 </p:sld>
 </file>
 
@@ -25988,10 +20764,7 @@
                   </a:pPr>
                   <a14:m>
                     <m:oMathPara xmlns:m="http://schemas.openxmlformats.org/officeDocument/2006/math">
-                      <m:oMathParaPr>
-                        <m:jc m:val="centerGroup"/>
-                      </m:oMathParaPr>
-                      <m:oMath xmlns:m="http://schemas.openxmlformats.org/officeDocument/2006/math">
+                      <m:oMath>
                         <m:r>
                           <m:rPr>
                             <m:nor/>
@@ -26194,10 +20967,7 @@
                   </a:pPr>
                   <a14:m>
                     <m:oMathPara xmlns:m="http://schemas.openxmlformats.org/officeDocument/2006/math">
-                      <m:oMathParaPr>
-                        <m:jc m:val="centerGroup"/>
-                      </m:oMathParaPr>
-                      <m:oMath xmlns:m="http://schemas.openxmlformats.org/officeDocument/2006/math">
+                      <m:oMath>
                         <m:r>
                           <a:rPr kumimoji="0" lang="en-US" sz="2400" b="0" i="1" u="none" strike="noStrike" cap="none" normalizeH="0" baseline="0" smtClean="0">
                             <a:ln>
@@ -26512,10 +21282,7 @@
                   <a:pPr/>
                   <a14:m>
                     <m:oMathPara xmlns:m="http://schemas.openxmlformats.org/officeDocument/2006/math">
-                      <m:oMathParaPr>
-                        <m:jc m:val="centerGroup"/>
-                      </m:oMathParaPr>
-                      <m:oMath xmlns:m="http://schemas.openxmlformats.org/officeDocument/2006/math">
+                      <m:oMath>
                         <m:r>
                           <a:rPr lang="en-US" sz="3200" b="0" i="1" smtClean="0">
                             <a:latin typeface="Cambria Math" panose="02040503050406030204" pitchFamily="18" charset="0"/>
@@ -26643,10 +21410,7 @@
                   <a:pPr/>
                   <a14:m>
                     <m:oMathPara xmlns:m="http://schemas.openxmlformats.org/officeDocument/2006/math">
-                      <m:oMathParaPr>
-                        <m:jc m:val="centerGroup"/>
-                      </m:oMathParaPr>
-                      <m:oMath xmlns:m="http://schemas.openxmlformats.org/officeDocument/2006/math">
+                      <m:oMath>
                         <m:r>
                           <a:rPr lang="en-US" b="0" i="1" smtClean="0">
                             <a:latin typeface="Cambria Math" panose="02040503050406030204" pitchFamily="18" charset="0"/>
@@ -26789,8 +21553,8 @@
           </a:p>
         </p:txBody>
       </p:sp>
-      <mc:AlternateContent xmlns:mc="http://schemas.openxmlformats.org/markup-compatibility/2006" xmlns:a14="http://schemas.microsoft.com/office/drawing/2010/main">
-        <mc:Choice Requires="a14">
+      <mc:AlternateContent xmlns:mc="http://schemas.openxmlformats.org/markup-compatibility/2006">
+        <mc:Choice xmlns:a14="http://schemas.microsoft.com/office/drawing/2010/main" Requires="a14">
           <p:sp>
             <p:nvSpPr>
               <p:cNvPr id="4" name="Content Placeholder 3">
@@ -26996,10 +21760,7 @@
                 </a:pPr>
                 <a14:m>
                   <m:oMathPara xmlns:m="http://schemas.openxmlformats.org/officeDocument/2006/math">
-                    <m:oMathParaPr>
-                      <m:jc m:val="centerGroup"/>
-                    </m:oMathParaPr>
-                    <m:oMath xmlns:m="http://schemas.openxmlformats.org/officeDocument/2006/math">
+                    <m:oMath>
                       <m:r>
                         <a:rPr lang="en-US" i="1">
                           <a:latin typeface="Cambria Math" panose="02040503050406030204" pitchFamily="18" charset="0"/>
@@ -27225,7 +21986,7 @@
                     <m:sSub>
                       <m:sSubPr>
                         <m:ctrlPr>
-                          <a:rPr lang="en-US" i="1" smtClean="0">
+                          <a:rPr lang="en-US" i="1">
                             <a:solidFill>
                               <a:schemeClr val="tx1"/>
                             </a:solidFill>
@@ -27257,13 +22018,13 @@
                       </m:sub>
                     </m:sSub>
                     <m:r>
-                      <a:rPr lang="en-US" i="1">
+                      <a:rPr lang="en-US" b="0" i="1" smtClean="0">
                         <a:solidFill>
                           <a:schemeClr val="tx1"/>
                         </a:solidFill>
                         <a:latin typeface="Cambria Math" panose="02040503050406030204" pitchFamily="18" charset="0"/>
                       </a:rPr>
-                      <m:t>=</m:t>
+                      <m:t>≡</m:t>
                     </m:r>
                     <m:r>
                       <a:rPr lang="en-US" i="1">
@@ -27442,7 +22203,7 @@
             </p:txBody>
           </p:sp>
         </mc:Choice>
-        <mc:Fallback xmlns="">
+        <mc:Fallback>
           <p:sp>
             <p:nvSpPr>
               <p:cNvPr id="4" name="Content Placeholder 3">
@@ -27722,10 +22483,7 @@
                   </a:pPr>
                   <a14:m>
                     <m:oMathPara xmlns:m="http://schemas.openxmlformats.org/officeDocument/2006/math">
-                      <m:oMathParaPr>
-                        <m:jc m:val="centerGroup"/>
-                      </m:oMathParaPr>
-                      <m:oMath xmlns:m="http://schemas.openxmlformats.org/officeDocument/2006/math">
+                      <m:oMath>
                         <m:r>
                           <m:rPr>
                             <m:nor/>
@@ -27928,10 +22686,7 @@
                   </a:pPr>
                   <a14:m>
                     <m:oMathPara xmlns:m="http://schemas.openxmlformats.org/officeDocument/2006/math">
-                      <m:oMathParaPr>
-                        <m:jc m:val="centerGroup"/>
-                      </m:oMathParaPr>
-                      <m:oMath xmlns:m="http://schemas.openxmlformats.org/officeDocument/2006/math">
+                      <m:oMath>
                         <m:r>
                           <a:rPr kumimoji="0" lang="en-US" sz="2400" b="0" i="1" u="none" strike="noStrike" cap="none" normalizeH="0" baseline="0" smtClean="0">
                             <a:ln>
@@ -28246,10 +23001,7 @@
                   <a:pPr/>
                   <a14:m>
                     <m:oMathPara xmlns:m="http://schemas.openxmlformats.org/officeDocument/2006/math">
-                      <m:oMathParaPr>
-                        <m:jc m:val="centerGroup"/>
-                      </m:oMathParaPr>
-                      <m:oMath xmlns:m="http://schemas.openxmlformats.org/officeDocument/2006/math">
+                      <m:oMath>
                         <m:r>
                           <a:rPr lang="en-US" sz="3200" b="0" i="1" smtClean="0">
                             <a:latin typeface="Cambria Math" panose="02040503050406030204" pitchFamily="18" charset="0"/>
@@ -28377,10 +23129,7 @@
                   <a:pPr/>
                   <a14:m>
                     <m:oMathPara xmlns:m="http://schemas.openxmlformats.org/officeDocument/2006/math">
-                      <m:oMathParaPr>
-                        <m:jc m:val="centerGroup"/>
-                      </m:oMathParaPr>
-                      <m:oMath xmlns:m="http://schemas.openxmlformats.org/officeDocument/2006/math">
+                      <m:oMath>
                         <m:r>
                           <a:rPr lang="en-US" b="0" i="1" smtClean="0">
                             <a:latin typeface="Cambria Math" panose="02040503050406030204" pitchFamily="18" charset="0"/>
@@ -28560,10 +23309,7 @@
                 </a:pPr>
                 <a14:m>
                   <m:oMathPara xmlns:m="http://schemas.openxmlformats.org/officeDocument/2006/math">
-                    <m:oMathParaPr>
-                      <m:jc m:val="centerGroup"/>
-                    </m:oMathParaPr>
-                    <m:oMath xmlns:m="http://schemas.openxmlformats.org/officeDocument/2006/math">
+                    <m:oMath>
                       <m:r>
                         <a:rPr lang="en-US" i="1">
                           <a:latin typeface="Cambria Math" panose="02040503050406030204" pitchFamily="18" charset="0"/>
@@ -29299,10 +24045,7 @@
                   </a:pPr>
                   <a14:m>
                     <m:oMathPara xmlns:m="http://schemas.openxmlformats.org/officeDocument/2006/math">
-                      <m:oMathParaPr>
-                        <m:jc m:val="centerGroup"/>
-                      </m:oMathParaPr>
-                      <m:oMath xmlns:m="http://schemas.openxmlformats.org/officeDocument/2006/math">
+                      <m:oMath>
                         <m:r>
                           <m:rPr>
                             <m:nor/>
@@ -29505,10 +24248,7 @@
                   </a:pPr>
                   <a14:m>
                     <m:oMathPara xmlns:m="http://schemas.openxmlformats.org/officeDocument/2006/math">
-                      <m:oMathParaPr>
-                        <m:jc m:val="centerGroup"/>
-                      </m:oMathParaPr>
-                      <m:oMath xmlns:m="http://schemas.openxmlformats.org/officeDocument/2006/math">
+                      <m:oMath>
                         <m:r>
                           <a:rPr kumimoji="0" lang="en-US" sz="2400" b="0" i="1" u="none" strike="noStrike" cap="none" normalizeH="0" baseline="0" smtClean="0">
                             <a:ln>
@@ -29823,10 +24563,7 @@
                   <a:pPr/>
                   <a14:m>
                     <m:oMathPara xmlns:m="http://schemas.openxmlformats.org/officeDocument/2006/math">
-                      <m:oMathParaPr>
-                        <m:jc m:val="centerGroup"/>
-                      </m:oMathParaPr>
-                      <m:oMath xmlns:m="http://schemas.openxmlformats.org/officeDocument/2006/math">
+                      <m:oMath>
                         <m:r>
                           <a:rPr lang="en-US" sz="3200" b="0" i="1" smtClean="0">
                             <a:latin typeface="Cambria Math" panose="02040503050406030204" pitchFamily="18" charset="0"/>
@@ -29954,10 +24691,7 @@
                   <a:pPr/>
                   <a14:m>
                     <m:oMathPara xmlns:m="http://schemas.openxmlformats.org/officeDocument/2006/math">
-                      <m:oMathParaPr>
-                        <m:jc m:val="centerGroup"/>
-                      </m:oMathParaPr>
-                      <m:oMath xmlns:m="http://schemas.openxmlformats.org/officeDocument/2006/math">
+                      <m:oMath>
                         <m:r>
                           <a:rPr lang="en-US" b="0" i="1" smtClean="0">
                             <a:latin typeface="Cambria Math" panose="02040503050406030204" pitchFamily="18" charset="0"/>
@@ -30185,8 +24919,12 @@
               <a:buNone/>
             </a:pPr>
             <a:r>
+              <a:rPr lang="en-US" i="1" dirty="0"/>
+              <a:t>that</a:t>
+            </a:r>
+            <a:r>
               <a:rPr lang="en-US" dirty="0"/>
-              <a:t>that landscape but rather of the</a:t>
+              <a:t> landscape but rather of the</a:t>
             </a:r>
           </a:p>
           <a:p>
@@ -30454,10 +25192,7 @@
                 </a:pPr>
                 <a14:m>
                   <m:oMathPara xmlns:m="http://schemas.openxmlformats.org/officeDocument/2006/math">
-                    <m:oMathParaPr>
-                      <m:jc m:val="centerGroup"/>
-                    </m:oMathParaPr>
-                    <m:oMath xmlns:m="http://schemas.openxmlformats.org/officeDocument/2006/math">
+                    <m:oMath>
                       <m:r>
                         <a:rPr lang="en-US" i="1">
                           <a:latin typeface="Cambria Math" panose="02040503050406030204" pitchFamily="18" charset="0"/>
